--- a/docs/Bhoomi_Kaaval_Deck.pptx
+++ b/docs/Bhoomi_Kaaval_Deck.pptx
@@ -121,18 +121,18 @@
   <p:extLst>
     <p:ext uri="{521415D9-36F7-43E2-AB2F-B90AF26B5E84}">
       <p14:sectionLst xmlns:p14="http://schemas.microsoft.com/office/powerpoint/2010/main">
-        <p14:section name="Opening" id="{8d897574-89af-c8dd-e4de-26209f018c9b}">
+        <p14:section name="Opening" id="{bad97f09-f72c-e105-c0eb-6d615e474101}">
           <p14:sldIdLst>
             <p14:sldId id="256"/>
           </p14:sldIdLst>
         </p14:section>
-        <p14:section name="Problem and solution" id="{44e0bb41-51dd-3e05-a712-cd080eaf2780}">
+        <p14:section name="Problem and solution" id="{f78e5fce-03ce-1ca1-1e77-ffc7cf5e39ed}">
           <p14:sldIdLst>
             <p14:sldId id="257"/>
             <p14:sldId id="258"/>
           </p14:sldIdLst>
         </p14:section>
-        <p14:section name="How it works" id="{62636938-db4a-ccb5-ebf9-1311856b57cd}">
+        <p14:section name="How it works" id="{e0235786-9636-3205-7338-aae91278d5df}">
           <p14:sldIdLst>
             <p14:sldId id="259"/>
             <p14:sldId id="260"/>
@@ -141,20 +141,20 @@
             <p14:sldId id="263"/>
           </p14:sldIdLst>
         </p14:section>
-        <p14:section name="Tools and Cline" id="{96c12dcb-362c-38e8-486e-59e3f68af821}">
+        <p14:section name="Tools and Cline" id="{82d37328-6b07-59a7-b333-ec86ca96b8ef}">
           <p14:sldIdLst>
             <p14:sldId id="264"/>
             <p14:sldId id="265"/>
           </p14:sldIdLst>
         </p14:section>
-        <p14:section name="Proof" id="{0aa6856a-b8b4-3059-4f89-96d13454426c}">
+        <p14:section name="Proof" id="{a93d4730-8177-9b04-6286-df9b4e8b2f09}">
           <p14:sldIdLst>
             <p14:sldId id="266"/>
             <p14:sldId id="267"/>
             <p14:sldId id="268"/>
           </p14:sldIdLst>
         </p14:section>
-        <p14:section name="Wrap-up" id="{37984d2f-da76-89d3-8710-018ad5af805d}">
+        <p14:section name="Wrap-up" id="{076b5799-5883-9838-012f-b9b12011a166}">
           <p14:sldIdLst>
             <p14:sldId id="269"/>
             <p14:sldId id="270"/>
@@ -4671,7 +4671,7 @@
                   <a:schemeClr val="tx1"/>
                 </a:solidFill>
               </a:rPr>
-              <a:t>An Aadhaar number was not masked when it ended a sentence (“.” or Hindi “।”)</a:t>
+              <a:t>An Aadhaar number was not masked when a full stop (or the Hindi danda) followed it</a:t>
             </a:r>
             <a:endParaRPr lang="en-US" sz="1400" dirty="0"/>
           </a:p>
@@ -6598,7 +6598,7 @@
         <p:spPr>
           <a:xfrm>
             <a:off x="822960" y="2194560"/>
-            <a:ext cx="4815688" cy="3657600"/>
+            <a:ext cx="4815688" cy="3749040"/>
           </a:xfrm>
           <a:prstGeom prst="rect">
             <a:avLst/>
@@ -6612,92 +6612,92 @@
           <a:p>
             <a:pPr marL="177800" indent="-177800">
               <a:spcAft>
-                <a:spcPts val="800"/>
+                <a:spcPts val="1200"/>
               </a:spcAft>
               <a:buSzPct val="100000"/>
               <a:buChar char="•"/>
             </a:pPr>
             <a:r>
-              <a:rPr lang="en-US" sz="1500" dirty="0">
+              <a:rPr lang="en-US" sz="1700" dirty="0">
                 <a:solidFill>
                   <a:schemeClr val="tx1"/>
                 </a:solidFill>
               </a:rPr>
               <a:t>Synthetic documents, one model: this shows the logic, not real-world accuracy</a:t>
             </a:r>
-            <a:endParaRPr lang="en-US" sz="1500" dirty="0"/>
+            <a:endParaRPr lang="en-US" sz="1700" dirty="0"/>
           </a:p>
           <a:p>
             <a:pPr marL="177800" indent="-177800">
               <a:spcAft>
-                <a:spcPts val="800"/>
+                <a:spcPts val="1200"/>
               </a:spcAft>
               <a:buSzPct val="100000"/>
               <a:buChar char="•"/>
             </a:pPr>
             <a:r>
-              <a:rPr lang="en-US" sz="1500" dirty="0">
+              <a:rPr lang="en-US" sz="1700" dirty="0">
                 <a:solidFill>
                   <a:schemeClr val="tx1"/>
                 </a:solidFill>
               </a:rPr>
               <a:t>English and Hindi tested; Assamese not tested</a:t>
             </a:r>
-            <a:endParaRPr lang="en-US" sz="1500" dirty="0"/>
+            <a:endParaRPr lang="en-US" sz="1700" dirty="0"/>
           </a:p>
           <a:p>
             <a:pPr marL="177800" indent="-177800">
               <a:spcAft>
-                <a:spcPts val="800"/>
+                <a:spcPts val="1200"/>
               </a:spcAft>
               <a:buSzPct val="100000"/>
               <a:buChar char="•"/>
             </a:pPr>
             <a:r>
-              <a:rPr lang="en-US" sz="1500" dirty="0">
+              <a:rPr lang="en-US" sz="1700" dirty="0">
                 <a:solidFill>
                   <a:schemeClr val="tx1"/>
                 </a:solidFill>
               </a:rPr>
               <a:t>Handwriting tested with a handwriting font, which is tidier than real writing</a:t>
             </a:r>
-            <a:endParaRPr lang="en-US" sz="1500" dirty="0"/>
+            <a:endParaRPr lang="en-US" sz="1700" dirty="0"/>
           </a:p>
           <a:p>
             <a:pPr marL="177800" indent="-177800">
               <a:spcAft>
-                <a:spcPts val="800"/>
+                <a:spcPts val="1200"/>
               </a:spcAft>
               <a:buSzPct val="100000"/>
               <a:buChar char="•"/>
             </a:pPr>
             <a:r>
-              <a:rPr lang="en-US" sz="1500" dirty="0">
+              <a:rPr lang="en-US" sz="1700" dirty="0">
                 <a:solidFill>
                   <a:schemeClr val="tx1"/>
                 </a:solidFill>
               </a:rPr>
               <a:t>Handwritten ID numbers cannot be masked automatically</a:t>
             </a:r>
-            <a:endParaRPr lang="en-US" sz="1500" dirty="0"/>
+            <a:endParaRPr lang="en-US" sz="1700" dirty="0"/>
           </a:p>
           <a:p>
             <a:pPr marL="177800" indent="-177800">
               <a:spcAft>
-                <a:spcPts val="800"/>
+                <a:spcPts val="1200"/>
               </a:spcAft>
               <a:buSzPct val="100000"/>
               <a:buChar char="•"/>
             </a:pPr>
             <a:r>
-              <a:rPr lang="en-US" sz="1500" dirty="0">
+              <a:rPr lang="en-US" sz="1700" dirty="0">
                 <a:solidFill>
                   <a:schemeClr val="tx1"/>
                 </a:solidFill>
               </a:rPr>
               <a:t>A deed-only view cannot see inheritance, mutations or litigation</a:t>
             </a:r>
-            <a:endParaRPr lang="en-US" sz="1500" dirty="0"/>
+            <a:endParaRPr lang="en-US" sz="1700" dirty="0"/>
           </a:p>
         </p:txBody>
       </p:sp>
@@ -6780,7 +6780,7 @@
         <p:spPr>
           <a:xfrm>
             <a:off x="6553048" y="2194560"/>
-            <a:ext cx="4815688" cy="3657600"/>
+            <a:ext cx="4815688" cy="3749040"/>
           </a:xfrm>
           <a:prstGeom prst="rect">
             <a:avLst/>
@@ -6794,92 +6794,92 @@
           <a:p>
             <a:pPr marL="177800" indent="-177800">
               <a:spcAft>
-                <a:spcPts val="800"/>
+                <a:spcPts val="1200"/>
               </a:spcAft>
               <a:buSzPct val="100000"/>
               <a:buChar char="•"/>
             </a:pPr>
             <a:r>
-              <a:rPr lang="en-US" sz="1500" dirty="0">
+              <a:rPr lang="en-US" sz="1700" dirty="0">
                 <a:solidFill>
                   <a:schemeClr val="tx1"/>
                 </a:solidFill>
               </a:rPr>
               <a:t>Pilot with one Sub-Registrar office on a sandbox registry feed</a:t>
             </a:r>
-            <a:endParaRPr lang="en-US" sz="1500" dirty="0"/>
+            <a:endParaRPr lang="en-US" sz="1700" dirty="0"/>
           </a:p>
           <a:p>
             <a:pPr marL="177800" indent="-177800">
               <a:spcAft>
-                <a:spcPts val="800"/>
+                <a:spcPts val="1200"/>
               </a:spcAft>
               <a:buSzPct val="100000"/>
               <a:buChar char="•"/>
             </a:pPr>
             <a:r>
-              <a:rPr lang="en-US" sz="1500" dirty="0">
+              <a:rPr lang="en-US" sz="1700" dirty="0">
                 <a:solidFill>
                   <a:schemeClr val="tx1"/>
                 </a:solidFill>
               </a:rPr>
               <a:t>Self-hosted Indic vision model, so documents never leave the department</a:t>
             </a:r>
-            <a:endParaRPr lang="en-US" sz="1500" dirty="0"/>
+            <a:endParaRPr lang="en-US" sz="1700" dirty="0"/>
           </a:p>
           <a:p>
             <a:pPr marL="177800" indent="-177800">
               <a:spcAft>
-                <a:spcPts val="800"/>
+                <a:spcPts val="1200"/>
               </a:spcAft>
               <a:buSzPct val="100000"/>
               <a:buChar char="•"/>
             </a:pPr>
             <a:r>
-              <a:rPr lang="en-US" sz="1500" dirty="0">
+              <a:rPr lang="en-US" sz="1700" dirty="0">
                 <a:solidFill>
                   <a:schemeClr val="tx1"/>
                 </a:solidFill>
               </a:rPr>
               <a:t>State-specific rule packs and an Indic handwriting test set from consented specimens</a:t>
             </a:r>
-            <a:endParaRPr lang="en-US" sz="1500" dirty="0"/>
+            <a:endParaRPr lang="en-US" sz="1700" dirty="0"/>
           </a:p>
           <a:p>
             <a:pPr marL="177800" indent="-177800">
               <a:spcAft>
-                <a:spcPts val="800"/>
+                <a:spcPts val="1200"/>
               </a:spcAft>
               <a:buSzPct val="100000"/>
               <a:buChar char="•"/>
             </a:pPr>
             <a:r>
-              <a:rPr lang="en-US" sz="1500" dirty="0">
+              <a:rPr lang="en-US" sz="1700" dirty="0">
                 <a:solidFill>
                   <a:schemeClr val="tx1"/>
                 </a:solidFill>
               </a:rPr>
               <a:t>Transliteration-aware name matching across scripts</a:t>
             </a:r>
-            <a:endParaRPr lang="en-US" sz="1500" dirty="0"/>
+            <a:endParaRPr lang="en-US" sz="1700" dirty="0"/>
           </a:p>
           <a:p>
             <a:pPr marL="177800" indent="-177800">
               <a:spcAft>
-                <a:spcPts val="800"/>
+                <a:spcPts val="1200"/>
               </a:spcAft>
               <a:buSzPct val="100000"/>
               <a:buChar char="•"/>
             </a:pPr>
             <a:r>
-              <a:rPr lang="en-US" sz="1500" dirty="0">
+              <a:rPr lang="en-US" sz="1700" dirty="0">
                 <a:solidFill>
                   <a:schemeClr val="tx1"/>
                 </a:solidFill>
               </a:rPr>
               <a:t>A Cline-powered assistant that answers “why was this flagged?” from the evidence</a:t>
             </a:r>
-            <a:endParaRPr lang="en-US" sz="1500" dirty="0"/>
+            <a:endParaRPr lang="en-US" sz="1700" dirty="0"/>
           </a:p>
         </p:txBody>
       </p:sp>

--- a/docs/Bhoomi_Kaaval_Deck.pptx
+++ b/docs/Bhoomi_Kaaval_Deck.pptx
@@ -20,9 +20,10 @@
     <p:sldId id="268" r:id="rId14"/>
     <p:sldId id="269" r:id="rId15"/>
     <p:sldId id="270" r:id="rId16"/>
+    <p:sldId id="271" r:id="rId17"/>
   </p:sldIdLst>
   <p:notesMasterIdLst>
-    <p:notesMasterId r:id="rId17"/>
+    <p:notesMasterId r:id="rId18"/>
   </p:notesMasterIdLst>
   <p:sldSz cx="12192000" cy="6858000"/>
   <p:notesSz cx="6858000" cy="12192000"/>
@@ -121,43 +122,44 @@
   <p:extLst>
     <p:ext uri="{521415D9-36F7-43E2-AB2F-B90AF26B5E84}">
       <p14:sectionLst xmlns:p14="http://schemas.microsoft.com/office/powerpoint/2010/main">
-        <p14:section name="Opening" id="{bad97f09-f72c-e105-c0eb-6d615e474101}">
+        <p14:section name="Opening" id="{70c68c9b-65d1-592a-c912-313cccdc4302}">
           <p14:sldIdLst>
             <p14:sldId id="256"/>
           </p14:sldIdLst>
         </p14:section>
-        <p14:section name="Problem and solution" id="{f78e5fce-03ce-1ca1-1e77-ffc7cf5e39ed}">
+        <p14:section name="Problem and solution" id="{782a356c-72b0-46ad-c7a1-a309ef2cb65a}">
           <p14:sldIdLst>
             <p14:sldId id="257"/>
             <p14:sldId id="258"/>
           </p14:sldIdLst>
         </p14:section>
-        <p14:section name="How it works" id="{e0235786-9636-3205-7338-aae91278d5df}">
+        <p14:section name="How it works" id="{fdd06512-c318-9639-ff7b-9d945ba90245}">
           <p14:sldIdLst>
             <p14:sldId id="259"/>
             <p14:sldId id="260"/>
             <p14:sldId id="261"/>
             <p14:sldId id="262"/>
             <p14:sldId id="263"/>
+            <p14:sldId id="264"/>
           </p14:sldIdLst>
         </p14:section>
-        <p14:section name="Tools and Cline" id="{82d37328-6b07-59a7-b333-ec86ca96b8ef}">
+        <p14:section name="Tools and Cline" id="{6b973eeb-29af-7791-46e0-996c9b5f788b}">
           <p14:sldIdLst>
-            <p14:sldId id="264"/>
             <p14:sldId id="265"/>
+            <p14:sldId id="266"/>
           </p14:sldIdLst>
         </p14:section>
-        <p14:section name="Proof" id="{a93d4730-8177-9b04-6286-df9b4e8b2f09}">
+        <p14:section name="Proof" id="{3af85e37-20d0-d060-f7b0-468049cf5e2e}">
           <p14:sldIdLst>
-            <p14:sldId id="266"/>
             <p14:sldId id="267"/>
             <p14:sldId id="268"/>
+            <p14:sldId id="269"/>
           </p14:sldIdLst>
         </p14:section>
-        <p14:section name="Wrap-up" id="{076b5799-5883-9838-012f-b9b12011a166}">
+        <p14:section name="Wrap-up" id="{de1d9a7d-1e80-5578-01b9-ed3825f37942}">
           <p14:sldIdLst>
-            <p14:sldId id="269"/>
             <p14:sldId id="270"/>
+            <p14:sldId id="271"/>
           </p14:sldIdLst>
         </p14:section>
       </p14:sectionLst>
@@ -974,7 +976,7 @@
           <a:p>
             <a:r>
               <a:rPr lang="en-US" dirty="0"/>
-              <a:t>Two kinds of Cline use. In the build, Cline made reviewable changes with tests and commits. Inside the product, a Cline SDK agent helps with unreadable fields but is deliberately powerless: it can only propose, and ordinary code decides whether to accept. We also say plainly that other AI assistants wrote the first pass.</a:t>
+              <a:t>Gemini does the reading; everything that decides is ordinary code. The extractor sits behind one function, so a department can later swap in a self-hosted model and keep documents on its own infrastructure.</a:t>
             </a:r>
             <a:endParaRPr lang="en-US" dirty="0"/>
           </a:p>
@@ -1062,7 +1064,7 @@
           <a:p>
             <a:r>
               <a:rPr lang="en-US" dirty="0"/>
-              <a:t>These numbers show the pipeline logic works. They do not show real-world OCR robustness: the documents are synthetic and the labels were authored by the team. Recent benchmarks show vision models degrade on real Indic scans, so we report abstentions and say so.</a:t>
+              <a:t>Two kinds of Cline use. In the build, Cline made reviewable changes with tests and commits. Inside the product, a Cline SDK agent helps with unreadable fields but is deliberately powerless: it can only propose, and ordinary code decides whether to accept. We also say plainly that other AI assistants wrote the first pass.</a:t>
             </a:r>
             <a:endParaRPr lang="en-US" dirty="0"/>
           </a:p>
@@ -1150,7 +1152,7 @@
           <a:p>
             <a:r>
               <a:rPr lang="en-US" dirty="0"/>
-              <a:t>Real documents found real bugs that clean test files never showed. The redaction one matters most: a privacy guarantee is only as good as the formats it has been tested on, so each fix has a regression test.</a:t>
+              <a:t>These numbers show the pipeline logic works. They do not show real-world OCR robustness: the documents are synthetic and the labels were authored by the team. Recent benchmarks show vision models degrade on real Indic scans, so we report abstentions and say so.</a:t>
             </a:r>
             <a:endParaRPr lang="en-US" dirty="0"/>
           </a:p>
@@ -1238,7 +1240,7 @@
           <a:p>
             <a:r>
               <a:rPr lang="en-US" dirty="0"/>
-              <a:t>This slide maps our work to the judging criteria. For Cline we describe exactly what Cline did, and the bonus is the SDK agent inside the product.</a:t>
+              <a:t>Real documents found real bugs that clean test files never showed. The redaction one matters most: a privacy guarantee is only as good as the formats it has been tested on, so each fix has a regression test.</a:t>
             </a:r>
             <a:endParaRPr lang="en-US" dirty="0"/>
           </a:p>
@@ -1326,7 +1328,7 @@
           <a:p>
             <a:r>
               <a:rPr lang="en-US" dirty="0"/>
-              <a:t>We would rather show our limits than overclaim. The next step that matters most is a pilot with a real registry feed and a self-hosted model.</a:t>
+              <a:t>This slide maps our work to the judging criteria. For Cline we describe exactly what Cline did, and the bonus is the SDK agent inside the product.</a:t>
             </a:r>
             <a:endParaRPr lang="en-US" dirty="0"/>
           </a:p>
@@ -1414,7 +1416,7 @@
           <a:p>
             <a:r>
               <a:rPr lang="en-US" dirty="0"/>
-              <a:t>Close on the promise and the limit: we show what the documents say and where it comes from, and we never certify title.</a:t>
+              <a:t>We would rather show our limits than overclaim. The next step that matters most is a pilot with a real registry feed and a self-hosted model.</a:t>
             </a:r>
             <a:endParaRPr lang="en-US" dirty="0"/>
           </a:p>
@@ -1438,6 +1440,94 @@
             <a:fld id="{F7021451-1387-4CA6-816F-3879F97B5CBC}" type="slidenum">
               <a:rPr lang="en-US"/>
               <a:t>15</a:t>
+            </a:fld>
+            <a:endParaRPr lang="en-US"/>
+          </a:p>
+        </p:txBody>
+      </p:sp>
+    </p:spTree>
+    <p:extLst>
+      <p:ext uri="{BB962C8B-B14F-4D97-AF65-F5344CB8AC3E}">
+        <p14:creationId xmlns:p14="http://schemas.microsoft.com/office/powerpoint/2010/main" val="1024086991"/>
+      </p:ext>
+    </p:extLst>
+  </p:cSld>
+  <p:clrMapOvr>
+    <a:masterClrMapping/>
+  </p:clrMapOvr>
+</p:notes>
+</file>
+
+<file path=ppt/notesSlides/notesSlide16.xml><?xml version="1.0" encoding="utf-8"?>
+<p:notes xmlns:a="http://schemas.openxmlformats.org/drawingml/2006/main" xmlns:r="http://schemas.openxmlformats.org/officeDocument/2006/relationships" xmlns:p="http://schemas.openxmlformats.org/presentationml/2006/main">
+  <p:cSld>
+    <p:spTree>
+      <p:nvGrpSpPr>
+        <p:cNvPr id="1" name=""/>
+        <p:cNvGrpSpPr/>
+        <p:nvPr/>
+      </p:nvGrpSpPr>
+      <p:grpSpPr>
+        <a:xfrm>
+          <a:off x="0" y="0"/>
+          <a:ext cx="0" cy="0"/>
+          <a:chOff x="0" y="0"/>
+          <a:chExt cx="0" cy="0"/>
+        </a:xfrm>
+      </p:grpSpPr>
+      <p:sp>
+        <p:nvSpPr>
+          <p:cNvPr id="2" name="Slide Image Placeholder 1"/>
+          <p:cNvSpPr>
+            <a:spLocks noGrp="1" noRot="1" noChangeAspect="1"/>
+          </p:cNvSpPr>
+          <p:nvPr>
+            <p:ph type="sldImg"/>
+          </p:nvPr>
+        </p:nvSpPr>
+        <p:spPr/>
+      </p:sp>
+      <p:sp>
+        <p:nvSpPr>
+          <p:cNvPr id="3" name="Notes Placeholder 2"/>
+          <p:cNvSpPr>
+            <a:spLocks noGrp="1"/>
+          </p:cNvSpPr>
+          <p:nvPr>
+            <p:ph type="body" idx="1"/>
+          </p:nvPr>
+        </p:nvSpPr>
+        <p:spPr/>
+        <p:txBody>
+          <a:bodyPr/>
+          <a:lstStyle/>
+          <a:p>
+            <a:r>
+              <a:rPr lang="en-US" dirty="0"/>
+              <a:t>Close on the promise and the limit: we show what the documents say and where it comes from, and we never certify title.</a:t>
+            </a:r>
+            <a:endParaRPr lang="en-US" dirty="0"/>
+          </a:p>
+        </p:txBody>
+      </p:sp>
+      <p:sp>
+        <p:nvSpPr>
+          <p:cNvPr id="4" name="Slide Number Placeholder 3"/>
+          <p:cNvSpPr>
+            <a:spLocks noGrp="1"/>
+          </p:cNvSpPr>
+          <p:nvPr>
+            <p:ph type="sldNum" sz="quarter" idx="10"/>
+          </p:nvPr>
+        </p:nvSpPr>
+        <p:spPr/>
+        <p:txBody>
+          <a:bodyPr/>
+          <a:lstStyle/>
+          <a:p>
+            <a:fld id="{F7021451-1387-4CA6-816F-3879F97B5CBC}" type="slidenum">
+              <a:rPr lang="en-US"/>
+              <a:t>16</a:t>
             </a:fld>
             <a:endParaRPr lang="en-US"/>
           </a:p>
@@ -2030,7 +2120,7 @@
           <a:p>
             <a:r>
               <a:rPr lang="en-US" dirty="0"/>
-              <a:t>The ledger shows what the system produced, what the officer recorded, and that none of it was altered afterwards. We say tamper-evident, not blockchain, and we do not claim it proves fault: for Class B advisories the officer may rightly proceed.</a:t>
+              <a:t>These are the app's own pages rendered with its real styles, using the synthetic sample data. The finding card shows the red Class A item with its page; the ledger shows two linked blocks and the red alert from the tamper test.</a:t>
             </a:r>
             <a:endParaRPr lang="en-US" dirty="0"/>
           </a:p>
@@ -2118,7 +2208,7 @@
           <a:p>
             <a:r>
               <a:rPr lang="en-US" dirty="0"/>
-              <a:t>Gemini does the reading; everything that decides is ordinary code. The extractor sits behind one function, so a department can later swap in a self-hosted model and keep documents on its own infrastructure.</a:t>
+              <a:t>The ledger shows what the system produced, what the officer recorded, and that none of it was altered afterwards. We say tamper-evident, not blockchain, and we do not claim it proves fault: for Class B advisories the officer may rightly proceed.</a:t>
             </a:r>
             <a:endParaRPr lang="en-US" dirty="0"/>
           </a:p>
@@ -3344,7 +3434,7 @@
                   <a:schemeClr val="tx2"/>
                 </a:solidFill>
               </a:rPr>
-              <a:t>How Cline was used</a:t>
+              <a:t>Models and tools</a:t>
             </a:r>
             <a:endParaRPr lang="en-US" sz="3600" dirty="0"/>
           </a:p>
@@ -3358,12 +3448,12 @@
         </p:nvSpPr>
         <p:spPr>
           <a:xfrm>
-            <a:off x="548640" y="1508760"/>
-            <a:ext cx="5364328" cy="4526280"/>
+            <a:off x="548640" y="1554480"/>
+            <a:ext cx="3520440" cy="2194560"/>
           </a:xfrm>
           <a:prstGeom prst="roundRect">
             <a:avLst>
-              <a:gd name="adj" fmla="val 2424"/>
+              <a:gd name="adj" fmla="val 5000"/>
             </a:avLst>
           </a:prstGeom>
           <a:solidFill>
@@ -3386,153 +3476,63 @@
       </p:sp>
       <p:sp>
         <p:nvSpPr>
-          <p:cNvPr id="4" name="Text 2"/>
-          <p:cNvSpPr txBox="1"/>
-          <p:nvPr/>
-        </p:nvSpPr>
-        <p:spPr>
-          <a:xfrm>
-            <a:off x="822960" y="1645920"/>
-            <a:ext cx="4815688" cy="457200"/>
-          </a:xfrm>
-          <a:prstGeom prst="rect">
-            <a:avLst/>
-          </a:prstGeom>
-          <a:noFill/>
-          <a:ln/>
-        </p:spPr>
-        <p:txBody>
-          <a:bodyPr wrap="square" lIns="0" tIns="0" rIns="0" bIns="0" rtlCol="0" anchor="t"/>
-          <a:lstStyle/>
-          <a:p>
-            <a:pPr indent="0" marL="0">
-              <a:buNone/>
-            </a:pPr>
-            <a:r>
-              <a:rPr lang="en-US" sz="2200" b="1" dirty="0">
-                <a:solidFill>
-                  <a:schemeClr val="tx2"/>
-                </a:solidFill>
-              </a:rPr>
-              <a:t>In the build</a:t>
-            </a:r>
-            <a:endParaRPr lang="en-US" sz="2200" dirty="0"/>
-          </a:p>
-        </p:txBody>
-      </p:sp>
-      <p:sp>
-        <p:nvSpPr>
-          <p:cNvPr id="5" name="Text 3"/>
-          <p:cNvSpPr txBox="1"/>
-          <p:nvPr/>
-        </p:nvSpPr>
-        <p:spPr>
-          <a:xfrm>
-            <a:off x="822960" y="2194560"/>
-            <a:ext cx="4815688" cy="2377440"/>
-          </a:xfrm>
-          <a:prstGeom prst="rect">
-            <a:avLst/>
-          </a:prstGeom>
-          <a:noFill/>
-          <a:ln/>
-        </p:spPr>
-        <p:txBody>
-          <a:bodyPr wrap="square" lIns="635" tIns="635" rIns="635" bIns="635" rtlCol="0" anchor="t"/>
-          <a:lstStyle/>
-          <a:p>
-            <a:pPr marL="177800" indent="-177800">
-              <a:spcAft>
-                <a:spcPts val="800"/>
-              </a:spcAft>
-              <a:buSzPct val="100000"/>
-              <a:buChar char="•"/>
-            </a:pPr>
-            <a:r>
-              <a:rPr lang="en-US" sz="1400" dirty="0">
-                <a:solidFill>
-                  <a:schemeClr val="tx1"/>
-                </a:solidFill>
-              </a:rPr>
-              <a:t>Cline (ClinePass, in VS Code) made real changes: a prompt fix so the extractor must return every field, plus a version bump and a test</a:t>
-            </a:r>
-            <a:endParaRPr lang="en-US" sz="1400" dirty="0"/>
-          </a:p>
-          <a:p>
-            <a:pPr marL="177800" indent="-177800">
-              <a:spcAft>
-                <a:spcPts val="800"/>
-              </a:spcAft>
-              <a:buSzPct val="100000"/>
-              <a:buChar char="•"/>
-            </a:pPr>
-            <a:r>
-              <a:rPr lang="en-US" sz="1400" dirty="0">
-                <a:solidFill>
-                  <a:schemeClr val="tx1"/>
-                </a:solidFill>
-              </a:rPr>
-              <a:t>Cline wrote the request-list test suite and the README write-up</a:t>
-            </a:r>
-            <a:endParaRPr lang="en-US" sz="1400" dirty="0"/>
-          </a:p>
-          <a:p>
-            <a:pPr marL="177800" indent="-177800">
-              <a:spcAft>
-                <a:spcPts val="800"/>
-              </a:spcAft>
-              <a:buSzPct val="100000"/>
-              <a:buChar char="•"/>
-            </a:pPr>
-            <a:r>
-              <a:rPr lang="en-US" sz="1400" dirty="0">
-                <a:solidFill>
-                  <a:schemeClr val="tx1"/>
-                </a:solidFill>
-              </a:rPr>
-              <a:t>Each change is a visible diff, a green test run and a commit</a:t>
-            </a:r>
-            <a:endParaRPr lang="en-US" sz="1400" dirty="0"/>
-          </a:p>
-        </p:txBody>
-      </p:sp>
-      <p:sp>
-        <p:nvSpPr>
-          <p:cNvPr id="6" name="Shape 4"/>
+          <p:cNvPr id="4" name="Shape 2"/>
           <p:cNvSpPr/>
           <p:nvPr/>
         </p:nvSpPr>
         <p:spPr>
           <a:xfrm>
-            <a:off x="822960" y="4572000"/>
-            <a:ext cx="4815688" cy="1280160"/>
-          </a:xfrm>
-          <a:prstGeom prst="roundRect">
-            <a:avLst>
-              <a:gd name="adj" fmla="val 8571"/>
-            </a:avLst>
-          </a:prstGeom>
-          <a:solidFill>
-            <a:srgbClr val="FFF3D1"/>
+            <a:off x="822960" y="1737360"/>
+            <a:ext cx="512064" cy="512064"/>
+          </a:xfrm>
+          <a:prstGeom prst="ellipse">
+            <a:avLst/>
+          </a:prstGeom>
+          <a:solidFill>
+            <a:schemeClr val="accent1"/>
           </a:solidFill>
           <a:ln w="12700">
             <a:solidFill>
-              <a:srgbClr val="FCD34D"/>
+              <a:schemeClr val="accent1"/>
             </a:solidFill>
             <a:prstDash val="solid"/>
           </a:ln>
         </p:spPr>
       </p:sp>
-      <p:sp>
-        <p:nvSpPr>
-          <p:cNvPr id="7" name="Text 5"/>
+      <p:pic>
+        <p:nvPicPr>
+          <p:cNvPr id="5" name="Image 0" descr="Eye">    </p:cNvPr>
+          <p:cNvPicPr>
+            <a:picLocks noChangeAspect="1"/>
+          </p:cNvPicPr>
+          <p:nvPr/>
+        </p:nvPicPr>
+        <p:blipFill>
+          <a:blip r:embed="rId1"/>
+          <a:stretch>
+            <a:fillRect/>
+          </a:stretch>
+        </p:blipFill>
+        <p:spPr>
+          <a:xfrm>
+            <a:off x="950976" y="1865376"/>
+            <a:ext cx="256032" cy="256032"/>
+          </a:xfrm>
+          <a:prstGeom prst="rect">
+            <a:avLst/>
+          </a:prstGeom>
+        </p:spPr>
+      </p:pic>
+      <p:sp>
+        <p:nvSpPr>
+          <p:cNvPr id="6" name="Text 3"/>
           <p:cNvSpPr txBox="1"/>
           <p:nvPr/>
         </p:nvSpPr>
         <p:spPr>
           <a:xfrm>
-            <a:off x="960120" y="4572000"/>
-            <a:ext cx="4541368" cy="1280160"/>
+            <a:off x="1463040" y="1755648"/>
+            <a:ext cx="2377440" cy="457200"/>
           </a:xfrm>
           <a:prstGeom prst="rect">
             <a:avLst/>
@@ -3548,12 +3548,48 @@
               <a:buNone/>
             </a:pPr>
             <a:r>
+              <a:rPr lang="en-US" sz="1800" b="1" dirty="0">
+                <a:solidFill>
+                  <a:schemeClr val="tx2"/>
+                </a:solidFill>
+              </a:rPr>
+              <a:t>Vision LLM</a:t>
+            </a:r>
+            <a:endParaRPr lang="en-US" sz="1800" dirty="0"/>
+          </a:p>
+        </p:txBody>
+      </p:sp>
+      <p:sp>
+        <p:nvSpPr>
+          <p:cNvPr id="7" name="Text 4"/>
+          <p:cNvSpPr txBox="1"/>
+          <p:nvPr/>
+        </p:nvSpPr>
+        <p:spPr>
+          <a:xfrm>
+            <a:off x="822960" y="2331720"/>
+            <a:ext cx="2971800" cy="1325880"/>
+          </a:xfrm>
+          <a:prstGeom prst="rect">
+            <a:avLst/>
+          </a:prstGeom>
+          <a:noFill/>
+          <a:ln/>
+        </p:spPr>
+        <p:txBody>
+          <a:bodyPr wrap="square" lIns="0" tIns="0" rIns="0" bIns="0" rtlCol="0" anchor="t"/>
+          <a:lstStyle/>
+          <a:p>
+            <a:pPr indent="0" marL="0">
+              <a:buNone/>
+            </a:pPr>
+            <a:r>
               <a:rPr lang="en-US" sz="1400" dirty="0">
                 <a:solidFill>
-                  <a:srgbClr val="7C4A03"/>
-                </a:solidFill>
-              </a:rPr>
-              <a:t>To be plain: the first version of the pipeline, rules bridge and ledger signing was drafted with other AI coding assistants. The commit history shows who contributed what.</a:t>
+                  <a:schemeClr val="tx1"/>
+                </a:solidFill>
+              </a:rPr>
+              <a:t>Gemini Flash reads the page images. One provider interface: Claude also supported, a self-hosted model can be swapped in.</a:t>
             </a:r>
             <a:endParaRPr lang="en-US" sz="1400" dirty="0"/>
           </a:p>
@@ -3561,18 +3597,18 @@
       </p:sp>
       <p:sp>
         <p:nvSpPr>
-          <p:cNvPr id="8" name="Shape 6"/>
+          <p:cNvPr id="8" name="Shape 5"/>
           <p:cNvSpPr/>
           <p:nvPr/>
         </p:nvSpPr>
         <p:spPr>
           <a:xfrm>
-            <a:off x="6278728" y="1508760"/>
-            <a:ext cx="5364328" cy="4526280"/>
+            <a:off x="4335628" y="1554480"/>
+            <a:ext cx="3520440" cy="2194560"/>
           </a:xfrm>
           <a:prstGeom prst="roundRect">
             <a:avLst>
-              <a:gd name="adj" fmla="val 2424"/>
+              <a:gd name="adj" fmla="val 5000"/>
             </a:avLst>
           </a:prstGeom>
           <a:solidFill>
@@ -3595,14 +3631,63 @@
       </p:sp>
       <p:sp>
         <p:nvSpPr>
-          <p:cNvPr id="9" name="Text 7"/>
+          <p:cNvPr id="9" name="Shape 6"/>
+          <p:cNvSpPr/>
+          <p:nvPr/>
+        </p:nvSpPr>
+        <p:spPr>
+          <a:xfrm>
+            <a:off x="4609948" y="1737360"/>
+            <a:ext cx="512064" cy="512064"/>
+          </a:xfrm>
+          <a:prstGeom prst="ellipse">
+            <a:avLst/>
+          </a:prstGeom>
+          <a:solidFill>
+            <a:schemeClr val="accent1"/>
+          </a:solidFill>
+          <a:ln w="12700">
+            <a:solidFill>
+              <a:schemeClr val="accent1"/>
+            </a:solidFill>
+            <a:prstDash val="solid"/>
+          </a:ln>
+        </p:spPr>
+      </p:sp>
+      <p:pic>
+        <p:nvPicPr>
+          <p:cNvPr id="10" name="Image 1" descr="MagnifyingGlass">    </p:cNvPr>
+          <p:cNvPicPr>
+            <a:picLocks noChangeAspect="1"/>
+          </p:cNvPicPr>
+          <p:nvPr/>
+        </p:nvPicPr>
+        <p:blipFill>
+          <a:blip r:embed="rId2"/>
+          <a:stretch>
+            <a:fillRect/>
+          </a:stretch>
+        </p:blipFill>
+        <p:spPr>
+          <a:xfrm>
+            <a:off x="4737964" y="1865376"/>
+            <a:ext cx="256032" cy="256032"/>
+          </a:xfrm>
+          <a:prstGeom prst="rect">
+            <a:avLst/>
+          </a:prstGeom>
+        </p:spPr>
+      </p:pic>
+      <p:sp>
+        <p:nvSpPr>
+          <p:cNvPr id="11" name="Text 7"/>
           <p:cNvSpPr txBox="1"/>
           <p:nvPr/>
         </p:nvSpPr>
         <p:spPr>
           <a:xfrm>
-            <a:off x="6553048" y="1645920"/>
-            <a:ext cx="4815688" cy="457200"/>
+            <a:off x="5250028" y="1755648"/>
+            <a:ext cx="2377440" cy="457200"/>
           </a:xfrm>
           <a:prstGeom prst="rect">
             <a:avLst/>
@@ -3611,6 +3696,42 @@
           <a:ln/>
         </p:spPr>
         <p:txBody>
+          <a:bodyPr wrap="square" lIns="0" tIns="0" rIns="0" bIns="0" rtlCol="0" anchor="ctr"/>
+          <a:lstStyle/>
+          <a:p>
+            <a:pPr indent="0" marL="0">
+              <a:buNone/>
+            </a:pPr>
+            <a:r>
+              <a:rPr lang="en-US" sz="1800" b="1" dirty="0">
+                <a:solidFill>
+                  <a:schemeClr val="tx2"/>
+                </a:solidFill>
+              </a:rPr>
+              <a:t>Local reader</a:t>
+            </a:r>
+            <a:endParaRPr lang="en-US" sz="1800" dirty="0"/>
+          </a:p>
+        </p:txBody>
+      </p:sp>
+      <p:sp>
+        <p:nvSpPr>
+          <p:cNvPr id="12" name="Text 8"/>
+          <p:cNvSpPr txBox="1"/>
+          <p:nvPr/>
+        </p:nvSpPr>
+        <p:spPr>
+          <a:xfrm>
+            <a:off x="4609948" y="2331720"/>
+            <a:ext cx="2971800" cy="1325880"/>
+          </a:xfrm>
+          <a:prstGeom prst="rect">
+            <a:avLst/>
+          </a:prstGeom>
+          <a:noFill/>
+          <a:ln/>
+        </p:spPr>
+        <p:txBody>
           <a:bodyPr wrap="square" lIns="0" tIns="0" rIns="0" bIns="0" rtlCol="0" anchor="t"/>
           <a:lstStyle/>
           <a:p>
@@ -3618,241 +3739,63 @@
               <a:buNone/>
             </a:pPr>
             <a:r>
-              <a:rPr lang="en-US" sz="2200" b="1" dirty="0">
-                <a:solidFill>
-                  <a:schemeClr val="tx2"/>
-                </a:solidFill>
-              </a:rPr>
-              <a:t>Inside the product</a:t>
-            </a:r>
-            <a:endParaRPr lang="en-US" sz="2200" dirty="0"/>
-          </a:p>
-        </p:txBody>
-      </p:sp>
-      <p:sp>
-        <p:nvSpPr>
-          <p:cNvPr id="10" name="Text 8"/>
-          <p:cNvSpPr txBox="1"/>
-          <p:nvPr/>
-        </p:nvSpPr>
-        <p:spPr>
-          <a:xfrm>
-            <a:off x="6553048" y="2240280"/>
-            <a:ext cx="4815688" cy="502920"/>
+              <a:rPr lang="en-US" sz="1400" dirty="0">
+                <a:solidFill>
+                  <a:schemeClr val="tx1"/>
+                </a:solidFill>
+              </a:rPr>
+              <a:t>Tesseract 5 (English, Hindi, Marathi, Assamese packs) and the PDF text layer. Cross-checks the model and finds ID numbers to mask.</a:t>
+            </a:r>
+            <a:endParaRPr lang="en-US" sz="1400" dirty="0"/>
+          </a:p>
+        </p:txBody>
+      </p:sp>
+      <p:sp>
+        <p:nvSpPr>
+          <p:cNvPr id="13" name="Shape 9"/>
+          <p:cNvSpPr/>
+          <p:nvPr/>
+        </p:nvSpPr>
+        <p:spPr>
+          <a:xfrm>
+            <a:off x="8122615" y="1554480"/>
+            <a:ext cx="3520440" cy="2194560"/>
           </a:xfrm>
           <a:prstGeom prst="roundRect">
             <a:avLst>
-              <a:gd name="adj" fmla="val 18182"/>
+              <a:gd name="adj" fmla="val 5000"/>
             </a:avLst>
           </a:prstGeom>
           <a:solidFill>
-            <a:schemeClr val="accent1"/>
-          </a:solidFill>
-          <a:ln/>
-        </p:spPr>
-        <p:txBody>
-          <a:bodyPr wrap="square" lIns="0" tIns="0" rIns="0" bIns="0" rtlCol="0" anchor="ctr"/>
-          <a:lstStyle/>
-          <a:p>
-            <a:pPr algn="ctr" indent="0" marL="0">
-              <a:buNone/>
-            </a:pPr>
-            <a:r>
-              <a:rPr lang="en-US" sz="1600" b="1" dirty="0">
-                <a:solidFill>
-                  <a:schemeClr val="bg1"/>
-                </a:solidFill>
-              </a:rPr>
-              <a:t>Cline SDK review agent</a:t>
-            </a:r>
-            <a:endParaRPr lang="en-US" sz="1600" dirty="0"/>
-          </a:p>
-        </p:txBody>
-      </p:sp>
-      <p:sp>
-        <p:nvSpPr>
-          <p:cNvPr id="11" name="Text 9"/>
-          <p:cNvSpPr txBox="1"/>
-          <p:nvPr/>
-        </p:nvSpPr>
-        <p:spPr>
-          <a:xfrm>
-            <a:off x="6553048" y="2926080"/>
-            <a:ext cx="2270684" cy="384048"/>
-          </a:xfrm>
-          <a:prstGeom prst="roundRect">
-            <a:avLst>
-              <a:gd name="adj" fmla="val 19048"/>
-            </a:avLst>
-          </a:prstGeom>
-          <a:solidFill>
-            <a:srgbClr val="E5F6F2"/>
-          </a:solidFill>
-          <a:ln/>
-        </p:spPr>
-        <p:txBody>
-          <a:bodyPr wrap="square" lIns="0" tIns="0" rIns="0" bIns="0" rtlCol="0" anchor="ctr"/>
-          <a:lstStyle/>
-          <a:p>
-            <a:pPr algn="ctr" indent="0" marL="0">
-              <a:buNone/>
-            </a:pPr>
-            <a:r>
-              <a:rPr lang="en-US" sz="1200" dirty="0">
-                <a:solidFill>
-                  <a:srgbClr val="134E4A"/>
-                </a:solidFill>
-                <a:latin typeface="Consolas" pitchFamily="34" charset="0"/>
-                <a:ea typeface="Consolas" pitchFamily="34" charset="-122"/>
-                <a:cs typeface="Consolas" pitchFamily="34" charset="-120"/>
-              </a:rPr>
-              <a:t>get_field</a:t>
-            </a:r>
-            <a:endParaRPr lang="en-US" sz="1200" dirty="0"/>
-          </a:p>
-        </p:txBody>
-      </p:sp>
-      <p:sp>
-        <p:nvSpPr>
-          <p:cNvPr id="12" name="Text 10"/>
-          <p:cNvSpPr txBox="1"/>
-          <p:nvPr/>
-        </p:nvSpPr>
-        <p:spPr>
-          <a:xfrm>
-            <a:off x="9098051" y="2926080"/>
-            <a:ext cx="2270684" cy="384048"/>
-          </a:xfrm>
-          <a:prstGeom prst="roundRect">
-            <a:avLst>
-              <a:gd name="adj" fmla="val 19048"/>
-            </a:avLst>
-          </a:prstGeom>
-          <a:solidFill>
-            <a:srgbClr val="E5F6F2"/>
-          </a:solidFill>
-          <a:ln/>
-        </p:spPr>
-        <p:txBody>
-          <a:bodyPr wrap="square" lIns="0" tIns="0" rIns="0" bIns="0" rtlCol="0" anchor="ctr"/>
-          <a:lstStyle/>
-          <a:p>
-            <a:pPr algn="ctr" indent="0" marL="0">
-              <a:buNone/>
-            </a:pPr>
-            <a:r>
-              <a:rPr lang="en-US" sz="1200" dirty="0">
-                <a:solidFill>
-                  <a:srgbClr val="134E4A"/>
-                </a:solidFill>
-                <a:latin typeface="Consolas" pitchFamily="34" charset="0"/>
-                <a:ea typeface="Consolas" pitchFamily="34" charset="-122"/>
-                <a:cs typeface="Consolas" pitchFamily="34" charset="-120"/>
-              </a:rPr>
-              <a:t>read_page_text</a:t>
-            </a:r>
-            <a:endParaRPr lang="en-US" sz="1200" dirty="0"/>
-          </a:p>
-        </p:txBody>
-      </p:sp>
-      <p:sp>
-        <p:nvSpPr>
-          <p:cNvPr id="13" name="Text 11"/>
-          <p:cNvSpPr txBox="1"/>
-          <p:nvPr/>
-        </p:nvSpPr>
-        <p:spPr>
-          <a:xfrm>
-            <a:off x="6553048" y="3429000"/>
-            <a:ext cx="2270684" cy="384048"/>
-          </a:xfrm>
-          <a:prstGeom prst="roundRect">
-            <a:avLst>
-              <a:gd name="adj" fmla="val 19048"/>
-            </a:avLst>
-          </a:prstGeom>
-          <a:solidFill>
-            <a:srgbClr val="E5F6F2"/>
-          </a:solidFill>
-          <a:ln/>
-        </p:spPr>
-        <p:txBody>
-          <a:bodyPr wrap="square" lIns="0" tIns="0" rIns="0" bIns="0" rtlCol="0" anchor="ctr"/>
-          <a:lstStyle/>
-          <a:p>
-            <a:pPr algn="ctr" indent="0" marL="0">
-              <a:buNone/>
-            </a:pPr>
-            <a:r>
-              <a:rPr lang="en-US" sz="1200" dirty="0">
-                <a:solidFill>
-                  <a:srgbClr val="134E4A"/>
-                </a:solidFill>
-                <a:latin typeface="Consolas" pitchFamily="34" charset="0"/>
-                <a:ea typeface="Consolas" pitchFamily="34" charset="-122"/>
-                <a:cs typeface="Consolas" pitchFamily="34" charset="-120"/>
-              </a:rPr>
-              <a:t>validate_field</a:t>
-            </a:r>
-            <a:endParaRPr lang="en-US" sz="1200" dirty="0"/>
-          </a:p>
-        </p:txBody>
-      </p:sp>
-      <p:sp>
-        <p:nvSpPr>
-          <p:cNvPr id="14" name="Text 12"/>
-          <p:cNvSpPr txBox="1"/>
-          <p:nvPr/>
-        </p:nvSpPr>
-        <p:spPr>
-          <a:xfrm>
-            <a:off x="9098051" y="3429000"/>
-            <a:ext cx="2270684" cy="384048"/>
-          </a:xfrm>
-          <a:prstGeom prst="roundRect">
-            <a:avLst>
-              <a:gd name="adj" fmla="val 19048"/>
-            </a:avLst>
-          </a:prstGeom>
-          <a:solidFill>
-            <a:srgbClr val="E5F6F2"/>
-          </a:solidFill>
-          <a:ln/>
-        </p:spPr>
-        <p:txBody>
-          <a:bodyPr wrap="square" lIns="0" tIns="0" rIns="0" bIns="0" rtlCol="0" anchor="ctr"/>
-          <a:lstStyle/>
-          <a:p>
-            <a:pPr algn="ctr" indent="0" marL="0">
-              <a:buNone/>
-            </a:pPr>
-            <a:r>
-              <a:rPr lang="en-US" sz="1200" dirty="0">
-                <a:solidFill>
-                  <a:srgbClr val="134E4A"/>
-                </a:solidFill>
-                <a:latin typeface="Consolas" pitchFamily="34" charset="0"/>
-                <a:ea typeface="Consolas" pitchFamily="34" charset="-122"/>
-                <a:cs typeface="Consolas" pitchFamily="34" charset="-120"/>
-              </a:rPr>
-              <a:t>propose_correction</a:t>
-            </a:r>
-            <a:endParaRPr lang="en-US" sz="1200" dirty="0"/>
-          </a:p>
-        </p:txBody>
-      </p:sp>
-      <p:sp>
-        <p:nvSpPr>
-          <p:cNvPr id="15" name="Shape 13"/>
+            <a:schemeClr val="bg1"/>
+          </a:solidFill>
+          <a:ln w="12700">
+            <a:solidFill>
+              <a:srgbClr val="E4ECE8"/>
+            </a:solidFill>
+            <a:prstDash val="solid"/>
+          </a:ln>
+          <a:effectLst>
+            <a:outerShdw sx="100000" sy="100000" kx="0" ky="0" algn="bl" rotWithShape="0" blurRad="76200" dist="25400" dir="5400000">
+              <a:srgbClr val="000000">
+                <a:alpha val="12000"/>
+              </a:srgbClr>
+            </a:outerShdw>
+          </a:effectLst>
+        </p:spPr>
+      </p:sp>
+      <p:sp>
+        <p:nvSpPr>
+          <p:cNvPr id="14" name="Shape 10"/>
           <p:cNvSpPr/>
           <p:nvPr/>
         </p:nvSpPr>
         <p:spPr>
           <a:xfrm>
-            <a:off x="8823731" y="3977640"/>
-            <a:ext cx="274320" cy="274320"/>
-          </a:xfrm>
-          <a:prstGeom prst="downArrow">
+            <a:off x="8396935" y="1737360"/>
+            <a:ext cx="512064" cy="512064"/>
+          </a:xfrm>
+          <a:prstGeom prst="ellipse">
             <a:avLst/>
           </a:prstGeom>
           <a:solidFill>
@@ -3866,41 +3809,252 @@
           </a:ln>
         </p:spPr>
       </p:sp>
-      <p:sp>
-        <p:nvSpPr>
-          <p:cNvPr id="16" name="Text 14"/>
+      <p:pic>
+        <p:nvPicPr>
+          <p:cNvPr id="15" name="Image 2" descr="Robot">    </p:cNvPr>
+          <p:cNvPicPr>
+            <a:picLocks noChangeAspect="1"/>
+          </p:cNvPicPr>
+          <p:nvPr/>
+        </p:nvPicPr>
+        <p:blipFill>
+          <a:blip r:embed="rId3"/>
+          <a:stretch>
+            <a:fillRect/>
+          </a:stretch>
+        </p:blipFill>
+        <p:spPr>
+          <a:xfrm>
+            <a:off x="8524951" y="1865376"/>
+            <a:ext cx="256032" cy="256032"/>
+          </a:xfrm>
+          <a:prstGeom prst="rect">
+            <a:avLst/>
+          </a:prstGeom>
+        </p:spPr>
+      </p:pic>
+      <p:sp>
+        <p:nvSpPr>
+          <p:cNvPr id="16" name="Text 11"/>
           <p:cNvSpPr txBox="1"/>
           <p:nvPr/>
         </p:nvSpPr>
         <p:spPr>
           <a:xfrm>
-            <a:off x="6553048" y="4297680"/>
-            <a:ext cx="4815688" cy="548640"/>
+            <a:off x="9037015" y="1755648"/>
+            <a:ext cx="2377440" cy="457200"/>
+          </a:xfrm>
+          <a:prstGeom prst="rect">
+            <a:avLst/>
+          </a:prstGeom>
+          <a:noFill/>
+          <a:ln/>
+        </p:spPr>
+        <p:txBody>
+          <a:bodyPr wrap="square" lIns="0" tIns="0" rIns="0" bIns="0" rtlCol="0" anchor="ctr"/>
+          <a:lstStyle/>
+          <a:p>
+            <a:pPr indent="0" marL="0">
+              <a:buNone/>
+            </a:pPr>
+            <a:r>
+              <a:rPr lang="en-US" sz="1800" b="1" dirty="0">
+                <a:solidFill>
+                  <a:schemeClr val="tx2"/>
+                </a:solidFill>
+              </a:rPr>
+              <a:t>Cline SDK agent</a:t>
+            </a:r>
+            <a:endParaRPr lang="en-US" sz="1800" dirty="0"/>
+          </a:p>
+        </p:txBody>
+      </p:sp>
+      <p:sp>
+        <p:nvSpPr>
+          <p:cNvPr id="17" name="Text 12"/>
+          <p:cNvSpPr txBox="1"/>
+          <p:nvPr/>
+        </p:nvSpPr>
+        <p:spPr>
+          <a:xfrm>
+            <a:off x="8396935" y="2331720"/>
+            <a:ext cx="2971800" cy="1325880"/>
+          </a:xfrm>
+          <a:prstGeom prst="rect">
+            <a:avLst/>
+          </a:prstGeom>
+          <a:noFill/>
+          <a:ln/>
+        </p:spPr>
+        <p:txBody>
+          <a:bodyPr wrap="square" lIns="0" tIns="0" rIns="0" bIns="0" rtlCol="0" anchor="t"/>
+          <a:lstStyle/>
+          <a:p>
+            <a:pPr indent="0" marL="0">
+              <a:buNone/>
+            </a:pPr>
+            <a:r>
+              <a:rPr lang="en-US" sz="1400" dirty="0">
+                <a:solidFill>
+                  <a:schemeClr val="tx1"/>
+                </a:solidFill>
+              </a:rPr>
+              <a:t>@cline/sdk on Node 22 reviews fields the extractor could not read. It can only propose; Python re-checks.</a:t>
+            </a:r>
+            <a:endParaRPr lang="en-US" sz="1400" dirty="0"/>
+          </a:p>
+        </p:txBody>
+      </p:sp>
+      <p:sp>
+        <p:nvSpPr>
+          <p:cNvPr id="18" name="Shape 13"/>
+          <p:cNvSpPr/>
+          <p:nvPr/>
+        </p:nvSpPr>
+        <p:spPr>
+          <a:xfrm>
+            <a:off x="548640" y="4023360"/>
+            <a:ext cx="3520440" cy="2194560"/>
           </a:xfrm>
           <a:prstGeom prst="roundRect">
             <a:avLst>
-              <a:gd name="adj" fmla="val 16667"/>
+              <a:gd name="adj" fmla="val 5000"/>
             </a:avLst>
           </a:prstGeom>
           <a:solidFill>
-            <a:srgbClr val="FDE9C4"/>
-          </a:solidFill>
-          <a:ln/>
-        </p:spPr>
-        <p:txBody>
-          <a:bodyPr wrap="square" lIns="635" tIns="635" rIns="635" bIns="635" rtlCol="0" anchor="ctr"/>
-          <a:lstStyle/>
-          <a:p>
-            <a:pPr algn="ctr" indent="0" marL="0">
-              <a:buNone/>
-            </a:pPr>
-            <a:r>
-              <a:rPr lang="en-US" sz="1400" b="1" dirty="0">
-                <a:solidFill>
-                  <a:srgbClr val="7C4A03"/>
-                </a:solidFill>
-              </a:rPr>
-              <a:t>Python re-checks: format valid AND quote found on the page</a:t>
+            <a:schemeClr val="bg1"/>
+          </a:solidFill>
+          <a:ln w="12700">
+            <a:solidFill>
+              <a:srgbClr val="E4ECE8"/>
+            </a:solidFill>
+            <a:prstDash val="solid"/>
+          </a:ln>
+          <a:effectLst>
+            <a:outerShdw sx="100000" sy="100000" kx="0" ky="0" algn="bl" rotWithShape="0" blurRad="76200" dist="25400" dir="5400000">
+              <a:srgbClr val="000000">
+                <a:alpha val="12000"/>
+              </a:srgbClr>
+            </a:outerShdw>
+          </a:effectLst>
+        </p:spPr>
+      </p:sp>
+      <p:sp>
+        <p:nvSpPr>
+          <p:cNvPr id="19" name="Shape 14"/>
+          <p:cNvSpPr/>
+          <p:nvPr/>
+        </p:nvSpPr>
+        <p:spPr>
+          <a:xfrm>
+            <a:off x="822960" y="4206240"/>
+            <a:ext cx="512064" cy="512064"/>
+          </a:xfrm>
+          <a:prstGeom prst="ellipse">
+            <a:avLst/>
+          </a:prstGeom>
+          <a:solidFill>
+            <a:schemeClr val="accent1"/>
+          </a:solidFill>
+          <a:ln w="12700">
+            <a:solidFill>
+              <a:schemeClr val="accent1"/>
+            </a:solidFill>
+            <a:prstDash val="solid"/>
+          </a:ln>
+        </p:spPr>
+      </p:sp>
+      <p:pic>
+        <p:nvPicPr>
+          <p:cNvPr id="20" name="Image 3" descr="Python">    </p:cNvPr>
+          <p:cNvPicPr>
+            <a:picLocks noChangeAspect="1"/>
+          </p:cNvPicPr>
+          <p:nvPr/>
+        </p:nvPicPr>
+        <p:blipFill>
+          <a:blip r:embed="rId4"/>
+          <a:stretch>
+            <a:fillRect/>
+          </a:stretch>
+        </p:blipFill>
+        <p:spPr>
+          <a:xfrm>
+            <a:off x="950976" y="4334256"/>
+            <a:ext cx="256032" cy="256032"/>
+          </a:xfrm>
+          <a:prstGeom prst="rect">
+            <a:avLst/>
+          </a:prstGeom>
+        </p:spPr>
+      </p:pic>
+      <p:sp>
+        <p:nvSpPr>
+          <p:cNvPr id="21" name="Text 15"/>
+          <p:cNvSpPr txBox="1"/>
+          <p:nvPr/>
+        </p:nvSpPr>
+        <p:spPr>
+          <a:xfrm>
+            <a:off x="1463040" y="4224528"/>
+            <a:ext cx="2377440" cy="457200"/>
+          </a:xfrm>
+          <a:prstGeom prst="rect">
+            <a:avLst/>
+          </a:prstGeom>
+          <a:noFill/>
+          <a:ln/>
+        </p:spPr>
+        <p:txBody>
+          <a:bodyPr wrap="square" lIns="0" tIns="0" rIns="0" bIns="0" rtlCol="0" anchor="ctr"/>
+          <a:lstStyle/>
+          <a:p>
+            <a:pPr indent="0" marL="0">
+              <a:buNone/>
+            </a:pPr>
+            <a:r>
+              <a:rPr lang="en-US" sz="1800" b="1" dirty="0">
+                <a:solidFill>
+                  <a:schemeClr val="tx2"/>
+                </a:solidFill>
+              </a:rPr>
+              <a:t>Python core</a:t>
+            </a:r>
+            <a:endParaRPr lang="en-US" sz="1800" dirty="0"/>
+          </a:p>
+        </p:txBody>
+      </p:sp>
+      <p:sp>
+        <p:nvSpPr>
+          <p:cNvPr id="22" name="Text 16"/>
+          <p:cNvSpPr txBox="1"/>
+          <p:nvPr/>
+        </p:nvSpPr>
+        <p:spPr>
+          <a:xfrm>
+            <a:off x="822960" y="4800600"/>
+            <a:ext cx="2971800" cy="1325880"/>
+          </a:xfrm>
+          <a:prstGeom prst="rect">
+            <a:avLst/>
+          </a:prstGeom>
+          <a:noFill/>
+          <a:ln/>
+        </p:spPr>
+        <p:txBody>
+          <a:bodyPr wrap="square" lIns="0" tIns="0" rIns="0" bIns="0" rtlCol="0" anchor="t"/>
+          <a:lstStyle/>
+          <a:p>
+            <a:pPr indent="0" marL="0">
+              <a:buNone/>
+            </a:pPr>
+            <a:r>
+              <a:rPr lang="en-US" sz="1400" dirty="0">
+                <a:solidFill>
+                  <a:schemeClr val="tx1"/>
+                </a:solidFill>
+              </a:rPr>
+              <a:t>PyMuPDF, OpenCV, pydantic and rapidfuzz for ingest, preprocessing, validation and matching.</a:t>
             </a:r>
             <a:endParaRPr lang="en-US" sz="1400" dirty="0"/>
           </a:p>
@@ -3908,14 +4062,97 @@
       </p:sp>
       <p:sp>
         <p:nvSpPr>
-          <p:cNvPr id="17" name="Text 15"/>
+          <p:cNvPr id="23" name="Shape 17"/>
+          <p:cNvSpPr/>
+          <p:nvPr/>
+        </p:nvSpPr>
+        <p:spPr>
+          <a:xfrm>
+            <a:off x="4335628" y="4023360"/>
+            <a:ext cx="3520440" cy="2194560"/>
+          </a:xfrm>
+          <a:prstGeom prst="roundRect">
+            <a:avLst>
+              <a:gd name="adj" fmla="val 5000"/>
+            </a:avLst>
+          </a:prstGeom>
+          <a:solidFill>
+            <a:schemeClr val="bg1"/>
+          </a:solidFill>
+          <a:ln w="12700">
+            <a:solidFill>
+              <a:srgbClr val="E4ECE8"/>
+            </a:solidFill>
+            <a:prstDash val="solid"/>
+          </a:ln>
+          <a:effectLst>
+            <a:outerShdw sx="100000" sy="100000" kx="0" ky="0" algn="bl" rotWithShape="0" blurRad="76200" dist="25400" dir="5400000">
+              <a:srgbClr val="000000">
+                <a:alpha val="12000"/>
+              </a:srgbClr>
+            </a:outerShdw>
+          </a:effectLst>
+        </p:spPr>
+      </p:sp>
+      <p:sp>
+        <p:nvSpPr>
+          <p:cNvPr id="24" name="Shape 18"/>
+          <p:cNvSpPr/>
+          <p:nvPr/>
+        </p:nvSpPr>
+        <p:spPr>
+          <a:xfrm>
+            <a:off x="4609948" y="4206240"/>
+            <a:ext cx="512064" cy="512064"/>
+          </a:xfrm>
+          <a:prstGeom prst="ellipse">
+            <a:avLst/>
+          </a:prstGeom>
+          <a:solidFill>
+            <a:schemeClr val="accent1"/>
+          </a:solidFill>
+          <a:ln w="12700">
+            <a:solidFill>
+              <a:schemeClr val="accent1"/>
+            </a:solidFill>
+            <a:prstDash val="solid"/>
+          </a:ln>
+        </p:spPr>
+      </p:sp>
+      <p:pic>
+        <p:nvPicPr>
+          <p:cNvPr id="25" name="Image 4" descr="Database">    </p:cNvPr>
+          <p:cNvPicPr>
+            <a:picLocks noChangeAspect="1"/>
+          </p:cNvPicPr>
+          <p:nvPr/>
+        </p:nvPicPr>
+        <p:blipFill>
+          <a:blip r:embed="rId5"/>
+          <a:stretch>
+            <a:fillRect/>
+          </a:stretch>
+        </p:blipFill>
+        <p:spPr>
+          <a:xfrm>
+            <a:off x="4737964" y="4334256"/>
+            <a:ext cx="256032" cy="256032"/>
+          </a:xfrm>
+          <a:prstGeom prst="rect">
+            <a:avLst/>
+          </a:prstGeom>
+        </p:spPr>
+      </p:pic>
+      <p:sp>
+        <p:nvSpPr>
+          <p:cNvPr id="26" name="Text 19"/>
           <p:cNvSpPr txBox="1"/>
           <p:nvPr/>
         </p:nvSpPr>
         <p:spPr>
           <a:xfrm>
-            <a:off x="6553048" y="4937760"/>
-            <a:ext cx="4815688" cy="1051560"/>
+            <a:off x="5250028" y="4224528"/>
+            <a:ext cx="2377440" cy="457200"/>
           </a:xfrm>
           <a:prstGeom prst="rect">
             <a:avLst/>
@@ -3924,6 +4161,42 @@
           <a:ln/>
         </p:spPr>
         <p:txBody>
+          <a:bodyPr wrap="square" lIns="0" tIns="0" rIns="0" bIns="0" rtlCol="0" anchor="ctr"/>
+          <a:lstStyle/>
+          <a:p>
+            <a:pPr indent="0" marL="0">
+              <a:buNone/>
+            </a:pPr>
+            <a:r>
+              <a:rPr lang="en-US" sz="1800" b="1" dirty="0">
+                <a:solidFill>
+                  <a:schemeClr val="tx2"/>
+                </a:solidFill>
+              </a:rPr>
+              <a:t>Rules + ledger</a:t>
+            </a:r>
+            <a:endParaRPr lang="en-US" sz="1800" dirty="0"/>
+          </a:p>
+        </p:txBody>
+      </p:sp>
+      <p:sp>
+        <p:nvSpPr>
+          <p:cNvPr id="27" name="Text 20"/>
+          <p:cNvSpPr txBox="1"/>
+          <p:nvPr/>
+        </p:nvSpPr>
+        <p:spPr>
+          <a:xfrm>
+            <a:off x="4609948" y="4800600"/>
+            <a:ext cx="2971800" cy="1325880"/>
+          </a:xfrm>
+          <a:prstGeom prst="rect">
+            <a:avLst/>
+          </a:prstGeom>
+          <a:noFill/>
+          <a:ln/>
+        </p:spPr>
+        <p:txBody>
           <a:bodyPr wrap="square" lIns="0" tIns="0" rIns="0" bIns="0" rtlCol="0" anchor="t"/>
           <a:lstStyle/>
           <a:p>
@@ -3936,7 +4209,162 @@
                   <a:schemeClr val="tx1"/>
                 </a:solidFill>
               </a:rPr>
-              <a:t>It has no tool to run rules, create flags or touch the ledger. It works with the agent switched off. On our test set it recovered 0 of 1 field: deliberately conservative.</a:t>
+              <a:t>Deterministic Python rules, SQLite, SHA-256 hash chain, Ed25519 signatures, salted HMAC commitments.</a:t>
+            </a:r>
+            <a:endParaRPr lang="en-US" sz="1400" dirty="0"/>
+          </a:p>
+        </p:txBody>
+      </p:sp>
+      <p:sp>
+        <p:nvSpPr>
+          <p:cNvPr id="28" name="Shape 21"/>
+          <p:cNvSpPr/>
+          <p:nvPr/>
+        </p:nvSpPr>
+        <p:spPr>
+          <a:xfrm>
+            <a:off x="8122615" y="4023360"/>
+            <a:ext cx="3520440" cy="2194560"/>
+          </a:xfrm>
+          <a:prstGeom prst="roundRect">
+            <a:avLst>
+              <a:gd name="adj" fmla="val 5000"/>
+            </a:avLst>
+          </a:prstGeom>
+          <a:solidFill>
+            <a:schemeClr val="bg1"/>
+          </a:solidFill>
+          <a:ln w="12700">
+            <a:solidFill>
+              <a:srgbClr val="E4ECE8"/>
+            </a:solidFill>
+            <a:prstDash val="solid"/>
+          </a:ln>
+          <a:effectLst>
+            <a:outerShdw sx="100000" sy="100000" kx="0" ky="0" algn="bl" rotWithShape="0" blurRad="76200" dist="25400" dir="5400000">
+              <a:srgbClr val="000000">
+                <a:alpha val="12000"/>
+              </a:srgbClr>
+            </a:outerShdw>
+          </a:effectLst>
+        </p:spPr>
+      </p:sp>
+      <p:sp>
+        <p:nvSpPr>
+          <p:cNvPr id="29" name="Shape 22"/>
+          <p:cNvSpPr/>
+          <p:nvPr/>
+        </p:nvSpPr>
+        <p:spPr>
+          <a:xfrm>
+            <a:off x="8396935" y="4206240"/>
+            <a:ext cx="512064" cy="512064"/>
+          </a:xfrm>
+          <a:prstGeom prst="ellipse">
+            <a:avLst/>
+          </a:prstGeom>
+          <a:solidFill>
+            <a:schemeClr val="accent1"/>
+          </a:solidFill>
+          <a:ln w="12700">
+            <a:solidFill>
+              <a:schemeClr val="accent1"/>
+            </a:solidFill>
+            <a:prstDash val="solid"/>
+          </a:ln>
+        </p:spPr>
+      </p:sp>
+      <p:pic>
+        <p:nvPicPr>
+          <p:cNvPr id="30" name="Image 5" descr="Desktop">    </p:cNvPr>
+          <p:cNvPicPr>
+            <a:picLocks noChangeAspect="1"/>
+          </p:cNvPicPr>
+          <p:nvPr/>
+        </p:nvPicPr>
+        <p:blipFill>
+          <a:blip r:embed="rId6"/>
+          <a:stretch>
+            <a:fillRect/>
+          </a:stretch>
+        </p:blipFill>
+        <p:spPr>
+          <a:xfrm>
+            <a:off x="8524951" y="4334256"/>
+            <a:ext cx="256032" cy="256032"/>
+          </a:xfrm>
+          <a:prstGeom prst="rect">
+            <a:avLst/>
+          </a:prstGeom>
+        </p:spPr>
+      </p:pic>
+      <p:sp>
+        <p:nvSpPr>
+          <p:cNvPr id="31" name="Text 23"/>
+          <p:cNvSpPr txBox="1"/>
+          <p:nvPr/>
+        </p:nvSpPr>
+        <p:spPr>
+          <a:xfrm>
+            <a:off x="9037015" y="4224528"/>
+            <a:ext cx="2377440" cy="457200"/>
+          </a:xfrm>
+          <a:prstGeom prst="rect">
+            <a:avLst/>
+          </a:prstGeom>
+          <a:noFill/>
+          <a:ln/>
+        </p:spPr>
+        <p:txBody>
+          <a:bodyPr wrap="square" lIns="0" tIns="0" rIns="0" bIns="0" rtlCol="0" anchor="ctr"/>
+          <a:lstStyle/>
+          <a:p>
+            <a:pPr indent="0" marL="0">
+              <a:buNone/>
+            </a:pPr>
+            <a:r>
+              <a:rPr lang="en-US" sz="1800" b="1" dirty="0">
+                <a:solidFill>
+                  <a:schemeClr val="tx2"/>
+                </a:solidFill>
+              </a:rPr>
+              <a:t>Streamlit app</a:t>
+            </a:r>
+            <a:endParaRPr lang="en-US" sz="1800" dirty="0"/>
+          </a:p>
+        </p:txBody>
+      </p:sp>
+      <p:sp>
+        <p:nvSpPr>
+          <p:cNvPr id="32" name="Text 24"/>
+          <p:cNvSpPr txBox="1"/>
+          <p:nvPr/>
+        </p:nvSpPr>
+        <p:spPr>
+          <a:xfrm>
+            <a:off x="8396935" y="4800600"/>
+            <a:ext cx="2971800" cy="1325880"/>
+          </a:xfrm>
+          <a:prstGeom prst="rect">
+            <a:avLst/>
+          </a:prstGeom>
+          <a:noFill/>
+          <a:ln/>
+        </p:spPr>
+        <p:txBody>
+          <a:bodyPr wrap="square" lIns="0" tIns="0" rIns="0" bIns="0" rtlCol="0" anchor="t"/>
+          <a:lstStyle/>
+          <a:p>
+            <a:pPr indent="0" marL="0">
+              <a:buNone/>
+            </a:pPr>
+            <a:r>
+              <a:rPr lang="en-US" sz="1400" dirty="0">
+                <a:solidFill>
+                  <a:schemeClr val="tx1"/>
+                </a:solidFill>
+              </a:rPr>
+              <a:t>Website-style interface with SVG illustrations. Runs offline from cached extractions for the demo.</a:t>
             </a:r>
             <a:endParaRPr lang="en-US" sz="1400" dirty="0"/>
           </a:p>
@@ -3999,7 +4427,7 @@
                   <a:schemeClr val="tx2"/>
                 </a:solidFill>
               </a:rPr>
-              <a:t>Measured results</a:t>
+              <a:t>How Cline was used</a:t>
             </a:r>
             <a:endParaRPr lang="en-US" sz="3600" dirty="0"/>
           </a:p>
@@ -4014,11 +4442,11 @@
         <p:spPr>
           <a:xfrm>
             <a:off x="548640" y="1508760"/>
-            <a:ext cx="6309360" cy="4343400"/>
+            <a:ext cx="5364328" cy="4526280"/>
           </a:xfrm>
           <a:prstGeom prst="roundRect">
             <a:avLst>
-              <a:gd name="adj" fmla="val 2526"/>
+              <a:gd name="adj" fmla="val 2424"/>
             </a:avLst>
           </a:prstGeom>
           <a:solidFill>
@@ -4039,36 +4467,244 @@
           </a:effectLst>
         </p:spPr>
       </p:sp>
-      <p:graphicFrame>
-        <p:nvGraphicFramePr>
-          <p:cNvPr id="4" name="Chart 0" descr=""/>
-          <p:cNvGraphicFramePr/>
-          <p:nvPr/>
-        </p:nvGraphicFramePr>
-        <p:xfrm>
-          <a:off x="685800" y="1600200"/>
-          <a:ext cx="6035040" cy="4160520"/>
-        </p:xfrm>
-        <a:graphic xmlns:a="http://schemas.openxmlformats.org/drawingml/2006/main">
-          <a:graphicData uri="http://schemas.openxmlformats.org/drawingml/2006/chart">
-            <c:chart xmlns:c="http://schemas.openxmlformats.org/drawingml/2006/chart" r:id="rId1"/>
-          </a:graphicData>
-        </a:graphic>
-      </p:graphicFrame>
-      <p:sp>
-        <p:nvSpPr>
-          <p:cNvPr id="5" name="Shape 2"/>
+      <p:sp>
+        <p:nvSpPr>
+          <p:cNvPr id="4" name="Shape 2"/>
           <p:cNvSpPr/>
           <p:nvPr/>
         </p:nvSpPr>
         <p:spPr>
           <a:xfrm>
-            <a:off x="7132320" y="1508760"/>
-            <a:ext cx="4510735" cy="1051560"/>
+            <a:off x="5044288" y="1600200"/>
+            <a:ext cx="566928" cy="566928"/>
+          </a:xfrm>
+          <a:prstGeom prst="ellipse">
+            <a:avLst/>
+          </a:prstGeom>
+          <a:solidFill>
+            <a:schemeClr val="accent1"/>
+          </a:solidFill>
+          <a:ln w="12700">
+            <a:solidFill>
+              <a:schemeClr val="accent1"/>
+            </a:solidFill>
+            <a:prstDash val="solid"/>
+          </a:ln>
+        </p:spPr>
+      </p:sp>
+      <p:pic>
+        <p:nvPicPr>
+          <p:cNvPr id="5" name="Image 0" descr="Code">    </p:cNvPr>
+          <p:cNvPicPr>
+            <a:picLocks noChangeAspect="1"/>
+          </p:cNvPicPr>
+          <p:nvPr/>
+        </p:nvPicPr>
+        <p:blipFill>
+          <a:blip r:embed="rId1"/>
+          <a:stretch>
+            <a:fillRect/>
+          </a:stretch>
+        </p:blipFill>
+        <p:spPr>
+          <a:xfrm>
+            <a:off x="5186020" y="1741932"/>
+            <a:ext cx="283464" cy="283464"/>
+          </a:xfrm>
+          <a:prstGeom prst="rect">
+            <a:avLst/>
+          </a:prstGeom>
+        </p:spPr>
+      </p:pic>
+      <p:sp>
+        <p:nvSpPr>
+          <p:cNvPr id="6" name="Text 3"/>
+          <p:cNvSpPr txBox="1"/>
+          <p:nvPr/>
+        </p:nvSpPr>
+        <p:spPr>
+          <a:xfrm>
+            <a:off x="822960" y="1645920"/>
+            <a:ext cx="4815688" cy="457200"/>
+          </a:xfrm>
+          <a:prstGeom prst="rect">
+            <a:avLst/>
+          </a:prstGeom>
+          <a:noFill/>
+          <a:ln/>
+        </p:spPr>
+        <p:txBody>
+          <a:bodyPr wrap="square" lIns="0" tIns="0" rIns="0" bIns="0" rtlCol="0" anchor="t"/>
+          <a:lstStyle/>
+          <a:p>
+            <a:pPr indent="0" marL="0">
+              <a:buNone/>
+            </a:pPr>
+            <a:r>
+              <a:rPr lang="en-US" sz="2200" b="1" dirty="0">
+                <a:solidFill>
+                  <a:schemeClr val="tx2"/>
+                </a:solidFill>
+              </a:rPr>
+              <a:t>In the build</a:t>
+            </a:r>
+            <a:endParaRPr lang="en-US" sz="2200" dirty="0"/>
+          </a:p>
+        </p:txBody>
+      </p:sp>
+      <p:sp>
+        <p:nvSpPr>
+          <p:cNvPr id="7" name="Text 4"/>
+          <p:cNvSpPr txBox="1"/>
+          <p:nvPr/>
+        </p:nvSpPr>
+        <p:spPr>
+          <a:xfrm>
+            <a:off x="822960" y="2194560"/>
+            <a:ext cx="4815688" cy="2377440"/>
+          </a:xfrm>
+          <a:prstGeom prst="rect">
+            <a:avLst/>
+          </a:prstGeom>
+          <a:noFill/>
+          <a:ln/>
+        </p:spPr>
+        <p:txBody>
+          <a:bodyPr wrap="square" lIns="635" tIns="635" rIns="635" bIns="635" rtlCol="0" anchor="t"/>
+          <a:lstStyle/>
+          <a:p>
+            <a:pPr marL="177800" indent="-177800">
+              <a:spcAft>
+                <a:spcPts val="800"/>
+              </a:spcAft>
+              <a:buSzPct val="100000"/>
+              <a:buChar char="•"/>
+            </a:pPr>
+            <a:r>
+              <a:rPr lang="en-US" sz="1400" dirty="0">
+                <a:solidFill>
+                  <a:schemeClr val="tx1"/>
+                </a:solidFill>
+              </a:rPr>
+              <a:t>Cline (ClinePass, in VS Code) made real changes: a prompt fix so the extractor must return every field, plus a version bump and a test</a:t>
+            </a:r>
+            <a:endParaRPr lang="en-US" sz="1400" dirty="0"/>
+          </a:p>
+          <a:p>
+            <a:pPr marL="177800" indent="-177800">
+              <a:spcAft>
+                <a:spcPts val="800"/>
+              </a:spcAft>
+              <a:buSzPct val="100000"/>
+              <a:buChar char="•"/>
+            </a:pPr>
+            <a:r>
+              <a:rPr lang="en-US" sz="1400" dirty="0">
+                <a:solidFill>
+                  <a:schemeClr val="tx1"/>
+                </a:solidFill>
+              </a:rPr>
+              <a:t>Cline wrote the request-list test suite and the README write-up</a:t>
+            </a:r>
+            <a:endParaRPr lang="en-US" sz="1400" dirty="0"/>
+          </a:p>
+          <a:p>
+            <a:pPr marL="177800" indent="-177800">
+              <a:spcAft>
+                <a:spcPts val="800"/>
+              </a:spcAft>
+              <a:buSzPct val="100000"/>
+              <a:buChar char="•"/>
+            </a:pPr>
+            <a:r>
+              <a:rPr lang="en-US" sz="1400" dirty="0">
+                <a:solidFill>
+                  <a:schemeClr val="tx1"/>
+                </a:solidFill>
+              </a:rPr>
+              <a:t>Each change is a visible diff, a green test run and a commit</a:t>
+            </a:r>
+            <a:endParaRPr lang="en-US" sz="1400" dirty="0"/>
+          </a:p>
+        </p:txBody>
+      </p:sp>
+      <p:sp>
+        <p:nvSpPr>
+          <p:cNvPr id="8" name="Shape 5"/>
+          <p:cNvSpPr/>
+          <p:nvPr/>
+        </p:nvSpPr>
+        <p:spPr>
+          <a:xfrm>
+            <a:off x="822960" y="4572000"/>
+            <a:ext cx="4815688" cy="1280160"/>
           </a:xfrm>
           <a:prstGeom prst="roundRect">
             <a:avLst>
-              <a:gd name="adj" fmla="val 10435"/>
+              <a:gd name="adj" fmla="val 8571"/>
+            </a:avLst>
+          </a:prstGeom>
+          <a:solidFill>
+            <a:srgbClr val="FFF3D1"/>
+          </a:solidFill>
+          <a:ln w="12700">
+            <a:solidFill>
+              <a:srgbClr val="FCD34D"/>
+            </a:solidFill>
+            <a:prstDash val="solid"/>
+          </a:ln>
+        </p:spPr>
+      </p:sp>
+      <p:sp>
+        <p:nvSpPr>
+          <p:cNvPr id="9" name="Text 6"/>
+          <p:cNvSpPr txBox="1"/>
+          <p:nvPr/>
+        </p:nvSpPr>
+        <p:spPr>
+          <a:xfrm>
+            <a:off x="960120" y="4572000"/>
+            <a:ext cx="4541368" cy="1280160"/>
+          </a:xfrm>
+          <a:prstGeom prst="rect">
+            <a:avLst/>
+          </a:prstGeom>
+          <a:noFill/>
+          <a:ln/>
+        </p:spPr>
+        <p:txBody>
+          <a:bodyPr wrap="square" lIns="0" tIns="0" rIns="0" bIns="0" rtlCol="0" anchor="ctr"/>
+          <a:lstStyle/>
+          <a:p>
+            <a:pPr indent="0" marL="0">
+              <a:buNone/>
+            </a:pPr>
+            <a:r>
+              <a:rPr lang="en-US" sz="1400" dirty="0">
+                <a:solidFill>
+                  <a:srgbClr val="7C4A03"/>
+                </a:solidFill>
+              </a:rPr>
+              <a:t>To be plain: the first version of the pipeline, rules bridge and ledger signing was drafted with other AI coding assistants. The commit history shows who contributed what.</a:t>
+            </a:r>
+            <a:endParaRPr lang="en-US" sz="1400" dirty="0"/>
+          </a:p>
+        </p:txBody>
+      </p:sp>
+      <p:sp>
+        <p:nvSpPr>
+          <p:cNvPr id="10" name="Shape 7"/>
+          <p:cNvSpPr/>
+          <p:nvPr/>
+        </p:nvSpPr>
+        <p:spPr>
+          <a:xfrm>
+            <a:off x="6278728" y="1508760"/>
+            <a:ext cx="5364328" cy="4526280"/>
+          </a:xfrm>
+          <a:prstGeom prst="roundRect">
+            <a:avLst>
+              <a:gd name="adj" fmla="val 2424"/>
             </a:avLst>
           </a:prstGeom>
           <a:solidFill>
@@ -4091,120 +4727,63 @@
       </p:sp>
       <p:sp>
         <p:nvSpPr>
-          <p:cNvPr id="6" name="Text 3"/>
-          <p:cNvSpPr txBox="1"/>
-          <p:nvPr/>
-        </p:nvSpPr>
-        <p:spPr>
-          <a:xfrm>
-            <a:off x="7315200" y="1600200"/>
-            <a:ext cx="1600200" cy="868680"/>
-          </a:xfrm>
-          <a:prstGeom prst="rect">
-            <a:avLst/>
-          </a:prstGeom>
-          <a:noFill/>
-          <a:ln/>
-        </p:spPr>
-        <p:txBody>
-          <a:bodyPr wrap="square" lIns="0" tIns="0" rIns="0" bIns="0" rtlCol="0" anchor="ctr"/>
-          <a:lstStyle/>
-          <a:p>
-            <a:pPr indent="0" marL="0">
-              <a:buNone/>
-            </a:pPr>
-            <a:r>
-              <a:rPr lang="en-US" sz="2800" b="1" dirty="0">
-                <a:solidFill>
-                  <a:schemeClr val="accent1"/>
-                </a:solidFill>
-              </a:rPr>
-              <a:t>161</a:t>
-            </a:r>
-            <a:endParaRPr lang="en-US" sz="2800" dirty="0"/>
-          </a:p>
-        </p:txBody>
-      </p:sp>
-      <p:sp>
-        <p:nvSpPr>
-          <p:cNvPr id="7" name="Text 4"/>
-          <p:cNvSpPr txBox="1"/>
-          <p:nvPr/>
-        </p:nvSpPr>
-        <p:spPr>
-          <a:xfrm>
-            <a:off x="8961120" y="1600200"/>
-            <a:ext cx="2499055" cy="868680"/>
-          </a:xfrm>
-          <a:prstGeom prst="rect">
-            <a:avLst/>
-          </a:prstGeom>
-          <a:noFill/>
-          <a:ln/>
-        </p:spPr>
-        <p:txBody>
-          <a:bodyPr wrap="square" lIns="0" tIns="0" rIns="0" bIns="0" rtlCol="0" anchor="ctr"/>
-          <a:lstStyle/>
-          <a:p>
-            <a:pPr indent="0" marL="0">
-              <a:buNone/>
-            </a:pPr>
-            <a:r>
-              <a:rPr lang="en-US" sz="1300" dirty="0">
-                <a:solidFill>
-                  <a:schemeClr val="tx1"/>
-                </a:solidFill>
-              </a:rPr>
-              <a:t>labelled fields, 7 synthetic deeds: clean and scanned English, Hindi, handwriting-style</a:t>
-            </a:r>
-            <a:endParaRPr lang="en-US" sz="1300" dirty="0"/>
-          </a:p>
-        </p:txBody>
-      </p:sp>
-      <p:sp>
-        <p:nvSpPr>
-          <p:cNvPr id="8" name="Shape 5"/>
+          <p:cNvPr id="11" name="Shape 8"/>
           <p:cNvSpPr/>
           <p:nvPr/>
         </p:nvSpPr>
         <p:spPr>
           <a:xfrm>
-            <a:off x="7132320" y="2697480"/>
-            <a:ext cx="4510735" cy="1051560"/>
-          </a:xfrm>
-          <a:prstGeom prst="roundRect">
-            <a:avLst>
-              <a:gd name="adj" fmla="val 10435"/>
-            </a:avLst>
-          </a:prstGeom>
-          <a:solidFill>
-            <a:schemeClr val="bg1"/>
+            <a:off x="10774375" y="1600200"/>
+            <a:ext cx="566928" cy="566928"/>
+          </a:xfrm>
+          <a:prstGeom prst="ellipse">
+            <a:avLst/>
+          </a:prstGeom>
+          <a:solidFill>
+            <a:schemeClr val="accent2"/>
           </a:solidFill>
           <a:ln w="12700">
             <a:solidFill>
-              <a:srgbClr val="E4ECE8"/>
+              <a:schemeClr val="accent2"/>
             </a:solidFill>
             <a:prstDash val="solid"/>
           </a:ln>
-          <a:effectLst>
-            <a:outerShdw sx="100000" sy="100000" kx="0" ky="0" algn="bl" rotWithShape="0" blurRad="76200" dist="25400" dir="5400000">
-              <a:srgbClr val="000000">
-                <a:alpha val="12000"/>
-              </a:srgbClr>
-            </a:outerShdw>
-          </a:effectLst>
-        </p:spPr>
-      </p:sp>
-      <p:sp>
-        <p:nvSpPr>
-          <p:cNvPr id="9" name="Text 6"/>
+        </p:spPr>
+      </p:sp>
+      <p:pic>
+        <p:nvPicPr>
+          <p:cNvPr id="12" name="Image 1" descr="PuzzlePiece">    </p:cNvPr>
+          <p:cNvPicPr>
+            <a:picLocks noChangeAspect="1"/>
+          </p:cNvPicPr>
+          <p:nvPr/>
+        </p:nvPicPr>
+        <p:blipFill>
+          <a:blip r:embed="rId2"/>
+          <a:stretch>
+            <a:fillRect/>
+          </a:stretch>
+        </p:blipFill>
+        <p:spPr>
+          <a:xfrm>
+            <a:off x="10916107" y="1741932"/>
+            <a:ext cx="283464" cy="283464"/>
+          </a:xfrm>
+          <a:prstGeom prst="rect">
+            <a:avLst/>
+          </a:prstGeom>
+        </p:spPr>
+      </p:pic>
+      <p:sp>
+        <p:nvSpPr>
+          <p:cNvPr id="13" name="Text 9"/>
           <p:cNvSpPr txBox="1"/>
           <p:nvPr/>
         </p:nvSpPr>
         <p:spPr>
           <a:xfrm>
-            <a:off x="7315200" y="2788920"/>
-            <a:ext cx="1600200" cy="868680"/>
+            <a:off x="6553048" y="1645920"/>
+            <a:ext cx="4815688" cy="457200"/>
           </a:xfrm>
           <a:prstGeom prst="rect">
             <a:avLst/>
@@ -4213,203 +4792,311 @@
           <a:ln/>
         </p:spPr>
         <p:txBody>
-          <a:bodyPr wrap="square" lIns="0" tIns="0" rIns="0" bIns="0" rtlCol="0" anchor="ctr"/>
+          <a:bodyPr wrap="square" lIns="0" tIns="0" rIns="0" bIns="0" rtlCol="0" anchor="t"/>
           <a:lstStyle/>
           <a:p>
             <a:pPr indent="0" marL="0">
               <a:buNone/>
             </a:pPr>
             <a:r>
-              <a:rPr lang="en-US" sz="2800" b="1" dirty="0">
-                <a:solidFill>
-                  <a:schemeClr val="accent1"/>
-                </a:solidFill>
-              </a:rPr>
-              <a:t>11 / 11</a:t>
-            </a:r>
-            <a:endParaRPr lang="en-US" sz="2800" dirty="0"/>
-          </a:p>
-        </p:txBody>
-      </p:sp>
-      <p:sp>
-        <p:nvSpPr>
-          <p:cNvPr id="10" name="Text 7"/>
+              <a:rPr lang="en-US" sz="2200" b="1" dirty="0">
+                <a:solidFill>
+                  <a:schemeClr val="tx2"/>
+                </a:solidFill>
+              </a:rPr>
+              <a:t>Inside the product</a:t>
+            </a:r>
+            <a:endParaRPr lang="en-US" sz="2200" dirty="0"/>
+          </a:p>
+        </p:txBody>
+      </p:sp>
+      <p:sp>
+        <p:nvSpPr>
+          <p:cNvPr id="14" name="Text 10"/>
           <p:cNvSpPr txBox="1"/>
           <p:nvPr/>
         </p:nvSpPr>
         <p:spPr>
           <a:xfrm>
-            <a:off x="8961120" y="2788920"/>
-            <a:ext cx="2499055" cy="868680"/>
-          </a:xfrm>
-          <a:prstGeom prst="rect">
-            <a:avLst/>
-          </a:prstGeom>
-          <a:noFill/>
-          <a:ln/>
-        </p:spPr>
-        <p:txBody>
-          <a:bodyPr wrap="square" lIns="0" tIns="0" rIns="0" bIns="0" rtlCol="0" anchor="ctr"/>
-          <a:lstStyle/>
-          <a:p>
-            <a:pPr indent="0" marL="0">
-              <a:buNone/>
-            </a:pPr>
-            <a:r>
-              <a:rPr lang="en-US" sz="1300" dirty="0">
-                <a:solidFill>
-                  <a:schemeClr val="tx1"/>
-                </a:solidFill>
-              </a:rPr>
-              <a:t>rule cases correct on planted defects, including the succession decoy</a:t>
-            </a:r>
-            <a:endParaRPr lang="en-US" sz="1300" dirty="0"/>
-          </a:p>
-        </p:txBody>
-      </p:sp>
-      <p:sp>
-        <p:nvSpPr>
-          <p:cNvPr id="11" name="Shape 8"/>
-          <p:cNvSpPr/>
-          <p:nvPr/>
-        </p:nvSpPr>
-        <p:spPr>
-          <a:xfrm>
-            <a:off x="7132320" y="3886200"/>
-            <a:ext cx="4510735" cy="1051560"/>
+            <a:off x="6553048" y="2240280"/>
+            <a:ext cx="4815688" cy="502920"/>
           </a:xfrm>
           <a:prstGeom prst="roundRect">
             <a:avLst>
-              <a:gd name="adj" fmla="val 10435"/>
+              <a:gd name="adj" fmla="val 18182"/>
             </a:avLst>
           </a:prstGeom>
           <a:solidFill>
-            <a:schemeClr val="bg1"/>
+            <a:schemeClr val="accent1"/>
+          </a:solidFill>
+          <a:ln/>
+        </p:spPr>
+        <p:txBody>
+          <a:bodyPr wrap="square" lIns="0" tIns="0" rIns="0" bIns="0" rtlCol="0" anchor="ctr"/>
+          <a:lstStyle/>
+          <a:p>
+            <a:pPr algn="ctr" indent="0" marL="0">
+              <a:buNone/>
+            </a:pPr>
+            <a:r>
+              <a:rPr lang="en-US" sz="1600" b="1" dirty="0">
+                <a:solidFill>
+                  <a:schemeClr val="bg1"/>
+                </a:solidFill>
+              </a:rPr>
+              <a:t>Cline SDK review agent</a:t>
+            </a:r>
+            <a:endParaRPr lang="en-US" sz="1600" dirty="0"/>
+          </a:p>
+        </p:txBody>
+      </p:sp>
+      <p:sp>
+        <p:nvSpPr>
+          <p:cNvPr id="15" name="Text 11"/>
+          <p:cNvSpPr txBox="1"/>
+          <p:nvPr/>
+        </p:nvSpPr>
+        <p:spPr>
+          <a:xfrm>
+            <a:off x="6553048" y="2926080"/>
+            <a:ext cx="2270684" cy="384048"/>
+          </a:xfrm>
+          <a:prstGeom prst="roundRect">
+            <a:avLst>
+              <a:gd name="adj" fmla="val 19048"/>
+            </a:avLst>
+          </a:prstGeom>
+          <a:solidFill>
+            <a:srgbClr val="E5F6F2"/>
+          </a:solidFill>
+          <a:ln/>
+        </p:spPr>
+        <p:txBody>
+          <a:bodyPr wrap="square" lIns="0" tIns="0" rIns="0" bIns="0" rtlCol="0" anchor="ctr"/>
+          <a:lstStyle/>
+          <a:p>
+            <a:pPr algn="ctr" indent="0" marL="0">
+              <a:buNone/>
+            </a:pPr>
+            <a:r>
+              <a:rPr lang="en-US" sz="1200" dirty="0">
+                <a:solidFill>
+                  <a:srgbClr val="134E4A"/>
+                </a:solidFill>
+                <a:latin typeface="Consolas" pitchFamily="34" charset="0"/>
+                <a:ea typeface="Consolas" pitchFamily="34" charset="-122"/>
+                <a:cs typeface="Consolas" pitchFamily="34" charset="-120"/>
+              </a:rPr>
+              <a:t>get_field</a:t>
+            </a:r>
+            <a:endParaRPr lang="en-US" sz="1200" dirty="0"/>
+          </a:p>
+        </p:txBody>
+      </p:sp>
+      <p:sp>
+        <p:nvSpPr>
+          <p:cNvPr id="16" name="Text 12"/>
+          <p:cNvSpPr txBox="1"/>
+          <p:nvPr/>
+        </p:nvSpPr>
+        <p:spPr>
+          <a:xfrm>
+            <a:off x="9098051" y="2926080"/>
+            <a:ext cx="2270684" cy="384048"/>
+          </a:xfrm>
+          <a:prstGeom prst="roundRect">
+            <a:avLst>
+              <a:gd name="adj" fmla="val 19048"/>
+            </a:avLst>
+          </a:prstGeom>
+          <a:solidFill>
+            <a:srgbClr val="E5F6F2"/>
+          </a:solidFill>
+          <a:ln/>
+        </p:spPr>
+        <p:txBody>
+          <a:bodyPr wrap="square" lIns="0" tIns="0" rIns="0" bIns="0" rtlCol="0" anchor="ctr"/>
+          <a:lstStyle/>
+          <a:p>
+            <a:pPr algn="ctr" indent="0" marL="0">
+              <a:buNone/>
+            </a:pPr>
+            <a:r>
+              <a:rPr lang="en-US" sz="1200" dirty="0">
+                <a:solidFill>
+                  <a:srgbClr val="134E4A"/>
+                </a:solidFill>
+                <a:latin typeface="Consolas" pitchFamily="34" charset="0"/>
+                <a:ea typeface="Consolas" pitchFamily="34" charset="-122"/>
+                <a:cs typeface="Consolas" pitchFamily="34" charset="-120"/>
+              </a:rPr>
+              <a:t>read_page_text</a:t>
+            </a:r>
+            <a:endParaRPr lang="en-US" sz="1200" dirty="0"/>
+          </a:p>
+        </p:txBody>
+      </p:sp>
+      <p:sp>
+        <p:nvSpPr>
+          <p:cNvPr id="17" name="Text 13"/>
+          <p:cNvSpPr txBox="1"/>
+          <p:nvPr/>
+        </p:nvSpPr>
+        <p:spPr>
+          <a:xfrm>
+            <a:off x="6553048" y="3429000"/>
+            <a:ext cx="2270684" cy="384048"/>
+          </a:xfrm>
+          <a:prstGeom prst="roundRect">
+            <a:avLst>
+              <a:gd name="adj" fmla="val 19048"/>
+            </a:avLst>
+          </a:prstGeom>
+          <a:solidFill>
+            <a:srgbClr val="E5F6F2"/>
+          </a:solidFill>
+          <a:ln/>
+        </p:spPr>
+        <p:txBody>
+          <a:bodyPr wrap="square" lIns="0" tIns="0" rIns="0" bIns="0" rtlCol="0" anchor="ctr"/>
+          <a:lstStyle/>
+          <a:p>
+            <a:pPr algn="ctr" indent="0" marL="0">
+              <a:buNone/>
+            </a:pPr>
+            <a:r>
+              <a:rPr lang="en-US" sz="1200" dirty="0">
+                <a:solidFill>
+                  <a:srgbClr val="134E4A"/>
+                </a:solidFill>
+                <a:latin typeface="Consolas" pitchFamily="34" charset="0"/>
+                <a:ea typeface="Consolas" pitchFamily="34" charset="-122"/>
+                <a:cs typeface="Consolas" pitchFamily="34" charset="-120"/>
+              </a:rPr>
+              <a:t>validate_field</a:t>
+            </a:r>
+            <a:endParaRPr lang="en-US" sz="1200" dirty="0"/>
+          </a:p>
+        </p:txBody>
+      </p:sp>
+      <p:sp>
+        <p:nvSpPr>
+          <p:cNvPr id="18" name="Text 14"/>
+          <p:cNvSpPr txBox="1"/>
+          <p:nvPr/>
+        </p:nvSpPr>
+        <p:spPr>
+          <a:xfrm>
+            <a:off x="9098051" y="3429000"/>
+            <a:ext cx="2270684" cy="384048"/>
+          </a:xfrm>
+          <a:prstGeom prst="roundRect">
+            <a:avLst>
+              <a:gd name="adj" fmla="val 19048"/>
+            </a:avLst>
+          </a:prstGeom>
+          <a:solidFill>
+            <a:srgbClr val="E5F6F2"/>
+          </a:solidFill>
+          <a:ln/>
+        </p:spPr>
+        <p:txBody>
+          <a:bodyPr wrap="square" lIns="0" tIns="0" rIns="0" bIns="0" rtlCol="0" anchor="ctr"/>
+          <a:lstStyle/>
+          <a:p>
+            <a:pPr algn="ctr" indent="0" marL="0">
+              <a:buNone/>
+            </a:pPr>
+            <a:r>
+              <a:rPr lang="en-US" sz="1200" dirty="0">
+                <a:solidFill>
+                  <a:srgbClr val="134E4A"/>
+                </a:solidFill>
+                <a:latin typeface="Consolas" pitchFamily="34" charset="0"/>
+                <a:ea typeface="Consolas" pitchFamily="34" charset="-122"/>
+                <a:cs typeface="Consolas" pitchFamily="34" charset="-120"/>
+              </a:rPr>
+              <a:t>propose_correction</a:t>
+            </a:r>
+            <a:endParaRPr lang="en-US" sz="1200" dirty="0"/>
+          </a:p>
+        </p:txBody>
+      </p:sp>
+      <p:sp>
+        <p:nvSpPr>
+          <p:cNvPr id="19" name="Shape 15"/>
+          <p:cNvSpPr/>
+          <p:nvPr/>
+        </p:nvSpPr>
+        <p:spPr>
+          <a:xfrm>
+            <a:off x="8823731" y="3977640"/>
+            <a:ext cx="274320" cy="274320"/>
+          </a:xfrm>
+          <a:prstGeom prst="downArrow">
+            <a:avLst/>
+          </a:prstGeom>
+          <a:solidFill>
+            <a:schemeClr val="accent2"/>
           </a:solidFill>
           <a:ln w="12700">
             <a:solidFill>
-              <a:srgbClr val="E4ECE8"/>
+              <a:schemeClr val="accent2"/>
             </a:solidFill>
             <a:prstDash val="solid"/>
           </a:ln>
-          <a:effectLst>
-            <a:outerShdw sx="100000" sy="100000" kx="0" ky="0" algn="bl" rotWithShape="0" blurRad="76200" dist="25400" dir="5400000">
-              <a:srgbClr val="000000">
-                <a:alpha val="12000"/>
-              </a:srgbClr>
-            </a:outerShdw>
-          </a:effectLst>
-        </p:spPr>
-      </p:sp>
-      <p:sp>
-        <p:nvSpPr>
-          <p:cNvPr id="12" name="Text 9"/>
+        </p:spPr>
+      </p:sp>
+      <p:sp>
+        <p:nvSpPr>
+          <p:cNvPr id="20" name="Text 16"/>
           <p:cNvSpPr txBox="1"/>
           <p:nvPr/>
         </p:nvSpPr>
         <p:spPr>
           <a:xfrm>
-            <a:off x="7315200" y="3977640"/>
-            <a:ext cx="1600200" cy="868680"/>
-          </a:xfrm>
-          <a:prstGeom prst="rect">
-            <a:avLst/>
-          </a:prstGeom>
-          <a:noFill/>
-          <a:ln/>
-        </p:spPr>
-        <p:txBody>
-          <a:bodyPr wrap="square" lIns="0" tIns="0" rIns="0" bIns="0" rtlCol="0" anchor="ctr"/>
-          <a:lstStyle/>
-          <a:p>
-            <a:pPr indent="0" marL="0">
-              <a:buNone/>
-            </a:pPr>
-            <a:r>
-              <a:rPr lang="en-US" sz="2800" b="1" dirty="0">
-                <a:solidFill>
-                  <a:schemeClr val="accent1"/>
-                </a:solidFill>
-              </a:rPr>
-              <a:t>75</a:t>
-            </a:r>
-            <a:endParaRPr lang="en-US" sz="2800" dirty="0"/>
-          </a:p>
-        </p:txBody>
-      </p:sp>
-      <p:sp>
-        <p:nvSpPr>
-          <p:cNvPr id="13" name="Text 10"/>
-          <p:cNvSpPr txBox="1"/>
-          <p:nvPr/>
-        </p:nvSpPr>
-        <p:spPr>
-          <a:xfrm>
-            <a:off x="8961120" y="3977640"/>
-            <a:ext cx="2499055" cy="868680"/>
-          </a:xfrm>
-          <a:prstGeom prst="rect">
-            <a:avLst/>
-          </a:prstGeom>
-          <a:noFill/>
-          <a:ln/>
-        </p:spPr>
-        <p:txBody>
-          <a:bodyPr wrap="square" lIns="0" tIns="0" rIns="0" bIns="0" rtlCol="0" anchor="ctr"/>
-          <a:lstStyle/>
-          <a:p>
-            <a:pPr indent="0" marL="0">
-              <a:buNone/>
-            </a:pPr>
-            <a:r>
-              <a:rPr lang="en-US" sz="1300" dirty="0">
-                <a:solidFill>
-                  <a:schemeClr val="tx1"/>
-                </a:solidFill>
-              </a:rPr>
-              <a:t>offline tests pass</a:t>
-            </a:r>
-            <a:endParaRPr lang="en-US" sz="1300" dirty="0"/>
-          </a:p>
-        </p:txBody>
-      </p:sp>
-      <p:sp>
-        <p:nvSpPr>
-          <p:cNvPr id="14" name="Shape 11"/>
-          <p:cNvSpPr/>
-          <p:nvPr/>
-        </p:nvSpPr>
-        <p:spPr>
-          <a:xfrm>
-            <a:off x="7132320" y="5074920"/>
-            <a:ext cx="4510735" cy="777240"/>
+            <a:off x="6553048" y="4297680"/>
+            <a:ext cx="4815688" cy="548640"/>
           </a:xfrm>
           <a:prstGeom prst="roundRect">
             <a:avLst>
-              <a:gd name="adj" fmla="val 14118"/>
+              <a:gd name="adj" fmla="val 16667"/>
             </a:avLst>
           </a:prstGeom>
           <a:solidFill>
-            <a:srgbClr val="FFF3D1"/>
-          </a:solidFill>
-          <a:ln w="12700">
-            <a:solidFill>
-              <a:srgbClr val="FCD34D"/>
-            </a:solidFill>
-            <a:prstDash val="solid"/>
-          </a:ln>
-        </p:spPr>
-      </p:sp>
-      <p:sp>
-        <p:nvSpPr>
-          <p:cNvPr id="15" name="Text 12"/>
+            <a:srgbClr val="FDE9C4"/>
+          </a:solidFill>
+          <a:ln/>
+        </p:spPr>
+        <p:txBody>
+          <a:bodyPr wrap="square" lIns="635" tIns="635" rIns="635" bIns="635" rtlCol="0" anchor="ctr"/>
+          <a:lstStyle/>
+          <a:p>
+            <a:pPr algn="ctr" indent="0" marL="0">
+              <a:buNone/>
+            </a:pPr>
+            <a:r>
+              <a:rPr lang="en-US" sz="1400" b="1" dirty="0">
+                <a:solidFill>
+                  <a:srgbClr val="7C4A03"/>
+                </a:solidFill>
+              </a:rPr>
+              <a:t>Python re-checks: format valid AND quote found on the page</a:t>
+            </a:r>
+            <a:endParaRPr lang="en-US" sz="1400" dirty="0"/>
+          </a:p>
+        </p:txBody>
+      </p:sp>
+      <p:sp>
+        <p:nvSpPr>
+          <p:cNvPr id="21" name="Text 17"/>
           <p:cNvSpPr txBox="1"/>
           <p:nvPr/>
         </p:nvSpPr>
         <p:spPr>
           <a:xfrm>
-            <a:off x="7315200" y="5074920"/>
-            <a:ext cx="4144975" cy="777240"/>
+            <a:off x="6553048" y="4937760"/>
+            <a:ext cx="4815688" cy="1051560"/>
           </a:xfrm>
           <a:prstGeom prst="rect">
             <a:avLst/>
@@ -4418,57 +5105,21 @@
           <a:ln/>
         </p:spPr>
         <p:txBody>
-          <a:bodyPr wrap="square" lIns="0" tIns="0" rIns="0" bIns="0" rtlCol="0" anchor="ctr"/>
+          <a:bodyPr wrap="square" lIns="0" tIns="0" rIns="0" bIns="0" rtlCol="0" anchor="t"/>
           <a:lstStyle/>
           <a:p>
             <a:pPr indent="0" marL="0">
               <a:buNone/>
             </a:pPr>
             <a:r>
-              <a:rPr lang="en-US" sz="1300" dirty="0">
-                <a:solidFill>
-                  <a:srgbClr val="7C4A03"/>
-                </a:solidFill>
-              </a:rPr>
-              <a:t>Synthetic data we authored; one model. One blurred “Bora” was read as “Boro”.</a:t>
-            </a:r>
-            <a:endParaRPr lang="en-US" sz="1300" dirty="0"/>
-          </a:p>
-        </p:txBody>
-      </p:sp>
-      <p:sp>
-        <p:nvSpPr>
-          <p:cNvPr id="16" name="Text 13"/>
-          <p:cNvSpPr txBox="1"/>
-          <p:nvPr/>
-        </p:nvSpPr>
-        <p:spPr>
-          <a:xfrm>
-            <a:off x="548640" y="5943600"/>
-            <a:ext cx="11094415" cy="365760"/>
-          </a:xfrm>
-          <a:prstGeom prst="rect">
-            <a:avLst/>
-          </a:prstGeom>
-          <a:noFill/>
-          <a:ln/>
-        </p:spPr>
-        <p:txBody>
-          <a:bodyPr wrap="square" lIns="0" tIns="0" rIns="0" bIns="0" rtlCol="0" anchor="t"/>
-          <a:lstStyle/>
-          <a:p>
-            <a:pPr indent="0" marL="0">
-              <a:buNone/>
-            </a:pPr>
-            <a:r>
-              <a:rPr lang="en-US" sz="1200" dirty="0">
-                <a:solidFill>
-                  <a:srgbClr val="5B7276"/>
-                </a:solidFill>
-              </a:rPr>
-              <a:t>Rule results use canned extraction replies, so they test the rules, not OCR. Abstained fields: 1.9% (sent to review).</a:t>
-            </a:r>
-            <a:endParaRPr lang="en-US" sz="1200" dirty="0"/>
+              <a:rPr lang="en-US" sz="1400" dirty="0">
+                <a:solidFill>
+                  <a:schemeClr val="tx1"/>
+                </a:solidFill>
+              </a:rPr>
+              <a:t>It has no tool to run rules, create flags or touch the ledger. It works with the agent switched off. On our test set it recovered 0 of 1 field: deliberately conservative.</a:t>
+            </a:r>
+            <a:endParaRPr lang="en-US" sz="1400" dirty="0"/>
           </a:p>
         </p:txBody>
       </p:sp>
@@ -4529,7 +5180,7 @@
                   <a:schemeClr val="tx2"/>
                 </a:solidFill>
               </a:rPr>
-              <a:t>Challenges we hit and fixed</a:t>
+              <a:t>Measured results</a:t>
             </a:r>
             <a:endParaRPr lang="en-US" sz="3600" dirty="0"/>
           </a:p>
@@ -4537,90 +5188,18 @@
       </p:sp>
       <p:sp>
         <p:nvSpPr>
-          <p:cNvPr id="3" name="Text 1"/>
-          <p:cNvSpPr txBox="1"/>
+          <p:cNvPr id="3" name="Shape 1"/>
+          <p:cNvSpPr/>
           <p:nvPr/>
         </p:nvSpPr>
         <p:spPr>
           <a:xfrm>
             <a:off x="548640" y="1508760"/>
-            <a:ext cx="6035040" cy="320040"/>
-          </a:xfrm>
-          <a:prstGeom prst="rect">
-            <a:avLst/>
-          </a:prstGeom>
-          <a:noFill/>
-          <a:ln/>
-        </p:spPr>
-        <p:txBody>
-          <a:bodyPr wrap="square" lIns="0" tIns="0" rIns="0" bIns="0" rtlCol="0" anchor="t"/>
-          <a:lstStyle/>
-          <a:p>
-            <a:pPr indent="0" marL="0">
-              <a:buNone/>
-            </a:pPr>
-            <a:r>
-              <a:rPr lang="en-US" sz="1400" b="1" dirty="0">
-                <a:solidFill>
-                  <a:srgbClr val="5B7276"/>
-                </a:solidFill>
-              </a:rPr>
-              <a:t>What went wrong</a:t>
-            </a:r>
-            <a:endParaRPr lang="en-US" sz="1400" dirty="0"/>
-          </a:p>
-        </p:txBody>
-      </p:sp>
-      <p:sp>
-        <p:nvSpPr>
-          <p:cNvPr id="4" name="Text 2"/>
-          <p:cNvSpPr txBox="1"/>
-          <p:nvPr/>
-        </p:nvSpPr>
-        <p:spPr>
-          <a:xfrm>
-            <a:off x="7040880" y="1508760"/>
-            <a:ext cx="4602175" cy="320040"/>
-          </a:xfrm>
-          <a:prstGeom prst="rect">
-            <a:avLst/>
-          </a:prstGeom>
-          <a:noFill/>
-          <a:ln/>
-        </p:spPr>
-        <p:txBody>
-          <a:bodyPr wrap="square" lIns="0" tIns="0" rIns="0" bIns="0" rtlCol="0" anchor="t"/>
-          <a:lstStyle/>
-          <a:p>
-            <a:pPr indent="0" marL="0">
-              <a:buNone/>
-            </a:pPr>
-            <a:r>
-              <a:rPr lang="en-US" sz="1400" b="1" dirty="0">
-                <a:solidFill>
-                  <a:srgbClr val="5B7276"/>
-                </a:solidFill>
-              </a:rPr>
-              <a:t>What we did</a:t>
-            </a:r>
-            <a:endParaRPr lang="en-US" sz="1400" dirty="0"/>
-          </a:p>
-        </p:txBody>
-      </p:sp>
-      <p:sp>
-        <p:nvSpPr>
-          <p:cNvPr id="5" name="Shape 3"/>
-          <p:cNvSpPr/>
-          <p:nvPr/>
-        </p:nvSpPr>
-        <p:spPr>
-          <a:xfrm>
-            <a:off x="548640" y="1920240"/>
-            <a:ext cx="6035040" cy="786384"/>
+            <a:ext cx="6309360" cy="4343400"/>
           </a:xfrm>
           <a:prstGeom prst="roundRect">
             <a:avLst>
-              <a:gd name="adj" fmla="val 13953"/>
+              <a:gd name="adj" fmla="val 2526"/>
             </a:avLst>
           </a:prstGeom>
           <a:solidFill>
@@ -4641,144 +5220,36 @@
           </a:effectLst>
         </p:spPr>
       </p:sp>
-      <p:sp>
-        <p:nvSpPr>
-          <p:cNvPr id="6" name="Text 4"/>
-          <p:cNvSpPr txBox="1"/>
-          <p:nvPr/>
-        </p:nvSpPr>
-        <p:spPr>
-          <a:xfrm>
-            <a:off x="731520" y="1920240"/>
-            <a:ext cx="5669280" cy="786384"/>
-          </a:xfrm>
-          <a:prstGeom prst="rect">
-            <a:avLst/>
-          </a:prstGeom>
-          <a:noFill/>
-          <a:ln/>
-        </p:spPr>
-        <p:txBody>
-          <a:bodyPr wrap="square" lIns="0" tIns="0" rIns="0" bIns="0" rtlCol="0" anchor="ctr"/>
-          <a:lstStyle/>
-          <a:p>
-            <a:pPr indent="0" marL="0">
-              <a:buNone/>
-            </a:pPr>
-            <a:r>
-              <a:rPr lang="en-US" sz="1400" dirty="0">
-                <a:solidFill>
-                  <a:schemeClr val="tx1"/>
-                </a:solidFill>
-              </a:rPr>
-              <a:t>An Aadhaar number was not masked when a full stop (or the Hindi danda) followed it</a:t>
-            </a:r>
-            <a:endParaRPr lang="en-US" sz="1400" dirty="0"/>
-          </a:p>
-        </p:txBody>
-      </p:sp>
-      <p:sp>
-        <p:nvSpPr>
-          <p:cNvPr id="7" name="Shape 5"/>
+      <p:graphicFrame>
+        <p:nvGraphicFramePr>
+          <p:cNvPr id="4" name="Chart 0" descr=""/>
+          <p:cNvGraphicFramePr/>
+          <p:nvPr/>
+        </p:nvGraphicFramePr>
+        <p:xfrm>
+          <a:off x="685800" y="1600200"/>
+          <a:ext cx="6035040" cy="4160520"/>
+        </p:xfrm>
+        <a:graphic xmlns:a="http://schemas.openxmlformats.org/drawingml/2006/main">
+          <a:graphicData uri="http://schemas.openxmlformats.org/drawingml/2006/chart">
+            <c:chart xmlns:c="http://schemas.openxmlformats.org/drawingml/2006/chart" r:id="rId1"/>
+          </a:graphicData>
+        </a:graphic>
+      </p:graphicFrame>
+      <p:sp>
+        <p:nvSpPr>
+          <p:cNvPr id="5" name="Shape 2"/>
           <p:cNvSpPr/>
           <p:nvPr/>
         </p:nvSpPr>
         <p:spPr>
           <a:xfrm>
-            <a:off x="6675120" y="2194560"/>
-            <a:ext cx="274320" cy="237744"/>
-          </a:xfrm>
-          <a:prstGeom prst="rightArrow">
-            <a:avLst/>
-          </a:prstGeom>
-          <a:solidFill>
-            <a:schemeClr val="accent2"/>
-          </a:solidFill>
-          <a:ln w="12700">
-            <a:solidFill>
-              <a:schemeClr val="accent2"/>
-            </a:solidFill>
-            <a:prstDash val="solid"/>
-          </a:ln>
-        </p:spPr>
-      </p:sp>
-      <p:sp>
-        <p:nvSpPr>
-          <p:cNvPr id="8" name="Shape 6"/>
-          <p:cNvSpPr/>
-          <p:nvPr/>
-        </p:nvSpPr>
-        <p:spPr>
-          <a:xfrm>
-            <a:off x="7040880" y="1920240"/>
-            <a:ext cx="4602175" cy="786384"/>
+            <a:off x="7132320" y="1508760"/>
+            <a:ext cx="4510735" cy="1051560"/>
           </a:xfrm>
           <a:prstGeom prst="roundRect">
             <a:avLst>
-              <a:gd name="adj" fmla="val 13953"/>
-            </a:avLst>
-          </a:prstGeom>
-          <a:solidFill>
-            <a:srgbClr val="ECFDF5"/>
-          </a:solidFill>
-          <a:ln w="12700">
-            <a:solidFill>
-              <a:srgbClr val="A7F3D0"/>
-            </a:solidFill>
-            <a:prstDash val="solid"/>
-          </a:ln>
-        </p:spPr>
-      </p:sp>
-      <p:sp>
-        <p:nvSpPr>
-          <p:cNvPr id="9" name="Text 7"/>
-          <p:cNvSpPr txBox="1"/>
-          <p:nvPr/>
-        </p:nvSpPr>
-        <p:spPr>
-          <a:xfrm>
-            <a:off x="7223760" y="1920240"/>
-            <a:ext cx="4236415" cy="786384"/>
-          </a:xfrm>
-          <a:prstGeom prst="rect">
-            <a:avLst/>
-          </a:prstGeom>
-          <a:noFill/>
-          <a:ln/>
-        </p:spPr>
-        <p:txBody>
-          <a:bodyPr wrap="square" lIns="0" tIns="0" rIns="0" bIns="0" rtlCol="0" anchor="ctr"/>
-          <a:lstStyle/>
-          <a:p>
-            <a:pPr indent="0" marL="0">
-              <a:buNone/>
-            </a:pPr>
-            <a:r>
-              <a:rPr lang="en-US" sz="1400" dirty="0">
-                <a:solidFill>
-                  <a:srgbClr val="065F46"/>
-                </a:solidFill>
-              </a:rPr>
-              <a:t>Punctuation-aware matching and regression tests</a:t>
-            </a:r>
-            <a:endParaRPr lang="en-US" sz="1400" dirty="0"/>
-          </a:p>
-        </p:txBody>
-      </p:sp>
-      <p:sp>
-        <p:nvSpPr>
-          <p:cNvPr id="10" name="Shape 8"/>
-          <p:cNvSpPr/>
-          <p:nvPr/>
-        </p:nvSpPr>
-        <p:spPr>
-          <a:xfrm>
-            <a:off x="548640" y="2816352"/>
-            <a:ext cx="6035040" cy="786384"/>
-          </a:xfrm>
-          <a:prstGeom prst="roundRect">
-            <a:avLst>
-              <a:gd name="adj" fmla="val 13953"/>
+              <a:gd name="adj" fmla="val 10435"/>
             </a:avLst>
           </a:prstGeom>
           <a:solidFill>
@@ -4801,14 +5272,14 @@
       </p:sp>
       <p:sp>
         <p:nvSpPr>
-          <p:cNvPr id="11" name="Text 9"/>
+          <p:cNvPr id="6" name="Text 3"/>
           <p:cNvSpPr txBox="1"/>
           <p:nvPr/>
         </p:nvSpPr>
         <p:spPr>
           <a:xfrm>
-            <a:off x="731520" y="2816352"/>
-            <a:ext cx="5669280" cy="786384"/>
+            <a:off x="7315200" y="1600200"/>
+            <a:ext cx="1600200" cy="868680"/>
           </a:xfrm>
           <a:prstGeom prst="rect">
             <a:avLst/>
@@ -4824,119 +5295,67 @@
               <a:buNone/>
             </a:pPr>
             <a:r>
-              <a:rPr lang="en-US" sz="1400" dirty="0">
+              <a:rPr lang="en-US" sz="2800" b="1" dirty="0">
+                <a:solidFill>
+                  <a:schemeClr val="accent1"/>
+                </a:solidFill>
+              </a:rPr>
+              <a:t>161</a:t>
+            </a:r>
+            <a:endParaRPr lang="en-US" sz="2800" dirty="0"/>
+          </a:p>
+        </p:txBody>
+      </p:sp>
+      <p:sp>
+        <p:nvSpPr>
+          <p:cNvPr id="7" name="Text 4"/>
+          <p:cNvSpPr txBox="1"/>
+          <p:nvPr/>
+        </p:nvSpPr>
+        <p:spPr>
+          <a:xfrm>
+            <a:off x="8961120" y="1600200"/>
+            <a:ext cx="2499055" cy="868680"/>
+          </a:xfrm>
+          <a:prstGeom prst="rect">
+            <a:avLst/>
+          </a:prstGeom>
+          <a:noFill/>
+          <a:ln/>
+        </p:spPr>
+        <p:txBody>
+          <a:bodyPr wrap="square" lIns="0" tIns="0" rIns="0" bIns="0" rtlCol="0" anchor="ctr"/>
+          <a:lstStyle/>
+          <a:p>
+            <a:pPr indent="0" marL="0">
+              <a:buNone/>
+            </a:pPr>
+            <a:r>
+              <a:rPr lang="en-US" sz="1300" dirty="0">
                 <a:solidFill>
                   <a:schemeClr val="tx1"/>
                 </a:solidFill>
               </a:rPr>
-              <a:t>Gemini spent 15.7k of 16.4k tokens “thinking”; the reply was cut off</a:t>
-            </a:r>
-            <a:endParaRPr lang="en-US" sz="1400" dirty="0"/>
-          </a:p>
-        </p:txBody>
-      </p:sp>
-      <p:sp>
-        <p:nvSpPr>
-          <p:cNvPr id="12" name="Shape 10"/>
+              <a:t>labelled fields, 7 synthetic deeds: clean and scanned English, Hindi, handwriting-style</a:t>
+            </a:r>
+            <a:endParaRPr lang="en-US" sz="1300" dirty="0"/>
+          </a:p>
+        </p:txBody>
+      </p:sp>
+      <p:sp>
+        <p:nvSpPr>
+          <p:cNvPr id="8" name="Shape 5"/>
           <p:cNvSpPr/>
           <p:nvPr/>
         </p:nvSpPr>
         <p:spPr>
           <a:xfrm>
-            <a:off x="6675120" y="3090672"/>
-            <a:ext cx="274320" cy="237744"/>
-          </a:xfrm>
-          <a:prstGeom prst="rightArrow">
-            <a:avLst/>
-          </a:prstGeom>
-          <a:solidFill>
-            <a:schemeClr val="accent2"/>
-          </a:solidFill>
-          <a:ln w="12700">
-            <a:solidFill>
-              <a:schemeClr val="accent2"/>
-            </a:solidFill>
-            <a:prstDash val="solid"/>
-          </a:ln>
-        </p:spPr>
-      </p:sp>
-      <p:sp>
-        <p:nvSpPr>
-          <p:cNvPr id="13" name="Shape 11"/>
-          <p:cNvSpPr/>
-          <p:nvPr/>
-        </p:nvSpPr>
-        <p:spPr>
-          <a:xfrm>
-            <a:off x="7040880" y="2816352"/>
-            <a:ext cx="4602175" cy="786384"/>
+            <a:off x="7132320" y="2697480"/>
+            <a:ext cx="4510735" cy="1051560"/>
           </a:xfrm>
           <a:prstGeom prst="roundRect">
             <a:avLst>
-              <a:gd name="adj" fmla="val 13953"/>
-            </a:avLst>
-          </a:prstGeom>
-          <a:solidFill>
-            <a:srgbClr val="ECFDF5"/>
-          </a:solidFill>
-          <a:ln w="12700">
-            <a:solidFill>
-              <a:srgbClr val="A7F3D0"/>
-            </a:solidFill>
-            <a:prstDash val="solid"/>
-          </a:ln>
-        </p:spPr>
-      </p:sp>
-      <p:sp>
-        <p:nvSpPr>
-          <p:cNvPr id="14" name="Text 12"/>
-          <p:cNvSpPr txBox="1"/>
-          <p:nvPr/>
-        </p:nvSpPr>
-        <p:spPr>
-          <a:xfrm>
-            <a:off x="7223760" y="2816352"/>
-            <a:ext cx="4236415" cy="786384"/>
-          </a:xfrm>
-          <a:prstGeom prst="rect">
-            <a:avLst/>
-          </a:prstGeom>
-          <a:noFill/>
-          <a:ln/>
-        </p:spPr>
-        <p:txBody>
-          <a:bodyPr wrap="square" lIns="0" tIns="0" rIns="0" bIns="0" rtlCol="0" anchor="ctr"/>
-          <a:lstStyle/>
-          <a:p>
-            <a:pPr indent="0" marL="0">
-              <a:buNone/>
-            </a:pPr>
-            <a:r>
-              <a:rPr lang="en-US" sz="1400" dirty="0">
-                <a:solidFill>
-                  <a:srgbClr val="065F46"/>
-                </a:solidFill>
-              </a:rPr>
-              <a:t>Capped thinking; a cut-off reply is an error, never parsed</a:t>
-            </a:r>
-            <a:endParaRPr lang="en-US" sz="1400" dirty="0"/>
-          </a:p>
-        </p:txBody>
-      </p:sp>
-      <p:sp>
-        <p:nvSpPr>
-          <p:cNvPr id="15" name="Shape 13"/>
-          <p:cNvSpPr/>
-          <p:nvPr/>
-        </p:nvSpPr>
-        <p:spPr>
-          <a:xfrm>
-            <a:off x="548640" y="3712464"/>
-            <a:ext cx="6035040" cy="786384"/>
-          </a:xfrm>
-          <a:prstGeom prst="roundRect">
-            <a:avLst>
-              <a:gd name="adj" fmla="val 13953"/>
+              <a:gd name="adj" fmla="val 10435"/>
             </a:avLst>
           </a:prstGeom>
           <a:solidFill>
@@ -4959,14 +5378,14 @@
       </p:sp>
       <p:sp>
         <p:nvSpPr>
-          <p:cNvPr id="16" name="Text 14"/>
+          <p:cNvPr id="9" name="Text 6"/>
           <p:cNvSpPr txBox="1"/>
           <p:nvPr/>
         </p:nvSpPr>
         <p:spPr>
           <a:xfrm>
-            <a:off x="731520" y="3712464"/>
-            <a:ext cx="5669280" cy="786384"/>
+            <a:off x="7315200" y="2788920"/>
+            <a:ext cx="1600200" cy="868680"/>
           </a:xfrm>
           <a:prstGeom prst="rect">
             <a:avLst/>
@@ -4982,119 +5401,67 @@
               <a:buNone/>
             </a:pPr>
             <a:r>
-              <a:rPr lang="en-US" sz="1400" dirty="0">
+              <a:rPr lang="en-US" sz="2800" b="1" dirty="0">
+                <a:solidFill>
+                  <a:schemeClr val="accent1"/>
+                </a:solidFill>
+              </a:rPr>
+              <a:t>11 / 11</a:t>
+            </a:r>
+            <a:endParaRPr lang="en-US" sz="2800" dirty="0"/>
+          </a:p>
+        </p:txBody>
+      </p:sp>
+      <p:sp>
+        <p:nvSpPr>
+          <p:cNvPr id="10" name="Text 7"/>
+          <p:cNvSpPr txBox="1"/>
+          <p:nvPr/>
+        </p:nvSpPr>
+        <p:spPr>
+          <a:xfrm>
+            <a:off x="8961120" y="2788920"/>
+            <a:ext cx="2499055" cy="868680"/>
+          </a:xfrm>
+          <a:prstGeom prst="rect">
+            <a:avLst/>
+          </a:prstGeom>
+          <a:noFill/>
+          <a:ln/>
+        </p:spPr>
+        <p:txBody>
+          <a:bodyPr wrap="square" lIns="0" tIns="0" rIns="0" bIns="0" rtlCol="0" anchor="ctr"/>
+          <a:lstStyle/>
+          <a:p>
+            <a:pPr indent="0" marL="0">
+              <a:buNone/>
+            </a:pPr>
+            <a:r>
+              <a:rPr lang="en-US" sz="1300" dirty="0">
                 <a:solidFill>
                   <a:schemeClr val="tx1"/>
                 </a:solidFill>
               </a:rPr>
-              <a:t>On empty forms the model looped, copying dotted blanks</a:t>
-            </a:r>
-            <a:endParaRPr lang="en-US" sz="1400" dirty="0"/>
-          </a:p>
-        </p:txBody>
-      </p:sp>
-      <p:sp>
-        <p:nvSpPr>
-          <p:cNvPr id="17" name="Shape 15"/>
+              <a:t>rule cases correct on planted defects, including the succession decoy</a:t>
+            </a:r>
+            <a:endParaRPr lang="en-US" sz="1300" dirty="0"/>
+          </a:p>
+        </p:txBody>
+      </p:sp>
+      <p:sp>
+        <p:nvSpPr>
+          <p:cNvPr id="11" name="Shape 8"/>
           <p:cNvSpPr/>
           <p:nvPr/>
         </p:nvSpPr>
         <p:spPr>
           <a:xfrm>
-            <a:off x="6675120" y="3986784"/>
-            <a:ext cx="274320" cy="237744"/>
-          </a:xfrm>
-          <a:prstGeom prst="rightArrow">
-            <a:avLst/>
-          </a:prstGeom>
-          <a:solidFill>
-            <a:schemeClr val="accent2"/>
-          </a:solidFill>
-          <a:ln w="12700">
-            <a:solidFill>
-              <a:schemeClr val="accent2"/>
-            </a:solidFill>
-            <a:prstDash val="solid"/>
-          </a:ln>
-        </p:spPr>
-      </p:sp>
-      <p:sp>
-        <p:nvSpPr>
-          <p:cNvPr id="18" name="Shape 16"/>
-          <p:cNvSpPr/>
-          <p:nvPr/>
-        </p:nvSpPr>
-        <p:spPr>
-          <a:xfrm>
-            <a:off x="7040880" y="3712464"/>
-            <a:ext cx="4602175" cy="786384"/>
+            <a:off x="7132320" y="3886200"/>
+            <a:ext cx="4510735" cy="1051560"/>
           </a:xfrm>
           <a:prstGeom prst="roundRect">
             <a:avLst>
-              <a:gd name="adj" fmla="val 13953"/>
-            </a:avLst>
-          </a:prstGeom>
-          <a:solidFill>
-            <a:srgbClr val="ECFDF5"/>
-          </a:solidFill>
-          <a:ln w="12700">
-            <a:solidFill>
-              <a:srgbClr val="A7F3D0"/>
-            </a:solidFill>
-            <a:prstDash val="solid"/>
-          </a:ln>
-        </p:spPr>
-      </p:sp>
-      <p:sp>
-        <p:nvSpPr>
-          <p:cNvPr id="19" name="Text 17"/>
-          <p:cNvSpPr txBox="1"/>
-          <p:nvPr/>
-        </p:nvSpPr>
-        <p:spPr>
-          <a:xfrm>
-            <a:off x="7223760" y="3712464"/>
-            <a:ext cx="4236415" cy="786384"/>
-          </a:xfrm>
-          <a:prstGeom prst="rect">
-            <a:avLst/>
-          </a:prstGeom>
-          <a:noFill/>
-          <a:ln/>
-        </p:spPr>
-        <p:txBody>
-          <a:bodyPr wrap="square" lIns="0" tIns="0" rIns="0" bIns="0" rtlCol="0" anchor="ctr"/>
-          <a:lstStyle/>
-          <a:p>
-            <a:pPr indent="0" marL="0">
-              <a:buNone/>
-            </a:pPr>
-            <a:r>
-              <a:rPr lang="en-US" sz="1400" dirty="0">
-                <a:solidFill>
-                  <a:srgbClr val="065F46"/>
-                </a:solidFill>
-              </a:rPr>
-              <a:t>Prompt rule, one re-ask, and only valid replies are cached</a:t>
-            </a:r>
-            <a:endParaRPr lang="en-US" sz="1400" dirty="0"/>
-          </a:p>
-        </p:txBody>
-      </p:sp>
-      <p:sp>
-        <p:nvSpPr>
-          <p:cNvPr id="20" name="Shape 18"/>
-          <p:cNvSpPr/>
-          <p:nvPr/>
-        </p:nvSpPr>
-        <p:spPr>
-          <a:xfrm>
-            <a:off x="548640" y="4608576"/>
-            <a:ext cx="6035040" cy="786384"/>
-          </a:xfrm>
-          <a:prstGeom prst="roundRect">
-            <a:avLst>
-              <a:gd name="adj" fmla="val 13953"/>
+              <a:gd name="adj" fmla="val 10435"/>
             </a:avLst>
           </a:prstGeom>
           <a:solidFill>
@@ -5117,14 +5484,14 @@
       </p:sp>
       <p:sp>
         <p:nvSpPr>
-          <p:cNvPr id="21" name="Text 19"/>
+          <p:cNvPr id="12" name="Text 9"/>
           <p:cNvSpPr txBox="1"/>
           <p:nvPr/>
         </p:nvSpPr>
         <p:spPr>
           <a:xfrm>
-            <a:off x="731520" y="4608576"/>
-            <a:ext cx="5669280" cy="786384"/>
+            <a:off x="7315200" y="3977640"/>
+            <a:ext cx="1600200" cy="868680"/>
           </a:xfrm>
           <a:prstGeom prst="rect">
             <a:avLst/>
@@ -5140,37 +5507,75 @@
               <a:buNone/>
             </a:pPr>
             <a:r>
-              <a:rPr lang="en-US" sz="1400" dirty="0">
+              <a:rPr lang="en-US" sz="2800" b="1" dirty="0">
+                <a:solidFill>
+                  <a:schemeClr val="accent1"/>
+                </a:solidFill>
+              </a:rPr>
+              <a:t>75</a:t>
+            </a:r>
+            <a:endParaRPr lang="en-US" sz="2800" dirty="0"/>
+          </a:p>
+        </p:txBody>
+      </p:sp>
+      <p:sp>
+        <p:nvSpPr>
+          <p:cNvPr id="13" name="Text 10"/>
+          <p:cNvSpPr txBox="1"/>
+          <p:nvPr/>
+        </p:nvSpPr>
+        <p:spPr>
+          <a:xfrm>
+            <a:off x="8961120" y="3977640"/>
+            <a:ext cx="2499055" cy="868680"/>
+          </a:xfrm>
+          <a:prstGeom prst="rect">
+            <a:avLst/>
+          </a:prstGeom>
+          <a:noFill/>
+          <a:ln/>
+        </p:spPr>
+        <p:txBody>
+          <a:bodyPr wrap="square" lIns="0" tIns="0" rIns="0" bIns="0" rtlCol="0" anchor="ctr"/>
+          <a:lstStyle/>
+          <a:p>
+            <a:pPr indent="0" marL="0">
+              <a:buNone/>
+            </a:pPr>
+            <a:r>
+              <a:rPr lang="en-US" sz="1300" dirty="0">
                 <a:solidFill>
                   <a:schemeClr val="tx1"/>
                 </a:solidFill>
               </a:rPr>
-              <a:t>Extractor and registry disagreed on the ULPIN format</a:t>
-            </a:r>
-            <a:endParaRPr lang="en-US" sz="1400" dirty="0"/>
-          </a:p>
-        </p:txBody>
-      </p:sp>
-      <p:sp>
-        <p:nvSpPr>
-          <p:cNvPr id="22" name="Shape 20"/>
+              <a:t>offline tests pass</a:t>
+            </a:r>
+            <a:endParaRPr lang="en-US" sz="1300" dirty="0"/>
+          </a:p>
+        </p:txBody>
+      </p:sp>
+      <p:sp>
+        <p:nvSpPr>
+          <p:cNvPr id="14" name="Shape 11"/>
           <p:cNvSpPr/>
           <p:nvPr/>
         </p:nvSpPr>
         <p:spPr>
           <a:xfrm>
-            <a:off x="6675120" y="4882896"/>
-            <a:ext cx="274320" cy="237744"/>
-          </a:xfrm>
-          <a:prstGeom prst="rightArrow">
-            <a:avLst/>
-          </a:prstGeom>
-          <a:solidFill>
-            <a:schemeClr val="accent2"/>
+            <a:off x="7132320" y="5074920"/>
+            <a:ext cx="4510735" cy="777240"/>
+          </a:xfrm>
+          <a:prstGeom prst="roundRect">
+            <a:avLst>
+              <a:gd name="adj" fmla="val 14118"/>
+            </a:avLst>
+          </a:prstGeom>
+          <a:solidFill>
+            <a:srgbClr val="FFF3D1"/>
           </a:solidFill>
           <a:ln w="12700">
             <a:solidFill>
-              <a:schemeClr val="accent2"/>
+              <a:srgbClr val="FCD34D"/>
             </a:solidFill>
             <a:prstDash val="solid"/>
           </a:ln>
@@ -5178,41 +5583,14 @@
       </p:sp>
       <p:sp>
         <p:nvSpPr>
-          <p:cNvPr id="23" name="Shape 21"/>
-          <p:cNvSpPr/>
-          <p:nvPr/>
-        </p:nvSpPr>
-        <p:spPr>
-          <a:xfrm>
-            <a:off x="7040880" y="4608576"/>
-            <a:ext cx="4602175" cy="786384"/>
-          </a:xfrm>
-          <a:prstGeom prst="roundRect">
-            <a:avLst>
-              <a:gd name="adj" fmla="val 13953"/>
-            </a:avLst>
-          </a:prstGeom>
-          <a:solidFill>
-            <a:srgbClr val="ECFDF5"/>
-          </a:solidFill>
-          <a:ln w="12700">
-            <a:solidFill>
-              <a:srgbClr val="A7F3D0"/>
-            </a:solidFill>
-            <a:prstDash val="solid"/>
-          </a:ln>
-        </p:spPr>
-      </p:sp>
-      <p:sp>
-        <p:nvSpPr>
-          <p:cNvPr id="24" name="Text 22"/>
+          <p:cNvPr id="15" name="Text 12"/>
           <p:cNvSpPr txBox="1"/>
           <p:nvPr/>
         </p:nvSpPr>
         <p:spPr>
           <a:xfrm>
-            <a:off x="7223760" y="4608576"/>
-            <a:ext cx="4236415" cy="786384"/>
+            <a:off x="7315200" y="5074920"/>
+            <a:ext cx="4144975" cy="777240"/>
           </a:xfrm>
           <a:prstGeom prst="rect">
             <a:avLst/>
@@ -5228,61 +5606,27 @@
               <a:buNone/>
             </a:pPr>
             <a:r>
-              <a:rPr lang="en-US" sz="1400" dirty="0">
-                <a:solidFill>
-                  <a:srgbClr val="065F46"/>
-                </a:solidFill>
-              </a:rPr>
-              <a:t>14-character IDs everywhere, short codes aliased</a:t>
-            </a:r>
-            <a:endParaRPr lang="en-US" sz="1400" dirty="0"/>
-          </a:p>
-        </p:txBody>
-      </p:sp>
-      <p:sp>
-        <p:nvSpPr>
-          <p:cNvPr id="25" name="Shape 23"/>
-          <p:cNvSpPr/>
-          <p:nvPr/>
-        </p:nvSpPr>
-        <p:spPr>
-          <a:xfrm>
-            <a:off x="548640" y="5504688"/>
-            <a:ext cx="6035040" cy="786384"/>
-          </a:xfrm>
-          <a:prstGeom prst="roundRect">
-            <a:avLst>
-              <a:gd name="adj" fmla="val 13953"/>
-            </a:avLst>
-          </a:prstGeom>
-          <a:solidFill>
-            <a:schemeClr val="bg1"/>
-          </a:solidFill>
-          <a:ln w="12700">
-            <a:solidFill>
-              <a:srgbClr val="E4ECE8"/>
-            </a:solidFill>
-            <a:prstDash val="solid"/>
-          </a:ln>
-          <a:effectLst>
-            <a:outerShdw sx="100000" sy="100000" kx="0" ky="0" algn="bl" rotWithShape="0" blurRad="76200" dist="25400" dir="5400000">
-              <a:srgbClr val="000000">
-                <a:alpha val="12000"/>
-              </a:srgbClr>
-            </a:outerShdw>
-          </a:effectLst>
-        </p:spPr>
-      </p:sp>
-      <p:sp>
-        <p:nvSpPr>
-          <p:cNvPr id="26" name="Text 24"/>
+              <a:rPr lang="en-US" sz="1300" dirty="0">
+                <a:solidFill>
+                  <a:srgbClr val="7C4A03"/>
+                </a:solidFill>
+              </a:rPr>
+              <a:t>Synthetic data we authored; one model. One blurred “Bora” was read as “Boro”.</a:t>
+            </a:r>
+            <a:endParaRPr lang="en-US" sz="1300" dirty="0"/>
+          </a:p>
+        </p:txBody>
+      </p:sp>
+      <p:sp>
+        <p:nvSpPr>
+          <p:cNvPr id="16" name="Text 13"/>
           <p:cNvSpPr txBox="1"/>
           <p:nvPr/>
         </p:nvSpPr>
         <p:spPr>
           <a:xfrm>
-            <a:off x="731520" y="5504688"/>
-            <a:ext cx="5669280" cy="786384"/>
+            <a:off x="548640" y="5943600"/>
+            <a:ext cx="11094415" cy="365760"/>
           </a:xfrm>
           <a:prstGeom prst="rect">
             <a:avLst/>
@@ -5291,109 +5635,21 @@
           <a:ln/>
         </p:spPr>
         <p:txBody>
-          <a:bodyPr wrap="square" lIns="0" tIns="0" rIns="0" bIns="0" rtlCol="0" anchor="ctr"/>
+          <a:bodyPr wrap="square" lIns="0" tIns="0" rIns="0" bIns="0" rtlCol="0" anchor="t"/>
           <a:lstStyle/>
           <a:p>
             <a:pPr indent="0" marL="0">
               <a:buNone/>
             </a:pPr>
             <a:r>
-              <a:rPr lang="en-US" sz="1400" dirty="0">
-                <a:solidFill>
-                  <a:schemeClr val="tx1"/>
-                </a:solidFill>
-              </a:rPr>
-              <a:t>Free API tier: 20 requests per day per model</a:t>
-            </a:r>
-            <a:endParaRPr lang="en-US" sz="1400" dirty="0"/>
-          </a:p>
-        </p:txBody>
-      </p:sp>
-      <p:sp>
-        <p:nvSpPr>
-          <p:cNvPr id="27" name="Shape 25"/>
-          <p:cNvSpPr/>
-          <p:nvPr/>
-        </p:nvSpPr>
-        <p:spPr>
-          <a:xfrm>
-            <a:off x="6675120" y="5779008"/>
-            <a:ext cx="274320" cy="237744"/>
-          </a:xfrm>
-          <a:prstGeom prst="rightArrow">
-            <a:avLst/>
-          </a:prstGeom>
-          <a:solidFill>
-            <a:schemeClr val="accent2"/>
-          </a:solidFill>
-          <a:ln w="12700">
-            <a:solidFill>
-              <a:schemeClr val="accent2"/>
-            </a:solidFill>
-            <a:prstDash val="solid"/>
-          </a:ln>
-        </p:spPr>
-      </p:sp>
-      <p:sp>
-        <p:nvSpPr>
-          <p:cNvPr id="28" name="Shape 26"/>
-          <p:cNvSpPr/>
-          <p:nvPr/>
-        </p:nvSpPr>
-        <p:spPr>
-          <a:xfrm>
-            <a:off x="7040880" y="5504688"/>
-            <a:ext cx="4602175" cy="786384"/>
-          </a:xfrm>
-          <a:prstGeom prst="roundRect">
-            <a:avLst>
-              <a:gd name="adj" fmla="val 13953"/>
-            </a:avLst>
-          </a:prstGeom>
-          <a:solidFill>
-            <a:srgbClr val="ECFDF5"/>
-          </a:solidFill>
-          <a:ln w="12700">
-            <a:solidFill>
-              <a:srgbClr val="A7F3D0"/>
-            </a:solidFill>
-            <a:prstDash val="solid"/>
-          </a:ln>
-        </p:spPr>
-      </p:sp>
-      <p:sp>
-        <p:nvSpPr>
-          <p:cNvPr id="29" name="Text 27"/>
-          <p:cNvSpPr txBox="1"/>
-          <p:nvPr/>
-        </p:nvSpPr>
-        <p:spPr>
-          <a:xfrm>
-            <a:off x="7223760" y="5504688"/>
-            <a:ext cx="4236415" cy="786384"/>
-          </a:xfrm>
-          <a:prstGeom prst="rect">
-            <a:avLst/>
-          </a:prstGeom>
-          <a:noFill/>
-          <a:ln/>
-        </p:spPr>
-        <p:txBody>
-          <a:bodyPr wrap="square" lIns="0" tIns="0" rIns="0" bIns="0" rtlCol="0" anchor="ctr"/>
-          <a:lstStyle/>
-          <a:p>
-            <a:pPr indent="0" marL="0">
-              <a:buNone/>
-            </a:pPr>
-            <a:r>
-              <a:rPr lang="en-US" sz="1400" dirty="0">
-                <a:solidFill>
-                  <a:srgbClr val="065F46"/>
-                </a:solidFill>
-              </a:rPr>
-              <a:t>Raw-reply cache and offline sample data for the demo</a:t>
-            </a:r>
-            <a:endParaRPr lang="en-US" sz="1400" dirty="0"/>
+              <a:rPr lang="en-US" sz="1200" dirty="0">
+                <a:solidFill>
+                  <a:srgbClr val="5B7276"/>
+                </a:solidFill>
+              </a:rPr>
+              <a:t>Rule results use canned extraction replies, so they test the rules, not OCR. Abstained fields: 1.9% (sent to review).</a:t>
+            </a:r>
+            <a:endParaRPr lang="en-US" sz="1200" dirty="0"/>
           </a:p>
         </p:txBody>
       </p:sp>
@@ -5454,6 +5710,931 @@
                   <a:schemeClr val="tx2"/>
                 </a:solidFill>
               </a:rPr>
+              <a:t>Challenges we hit and fixed</a:t>
+            </a:r>
+            <a:endParaRPr lang="en-US" sz="3600" dirty="0"/>
+          </a:p>
+        </p:txBody>
+      </p:sp>
+      <p:sp>
+        <p:nvSpPr>
+          <p:cNvPr id="3" name="Text 1"/>
+          <p:cNvSpPr txBox="1"/>
+          <p:nvPr/>
+        </p:nvSpPr>
+        <p:spPr>
+          <a:xfrm>
+            <a:off x="548640" y="1508760"/>
+            <a:ext cx="6035040" cy="320040"/>
+          </a:xfrm>
+          <a:prstGeom prst="rect">
+            <a:avLst/>
+          </a:prstGeom>
+          <a:noFill/>
+          <a:ln/>
+        </p:spPr>
+        <p:txBody>
+          <a:bodyPr wrap="square" lIns="0" tIns="0" rIns="0" bIns="0" rtlCol="0" anchor="t"/>
+          <a:lstStyle/>
+          <a:p>
+            <a:pPr indent="0" marL="0">
+              <a:buNone/>
+            </a:pPr>
+            <a:r>
+              <a:rPr lang="en-US" sz="1400" b="1" dirty="0">
+                <a:solidFill>
+                  <a:srgbClr val="5B7276"/>
+                </a:solidFill>
+              </a:rPr>
+              <a:t>What went wrong</a:t>
+            </a:r>
+            <a:endParaRPr lang="en-US" sz="1400" dirty="0"/>
+          </a:p>
+        </p:txBody>
+      </p:sp>
+      <p:sp>
+        <p:nvSpPr>
+          <p:cNvPr id="4" name="Text 2"/>
+          <p:cNvSpPr txBox="1"/>
+          <p:nvPr/>
+        </p:nvSpPr>
+        <p:spPr>
+          <a:xfrm>
+            <a:off x="7040880" y="1508760"/>
+            <a:ext cx="4602175" cy="320040"/>
+          </a:xfrm>
+          <a:prstGeom prst="rect">
+            <a:avLst/>
+          </a:prstGeom>
+          <a:noFill/>
+          <a:ln/>
+        </p:spPr>
+        <p:txBody>
+          <a:bodyPr wrap="square" lIns="0" tIns="0" rIns="0" bIns="0" rtlCol="0" anchor="t"/>
+          <a:lstStyle/>
+          <a:p>
+            <a:pPr indent="0" marL="0">
+              <a:buNone/>
+            </a:pPr>
+            <a:r>
+              <a:rPr lang="en-US" sz="1400" b="1" dirty="0">
+                <a:solidFill>
+                  <a:srgbClr val="5B7276"/>
+                </a:solidFill>
+              </a:rPr>
+              <a:t>What we did</a:t>
+            </a:r>
+            <a:endParaRPr lang="en-US" sz="1400" dirty="0"/>
+          </a:p>
+        </p:txBody>
+      </p:sp>
+      <p:sp>
+        <p:nvSpPr>
+          <p:cNvPr id="5" name="Shape 3"/>
+          <p:cNvSpPr/>
+          <p:nvPr/>
+        </p:nvSpPr>
+        <p:spPr>
+          <a:xfrm>
+            <a:off x="548640" y="1920240"/>
+            <a:ext cx="6035040" cy="786384"/>
+          </a:xfrm>
+          <a:prstGeom prst="roundRect">
+            <a:avLst>
+              <a:gd name="adj" fmla="val 13953"/>
+            </a:avLst>
+          </a:prstGeom>
+          <a:solidFill>
+            <a:schemeClr val="bg1"/>
+          </a:solidFill>
+          <a:ln w="12700">
+            <a:solidFill>
+              <a:srgbClr val="E4ECE8"/>
+            </a:solidFill>
+            <a:prstDash val="solid"/>
+          </a:ln>
+          <a:effectLst>
+            <a:outerShdw sx="100000" sy="100000" kx="0" ky="0" algn="bl" rotWithShape="0" blurRad="76200" dist="25400" dir="5400000">
+              <a:srgbClr val="000000">
+                <a:alpha val="12000"/>
+              </a:srgbClr>
+            </a:outerShdw>
+          </a:effectLst>
+        </p:spPr>
+      </p:sp>
+      <p:sp>
+        <p:nvSpPr>
+          <p:cNvPr id="6" name="Text 4"/>
+          <p:cNvSpPr txBox="1"/>
+          <p:nvPr/>
+        </p:nvSpPr>
+        <p:spPr>
+          <a:xfrm>
+            <a:off x="731520" y="1920240"/>
+            <a:ext cx="5669280" cy="786384"/>
+          </a:xfrm>
+          <a:prstGeom prst="rect">
+            <a:avLst/>
+          </a:prstGeom>
+          <a:noFill/>
+          <a:ln/>
+        </p:spPr>
+        <p:txBody>
+          <a:bodyPr wrap="square" lIns="0" tIns="0" rIns="0" bIns="0" rtlCol="0" anchor="ctr"/>
+          <a:lstStyle/>
+          <a:p>
+            <a:pPr indent="0" marL="0">
+              <a:buNone/>
+            </a:pPr>
+            <a:r>
+              <a:rPr lang="en-US" sz="1400" dirty="0">
+                <a:solidFill>
+                  <a:schemeClr val="tx1"/>
+                </a:solidFill>
+              </a:rPr>
+              <a:t>An Aadhaar number was not masked when a full stop (or the Hindi danda) followed it</a:t>
+            </a:r>
+            <a:endParaRPr lang="en-US" sz="1400" dirty="0"/>
+          </a:p>
+        </p:txBody>
+      </p:sp>
+      <p:sp>
+        <p:nvSpPr>
+          <p:cNvPr id="7" name="Shape 5"/>
+          <p:cNvSpPr/>
+          <p:nvPr/>
+        </p:nvSpPr>
+        <p:spPr>
+          <a:xfrm>
+            <a:off x="6675120" y="2194560"/>
+            <a:ext cx="274320" cy="237744"/>
+          </a:xfrm>
+          <a:prstGeom prst="rightArrow">
+            <a:avLst/>
+          </a:prstGeom>
+          <a:solidFill>
+            <a:schemeClr val="accent2"/>
+          </a:solidFill>
+          <a:ln w="12700">
+            <a:solidFill>
+              <a:schemeClr val="accent2"/>
+            </a:solidFill>
+            <a:prstDash val="solid"/>
+          </a:ln>
+        </p:spPr>
+      </p:sp>
+      <p:sp>
+        <p:nvSpPr>
+          <p:cNvPr id="8" name="Shape 6"/>
+          <p:cNvSpPr/>
+          <p:nvPr/>
+        </p:nvSpPr>
+        <p:spPr>
+          <a:xfrm>
+            <a:off x="7040880" y="1920240"/>
+            <a:ext cx="4602175" cy="786384"/>
+          </a:xfrm>
+          <a:prstGeom prst="roundRect">
+            <a:avLst>
+              <a:gd name="adj" fmla="val 13953"/>
+            </a:avLst>
+          </a:prstGeom>
+          <a:solidFill>
+            <a:srgbClr val="ECFDF5"/>
+          </a:solidFill>
+          <a:ln w="12700">
+            <a:solidFill>
+              <a:srgbClr val="A7F3D0"/>
+            </a:solidFill>
+            <a:prstDash val="solid"/>
+          </a:ln>
+        </p:spPr>
+      </p:sp>
+      <p:sp>
+        <p:nvSpPr>
+          <p:cNvPr id="9" name="Text 7"/>
+          <p:cNvSpPr txBox="1"/>
+          <p:nvPr/>
+        </p:nvSpPr>
+        <p:spPr>
+          <a:xfrm>
+            <a:off x="7223760" y="1920240"/>
+            <a:ext cx="4236415" cy="786384"/>
+          </a:xfrm>
+          <a:prstGeom prst="rect">
+            <a:avLst/>
+          </a:prstGeom>
+          <a:noFill/>
+          <a:ln/>
+        </p:spPr>
+        <p:txBody>
+          <a:bodyPr wrap="square" lIns="0" tIns="0" rIns="0" bIns="0" rtlCol="0" anchor="ctr"/>
+          <a:lstStyle/>
+          <a:p>
+            <a:pPr indent="0" marL="0">
+              <a:buNone/>
+            </a:pPr>
+            <a:r>
+              <a:rPr lang="en-US" sz="1400" dirty="0">
+                <a:solidFill>
+                  <a:srgbClr val="065F46"/>
+                </a:solidFill>
+              </a:rPr>
+              <a:t>Punctuation-aware matching and regression tests</a:t>
+            </a:r>
+            <a:endParaRPr lang="en-US" sz="1400" dirty="0"/>
+          </a:p>
+        </p:txBody>
+      </p:sp>
+      <p:sp>
+        <p:nvSpPr>
+          <p:cNvPr id="10" name="Shape 8"/>
+          <p:cNvSpPr/>
+          <p:nvPr/>
+        </p:nvSpPr>
+        <p:spPr>
+          <a:xfrm>
+            <a:off x="548640" y="2816352"/>
+            <a:ext cx="6035040" cy="786384"/>
+          </a:xfrm>
+          <a:prstGeom prst="roundRect">
+            <a:avLst>
+              <a:gd name="adj" fmla="val 13953"/>
+            </a:avLst>
+          </a:prstGeom>
+          <a:solidFill>
+            <a:schemeClr val="bg1"/>
+          </a:solidFill>
+          <a:ln w="12700">
+            <a:solidFill>
+              <a:srgbClr val="E4ECE8"/>
+            </a:solidFill>
+            <a:prstDash val="solid"/>
+          </a:ln>
+          <a:effectLst>
+            <a:outerShdw sx="100000" sy="100000" kx="0" ky="0" algn="bl" rotWithShape="0" blurRad="76200" dist="25400" dir="5400000">
+              <a:srgbClr val="000000">
+                <a:alpha val="12000"/>
+              </a:srgbClr>
+            </a:outerShdw>
+          </a:effectLst>
+        </p:spPr>
+      </p:sp>
+      <p:sp>
+        <p:nvSpPr>
+          <p:cNvPr id="11" name="Text 9"/>
+          <p:cNvSpPr txBox="1"/>
+          <p:nvPr/>
+        </p:nvSpPr>
+        <p:spPr>
+          <a:xfrm>
+            <a:off x="731520" y="2816352"/>
+            <a:ext cx="5669280" cy="786384"/>
+          </a:xfrm>
+          <a:prstGeom prst="rect">
+            <a:avLst/>
+          </a:prstGeom>
+          <a:noFill/>
+          <a:ln/>
+        </p:spPr>
+        <p:txBody>
+          <a:bodyPr wrap="square" lIns="0" tIns="0" rIns="0" bIns="0" rtlCol="0" anchor="ctr"/>
+          <a:lstStyle/>
+          <a:p>
+            <a:pPr indent="0" marL="0">
+              <a:buNone/>
+            </a:pPr>
+            <a:r>
+              <a:rPr lang="en-US" sz="1400" dirty="0">
+                <a:solidFill>
+                  <a:schemeClr val="tx1"/>
+                </a:solidFill>
+              </a:rPr>
+              <a:t>Gemini spent 15.7k of 16.4k tokens “thinking”; the reply was cut off</a:t>
+            </a:r>
+            <a:endParaRPr lang="en-US" sz="1400" dirty="0"/>
+          </a:p>
+        </p:txBody>
+      </p:sp>
+      <p:sp>
+        <p:nvSpPr>
+          <p:cNvPr id="12" name="Shape 10"/>
+          <p:cNvSpPr/>
+          <p:nvPr/>
+        </p:nvSpPr>
+        <p:spPr>
+          <a:xfrm>
+            <a:off x="6675120" y="3090672"/>
+            <a:ext cx="274320" cy="237744"/>
+          </a:xfrm>
+          <a:prstGeom prst="rightArrow">
+            <a:avLst/>
+          </a:prstGeom>
+          <a:solidFill>
+            <a:schemeClr val="accent2"/>
+          </a:solidFill>
+          <a:ln w="12700">
+            <a:solidFill>
+              <a:schemeClr val="accent2"/>
+            </a:solidFill>
+            <a:prstDash val="solid"/>
+          </a:ln>
+        </p:spPr>
+      </p:sp>
+      <p:sp>
+        <p:nvSpPr>
+          <p:cNvPr id="13" name="Shape 11"/>
+          <p:cNvSpPr/>
+          <p:nvPr/>
+        </p:nvSpPr>
+        <p:spPr>
+          <a:xfrm>
+            <a:off x="7040880" y="2816352"/>
+            <a:ext cx="4602175" cy="786384"/>
+          </a:xfrm>
+          <a:prstGeom prst="roundRect">
+            <a:avLst>
+              <a:gd name="adj" fmla="val 13953"/>
+            </a:avLst>
+          </a:prstGeom>
+          <a:solidFill>
+            <a:srgbClr val="ECFDF5"/>
+          </a:solidFill>
+          <a:ln w="12700">
+            <a:solidFill>
+              <a:srgbClr val="A7F3D0"/>
+            </a:solidFill>
+            <a:prstDash val="solid"/>
+          </a:ln>
+        </p:spPr>
+      </p:sp>
+      <p:sp>
+        <p:nvSpPr>
+          <p:cNvPr id="14" name="Text 12"/>
+          <p:cNvSpPr txBox="1"/>
+          <p:nvPr/>
+        </p:nvSpPr>
+        <p:spPr>
+          <a:xfrm>
+            <a:off x="7223760" y="2816352"/>
+            <a:ext cx="4236415" cy="786384"/>
+          </a:xfrm>
+          <a:prstGeom prst="rect">
+            <a:avLst/>
+          </a:prstGeom>
+          <a:noFill/>
+          <a:ln/>
+        </p:spPr>
+        <p:txBody>
+          <a:bodyPr wrap="square" lIns="0" tIns="0" rIns="0" bIns="0" rtlCol="0" anchor="ctr"/>
+          <a:lstStyle/>
+          <a:p>
+            <a:pPr indent="0" marL="0">
+              <a:buNone/>
+            </a:pPr>
+            <a:r>
+              <a:rPr lang="en-US" sz="1400" dirty="0">
+                <a:solidFill>
+                  <a:srgbClr val="065F46"/>
+                </a:solidFill>
+              </a:rPr>
+              <a:t>Capped thinking; a cut-off reply is an error, never parsed</a:t>
+            </a:r>
+            <a:endParaRPr lang="en-US" sz="1400" dirty="0"/>
+          </a:p>
+        </p:txBody>
+      </p:sp>
+      <p:sp>
+        <p:nvSpPr>
+          <p:cNvPr id="15" name="Shape 13"/>
+          <p:cNvSpPr/>
+          <p:nvPr/>
+        </p:nvSpPr>
+        <p:spPr>
+          <a:xfrm>
+            <a:off x="548640" y="3712464"/>
+            <a:ext cx="6035040" cy="786384"/>
+          </a:xfrm>
+          <a:prstGeom prst="roundRect">
+            <a:avLst>
+              <a:gd name="adj" fmla="val 13953"/>
+            </a:avLst>
+          </a:prstGeom>
+          <a:solidFill>
+            <a:schemeClr val="bg1"/>
+          </a:solidFill>
+          <a:ln w="12700">
+            <a:solidFill>
+              <a:srgbClr val="E4ECE8"/>
+            </a:solidFill>
+            <a:prstDash val="solid"/>
+          </a:ln>
+          <a:effectLst>
+            <a:outerShdw sx="100000" sy="100000" kx="0" ky="0" algn="bl" rotWithShape="0" blurRad="76200" dist="25400" dir="5400000">
+              <a:srgbClr val="000000">
+                <a:alpha val="12000"/>
+              </a:srgbClr>
+            </a:outerShdw>
+          </a:effectLst>
+        </p:spPr>
+      </p:sp>
+      <p:sp>
+        <p:nvSpPr>
+          <p:cNvPr id="16" name="Text 14"/>
+          <p:cNvSpPr txBox="1"/>
+          <p:nvPr/>
+        </p:nvSpPr>
+        <p:spPr>
+          <a:xfrm>
+            <a:off x="731520" y="3712464"/>
+            <a:ext cx="5669280" cy="786384"/>
+          </a:xfrm>
+          <a:prstGeom prst="rect">
+            <a:avLst/>
+          </a:prstGeom>
+          <a:noFill/>
+          <a:ln/>
+        </p:spPr>
+        <p:txBody>
+          <a:bodyPr wrap="square" lIns="0" tIns="0" rIns="0" bIns="0" rtlCol="0" anchor="ctr"/>
+          <a:lstStyle/>
+          <a:p>
+            <a:pPr indent="0" marL="0">
+              <a:buNone/>
+            </a:pPr>
+            <a:r>
+              <a:rPr lang="en-US" sz="1400" dirty="0">
+                <a:solidFill>
+                  <a:schemeClr val="tx1"/>
+                </a:solidFill>
+              </a:rPr>
+              <a:t>On empty forms the model looped, copying dotted blanks</a:t>
+            </a:r>
+            <a:endParaRPr lang="en-US" sz="1400" dirty="0"/>
+          </a:p>
+        </p:txBody>
+      </p:sp>
+      <p:sp>
+        <p:nvSpPr>
+          <p:cNvPr id="17" name="Shape 15"/>
+          <p:cNvSpPr/>
+          <p:nvPr/>
+        </p:nvSpPr>
+        <p:spPr>
+          <a:xfrm>
+            <a:off x="6675120" y="3986784"/>
+            <a:ext cx="274320" cy="237744"/>
+          </a:xfrm>
+          <a:prstGeom prst="rightArrow">
+            <a:avLst/>
+          </a:prstGeom>
+          <a:solidFill>
+            <a:schemeClr val="accent2"/>
+          </a:solidFill>
+          <a:ln w="12700">
+            <a:solidFill>
+              <a:schemeClr val="accent2"/>
+            </a:solidFill>
+            <a:prstDash val="solid"/>
+          </a:ln>
+        </p:spPr>
+      </p:sp>
+      <p:sp>
+        <p:nvSpPr>
+          <p:cNvPr id="18" name="Shape 16"/>
+          <p:cNvSpPr/>
+          <p:nvPr/>
+        </p:nvSpPr>
+        <p:spPr>
+          <a:xfrm>
+            <a:off x="7040880" y="3712464"/>
+            <a:ext cx="4602175" cy="786384"/>
+          </a:xfrm>
+          <a:prstGeom prst="roundRect">
+            <a:avLst>
+              <a:gd name="adj" fmla="val 13953"/>
+            </a:avLst>
+          </a:prstGeom>
+          <a:solidFill>
+            <a:srgbClr val="ECFDF5"/>
+          </a:solidFill>
+          <a:ln w="12700">
+            <a:solidFill>
+              <a:srgbClr val="A7F3D0"/>
+            </a:solidFill>
+            <a:prstDash val="solid"/>
+          </a:ln>
+        </p:spPr>
+      </p:sp>
+      <p:sp>
+        <p:nvSpPr>
+          <p:cNvPr id="19" name="Text 17"/>
+          <p:cNvSpPr txBox="1"/>
+          <p:nvPr/>
+        </p:nvSpPr>
+        <p:spPr>
+          <a:xfrm>
+            <a:off x="7223760" y="3712464"/>
+            <a:ext cx="4236415" cy="786384"/>
+          </a:xfrm>
+          <a:prstGeom prst="rect">
+            <a:avLst/>
+          </a:prstGeom>
+          <a:noFill/>
+          <a:ln/>
+        </p:spPr>
+        <p:txBody>
+          <a:bodyPr wrap="square" lIns="0" tIns="0" rIns="0" bIns="0" rtlCol="0" anchor="ctr"/>
+          <a:lstStyle/>
+          <a:p>
+            <a:pPr indent="0" marL="0">
+              <a:buNone/>
+            </a:pPr>
+            <a:r>
+              <a:rPr lang="en-US" sz="1400" dirty="0">
+                <a:solidFill>
+                  <a:srgbClr val="065F46"/>
+                </a:solidFill>
+              </a:rPr>
+              <a:t>Prompt rule, one re-ask, and only valid replies are cached</a:t>
+            </a:r>
+            <a:endParaRPr lang="en-US" sz="1400" dirty="0"/>
+          </a:p>
+        </p:txBody>
+      </p:sp>
+      <p:sp>
+        <p:nvSpPr>
+          <p:cNvPr id="20" name="Shape 18"/>
+          <p:cNvSpPr/>
+          <p:nvPr/>
+        </p:nvSpPr>
+        <p:spPr>
+          <a:xfrm>
+            <a:off x="548640" y="4608576"/>
+            <a:ext cx="6035040" cy="786384"/>
+          </a:xfrm>
+          <a:prstGeom prst="roundRect">
+            <a:avLst>
+              <a:gd name="adj" fmla="val 13953"/>
+            </a:avLst>
+          </a:prstGeom>
+          <a:solidFill>
+            <a:schemeClr val="bg1"/>
+          </a:solidFill>
+          <a:ln w="12700">
+            <a:solidFill>
+              <a:srgbClr val="E4ECE8"/>
+            </a:solidFill>
+            <a:prstDash val="solid"/>
+          </a:ln>
+          <a:effectLst>
+            <a:outerShdw sx="100000" sy="100000" kx="0" ky="0" algn="bl" rotWithShape="0" blurRad="76200" dist="25400" dir="5400000">
+              <a:srgbClr val="000000">
+                <a:alpha val="12000"/>
+              </a:srgbClr>
+            </a:outerShdw>
+          </a:effectLst>
+        </p:spPr>
+      </p:sp>
+      <p:sp>
+        <p:nvSpPr>
+          <p:cNvPr id="21" name="Text 19"/>
+          <p:cNvSpPr txBox="1"/>
+          <p:nvPr/>
+        </p:nvSpPr>
+        <p:spPr>
+          <a:xfrm>
+            <a:off x="731520" y="4608576"/>
+            <a:ext cx="5669280" cy="786384"/>
+          </a:xfrm>
+          <a:prstGeom prst="rect">
+            <a:avLst/>
+          </a:prstGeom>
+          <a:noFill/>
+          <a:ln/>
+        </p:spPr>
+        <p:txBody>
+          <a:bodyPr wrap="square" lIns="0" tIns="0" rIns="0" bIns="0" rtlCol="0" anchor="ctr"/>
+          <a:lstStyle/>
+          <a:p>
+            <a:pPr indent="0" marL="0">
+              <a:buNone/>
+            </a:pPr>
+            <a:r>
+              <a:rPr lang="en-US" sz="1400" dirty="0">
+                <a:solidFill>
+                  <a:schemeClr val="tx1"/>
+                </a:solidFill>
+              </a:rPr>
+              <a:t>Extractor and registry disagreed on the ULPIN format</a:t>
+            </a:r>
+            <a:endParaRPr lang="en-US" sz="1400" dirty="0"/>
+          </a:p>
+        </p:txBody>
+      </p:sp>
+      <p:sp>
+        <p:nvSpPr>
+          <p:cNvPr id="22" name="Shape 20"/>
+          <p:cNvSpPr/>
+          <p:nvPr/>
+        </p:nvSpPr>
+        <p:spPr>
+          <a:xfrm>
+            <a:off x="6675120" y="4882896"/>
+            <a:ext cx="274320" cy="237744"/>
+          </a:xfrm>
+          <a:prstGeom prst="rightArrow">
+            <a:avLst/>
+          </a:prstGeom>
+          <a:solidFill>
+            <a:schemeClr val="accent2"/>
+          </a:solidFill>
+          <a:ln w="12700">
+            <a:solidFill>
+              <a:schemeClr val="accent2"/>
+            </a:solidFill>
+            <a:prstDash val="solid"/>
+          </a:ln>
+        </p:spPr>
+      </p:sp>
+      <p:sp>
+        <p:nvSpPr>
+          <p:cNvPr id="23" name="Shape 21"/>
+          <p:cNvSpPr/>
+          <p:nvPr/>
+        </p:nvSpPr>
+        <p:spPr>
+          <a:xfrm>
+            <a:off x="7040880" y="4608576"/>
+            <a:ext cx="4602175" cy="786384"/>
+          </a:xfrm>
+          <a:prstGeom prst="roundRect">
+            <a:avLst>
+              <a:gd name="adj" fmla="val 13953"/>
+            </a:avLst>
+          </a:prstGeom>
+          <a:solidFill>
+            <a:srgbClr val="ECFDF5"/>
+          </a:solidFill>
+          <a:ln w="12700">
+            <a:solidFill>
+              <a:srgbClr val="A7F3D0"/>
+            </a:solidFill>
+            <a:prstDash val="solid"/>
+          </a:ln>
+        </p:spPr>
+      </p:sp>
+      <p:sp>
+        <p:nvSpPr>
+          <p:cNvPr id="24" name="Text 22"/>
+          <p:cNvSpPr txBox="1"/>
+          <p:nvPr/>
+        </p:nvSpPr>
+        <p:spPr>
+          <a:xfrm>
+            <a:off x="7223760" y="4608576"/>
+            <a:ext cx="4236415" cy="786384"/>
+          </a:xfrm>
+          <a:prstGeom prst="rect">
+            <a:avLst/>
+          </a:prstGeom>
+          <a:noFill/>
+          <a:ln/>
+        </p:spPr>
+        <p:txBody>
+          <a:bodyPr wrap="square" lIns="0" tIns="0" rIns="0" bIns="0" rtlCol="0" anchor="ctr"/>
+          <a:lstStyle/>
+          <a:p>
+            <a:pPr indent="0" marL="0">
+              <a:buNone/>
+            </a:pPr>
+            <a:r>
+              <a:rPr lang="en-US" sz="1400" dirty="0">
+                <a:solidFill>
+                  <a:srgbClr val="065F46"/>
+                </a:solidFill>
+              </a:rPr>
+              <a:t>14-character IDs everywhere, short codes aliased</a:t>
+            </a:r>
+            <a:endParaRPr lang="en-US" sz="1400" dirty="0"/>
+          </a:p>
+        </p:txBody>
+      </p:sp>
+      <p:sp>
+        <p:nvSpPr>
+          <p:cNvPr id="25" name="Shape 23"/>
+          <p:cNvSpPr/>
+          <p:nvPr/>
+        </p:nvSpPr>
+        <p:spPr>
+          <a:xfrm>
+            <a:off x="548640" y="5504688"/>
+            <a:ext cx="6035040" cy="786384"/>
+          </a:xfrm>
+          <a:prstGeom prst="roundRect">
+            <a:avLst>
+              <a:gd name="adj" fmla="val 13953"/>
+            </a:avLst>
+          </a:prstGeom>
+          <a:solidFill>
+            <a:schemeClr val="bg1"/>
+          </a:solidFill>
+          <a:ln w="12700">
+            <a:solidFill>
+              <a:srgbClr val="E4ECE8"/>
+            </a:solidFill>
+            <a:prstDash val="solid"/>
+          </a:ln>
+          <a:effectLst>
+            <a:outerShdw sx="100000" sy="100000" kx="0" ky="0" algn="bl" rotWithShape="0" blurRad="76200" dist="25400" dir="5400000">
+              <a:srgbClr val="000000">
+                <a:alpha val="12000"/>
+              </a:srgbClr>
+            </a:outerShdw>
+          </a:effectLst>
+        </p:spPr>
+      </p:sp>
+      <p:sp>
+        <p:nvSpPr>
+          <p:cNvPr id="26" name="Text 24"/>
+          <p:cNvSpPr txBox="1"/>
+          <p:nvPr/>
+        </p:nvSpPr>
+        <p:spPr>
+          <a:xfrm>
+            <a:off x="731520" y="5504688"/>
+            <a:ext cx="5669280" cy="786384"/>
+          </a:xfrm>
+          <a:prstGeom prst="rect">
+            <a:avLst/>
+          </a:prstGeom>
+          <a:noFill/>
+          <a:ln/>
+        </p:spPr>
+        <p:txBody>
+          <a:bodyPr wrap="square" lIns="0" tIns="0" rIns="0" bIns="0" rtlCol="0" anchor="ctr"/>
+          <a:lstStyle/>
+          <a:p>
+            <a:pPr indent="0" marL="0">
+              <a:buNone/>
+            </a:pPr>
+            <a:r>
+              <a:rPr lang="en-US" sz="1400" dirty="0">
+                <a:solidFill>
+                  <a:schemeClr val="tx1"/>
+                </a:solidFill>
+              </a:rPr>
+              <a:t>Free API tier: 20 requests per day per model</a:t>
+            </a:r>
+            <a:endParaRPr lang="en-US" sz="1400" dirty="0"/>
+          </a:p>
+        </p:txBody>
+      </p:sp>
+      <p:sp>
+        <p:nvSpPr>
+          <p:cNvPr id="27" name="Shape 25"/>
+          <p:cNvSpPr/>
+          <p:nvPr/>
+        </p:nvSpPr>
+        <p:spPr>
+          <a:xfrm>
+            <a:off x="6675120" y="5779008"/>
+            <a:ext cx="274320" cy="237744"/>
+          </a:xfrm>
+          <a:prstGeom prst="rightArrow">
+            <a:avLst/>
+          </a:prstGeom>
+          <a:solidFill>
+            <a:schemeClr val="accent2"/>
+          </a:solidFill>
+          <a:ln w="12700">
+            <a:solidFill>
+              <a:schemeClr val="accent2"/>
+            </a:solidFill>
+            <a:prstDash val="solid"/>
+          </a:ln>
+        </p:spPr>
+      </p:sp>
+      <p:sp>
+        <p:nvSpPr>
+          <p:cNvPr id="28" name="Shape 26"/>
+          <p:cNvSpPr/>
+          <p:nvPr/>
+        </p:nvSpPr>
+        <p:spPr>
+          <a:xfrm>
+            <a:off x="7040880" y="5504688"/>
+            <a:ext cx="4602175" cy="786384"/>
+          </a:xfrm>
+          <a:prstGeom prst="roundRect">
+            <a:avLst>
+              <a:gd name="adj" fmla="val 13953"/>
+            </a:avLst>
+          </a:prstGeom>
+          <a:solidFill>
+            <a:srgbClr val="ECFDF5"/>
+          </a:solidFill>
+          <a:ln w="12700">
+            <a:solidFill>
+              <a:srgbClr val="A7F3D0"/>
+            </a:solidFill>
+            <a:prstDash val="solid"/>
+          </a:ln>
+        </p:spPr>
+      </p:sp>
+      <p:sp>
+        <p:nvSpPr>
+          <p:cNvPr id="29" name="Text 27"/>
+          <p:cNvSpPr txBox="1"/>
+          <p:nvPr/>
+        </p:nvSpPr>
+        <p:spPr>
+          <a:xfrm>
+            <a:off x="7223760" y="5504688"/>
+            <a:ext cx="4236415" cy="786384"/>
+          </a:xfrm>
+          <a:prstGeom prst="rect">
+            <a:avLst/>
+          </a:prstGeom>
+          <a:noFill/>
+          <a:ln/>
+        </p:spPr>
+        <p:txBody>
+          <a:bodyPr wrap="square" lIns="0" tIns="0" rIns="0" bIns="0" rtlCol="0" anchor="ctr"/>
+          <a:lstStyle/>
+          <a:p>
+            <a:pPr indent="0" marL="0">
+              <a:buNone/>
+            </a:pPr>
+            <a:r>
+              <a:rPr lang="en-US" sz="1400" dirty="0">
+                <a:solidFill>
+                  <a:srgbClr val="065F46"/>
+                </a:solidFill>
+              </a:rPr>
+              <a:t>Raw-reply cache and offline sample data for the demo</a:t>
+            </a:r>
+            <a:endParaRPr lang="en-US" sz="1400" dirty="0"/>
+          </a:p>
+        </p:txBody>
+      </p:sp>
+    </p:spTree>
+  </p:cSld>
+  <p:clrMapOvr>
+    <a:masterClrMapping/>
+  </p:clrMapOvr>
+</p:sld>
+</file>
+
+<file path=ppt/slides/slide14.xml><?xml version="1.0" encoding="utf-8"?>
+<p:sld xmlns:a="http://schemas.openxmlformats.org/drawingml/2006/main" xmlns:r="http://schemas.openxmlformats.org/officeDocument/2006/relationships" xmlns:p="http://schemas.openxmlformats.org/presentationml/2006/main">
+  <p:cSld name="Slide 14">
+    <p:spTree>
+      <p:nvGrpSpPr>
+        <p:cNvPr id="1" name=""/>
+        <p:cNvGrpSpPr/>
+        <p:nvPr/>
+      </p:nvGrpSpPr>
+      <p:grpSpPr>
+        <a:xfrm>
+          <a:off x="0" y="0"/>
+          <a:ext cx="0" cy="0"/>
+          <a:chOff x="0" y="0"/>
+          <a:chExt cx="0" cy="0"/>
+        </a:xfrm>
+      </p:grpSpPr>
+      <p:sp>
+        <p:nvSpPr>
+          <p:cNvPr id="2" name="Text 0"/>
+          <p:cNvSpPr/>
+          <p:nvPr>
+            <p:ph idx="100" type="title" hasCustomPrompt="1"/>
+          </p:nvPr>
+        </p:nvSpPr>
+        <p:spPr>
+          <a:xfrm>
+            <a:off x="548640" y="365760"/>
+            <a:ext cx="11094415" cy="868680"/>
+          </a:xfrm>
+          <a:prstGeom prst="rect">
+            <a:avLst/>
+          </a:prstGeom>
+          <a:noFill/>
+          <a:ln/>
+        </p:spPr>
+        <p:txBody>
+          <a:bodyPr wrap="square" lIns="0" tIns="0" rIns="0" bIns="0" rtlCol="0" anchor="ctr"/>
+          <a:lstStyle/>
+          <a:p>
+            <a:pPr algn="l" indent="0" marL="0">
+              <a:buNone/>
+            </a:pPr>
+            <a:r>
+              <a:rPr lang="en-US" sz="3600" b="1" dirty="0">
+                <a:solidFill>
+                  <a:schemeClr val="tx2"/>
+                </a:solidFill>
+              </a:rPr>
               <a:t>Against the evaluation criteria</a:t>
             </a:r>
             <a:endParaRPr lang="en-US" sz="3600" dirty="0"/>
@@ -5462,7 +6643,7 @@
       </p:sp>
       <p:graphicFrame>
         <p:nvGraphicFramePr>
-          <p:cNvPr id="14" name="Table 0"/>
+          <p:cNvPr id="15" name="Table 0"/>
           <p:cNvGraphicFramePr>
             <a:graphicFrameLocks noGrp="1"/>
           </p:cNvGraphicFramePr>
@@ -5513,7 +6694,7 @@
                       </a:endParaRPr>
                     </a:p>
                   </a:txBody>
-                  <a:tcPr marL="109728" marR="109728" marT="36576" marB="36576" anchor="ctr">
+                  <a:tcPr marL="777240" marR="91440" marT="36576" marB="36576" anchor="ctr">
                     <a:lnL w="12700" cap="flat" cmpd="sng" algn="ctr">
                       <a:solidFill>
                         <a:srgbClr val="E4ECE8"/>
@@ -5651,7 +6832,7 @@
                       </a:endParaRPr>
                     </a:p>
                   </a:txBody>
-                  <a:tcPr marL="109728" marR="109728" marT="36576" marB="36576" anchor="ctr">
+                  <a:tcPr marL="777240" marR="91440" marT="36576" marB="36576" anchor="ctr">
                     <a:lnL w="12700" cap="flat" cmpd="sng" algn="ctr">
                       <a:solidFill>
                         <a:srgbClr val="E4ECE8"/>
@@ -5789,7 +6970,7 @@
                       </a:endParaRPr>
                     </a:p>
                   </a:txBody>
-                  <a:tcPr marL="109728" marR="109728" marT="36576" marB="36576" anchor="ctr">
+                  <a:tcPr marL="777240" marR="91440" marT="36576" marB="36576" anchor="ctr">
                     <a:lnL w="12700" cap="flat" cmpd="sng" algn="ctr">
                       <a:solidFill>
                         <a:srgbClr val="E4ECE8"/>
@@ -5927,7 +7108,7 @@
                       </a:endParaRPr>
                     </a:p>
                   </a:txBody>
-                  <a:tcPr marL="109728" marR="109728" marT="36576" marB="36576" anchor="ctr">
+                  <a:tcPr marL="777240" marR="91440" marT="36576" marB="36576" anchor="ctr">
                     <a:lnL w="12700" cap="flat" cmpd="sng" algn="ctr">
                       <a:solidFill>
                         <a:srgbClr val="E4ECE8"/>
@@ -6065,7 +7246,7 @@
                       </a:endParaRPr>
                     </a:p>
                   </a:txBody>
-                  <a:tcPr marL="109728" marR="109728" marT="36576" marB="36576" anchor="ctr">
+                  <a:tcPr marL="777240" marR="91440" marT="36576" marB="36576" anchor="ctr">
                     <a:lnL w="12700" cap="flat" cmpd="sng" algn="ctr">
                       <a:solidFill>
                         <a:srgbClr val="E4ECE8"/>
@@ -6203,7 +7384,7 @@
                       </a:endParaRPr>
                     </a:p>
                   </a:txBody>
-                  <a:tcPr marL="109728" marR="109728" marT="36576" marB="36576" anchor="ctr">
+                  <a:tcPr marL="777240" marR="91440" marT="36576" marB="36576" anchor="ctr">
                     <a:lnL w="12700" cap="flat" cmpd="sng" algn="ctr">
                       <a:solidFill>
                         <a:srgbClr val="E4ECE8"/>
@@ -6341,7 +7522,7 @@
                       </a:endParaRPr>
                     </a:p>
                   </a:txBody>
-                  <a:tcPr marL="109728" marR="109728" marT="36576" marB="36576" anchor="ctr">
+                  <a:tcPr marL="777240" marR="91440" marT="36576" marB="36576" anchor="ctr">
                     <a:lnL w="12700" cap="flat" cmpd="sng" algn="ctr">
                       <a:solidFill>
                         <a:srgbClr val="E4ECE8"/>
@@ -6456,433 +7637,349 @@
           </a:graphicData>
         </a:graphic>
       </p:graphicFrame>
-    </p:spTree>
-  </p:cSld>
-  <p:clrMapOvr>
-    <a:masterClrMapping/>
-  </p:clrMapOvr>
-</p:sld>
-</file>
-
-<file path=ppt/slides/slide14.xml><?xml version="1.0" encoding="utf-8"?>
-<p:sld xmlns:a="http://schemas.openxmlformats.org/drawingml/2006/main" xmlns:r="http://schemas.openxmlformats.org/officeDocument/2006/relationships" xmlns:p="http://schemas.openxmlformats.org/presentationml/2006/main">
-  <p:cSld name="Slide 14">
-    <p:spTree>
-      <p:nvGrpSpPr>
-        <p:cNvPr id="1" name=""/>
-        <p:cNvGrpSpPr/>
-        <p:nvPr/>
-      </p:nvGrpSpPr>
-      <p:grpSpPr>
-        <a:xfrm>
-          <a:off x="0" y="0"/>
-          <a:ext cx="0" cy="0"/>
-          <a:chOff x="0" y="0"/>
-          <a:chExt cx="0" cy="0"/>
-        </a:xfrm>
-      </p:grpSpPr>
-      <p:sp>
-        <p:nvSpPr>
-          <p:cNvPr id="2" name="Text 0"/>
+      <p:sp>
+        <p:nvSpPr>
+          <p:cNvPr id="4" name="Shape 1"/>
           <p:cNvSpPr/>
-          <p:nvPr>
-            <p:ph idx="100" type="title" hasCustomPrompt="1"/>
-          </p:nvPr>
-        </p:nvSpPr>
-        <p:spPr>
-          <a:xfrm>
-            <a:off x="548640" y="365760"/>
-            <a:ext cx="11094415" cy="868680"/>
-          </a:xfrm>
-          <a:prstGeom prst="rect">
-            <a:avLst/>
-          </a:prstGeom>
-          <a:noFill/>
-          <a:ln/>
-        </p:spPr>
-        <p:txBody>
-          <a:bodyPr wrap="square" lIns="0" tIns="0" rIns="0" bIns="0" rtlCol="0" anchor="ctr"/>
-          <a:lstStyle/>
-          <a:p>
-            <a:pPr algn="l" indent="0" marL="0">
-              <a:buNone/>
-            </a:pPr>
-            <a:r>
-              <a:rPr lang="en-US" sz="3600" b="1" dirty="0">
-                <a:solidFill>
-                  <a:schemeClr val="tx2"/>
-                </a:solidFill>
-              </a:rPr>
-              <a:t>Limits and what comes next</a:t>
-            </a:r>
-            <a:endParaRPr lang="en-US" sz="3600" dirty="0"/>
-          </a:p>
-        </p:txBody>
-      </p:sp>
-      <p:sp>
-        <p:nvSpPr>
-          <p:cNvPr id="3" name="Shape 1"/>
-          <p:cNvSpPr/>
-          <p:nvPr/>
-        </p:nvSpPr>
-        <p:spPr>
-          <a:xfrm>
-            <a:off x="548640" y="1508760"/>
-            <a:ext cx="5364328" cy="4526280"/>
-          </a:xfrm>
-          <a:prstGeom prst="roundRect">
-            <a:avLst>
-              <a:gd name="adj" fmla="val 2424"/>
-            </a:avLst>
-          </a:prstGeom>
-          <a:solidFill>
-            <a:schemeClr val="bg1"/>
+          <p:nvPr/>
+        </p:nvSpPr>
+        <p:spPr>
+          <a:xfrm>
+            <a:off x="676656" y="1572768"/>
+            <a:ext cx="475488" cy="475488"/>
+          </a:xfrm>
+          <a:prstGeom prst="ellipse">
+            <a:avLst/>
+          </a:prstGeom>
+          <a:solidFill>
+            <a:schemeClr val="accent1"/>
           </a:solidFill>
           <a:ln w="12700">
             <a:solidFill>
-              <a:srgbClr val="E4ECE8"/>
+              <a:schemeClr val="accent1"/>
             </a:solidFill>
             <a:prstDash val="solid"/>
           </a:ln>
-          <a:effectLst>
-            <a:outerShdw sx="100000" sy="100000" kx="0" ky="0" algn="bl" rotWithShape="0" blurRad="76200" dist="25400" dir="5400000">
-              <a:srgbClr val="000000">
-                <a:alpha val="12000"/>
-              </a:srgbClr>
-            </a:outerShdw>
-          </a:effectLst>
-        </p:spPr>
-      </p:sp>
-      <p:sp>
-        <p:nvSpPr>
-          <p:cNvPr id="4" name="Text 2"/>
-          <p:cNvSpPr txBox="1"/>
-          <p:nvPr/>
-        </p:nvSpPr>
-        <p:spPr>
-          <a:xfrm>
-            <a:off x="822960" y="1645920"/>
-            <a:ext cx="4815688" cy="457200"/>
-          </a:xfrm>
-          <a:prstGeom prst="rect">
-            <a:avLst/>
-          </a:prstGeom>
-          <a:noFill/>
-          <a:ln/>
-        </p:spPr>
-        <p:txBody>
-          <a:bodyPr wrap="square" lIns="0" tIns="0" rIns="0" bIns="0" rtlCol="0" anchor="t"/>
-          <a:lstStyle/>
-          <a:p>
-            <a:pPr indent="0" marL="0">
-              <a:buNone/>
-            </a:pPr>
-            <a:r>
-              <a:rPr lang="en-US" sz="2200" b="1" dirty="0">
-                <a:solidFill>
-                  <a:schemeClr val="accent4"/>
-                </a:solidFill>
-              </a:rPr>
-              <a:t>Honest limits</a:t>
-            </a:r>
-            <a:endParaRPr lang="en-US" sz="2200" dirty="0"/>
-          </a:p>
-        </p:txBody>
-      </p:sp>
-      <p:sp>
-        <p:nvSpPr>
-          <p:cNvPr id="5" name="Text 3"/>
-          <p:cNvSpPr txBox="1"/>
-          <p:nvPr/>
-        </p:nvSpPr>
-        <p:spPr>
-          <a:xfrm>
-            <a:off x="822960" y="2194560"/>
-            <a:ext cx="4815688" cy="3749040"/>
-          </a:xfrm>
-          <a:prstGeom prst="rect">
-            <a:avLst/>
-          </a:prstGeom>
-          <a:noFill/>
-          <a:ln/>
-        </p:spPr>
-        <p:txBody>
-          <a:bodyPr wrap="square" lIns="635" tIns="635" rIns="635" bIns="635" rtlCol="0" anchor="t"/>
-          <a:lstStyle/>
-          <a:p>
-            <a:pPr marL="177800" indent="-177800">
-              <a:spcAft>
-                <a:spcPts val="1200"/>
-              </a:spcAft>
-              <a:buSzPct val="100000"/>
-              <a:buChar char="•"/>
-            </a:pPr>
-            <a:r>
-              <a:rPr lang="en-US" sz="1700" dirty="0">
-                <a:solidFill>
-                  <a:schemeClr val="tx1"/>
-                </a:solidFill>
-              </a:rPr>
-              <a:t>Synthetic documents, one model: this shows the logic, not real-world accuracy</a:t>
-            </a:r>
-            <a:endParaRPr lang="en-US" sz="1700" dirty="0"/>
-          </a:p>
-          <a:p>
-            <a:pPr marL="177800" indent="-177800">
-              <a:spcAft>
-                <a:spcPts val="1200"/>
-              </a:spcAft>
-              <a:buSzPct val="100000"/>
-              <a:buChar char="•"/>
-            </a:pPr>
-            <a:r>
-              <a:rPr lang="en-US" sz="1700" dirty="0">
-                <a:solidFill>
-                  <a:schemeClr val="tx1"/>
-                </a:solidFill>
-              </a:rPr>
-              <a:t>English and Hindi tested; Assamese not tested</a:t>
-            </a:r>
-            <a:endParaRPr lang="en-US" sz="1700" dirty="0"/>
-          </a:p>
-          <a:p>
-            <a:pPr marL="177800" indent="-177800">
-              <a:spcAft>
-                <a:spcPts val="1200"/>
-              </a:spcAft>
-              <a:buSzPct val="100000"/>
-              <a:buChar char="•"/>
-            </a:pPr>
-            <a:r>
-              <a:rPr lang="en-US" sz="1700" dirty="0">
-                <a:solidFill>
-                  <a:schemeClr val="tx1"/>
-                </a:solidFill>
-              </a:rPr>
-              <a:t>Handwriting tested with a handwriting font, which is tidier than real writing</a:t>
-            </a:r>
-            <a:endParaRPr lang="en-US" sz="1700" dirty="0"/>
-          </a:p>
-          <a:p>
-            <a:pPr marL="177800" indent="-177800">
-              <a:spcAft>
-                <a:spcPts val="1200"/>
-              </a:spcAft>
-              <a:buSzPct val="100000"/>
-              <a:buChar char="•"/>
-            </a:pPr>
-            <a:r>
-              <a:rPr lang="en-US" sz="1700" dirty="0">
-                <a:solidFill>
-                  <a:schemeClr val="tx1"/>
-                </a:solidFill>
-              </a:rPr>
-              <a:t>Handwritten ID numbers cannot be masked automatically</a:t>
-            </a:r>
-            <a:endParaRPr lang="en-US" sz="1700" dirty="0"/>
-          </a:p>
-          <a:p>
-            <a:pPr marL="177800" indent="-177800">
-              <a:spcAft>
-                <a:spcPts val="1200"/>
-              </a:spcAft>
-              <a:buSzPct val="100000"/>
-              <a:buChar char="•"/>
-            </a:pPr>
-            <a:r>
-              <a:rPr lang="en-US" sz="1700" dirty="0">
-                <a:solidFill>
-                  <a:schemeClr val="tx1"/>
-                </a:solidFill>
-              </a:rPr>
-              <a:t>A deed-only view cannot see inheritance, mutations or litigation</a:t>
-            </a:r>
-            <a:endParaRPr lang="en-US" sz="1700" dirty="0"/>
-          </a:p>
-        </p:txBody>
-      </p:sp>
-      <p:sp>
-        <p:nvSpPr>
-          <p:cNvPr id="6" name="Shape 4"/>
+        </p:spPr>
+      </p:sp>
+      <p:pic>
+        <p:nvPicPr>
+          <p:cNvPr id="5" name="Image 0" descr="Lightbulb">    </p:cNvPr>
+          <p:cNvPicPr>
+            <a:picLocks noChangeAspect="1"/>
+          </p:cNvPicPr>
+          <p:nvPr/>
+        </p:nvPicPr>
+        <p:blipFill>
+          <a:blip r:embed="rId1"/>
+          <a:stretch>
+            <a:fillRect/>
+          </a:stretch>
+        </p:blipFill>
+        <p:spPr>
+          <a:xfrm>
+            <a:off x="795528" y="1691640"/>
+            <a:ext cx="237744" cy="237744"/>
+          </a:xfrm>
+          <a:prstGeom prst="rect">
+            <a:avLst/>
+          </a:prstGeom>
+        </p:spPr>
+      </p:pic>
+      <p:sp>
+        <p:nvSpPr>
+          <p:cNvPr id="6" name="Shape 2"/>
           <p:cNvSpPr/>
           <p:nvPr/>
         </p:nvSpPr>
         <p:spPr>
           <a:xfrm>
-            <a:off x="6278728" y="1508760"/>
-            <a:ext cx="5364328" cy="4526280"/>
-          </a:xfrm>
-          <a:prstGeom prst="roundRect">
-            <a:avLst>
-              <a:gd name="adj" fmla="val 2424"/>
-            </a:avLst>
-          </a:prstGeom>
-          <a:solidFill>
-            <a:schemeClr val="bg1"/>
+            <a:off x="676656" y="2176272"/>
+            <a:ext cx="475488" cy="475488"/>
+          </a:xfrm>
+          <a:prstGeom prst="ellipse">
+            <a:avLst/>
+          </a:prstGeom>
+          <a:solidFill>
+            <a:schemeClr val="accent1"/>
           </a:solidFill>
           <a:ln w="12700">
             <a:solidFill>
-              <a:srgbClr val="E4ECE8"/>
+              <a:schemeClr val="accent1"/>
             </a:solidFill>
             <a:prstDash val="solid"/>
           </a:ln>
-          <a:effectLst>
-            <a:outerShdw sx="100000" sy="100000" kx="0" ky="0" algn="bl" rotWithShape="0" blurRad="76200" dist="25400" dir="5400000">
-              <a:srgbClr val="000000">
-                <a:alpha val="12000"/>
-              </a:srgbClr>
-            </a:outerShdw>
-          </a:effectLst>
-        </p:spPr>
-      </p:sp>
-      <p:sp>
-        <p:nvSpPr>
-          <p:cNvPr id="7" name="Text 5"/>
-          <p:cNvSpPr txBox="1"/>
-          <p:nvPr/>
-        </p:nvSpPr>
-        <p:spPr>
-          <a:xfrm>
-            <a:off x="6553048" y="1645920"/>
-            <a:ext cx="4815688" cy="457200"/>
-          </a:xfrm>
-          <a:prstGeom prst="rect">
-            <a:avLst/>
-          </a:prstGeom>
-          <a:noFill/>
-          <a:ln/>
-        </p:spPr>
-        <p:txBody>
-          <a:bodyPr wrap="square" lIns="0" tIns="0" rIns="0" bIns="0" rtlCol="0" anchor="t"/>
-          <a:lstStyle/>
-          <a:p>
-            <a:pPr indent="0" marL="0">
-              <a:buNone/>
-            </a:pPr>
-            <a:r>
-              <a:rPr lang="en-US" sz="2200" b="1" dirty="0">
-                <a:solidFill>
-                  <a:schemeClr val="accent1"/>
-                </a:solidFill>
-              </a:rPr>
-              <a:t>Future scope</a:t>
-            </a:r>
-            <a:endParaRPr lang="en-US" sz="2200" dirty="0"/>
-          </a:p>
-        </p:txBody>
-      </p:sp>
-      <p:sp>
-        <p:nvSpPr>
-          <p:cNvPr id="8" name="Text 6"/>
-          <p:cNvSpPr txBox="1"/>
-          <p:nvPr/>
-        </p:nvSpPr>
-        <p:spPr>
-          <a:xfrm>
-            <a:off x="6553048" y="2194560"/>
-            <a:ext cx="4815688" cy="3749040"/>
-          </a:xfrm>
-          <a:prstGeom prst="rect">
-            <a:avLst/>
-          </a:prstGeom>
-          <a:noFill/>
-          <a:ln/>
-        </p:spPr>
-        <p:txBody>
-          <a:bodyPr wrap="square" lIns="635" tIns="635" rIns="635" bIns="635" rtlCol="0" anchor="t"/>
-          <a:lstStyle/>
-          <a:p>
-            <a:pPr marL="177800" indent="-177800">
-              <a:spcAft>
-                <a:spcPts val="1200"/>
-              </a:spcAft>
-              <a:buSzPct val="100000"/>
-              <a:buChar char="•"/>
-            </a:pPr>
-            <a:r>
-              <a:rPr lang="en-US" sz="1700" dirty="0">
-                <a:solidFill>
-                  <a:schemeClr val="tx1"/>
-                </a:solidFill>
-              </a:rPr>
-              <a:t>Pilot with one Sub-Registrar office on a sandbox registry feed</a:t>
-            </a:r>
-            <a:endParaRPr lang="en-US" sz="1700" dirty="0"/>
-          </a:p>
-          <a:p>
-            <a:pPr marL="177800" indent="-177800">
-              <a:spcAft>
-                <a:spcPts val="1200"/>
-              </a:spcAft>
-              <a:buSzPct val="100000"/>
-              <a:buChar char="•"/>
-            </a:pPr>
-            <a:r>
-              <a:rPr lang="en-US" sz="1700" dirty="0">
-                <a:solidFill>
-                  <a:schemeClr val="tx1"/>
-                </a:solidFill>
-              </a:rPr>
-              <a:t>Self-hosted Indic vision model, so documents never leave the department</a:t>
-            </a:r>
-            <a:endParaRPr lang="en-US" sz="1700" dirty="0"/>
-          </a:p>
-          <a:p>
-            <a:pPr marL="177800" indent="-177800">
-              <a:spcAft>
-                <a:spcPts val="1200"/>
-              </a:spcAft>
-              <a:buSzPct val="100000"/>
-              <a:buChar char="•"/>
-            </a:pPr>
-            <a:r>
-              <a:rPr lang="en-US" sz="1700" dirty="0">
-                <a:solidFill>
-                  <a:schemeClr val="tx1"/>
-                </a:solidFill>
-              </a:rPr>
-              <a:t>State-specific rule packs and an Indic handwriting test set from consented specimens</a:t>
-            </a:r>
-            <a:endParaRPr lang="en-US" sz="1700" dirty="0"/>
-          </a:p>
-          <a:p>
-            <a:pPr marL="177800" indent="-177800">
-              <a:spcAft>
-                <a:spcPts val="1200"/>
-              </a:spcAft>
-              <a:buSzPct val="100000"/>
-              <a:buChar char="•"/>
-            </a:pPr>
-            <a:r>
-              <a:rPr lang="en-US" sz="1700" dirty="0">
-                <a:solidFill>
-                  <a:schemeClr val="tx1"/>
-                </a:solidFill>
-              </a:rPr>
-              <a:t>Transliteration-aware name matching across scripts</a:t>
-            </a:r>
-            <a:endParaRPr lang="en-US" sz="1700" dirty="0"/>
-          </a:p>
-          <a:p>
-            <a:pPr marL="177800" indent="-177800">
-              <a:spcAft>
-                <a:spcPts val="1200"/>
-              </a:spcAft>
-              <a:buSzPct val="100000"/>
-              <a:buChar char="•"/>
-            </a:pPr>
-            <a:r>
-              <a:rPr lang="en-US" sz="1700" dirty="0">
-                <a:solidFill>
-                  <a:schemeClr val="tx1"/>
-                </a:solidFill>
-              </a:rPr>
-              <a:t>A Cline-powered assistant that answers “why was this flagged?” from the evidence</a:t>
-            </a:r>
-            <a:endParaRPr lang="en-US" sz="1700" dirty="0"/>
-          </a:p>
-        </p:txBody>
-      </p:sp>
+        </p:spPr>
+      </p:sp>
+      <p:pic>
+        <p:nvPicPr>
+          <p:cNvPr id="7" name="Image 1" descr="WandMagicSparkles">    </p:cNvPr>
+          <p:cNvPicPr>
+            <a:picLocks noChangeAspect="1"/>
+          </p:cNvPicPr>
+          <p:nvPr/>
+        </p:nvPicPr>
+        <p:blipFill>
+          <a:blip r:embed="rId2"/>
+          <a:stretch>
+            <a:fillRect/>
+          </a:stretch>
+        </p:blipFill>
+        <p:spPr>
+          <a:xfrm>
+            <a:off x="795528" y="2295144"/>
+            <a:ext cx="237744" cy="237744"/>
+          </a:xfrm>
+          <a:prstGeom prst="rect">
+            <a:avLst/>
+          </a:prstGeom>
+        </p:spPr>
+      </p:pic>
+      <p:sp>
+        <p:nvSpPr>
+          <p:cNvPr id="8" name="Shape 3"/>
+          <p:cNvSpPr/>
+          <p:nvPr/>
+        </p:nvSpPr>
+        <p:spPr>
+          <a:xfrm>
+            <a:off x="676656" y="2779776"/>
+            <a:ext cx="475488" cy="475488"/>
+          </a:xfrm>
+          <a:prstGeom prst="ellipse">
+            <a:avLst/>
+          </a:prstGeom>
+          <a:solidFill>
+            <a:schemeClr val="accent1"/>
+          </a:solidFill>
+          <a:ln w="12700">
+            <a:solidFill>
+              <a:schemeClr val="accent1"/>
+            </a:solidFill>
+            <a:prstDash val="solid"/>
+          </a:ln>
+        </p:spPr>
+      </p:sp>
+      <p:pic>
+        <p:nvPicPr>
+          <p:cNvPr id="9" name="Image 2" descr="HandshakeAngle">    </p:cNvPr>
+          <p:cNvPicPr>
+            <a:picLocks noChangeAspect="1"/>
+          </p:cNvPicPr>
+          <p:nvPr/>
+        </p:nvPicPr>
+        <p:blipFill>
+          <a:blip r:embed="rId3"/>
+          <a:stretch>
+            <a:fillRect/>
+          </a:stretch>
+        </p:blipFill>
+        <p:spPr>
+          <a:xfrm>
+            <a:off x="795528" y="2898648"/>
+            <a:ext cx="237744" cy="237744"/>
+          </a:xfrm>
+          <a:prstGeom prst="rect">
+            <a:avLst/>
+          </a:prstGeom>
+        </p:spPr>
+      </p:pic>
+      <p:sp>
+        <p:nvSpPr>
+          <p:cNvPr id="10" name="Shape 4"/>
+          <p:cNvSpPr/>
+          <p:nvPr/>
+        </p:nvSpPr>
+        <p:spPr>
+          <a:xfrm>
+            <a:off x="676656" y="3383280"/>
+            <a:ext cx="475488" cy="475488"/>
+          </a:xfrm>
+          <a:prstGeom prst="ellipse">
+            <a:avLst/>
+          </a:prstGeom>
+          <a:solidFill>
+            <a:schemeClr val="accent1"/>
+          </a:solidFill>
+          <a:ln w="12700">
+            <a:solidFill>
+              <a:schemeClr val="accent1"/>
+            </a:solidFill>
+            <a:prstDash val="solid"/>
+          </a:ln>
+        </p:spPr>
+      </p:sp>
+      <p:pic>
+        <p:nvPicPr>
+          <p:cNvPr id="11" name="Image 3" descr="Code">    </p:cNvPr>
+          <p:cNvPicPr>
+            <a:picLocks noChangeAspect="1"/>
+          </p:cNvPicPr>
+          <p:nvPr/>
+        </p:nvPicPr>
+        <p:blipFill>
+          <a:blip r:embed="rId4"/>
+          <a:stretch>
+            <a:fillRect/>
+          </a:stretch>
+        </p:blipFill>
+        <p:spPr>
+          <a:xfrm>
+            <a:off x="795528" y="3502152"/>
+            <a:ext cx="237744" cy="237744"/>
+          </a:xfrm>
+          <a:prstGeom prst="rect">
+            <a:avLst/>
+          </a:prstGeom>
+        </p:spPr>
+      </p:pic>
+      <p:sp>
+        <p:nvSpPr>
+          <p:cNvPr id="12" name="Shape 5"/>
+          <p:cNvSpPr/>
+          <p:nvPr/>
+        </p:nvSpPr>
+        <p:spPr>
+          <a:xfrm>
+            <a:off x="676656" y="3986784"/>
+            <a:ext cx="475488" cy="475488"/>
+          </a:xfrm>
+          <a:prstGeom prst="ellipse">
+            <a:avLst/>
+          </a:prstGeom>
+          <a:solidFill>
+            <a:schemeClr val="accent1"/>
+          </a:solidFill>
+          <a:ln w="12700">
+            <a:solidFill>
+              <a:schemeClr val="accent1"/>
+            </a:solidFill>
+            <a:prstDash val="solid"/>
+          </a:ln>
+        </p:spPr>
+      </p:sp>
+      <p:pic>
+        <p:nvPicPr>
+          <p:cNvPr id="13" name="Image 4" descr="MobileScreen">    </p:cNvPr>
+          <p:cNvPicPr>
+            <a:picLocks noChangeAspect="1"/>
+          </p:cNvPicPr>
+          <p:nvPr/>
+        </p:nvPicPr>
+        <p:blipFill>
+          <a:blip r:embed="rId5"/>
+          <a:stretch>
+            <a:fillRect/>
+          </a:stretch>
+        </p:blipFill>
+        <p:spPr>
+          <a:xfrm>
+            <a:off x="795528" y="4105656"/>
+            <a:ext cx="237744" cy="237744"/>
+          </a:xfrm>
+          <a:prstGeom prst="rect">
+            <a:avLst/>
+          </a:prstGeom>
+        </p:spPr>
+      </p:pic>
+      <p:sp>
+        <p:nvSpPr>
+          <p:cNvPr id="14" name="Shape 6"/>
+          <p:cNvSpPr/>
+          <p:nvPr/>
+        </p:nvSpPr>
+        <p:spPr>
+          <a:xfrm>
+            <a:off x="676656" y="4590288"/>
+            <a:ext cx="475488" cy="475488"/>
+          </a:xfrm>
+          <a:prstGeom prst="ellipse">
+            <a:avLst/>
+          </a:prstGeom>
+          <a:solidFill>
+            <a:schemeClr val="accent1"/>
+          </a:solidFill>
+          <a:ln w="12700">
+            <a:solidFill>
+              <a:schemeClr val="accent1"/>
+            </a:solidFill>
+            <a:prstDash val="solid"/>
+          </a:ln>
+        </p:spPr>
+      </p:sp>
+      <p:pic>
+        <p:nvPicPr>
+          <p:cNvPr id="15" name="Image 5" descr="Gears">    </p:cNvPr>
+          <p:cNvPicPr>
+            <a:picLocks noChangeAspect="1"/>
+          </p:cNvPicPr>
+          <p:nvPr/>
+        </p:nvPicPr>
+        <p:blipFill>
+          <a:blip r:embed="rId6"/>
+          <a:stretch>
+            <a:fillRect/>
+          </a:stretch>
+        </p:blipFill>
+        <p:spPr>
+          <a:xfrm>
+            <a:off x="795528" y="4709160"/>
+            <a:ext cx="237744" cy="237744"/>
+          </a:xfrm>
+          <a:prstGeom prst="rect">
+            <a:avLst/>
+          </a:prstGeom>
+        </p:spPr>
+      </p:pic>
+      <p:sp>
+        <p:nvSpPr>
+          <p:cNvPr id="16" name="Shape 7"/>
+          <p:cNvSpPr/>
+          <p:nvPr/>
+        </p:nvSpPr>
+        <p:spPr>
+          <a:xfrm>
+            <a:off x="676656" y="5193792"/>
+            <a:ext cx="475488" cy="475488"/>
+          </a:xfrm>
+          <a:prstGeom prst="ellipse">
+            <a:avLst/>
+          </a:prstGeom>
+          <a:solidFill>
+            <a:schemeClr val="accent2"/>
+          </a:solidFill>
+          <a:ln w="12700">
+            <a:solidFill>
+              <a:schemeClr val="accent2"/>
+            </a:solidFill>
+            <a:prstDash val="solid"/>
+          </a:ln>
+        </p:spPr>
+      </p:sp>
+      <p:pic>
+        <p:nvPicPr>
+          <p:cNvPr id="17" name="Image 6" descr="Star">    </p:cNvPr>
+          <p:cNvPicPr>
+            <a:picLocks noChangeAspect="1"/>
+          </p:cNvPicPr>
+          <p:nvPr/>
+        </p:nvPicPr>
+        <p:blipFill>
+          <a:blip r:embed="rId7"/>
+          <a:stretch>
+            <a:fillRect/>
+          </a:stretch>
+        </p:blipFill>
+        <p:spPr>
+          <a:xfrm>
+            <a:off x="795528" y="5312664"/>
+            <a:ext cx="237744" cy="237744"/>
+          </a:xfrm>
+          <a:prstGeom prst="rect">
+            <a:avLst/>
+          </a:prstGeom>
+        </p:spPr>
+      </p:pic>
     </p:spTree>
   </p:cSld>
   <p:clrMapOvr>
@@ -6918,6 +8015,433 @@
         </p:nvSpPr>
         <p:spPr>
           <a:xfrm>
+            <a:off x="548640" y="365760"/>
+            <a:ext cx="11094415" cy="868680"/>
+          </a:xfrm>
+          <a:prstGeom prst="rect">
+            <a:avLst/>
+          </a:prstGeom>
+          <a:noFill/>
+          <a:ln/>
+        </p:spPr>
+        <p:txBody>
+          <a:bodyPr wrap="square" lIns="0" tIns="0" rIns="0" bIns="0" rtlCol="0" anchor="ctr"/>
+          <a:lstStyle/>
+          <a:p>
+            <a:pPr algn="l" indent="0" marL="0">
+              <a:buNone/>
+            </a:pPr>
+            <a:r>
+              <a:rPr lang="en-US" sz="3600" b="1" dirty="0">
+                <a:solidFill>
+                  <a:schemeClr val="tx2"/>
+                </a:solidFill>
+              </a:rPr>
+              <a:t>Limits and what comes next</a:t>
+            </a:r>
+            <a:endParaRPr lang="en-US" sz="3600" dirty="0"/>
+          </a:p>
+        </p:txBody>
+      </p:sp>
+      <p:sp>
+        <p:nvSpPr>
+          <p:cNvPr id="3" name="Shape 1"/>
+          <p:cNvSpPr/>
+          <p:nvPr/>
+        </p:nvSpPr>
+        <p:spPr>
+          <a:xfrm>
+            <a:off x="548640" y="1508760"/>
+            <a:ext cx="5364328" cy="4526280"/>
+          </a:xfrm>
+          <a:prstGeom prst="roundRect">
+            <a:avLst>
+              <a:gd name="adj" fmla="val 2424"/>
+            </a:avLst>
+          </a:prstGeom>
+          <a:solidFill>
+            <a:schemeClr val="bg1"/>
+          </a:solidFill>
+          <a:ln w="12700">
+            <a:solidFill>
+              <a:srgbClr val="E4ECE8"/>
+            </a:solidFill>
+            <a:prstDash val="solid"/>
+          </a:ln>
+          <a:effectLst>
+            <a:outerShdw sx="100000" sy="100000" kx="0" ky="0" algn="bl" rotWithShape="0" blurRad="76200" dist="25400" dir="5400000">
+              <a:srgbClr val="000000">
+                <a:alpha val="12000"/>
+              </a:srgbClr>
+            </a:outerShdw>
+          </a:effectLst>
+        </p:spPr>
+      </p:sp>
+      <p:sp>
+        <p:nvSpPr>
+          <p:cNvPr id="4" name="Text 2"/>
+          <p:cNvSpPr txBox="1"/>
+          <p:nvPr/>
+        </p:nvSpPr>
+        <p:spPr>
+          <a:xfrm>
+            <a:off x="822960" y="1645920"/>
+            <a:ext cx="4815688" cy="457200"/>
+          </a:xfrm>
+          <a:prstGeom prst="rect">
+            <a:avLst/>
+          </a:prstGeom>
+          <a:noFill/>
+          <a:ln/>
+        </p:spPr>
+        <p:txBody>
+          <a:bodyPr wrap="square" lIns="0" tIns="0" rIns="0" bIns="0" rtlCol="0" anchor="t"/>
+          <a:lstStyle/>
+          <a:p>
+            <a:pPr indent="0" marL="0">
+              <a:buNone/>
+            </a:pPr>
+            <a:r>
+              <a:rPr lang="en-US" sz="2200" b="1" dirty="0">
+                <a:solidFill>
+                  <a:schemeClr val="accent4"/>
+                </a:solidFill>
+              </a:rPr>
+              <a:t>Honest limits</a:t>
+            </a:r>
+            <a:endParaRPr lang="en-US" sz="2200" dirty="0"/>
+          </a:p>
+        </p:txBody>
+      </p:sp>
+      <p:sp>
+        <p:nvSpPr>
+          <p:cNvPr id="5" name="Text 3"/>
+          <p:cNvSpPr txBox="1"/>
+          <p:nvPr/>
+        </p:nvSpPr>
+        <p:spPr>
+          <a:xfrm>
+            <a:off x="822960" y="2194560"/>
+            <a:ext cx="4815688" cy="3749040"/>
+          </a:xfrm>
+          <a:prstGeom prst="rect">
+            <a:avLst/>
+          </a:prstGeom>
+          <a:noFill/>
+          <a:ln/>
+        </p:spPr>
+        <p:txBody>
+          <a:bodyPr wrap="square" lIns="635" tIns="635" rIns="635" bIns="635" rtlCol="0" anchor="t"/>
+          <a:lstStyle/>
+          <a:p>
+            <a:pPr marL="177800" indent="-177800">
+              <a:spcAft>
+                <a:spcPts val="1200"/>
+              </a:spcAft>
+              <a:buSzPct val="100000"/>
+              <a:buChar char="•"/>
+            </a:pPr>
+            <a:r>
+              <a:rPr lang="en-US" sz="1700" dirty="0">
+                <a:solidFill>
+                  <a:schemeClr val="tx1"/>
+                </a:solidFill>
+              </a:rPr>
+              <a:t>Synthetic documents, one model: this shows the logic, not real-world accuracy</a:t>
+            </a:r>
+            <a:endParaRPr lang="en-US" sz="1700" dirty="0"/>
+          </a:p>
+          <a:p>
+            <a:pPr marL="177800" indent="-177800">
+              <a:spcAft>
+                <a:spcPts val="1200"/>
+              </a:spcAft>
+              <a:buSzPct val="100000"/>
+              <a:buChar char="•"/>
+            </a:pPr>
+            <a:r>
+              <a:rPr lang="en-US" sz="1700" dirty="0">
+                <a:solidFill>
+                  <a:schemeClr val="tx1"/>
+                </a:solidFill>
+              </a:rPr>
+              <a:t>English and Hindi tested; Assamese not tested</a:t>
+            </a:r>
+            <a:endParaRPr lang="en-US" sz="1700" dirty="0"/>
+          </a:p>
+          <a:p>
+            <a:pPr marL="177800" indent="-177800">
+              <a:spcAft>
+                <a:spcPts val="1200"/>
+              </a:spcAft>
+              <a:buSzPct val="100000"/>
+              <a:buChar char="•"/>
+            </a:pPr>
+            <a:r>
+              <a:rPr lang="en-US" sz="1700" dirty="0">
+                <a:solidFill>
+                  <a:schemeClr val="tx1"/>
+                </a:solidFill>
+              </a:rPr>
+              <a:t>Handwriting tested with a handwriting font, which is tidier than real writing</a:t>
+            </a:r>
+            <a:endParaRPr lang="en-US" sz="1700" dirty="0"/>
+          </a:p>
+          <a:p>
+            <a:pPr marL="177800" indent="-177800">
+              <a:spcAft>
+                <a:spcPts val="1200"/>
+              </a:spcAft>
+              <a:buSzPct val="100000"/>
+              <a:buChar char="•"/>
+            </a:pPr>
+            <a:r>
+              <a:rPr lang="en-US" sz="1700" dirty="0">
+                <a:solidFill>
+                  <a:schemeClr val="tx1"/>
+                </a:solidFill>
+              </a:rPr>
+              <a:t>Handwritten ID numbers cannot be masked automatically</a:t>
+            </a:r>
+            <a:endParaRPr lang="en-US" sz="1700" dirty="0"/>
+          </a:p>
+          <a:p>
+            <a:pPr marL="177800" indent="-177800">
+              <a:spcAft>
+                <a:spcPts val="1200"/>
+              </a:spcAft>
+              <a:buSzPct val="100000"/>
+              <a:buChar char="•"/>
+            </a:pPr>
+            <a:r>
+              <a:rPr lang="en-US" sz="1700" dirty="0">
+                <a:solidFill>
+                  <a:schemeClr val="tx1"/>
+                </a:solidFill>
+              </a:rPr>
+              <a:t>A deed-only view cannot see inheritance, mutations or litigation</a:t>
+            </a:r>
+            <a:endParaRPr lang="en-US" sz="1700" dirty="0"/>
+          </a:p>
+        </p:txBody>
+      </p:sp>
+      <p:sp>
+        <p:nvSpPr>
+          <p:cNvPr id="6" name="Shape 4"/>
+          <p:cNvSpPr/>
+          <p:nvPr/>
+        </p:nvSpPr>
+        <p:spPr>
+          <a:xfrm>
+            <a:off x="6278728" y="1508760"/>
+            <a:ext cx="5364328" cy="4526280"/>
+          </a:xfrm>
+          <a:prstGeom prst="roundRect">
+            <a:avLst>
+              <a:gd name="adj" fmla="val 2424"/>
+            </a:avLst>
+          </a:prstGeom>
+          <a:solidFill>
+            <a:schemeClr val="bg1"/>
+          </a:solidFill>
+          <a:ln w="12700">
+            <a:solidFill>
+              <a:srgbClr val="E4ECE8"/>
+            </a:solidFill>
+            <a:prstDash val="solid"/>
+          </a:ln>
+          <a:effectLst>
+            <a:outerShdw sx="100000" sy="100000" kx="0" ky="0" algn="bl" rotWithShape="0" blurRad="76200" dist="25400" dir="5400000">
+              <a:srgbClr val="000000">
+                <a:alpha val="12000"/>
+              </a:srgbClr>
+            </a:outerShdw>
+          </a:effectLst>
+        </p:spPr>
+      </p:sp>
+      <p:sp>
+        <p:nvSpPr>
+          <p:cNvPr id="7" name="Text 5"/>
+          <p:cNvSpPr txBox="1"/>
+          <p:nvPr/>
+        </p:nvSpPr>
+        <p:spPr>
+          <a:xfrm>
+            <a:off x="6553048" y="1645920"/>
+            <a:ext cx="4815688" cy="457200"/>
+          </a:xfrm>
+          <a:prstGeom prst="rect">
+            <a:avLst/>
+          </a:prstGeom>
+          <a:noFill/>
+          <a:ln/>
+        </p:spPr>
+        <p:txBody>
+          <a:bodyPr wrap="square" lIns="0" tIns="0" rIns="0" bIns="0" rtlCol="0" anchor="t"/>
+          <a:lstStyle/>
+          <a:p>
+            <a:pPr indent="0" marL="0">
+              <a:buNone/>
+            </a:pPr>
+            <a:r>
+              <a:rPr lang="en-US" sz="2200" b="1" dirty="0">
+                <a:solidFill>
+                  <a:schemeClr val="accent1"/>
+                </a:solidFill>
+              </a:rPr>
+              <a:t>Future scope</a:t>
+            </a:r>
+            <a:endParaRPr lang="en-US" sz="2200" dirty="0"/>
+          </a:p>
+        </p:txBody>
+      </p:sp>
+      <p:sp>
+        <p:nvSpPr>
+          <p:cNvPr id="8" name="Text 6"/>
+          <p:cNvSpPr txBox="1"/>
+          <p:nvPr/>
+        </p:nvSpPr>
+        <p:spPr>
+          <a:xfrm>
+            <a:off x="6553048" y="2194560"/>
+            <a:ext cx="4815688" cy="3749040"/>
+          </a:xfrm>
+          <a:prstGeom prst="rect">
+            <a:avLst/>
+          </a:prstGeom>
+          <a:noFill/>
+          <a:ln/>
+        </p:spPr>
+        <p:txBody>
+          <a:bodyPr wrap="square" lIns="635" tIns="635" rIns="635" bIns="635" rtlCol="0" anchor="t"/>
+          <a:lstStyle/>
+          <a:p>
+            <a:pPr marL="177800" indent="-177800">
+              <a:spcAft>
+                <a:spcPts val="1200"/>
+              </a:spcAft>
+              <a:buSzPct val="100000"/>
+              <a:buChar char="•"/>
+            </a:pPr>
+            <a:r>
+              <a:rPr lang="en-US" sz="1700" dirty="0">
+                <a:solidFill>
+                  <a:schemeClr val="tx1"/>
+                </a:solidFill>
+              </a:rPr>
+              <a:t>Pilot with one Sub-Registrar office on a sandbox registry feed</a:t>
+            </a:r>
+            <a:endParaRPr lang="en-US" sz="1700" dirty="0"/>
+          </a:p>
+          <a:p>
+            <a:pPr marL="177800" indent="-177800">
+              <a:spcAft>
+                <a:spcPts val="1200"/>
+              </a:spcAft>
+              <a:buSzPct val="100000"/>
+              <a:buChar char="•"/>
+            </a:pPr>
+            <a:r>
+              <a:rPr lang="en-US" sz="1700" dirty="0">
+                <a:solidFill>
+                  <a:schemeClr val="tx1"/>
+                </a:solidFill>
+              </a:rPr>
+              <a:t>Self-hosted Indic vision model, so documents never leave the department</a:t>
+            </a:r>
+            <a:endParaRPr lang="en-US" sz="1700" dirty="0"/>
+          </a:p>
+          <a:p>
+            <a:pPr marL="177800" indent="-177800">
+              <a:spcAft>
+                <a:spcPts val="1200"/>
+              </a:spcAft>
+              <a:buSzPct val="100000"/>
+              <a:buChar char="•"/>
+            </a:pPr>
+            <a:r>
+              <a:rPr lang="en-US" sz="1700" dirty="0">
+                <a:solidFill>
+                  <a:schemeClr val="tx1"/>
+                </a:solidFill>
+              </a:rPr>
+              <a:t>State-specific rule packs and an Indic handwriting test set from consented specimens</a:t>
+            </a:r>
+            <a:endParaRPr lang="en-US" sz="1700" dirty="0"/>
+          </a:p>
+          <a:p>
+            <a:pPr marL="177800" indent="-177800">
+              <a:spcAft>
+                <a:spcPts val="1200"/>
+              </a:spcAft>
+              <a:buSzPct val="100000"/>
+              <a:buChar char="•"/>
+            </a:pPr>
+            <a:r>
+              <a:rPr lang="en-US" sz="1700" dirty="0">
+                <a:solidFill>
+                  <a:schemeClr val="tx1"/>
+                </a:solidFill>
+              </a:rPr>
+              <a:t>Transliteration-aware name matching across scripts</a:t>
+            </a:r>
+            <a:endParaRPr lang="en-US" sz="1700" dirty="0"/>
+          </a:p>
+          <a:p>
+            <a:pPr marL="177800" indent="-177800">
+              <a:spcAft>
+                <a:spcPts val="1200"/>
+              </a:spcAft>
+              <a:buSzPct val="100000"/>
+              <a:buChar char="•"/>
+            </a:pPr>
+            <a:r>
+              <a:rPr lang="en-US" sz="1700" dirty="0">
+                <a:solidFill>
+                  <a:schemeClr val="tx1"/>
+                </a:solidFill>
+              </a:rPr>
+              <a:t>A Cline-powered assistant that answers “why was this flagged?” from the evidence</a:t>
+            </a:r>
+            <a:endParaRPr lang="en-US" sz="1700" dirty="0"/>
+          </a:p>
+        </p:txBody>
+      </p:sp>
+    </p:spTree>
+  </p:cSld>
+  <p:clrMapOvr>
+    <a:masterClrMapping/>
+  </p:clrMapOvr>
+</p:sld>
+</file>
+
+<file path=ppt/slides/slide16.xml><?xml version="1.0" encoding="utf-8"?>
+<p:sld xmlns:a="http://schemas.openxmlformats.org/drawingml/2006/main" xmlns:r="http://schemas.openxmlformats.org/officeDocument/2006/relationships" xmlns:p="http://schemas.openxmlformats.org/presentationml/2006/main">
+  <p:cSld name="Slide 16">
+    <p:spTree>
+      <p:nvGrpSpPr>
+        <p:cNvPr id="1" name=""/>
+        <p:cNvGrpSpPr/>
+        <p:nvPr/>
+      </p:nvGrpSpPr>
+      <p:grpSpPr>
+        <a:xfrm>
+          <a:off x="0" y="0"/>
+          <a:ext cx="0" cy="0"/>
+          <a:chOff x="0" y="0"/>
+          <a:chExt cx="0" cy="0"/>
+        </a:xfrm>
+      </p:grpSpPr>
+      <p:sp>
+        <p:nvSpPr>
+          <p:cNvPr id="2" name="Text 0"/>
+          <p:cNvSpPr/>
+          <p:nvPr>
+            <p:ph idx="100" type="title" hasCustomPrompt="1"/>
+          </p:nvPr>
+        </p:nvSpPr>
+        <p:spPr>
+          <a:xfrm>
             <a:off x="731520" y="2011680"/>
             <a:ext cx="10515600" cy="1097280"/>
           </a:xfrm>
@@ -6948,7 +8472,228 @@
       </p:sp>
       <p:sp>
         <p:nvSpPr>
-          <p:cNvPr id="3" name="Text 1"/>
+          <p:cNvPr id="3" name="Shape 1"/>
+          <p:cNvSpPr/>
+          <p:nvPr/>
+        </p:nvSpPr>
+        <p:spPr>
+          <a:xfrm>
+            <a:off x="8778240" y="640080"/>
+            <a:ext cx="2834640" cy="2834640"/>
+          </a:xfrm>
+          <a:prstGeom prst="ellipse">
+            <a:avLst/>
+          </a:prstGeom>
+          <a:solidFill>
+            <a:srgbClr val="1B5F5A"/>
+          </a:solidFill>
+          <a:ln w="12700">
+            <a:solidFill>
+              <a:srgbClr val="1B5F5A"/>
+            </a:solidFill>
+            <a:prstDash val="solid"/>
+          </a:ln>
+        </p:spPr>
+      </p:sp>
+      <p:sp>
+        <p:nvSpPr>
+          <p:cNvPr id="4" name="Shape 2"/>
+          <p:cNvSpPr/>
+          <p:nvPr/>
+        </p:nvSpPr>
+        <p:spPr>
+          <a:xfrm>
+            <a:off x="9281160" y="1143000"/>
+            <a:ext cx="1828800" cy="1828800"/>
+          </a:xfrm>
+          <a:prstGeom prst="ellipse">
+            <a:avLst/>
+          </a:prstGeom>
+          <a:solidFill>
+            <a:schemeClr val="accent1"/>
+          </a:solidFill>
+          <a:ln w="12700">
+            <a:solidFill>
+              <a:schemeClr val="accent1"/>
+            </a:solidFill>
+            <a:prstDash val="solid"/>
+          </a:ln>
+        </p:spPr>
+      </p:sp>
+      <p:pic>
+        <p:nvPicPr>
+          <p:cNvPr id="5" name="Image 0" descr="ShieldHalved">    </p:cNvPr>
+          <p:cNvPicPr>
+            <a:picLocks noChangeAspect="1"/>
+          </p:cNvPicPr>
+          <p:nvPr/>
+        </p:nvPicPr>
+        <p:blipFill>
+          <a:blip r:embed="rId1"/>
+          <a:stretch>
+            <a:fillRect/>
+          </a:stretch>
+        </p:blipFill>
+        <p:spPr>
+          <a:xfrm>
+            <a:off x="9738360" y="1600200"/>
+            <a:ext cx="914400" cy="914400"/>
+          </a:xfrm>
+          <a:prstGeom prst="rect">
+            <a:avLst/>
+          </a:prstGeom>
+        </p:spPr>
+      </p:pic>
+      <p:sp>
+        <p:nvSpPr>
+          <p:cNvPr id="6" name="Shape 3"/>
+          <p:cNvSpPr/>
+          <p:nvPr/>
+        </p:nvSpPr>
+        <p:spPr>
+          <a:xfrm>
+            <a:off x="8732520" y="2788920"/>
+            <a:ext cx="822960" cy="822960"/>
+          </a:xfrm>
+          <a:prstGeom prst="ellipse">
+            <a:avLst/>
+          </a:prstGeom>
+          <a:solidFill>
+            <a:schemeClr val="accent2"/>
+          </a:solidFill>
+          <a:ln w="12700">
+            <a:solidFill>
+              <a:schemeClr val="accent2"/>
+            </a:solidFill>
+            <a:prstDash val="solid"/>
+          </a:ln>
+        </p:spPr>
+      </p:sp>
+      <p:pic>
+        <p:nvPicPr>
+          <p:cNvPr id="7" name="Image 1" descr="House">    </p:cNvPr>
+          <p:cNvPicPr>
+            <a:picLocks noChangeAspect="1"/>
+          </p:cNvPicPr>
+          <p:nvPr/>
+        </p:nvPicPr>
+        <p:blipFill>
+          <a:blip r:embed="rId2"/>
+          <a:stretch>
+            <a:fillRect/>
+          </a:stretch>
+        </p:blipFill>
+        <p:spPr>
+          <a:xfrm>
+            <a:off x="8938260" y="2994660"/>
+            <a:ext cx="411480" cy="411480"/>
+          </a:xfrm>
+          <a:prstGeom prst="rect">
+            <a:avLst/>
+          </a:prstGeom>
+        </p:spPr>
+      </p:pic>
+      <p:sp>
+        <p:nvSpPr>
+          <p:cNvPr id="8" name="Shape 4"/>
+          <p:cNvSpPr/>
+          <p:nvPr/>
+        </p:nvSpPr>
+        <p:spPr>
+          <a:xfrm>
+            <a:off x="11109960" y="2606040"/>
+            <a:ext cx="731520" cy="731520"/>
+          </a:xfrm>
+          <a:prstGeom prst="ellipse">
+            <a:avLst/>
+          </a:prstGeom>
+          <a:solidFill>
+            <a:schemeClr val="accent5"/>
+          </a:solidFill>
+          <a:ln w="12700">
+            <a:solidFill>
+              <a:schemeClr val="accent5"/>
+            </a:solidFill>
+            <a:prstDash val="solid"/>
+          </a:ln>
+        </p:spPr>
+      </p:sp>
+      <p:pic>
+        <p:nvPicPr>
+          <p:cNvPr id="9" name="Image 2" descr="Lock">    </p:cNvPr>
+          <p:cNvPicPr>
+            <a:picLocks noChangeAspect="1"/>
+          </p:cNvPicPr>
+          <p:nvPr/>
+        </p:nvPicPr>
+        <p:blipFill>
+          <a:blip r:embed="rId3"/>
+          <a:stretch>
+            <a:fillRect/>
+          </a:stretch>
+        </p:blipFill>
+        <p:spPr>
+          <a:xfrm>
+            <a:off x="11292840" y="2788920"/>
+            <a:ext cx="365760" cy="365760"/>
+          </a:xfrm>
+          <a:prstGeom prst="rect">
+            <a:avLst/>
+          </a:prstGeom>
+        </p:spPr>
+      </p:pic>
+      <p:sp>
+        <p:nvSpPr>
+          <p:cNvPr id="10" name="Shape 5"/>
+          <p:cNvSpPr/>
+          <p:nvPr/>
+        </p:nvSpPr>
+        <p:spPr>
+          <a:xfrm>
+            <a:off x="11155680" y="548640"/>
+            <a:ext cx="640080" cy="640080"/>
+          </a:xfrm>
+          <a:prstGeom prst="ellipse">
+            <a:avLst/>
+          </a:prstGeom>
+          <a:solidFill>
+            <a:schemeClr val="accent2"/>
+          </a:solidFill>
+          <a:ln w="12700">
+            <a:solidFill>
+              <a:schemeClr val="accent2"/>
+            </a:solidFill>
+            <a:prstDash val="solid"/>
+          </a:ln>
+        </p:spPr>
+      </p:sp>
+      <p:pic>
+        <p:nvPicPr>
+          <p:cNvPr id="11" name="Image 3" descr="Eye">    </p:cNvPr>
+          <p:cNvPicPr>
+            <a:picLocks noChangeAspect="1"/>
+          </p:cNvPicPr>
+          <p:nvPr/>
+        </p:nvPicPr>
+        <p:blipFill>
+          <a:blip r:embed="rId4"/>
+          <a:stretch>
+            <a:fillRect/>
+          </a:stretch>
+        </p:blipFill>
+        <p:spPr>
+          <a:xfrm>
+            <a:off x="11315700" y="708660"/>
+            <a:ext cx="320040" cy="320040"/>
+          </a:xfrm>
+          <a:prstGeom prst="rect">
+            <a:avLst/>
+          </a:prstGeom>
+        </p:spPr>
+      </p:pic>
+      <p:sp>
+        <p:nvSpPr>
+          <p:cNvPr id="12" name="Text 6"/>
           <p:cNvSpPr txBox="1"/>
           <p:nvPr/>
         </p:nvSpPr>
@@ -6984,7 +8729,7 @@
       </p:sp>
       <p:sp>
         <p:nvSpPr>
-          <p:cNvPr id="4" name="Text 2"/>
+          <p:cNvPr id="13" name="Text 7"/>
           <p:cNvSpPr txBox="1"/>
           <p:nvPr/>
         </p:nvSpPr>
@@ -7020,7 +8765,7 @@
       </p:sp>
       <p:sp>
         <p:nvSpPr>
-          <p:cNvPr id="5" name="Text 3"/>
+          <p:cNvPr id="14" name="Text 8"/>
           <p:cNvSpPr txBox="1"/>
           <p:nvPr/>
         </p:nvSpPr>
@@ -7153,14 +8898,14 @@
       </p:sp>
       <p:sp>
         <p:nvSpPr>
-          <p:cNvPr id="4" name="Text 2"/>
-          <p:cNvSpPr txBox="1"/>
-          <p:nvPr/>
-        </p:nvSpPr>
-        <p:spPr>
-          <a:xfrm>
-            <a:off x="822960" y="1828800"/>
-            <a:ext cx="420624" cy="420624"/>
+          <p:cNvPr id="4" name="Shape 2"/>
+          <p:cNvSpPr/>
+          <p:nvPr/>
+        </p:nvSpPr>
+        <p:spPr>
+          <a:xfrm>
+            <a:off x="822960" y="1783080"/>
+            <a:ext cx="566928" cy="566928"/>
           </a:xfrm>
           <a:prstGeom prst="ellipse">
             <a:avLst/>
@@ -7168,30 +8913,41 @@
           <a:solidFill>
             <a:schemeClr val="accent1"/>
           </a:solidFill>
-          <a:ln/>
-        </p:spPr>
-        <p:txBody>
-          <a:bodyPr wrap="square" lIns="0" tIns="0" rIns="0" bIns="0" rtlCol="0" anchor="ctr"/>
-          <a:lstStyle/>
-          <a:p>
-            <a:pPr algn="ctr" indent="0" marL="0">
-              <a:buNone/>
-            </a:pPr>
-            <a:r>
-              <a:rPr lang="en-US" sz="1600" b="1" dirty="0">
-                <a:solidFill>
-                  <a:schemeClr val="bg1"/>
-                </a:solidFill>
-              </a:rPr>
-              <a:t>1</a:t>
-            </a:r>
-            <a:endParaRPr lang="en-US" sz="1600" dirty="0"/>
-          </a:p>
-        </p:txBody>
-      </p:sp>
-      <p:sp>
-        <p:nvSpPr>
-          <p:cNvPr id="5" name="Text 3"/>
+          <a:ln w="12700">
+            <a:solidFill>
+              <a:schemeClr val="accent1"/>
+            </a:solidFill>
+            <a:prstDash val="solid"/>
+          </a:ln>
+        </p:spPr>
+      </p:sp>
+      <p:pic>
+        <p:nvPicPr>
+          <p:cNvPr id="5" name="Image 0" descr="FileSignature">    </p:cNvPr>
+          <p:cNvPicPr>
+            <a:picLocks noChangeAspect="1"/>
+          </p:cNvPicPr>
+          <p:nvPr/>
+        </p:nvPicPr>
+        <p:blipFill>
+          <a:blip r:embed="rId1"/>
+          <a:stretch>
+            <a:fillRect/>
+          </a:stretch>
+        </p:blipFill>
+        <p:spPr>
+          <a:xfrm>
+            <a:off x="964692" y="1924812"/>
+            <a:ext cx="283464" cy="283464"/>
+          </a:xfrm>
+          <a:prstGeom prst="rect">
+            <a:avLst/>
+          </a:prstGeom>
+        </p:spPr>
+      </p:pic>
+      <p:sp>
+        <p:nvSpPr>
+          <p:cNvPr id="6" name="Text 3"/>
           <p:cNvSpPr txBox="1"/>
           <p:nvPr/>
         </p:nvSpPr>
@@ -7227,7 +8983,7 @@
       </p:sp>
       <p:sp>
         <p:nvSpPr>
-          <p:cNvPr id="6" name="Text 4"/>
+          <p:cNvPr id="7" name="Text 4"/>
           <p:cNvSpPr txBox="1"/>
           <p:nvPr/>
         </p:nvSpPr>
@@ -7263,7 +9019,7 @@
       </p:sp>
       <p:sp>
         <p:nvSpPr>
-          <p:cNvPr id="7" name="Shape 5"/>
+          <p:cNvPr id="8" name="Shape 5"/>
           <p:cNvSpPr/>
           <p:nvPr/>
         </p:nvSpPr>
@@ -7297,14 +9053,14 @@
       </p:sp>
       <p:sp>
         <p:nvSpPr>
-          <p:cNvPr id="8" name="Text 6"/>
-          <p:cNvSpPr txBox="1"/>
-          <p:nvPr/>
-        </p:nvSpPr>
-        <p:spPr>
-          <a:xfrm>
-            <a:off x="4609948" y="1828800"/>
-            <a:ext cx="420624" cy="420624"/>
+          <p:cNvPr id="9" name="Shape 6"/>
+          <p:cNvSpPr/>
+          <p:nvPr/>
+        </p:nvSpPr>
+        <p:spPr>
+          <a:xfrm>
+            <a:off x="4609948" y="1783080"/>
+            <a:ext cx="566928" cy="566928"/>
           </a:xfrm>
           <a:prstGeom prst="ellipse">
             <a:avLst/>
@@ -7312,30 +9068,41 @@
           <a:solidFill>
             <a:schemeClr val="accent1"/>
           </a:solidFill>
-          <a:ln/>
-        </p:spPr>
-        <p:txBody>
-          <a:bodyPr wrap="square" lIns="0" tIns="0" rIns="0" bIns="0" rtlCol="0" anchor="ctr"/>
-          <a:lstStyle/>
-          <a:p>
-            <a:pPr algn="ctr" indent="0" marL="0">
-              <a:buNone/>
-            </a:pPr>
-            <a:r>
-              <a:rPr lang="en-US" sz="1600" b="1" dirty="0">
-                <a:solidFill>
-                  <a:schemeClr val="bg1"/>
-                </a:solidFill>
-              </a:rPr>
-              <a:t>2</a:t>
-            </a:r>
-            <a:endParaRPr lang="en-US" sz="1600" dirty="0"/>
-          </a:p>
-        </p:txBody>
-      </p:sp>
-      <p:sp>
-        <p:nvSpPr>
-          <p:cNvPr id="9" name="Text 7"/>
+          <a:ln w="12700">
+            <a:solidFill>
+              <a:schemeClr val="accent1"/>
+            </a:solidFill>
+            <a:prstDash val="solid"/>
+          </a:ln>
+        </p:spPr>
+      </p:sp>
+      <p:pic>
+        <p:nvPicPr>
+          <p:cNvPr id="10" name="Image 1" descr="MagnifyingGlassChart">    </p:cNvPr>
+          <p:cNvPicPr>
+            <a:picLocks noChangeAspect="1"/>
+          </p:cNvPicPr>
+          <p:nvPr/>
+        </p:nvPicPr>
+        <p:blipFill>
+          <a:blip r:embed="rId2"/>
+          <a:stretch>
+            <a:fillRect/>
+          </a:stretch>
+        </p:blipFill>
+        <p:spPr>
+          <a:xfrm>
+            <a:off x="4751680" y="1924812"/>
+            <a:ext cx="283464" cy="283464"/>
+          </a:xfrm>
+          <a:prstGeom prst="rect">
+            <a:avLst/>
+          </a:prstGeom>
+        </p:spPr>
+      </p:pic>
+      <p:sp>
+        <p:nvSpPr>
+          <p:cNvPr id="11" name="Text 7"/>
           <p:cNvSpPr txBox="1"/>
           <p:nvPr/>
         </p:nvSpPr>
@@ -7371,7 +9138,7 @@
       </p:sp>
       <p:sp>
         <p:nvSpPr>
-          <p:cNvPr id="10" name="Text 8"/>
+          <p:cNvPr id="12" name="Text 8"/>
           <p:cNvSpPr txBox="1"/>
           <p:nvPr/>
         </p:nvSpPr>
@@ -7407,7 +9174,7 @@
       </p:sp>
       <p:sp>
         <p:nvSpPr>
-          <p:cNvPr id="11" name="Shape 9"/>
+          <p:cNvPr id="13" name="Shape 9"/>
           <p:cNvSpPr/>
           <p:nvPr/>
         </p:nvSpPr>
@@ -7441,14 +9208,14 @@
       </p:sp>
       <p:sp>
         <p:nvSpPr>
-          <p:cNvPr id="12" name="Text 10"/>
-          <p:cNvSpPr txBox="1"/>
-          <p:nvPr/>
-        </p:nvSpPr>
-        <p:spPr>
-          <a:xfrm>
-            <a:off x="8396935" y="1828800"/>
-            <a:ext cx="420624" cy="420624"/>
+          <p:cNvPr id="14" name="Shape 10"/>
+          <p:cNvSpPr/>
+          <p:nvPr/>
+        </p:nvSpPr>
+        <p:spPr>
+          <a:xfrm>
+            <a:off x="8396935" y="1783080"/>
+            <a:ext cx="566928" cy="566928"/>
           </a:xfrm>
           <a:prstGeom prst="ellipse">
             <a:avLst/>
@@ -7456,30 +9223,41 @@
           <a:solidFill>
             <a:schemeClr val="accent1"/>
           </a:solidFill>
-          <a:ln/>
-        </p:spPr>
-        <p:txBody>
-          <a:bodyPr wrap="square" lIns="0" tIns="0" rIns="0" bIns="0" rtlCol="0" anchor="ctr"/>
-          <a:lstStyle/>
-          <a:p>
-            <a:pPr algn="ctr" indent="0" marL="0">
-              <a:buNone/>
-            </a:pPr>
-            <a:r>
-              <a:rPr lang="en-US" sz="1600" b="1" dirty="0">
-                <a:solidFill>
-                  <a:schemeClr val="bg1"/>
-                </a:solidFill>
-              </a:rPr>
-              <a:t>3</a:t>
-            </a:r>
-            <a:endParaRPr lang="en-US" sz="1600" dirty="0"/>
-          </a:p>
-        </p:txBody>
-      </p:sp>
-      <p:sp>
-        <p:nvSpPr>
-          <p:cNvPr id="13" name="Text 11"/>
+          <a:ln w="12700">
+            <a:solidFill>
+              <a:schemeClr val="accent1"/>
+            </a:solidFill>
+            <a:prstDash val="solid"/>
+          </a:ln>
+        </p:spPr>
+      </p:sp>
+      <p:pic>
+        <p:nvPicPr>
+          <p:cNvPr id="15" name="Image 2" descr="ClockRotateLeft">    </p:cNvPr>
+          <p:cNvPicPr>
+            <a:picLocks noChangeAspect="1"/>
+          </p:cNvPicPr>
+          <p:nvPr/>
+        </p:nvPicPr>
+        <p:blipFill>
+          <a:blip r:embed="rId3"/>
+          <a:stretch>
+            <a:fillRect/>
+          </a:stretch>
+        </p:blipFill>
+        <p:spPr>
+          <a:xfrm>
+            <a:off x="8538667" y="1924812"/>
+            <a:ext cx="283464" cy="283464"/>
+          </a:xfrm>
+          <a:prstGeom prst="rect">
+            <a:avLst/>
+          </a:prstGeom>
+        </p:spPr>
+      </p:pic>
+      <p:sp>
+        <p:nvSpPr>
+          <p:cNvPr id="16" name="Text 11"/>
           <p:cNvSpPr txBox="1"/>
           <p:nvPr/>
         </p:nvSpPr>
@@ -7515,7 +9293,7 @@
       </p:sp>
       <p:sp>
         <p:nvSpPr>
-          <p:cNvPr id="14" name="Text 12"/>
+          <p:cNvPr id="17" name="Text 12"/>
           <p:cNvSpPr txBox="1"/>
           <p:nvPr/>
         </p:nvSpPr>
@@ -7551,7 +9329,7 @@
       </p:sp>
       <p:sp>
         <p:nvSpPr>
-          <p:cNvPr id="15" name="Shape 13"/>
+          <p:cNvPr id="18" name="Shape 13"/>
           <p:cNvSpPr/>
           <p:nvPr/>
         </p:nvSpPr>
@@ -7585,7 +9363,7 @@
       </p:sp>
       <p:sp>
         <p:nvSpPr>
-          <p:cNvPr id="16" name="Text 14"/>
+          <p:cNvPr id="19" name="Text 14"/>
           <p:cNvSpPr txBox="1"/>
           <p:nvPr/>
         </p:nvSpPr>
@@ -7794,8 +9572,8 @@
         </p:nvSpPr>
         <p:spPr>
           <a:xfrm>
-            <a:off x="822960" y="2880360"/>
-            <a:ext cx="457200" cy="457200"/>
+            <a:off x="822960" y="2834640"/>
+            <a:ext cx="548640" cy="548640"/>
           </a:xfrm>
           <a:prstGeom prst="ellipse">
             <a:avLst/>
@@ -7811,16 +9589,40 @@
           </a:ln>
         </p:spPr>
       </p:sp>
-      <p:sp>
-        <p:nvSpPr>
-          <p:cNvPr id="7" name="Text 5"/>
+      <p:pic>
+        <p:nvPicPr>
+          <p:cNvPr id="7" name="Image 0" descr="User">    </p:cNvPr>
+          <p:cNvPicPr>
+            <a:picLocks noChangeAspect="1"/>
+          </p:cNvPicPr>
+          <p:nvPr/>
+        </p:nvPicPr>
+        <p:blipFill>
+          <a:blip r:embed="rId1"/>
+          <a:stretch>
+            <a:fillRect/>
+          </a:stretch>
+        </p:blipFill>
+        <p:spPr>
+          <a:xfrm>
+            <a:off x="960120" y="2971800"/>
+            <a:ext cx="274320" cy="274320"/>
+          </a:xfrm>
+          <a:prstGeom prst="rect">
+            <a:avLst/>
+          </a:prstGeom>
+        </p:spPr>
+      </p:pic>
+      <p:sp>
+        <p:nvSpPr>
+          <p:cNvPr id="8" name="Text 5"/>
           <p:cNvSpPr txBox="1"/>
           <p:nvPr/>
         </p:nvSpPr>
         <p:spPr>
           <a:xfrm>
-            <a:off x="1417320" y="2880360"/>
-            <a:ext cx="4267048" cy="457200"/>
+            <a:off x="1508760" y="2880360"/>
+            <a:ext cx="4175608" cy="457200"/>
           </a:xfrm>
           <a:prstGeom prst="rect">
             <a:avLst/>
@@ -7849,7 +9651,7 @@
       </p:sp>
       <p:sp>
         <p:nvSpPr>
-          <p:cNvPr id="8" name="Text 6"/>
+          <p:cNvPr id="9" name="Text 6"/>
           <p:cNvSpPr txBox="1"/>
           <p:nvPr/>
         </p:nvSpPr>
@@ -7925,7 +9727,7 @@
       </p:sp>
       <p:sp>
         <p:nvSpPr>
-          <p:cNvPr id="9" name="Shape 7"/>
+          <p:cNvPr id="10" name="Shape 7"/>
           <p:cNvSpPr/>
           <p:nvPr/>
         </p:nvSpPr>
@@ -7959,14 +9761,14 @@
       </p:sp>
       <p:sp>
         <p:nvSpPr>
-          <p:cNvPr id="10" name="Shape 8"/>
+          <p:cNvPr id="11" name="Shape 8"/>
           <p:cNvSpPr/>
           <p:nvPr/>
         </p:nvSpPr>
         <p:spPr>
           <a:xfrm>
-            <a:off x="6553048" y="2880360"/>
-            <a:ext cx="457200" cy="457200"/>
+            <a:off x="6553048" y="2834640"/>
+            <a:ext cx="548640" cy="548640"/>
           </a:xfrm>
           <a:prstGeom prst="ellipse">
             <a:avLst/>
@@ -7982,16 +9784,40 @@
           </a:ln>
         </p:spPr>
       </p:sp>
-      <p:sp>
-        <p:nvSpPr>
-          <p:cNvPr id="11" name="Text 9"/>
+      <p:pic>
+        <p:nvPicPr>
+          <p:cNvPr id="12" name="Image 1" descr="Landmark">    </p:cNvPr>
+          <p:cNvPicPr>
+            <a:picLocks noChangeAspect="1"/>
+          </p:cNvPicPr>
+          <p:nvPr/>
+        </p:nvPicPr>
+        <p:blipFill>
+          <a:blip r:embed="rId2"/>
+          <a:stretch>
+            <a:fillRect/>
+          </a:stretch>
+        </p:blipFill>
+        <p:spPr>
+          <a:xfrm>
+            <a:off x="6690208" y="2971800"/>
+            <a:ext cx="274320" cy="274320"/>
+          </a:xfrm>
+          <a:prstGeom prst="rect">
+            <a:avLst/>
+          </a:prstGeom>
+        </p:spPr>
+      </p:pic>
+      <p:sp>
+        <p:nvSpPr>
+          <p:cNvPr id="13" name="Text 9"/>
           <p:cNvSpPr txBox="1"/>
           <p:nvPr/>
         </p:nvSpPr>
         <p:spPr>
           <a:xfrm>
-            <a:off x="7147408" y="2880360"/>
-            <a:ext cx="4267048" cy="457200"/>
+            <a:off x="7238848" y="2880360"/>
+            <a:ext cx="4175608" cy="457200"/>
           </a:xfrm>
           <a:prstGeom prst="rect">
             <a:avLst/>
@@ -8020,7 +9846,7 @@
       </p:sp>
       <p:sp>
         <p:nvSpPr>
-          <p:cNvPr id="12" name="Text 10"/>
+          <p:cNvPr id="14" name="Text 10"/>
           <p:cNvSpPr txBox="1"/>
           <p:nvPr/>
         </p:nvSpPr>
@@ -8096,7 +9922,7 @@
       </p:sp>
       <p:sp>
         <p:nvSpPr>
-          <p:cNvPr id="13" name="Shape 11"/>
+          <p:cNvPr id="15" name="Shape 11"/>
           <p:cNvSpPr/>
           <p:nvPr/>
         </p:nvSpPr>
@@ -8123,7 +9949,7 @@
       </p:sp>
       <p:sp>
         <p:nvSpPr>
-          <p:cNvPr id="14" name="Text 12"/>
+          <p:cNvPr id="16" name="Text 12"/>
           <p:cNvSpPr txBox="1"/>
           <p:nvPr/>
         </p:nvSpPr>
@@ -8256,14 +10082,14 @@
       </p:sp>
       <p:sp>
         <p:nvSpPr>
-          <p:cNvPr id="4" name="Text 2"/>
-          <p:cNvSpPr txBox="1"/>
-          <p:nvPr/>
-        </p:nvSpPr>
-        <p:spPr>
-          <a:xfrm>
-            <a:off x="658368" y="1783080"/>
-            <a:ext cx="420624" cy="420624"/>
+          <p:cNvPr id="4" name="Shape 2"/>
+          <p:cNvSpPr/>
+          <p:nvPr/>
+        </p:nvSpPr>
+        <p:spPr>
+          <a:xfrm>
+            <a:off x="658368" y="1755648"/>
+            <a:ext cx="512064" cy="512064"/>
           </a:xfrm>
           <a:prstGeom prst="ellipse">
             <a:avLst/>
@@ -8271,30 +10097,41 @@
           <a:solidFill>
             <a:schemeClr val="accent1"/>
           </a:solidFill>
-          <a:ln/>
-        </p:spPr>
-        <p:txBody>
-          <a:bodyPr wrap="square" lIns="0" tIns="0" rIns="0" bIns="0" rtlCol="0" anchor="ctr"/>
-          <a:lstStyle/>
-          <a:p>
-            <a:pPr algn="ctr" indent="0" marL="0">
-              <a:buNone/>
-            </a:pPr>
-            <a:r>
-              <a:rPr lang="en-US" sz="1600" b="1" dirty="0">
-                <a:solidFill>
-                  <a:schemeClr val="bg1"/>
-                </a:solidFill>
-              </a:rPr>
-              <a:t>1</a:t>
-            </a:r>
-            <a:endParaRPr lang="en-US" sz="1600" dirty="0"/>
-          </a:p>
-        </p:txBody>
-      </p:sp>
-      <p:sp>
-        <p:nvSpPr>
-          <p:cNvPr id="5" name="Text 3"/>
+          <a:ln w="12700">
+            <a:solidFill>
+              <a:schemeClr val="accent1"/>
+            </a:solidFill>
+            <a:prstDash val="solid"/>
+          </a:ln>
+        </p:spPr>
+      </p:sp>
+      <p:pic>
+        <p:nvPicPr>
+          <p:cNvPr id="5" name="Image 0" descr="FileArrowUp">    </p:cNvPr>
+          <p:cNvPicPr>
+            <a:picLocks noChangeAspect="1"/>
+          </p:cNvPicPr>
+          <p:nvPr/>
+        </p:nvPicPr>
+        <p:blipFill>
+          <a:blip r:embed="rId1"/>
+          <a:stretch>
+            <a:fillRect/>
+          </a:stretch>
+        </p:blipFill>
+        <p:spPr>
+          <a:xfrm>
+            <a:off x="786384" y="1883664"/>
+            <a:ext cx="256032" cy="256032"/>
+          </a:xfrm>
+          <a:prstGeom prst="rect">
+            <a:avLst/>
+          </a:prstGeom>
+        </p:spPr>
+      </p:pic>
+      <p:sp>
+        <p:nvSpPr>
+          <p:cNvPr id="6" name="Text 3"/>
           <p:cNvSpPr txBox="1"/>
           <p:nvPr/>
         </p:nvSpPr>
@@ -8330,7 +10167,7 @@
       </p:sp>
       <p:sp>
         <p:nvSpPr>
-          <p:cNvPr id="6" name="Text 4"/>
+          <p:cNvPr id="7" name="Text 4"/>
           <p:cNvSpPr txBox="1"/>
           <p:nvPr/>
         </p:nvSpPr>
@@ -8366,7 +10203,7 @@
       </p:sp>
       <p:sp>
         <p:nvSpPr>
-          <p:cNvPr id="7" name="Shape 5"/>
+          <p:cNvPr id="8" name="Shape 5"/>
           <p:cNvSpPr/>
           <p:nvPr/>
         </p:nvSpPr>
@@ -8391,7 +10228,7 @@
       </p:sp>
       <p:sp>
         <p:nvSpPr>
-          <p:cNvPr id="8" name="Shape 6"/>
+          <p:cNvPr id="9" name="Shape 6"/>
           <p:cNvSpPr/>
           <p:nvPr/>
         </p:nvSpPr>
@@ -8425,14 +10262,14 @@
       </p:sp>
       <p:sp>
         <p:nvSpPr>
-          <p:cNvPr id="9" name="Text 7"/>
-          <p:cNvSpPr txBox="1"/>
-          <p:nvPr/>
-        </p:nvSpPr>
-        <p:spPr>
-          <a:xfrm>
-            <a:off x="2269693" y="1783080"/>
-            <a:ext cx="420624" cy="420624"/>
+          <p:cNvPr id="10" name="Shape 7"/>
+          <p:cNvSpPr/>
+          <p:nvPr/>
+        </p:nvSpPr>
+        <p:spPr>
+          <a:xfrm>
+            <a:off x="2269693" y="1755648"/>
+            <a:ext cx="512064" cy="512064"/>
           </a:xfrm>
           <a:prstGeom prst="ellipse">
             <a:avLst/>
@@ -8440,30 +10277,41 @@
           <a:solidFill>
             <a:schemeClr val="accent1"/>
           </a:solidFill>
-          <a:ln/>
-        </p:spPr>
-        <p:txBody>
-          <a:bodyPr wrap="square" lIns="0" tIns="0" rIns="0" bIns="0" rtlCol="0" anchor="ctr"/>
-          <a:lstStyle/>
-          <a:p>
-            <a:pPr algn="ctr" indent="0" marL="0">
-              <a:buNone/>
-            </a:pPr>
-            <a:r>
-              <a:rPr lang="en-US" sz="1600" b="1" dirty="0">
-                <a:solidFill>
-                  <a:schemeClr val="bg1"/>
-                </a:solidFill>
-              </a:rPr>
-              <a:t>2</a:t>
-            </a:r>
-            <a:endParaRPr lang="en-US" sz="1600" dirty="0"/>
-          </a:p>
-        </p:txBody>
-      </p:sp>
-      <p:sp>
-        <p:nvSpPr>
-          <p:cNvPr id="10" name="Text 8"/>
+          <a:ln w="12700">
+            <a:solidFill>
+              <a:schemeClr val="accent1"/>
+            </a:solidFill>
+            <a:prstDash val="solid"/>
+          </a:ln>
+        </p:spPr>
+      </p:sp>
+      <p:pic>
+        <p:nvPicPr>
+          <p:cNvPr id="11" name="Image 1" descr="UserSecret">    </p:cNvPr>
+          <p:cNvPicPr>
+            <a:picLocks noChangeAspect="1"/>
+          </p:cNvPicPr>
+          <p:nvPr/>
+        </p:nvPicPr>
+        <p:blipFill>
+          <a:blip r:embed="rId2"/>
+          <a:stretch>
+            <a:fillRect/>
+          </a:stretch>
+        </p:blipFill>
+        <p:spPr>
+          <a:xfrm>
+            <a:off x="2397709" y="1883664"/>
+            <a:ext cx="256032" cy="256032"/>
+          </a:xfrm>
+          <a:prstGeom prst="rect">
+            <a:avLst/>
+          </a:prstGeom>
+        </p:spPr>
+      </p:pic>
+      <p:sp>
+        <p:nvSpPr>
+          <p:cNvPr id="12" name="Text 8"/>
           <p:cNvSpPr txBox="1"/>
           <p:nvPr/>
         </p:nvSpPr>
@@ -8499,7 +10347,7 @@
       </p:sp>
       <p:sp>
         <p:nvSpPr>
-          <p:cNvPr id="11" name="Text 9"/>
+          <p:cNvPr id="13" name="Text 9"/>
           <p:cNvSpPr txBox="1"/>
           <p:nvPr/>
         </p:nvSpPr>
@@ -8535,7 +10383,7 @@
       </p:sp>
       <p:sp>
         <p:nvSpPr>
-          <p:cNvPr id="12" name="Shape 10"/>
+          <p:cNvPr id="14" name="Shape 10"/>
           <p:cNvSpPr/>
           <p:nvPr/>
         </p:nvSpPr>
@@ -8560,7 +10408,7 @@
       </p:sp>
       <p:sp>
         <p:nvSpPr>
-          <p:cNvPr id="13" name="Shape 11"/>
+          <p:cNvPr id="15" name="Shape 11"/>
           <p:cNvSpPr/>
           <p:nvPr/>
         </p:nvSpPr>
@@ -8594,14 +10442,14 @@
       </p:sp>
       <p:sp>
         <p:nvSpPr>
-          <p:cNvPr id="14" name="Text 12"/>
-          <p:cNvSpPr txBox="1"/>
-          <p:nvPr/>
-        </p:nvSpPr>
-        <p:spPr>
-          <a:xfrm>
-            <a:off x="3881018" y="1783080"/>
-            <a:ext cx="420624" cy="420624"/>
+          <p:cNvPr id="16" name="Shape 12"/>
+          <p:cNvSpPr/>
+          <p:nvPr/>
+        </p:nvSpPr>
+        <p:spPr>
+          <a:xfrm>
+            <a:off x="3881018" y="1755648"/>
+            <a:ext cx="512064" cy="512064"/>
           </a:xfrm>
           <a:prstGeom prst="ellipse">
             <a:avLst/>
@@ -8609,30 +10457,41 @@
           <a:solidFill>
             <a:schemeClr val="accent1"/>
           </a:solidFill>
-          <a:ln/>
-        </p:spPr>
-        <p:txBody>
-          <a:bodyPr wrap="square" lIns="0" tIns="0" rIns="0" bIns="0" rtlCol="0" anchor="ctr"/>
-          <a:lstStyle/>
-          <a:p>
-            <a:pPr algn="ctr" indent="0" marL="0">
-              <a:buNone/>
-            </a:pPr>
-            <a:r>
-              <a:rPr lang="en-US" sz="1600" b="1" dirty="0">
-                <a:solidFill>
-                  <a:schemeClr val="bg1"/>
-                </a:solidFill>
-              </a:rPr>
-              <a:t>3</a:t>
-            </a:r>
-            <a:endParaRPr lang="en-US" sz="1600" dirty="0"/>
-          </a:p>
-        </p:txBody>
-      </p:sp>
-      <p:sp>
-        <p:nvSpPr>
-          <p:cNvPr id="15" name="Text 13"/>
+          <a:ln w="12700">
+            <a:solidFill>
+              <a:schemeClr val="accent1"/>
+            </a:solidFill>
+            <a:prstDash val="solid"/>
+          </a:ln>
+        </p:spPr>
+      </p:sp>
+      <p:pic>
+        <p:nvPicPr>
+          <p:cNvPr id="17" name="Image 2" descr="Brain">    </p:cNvPr>
+          <p:cNvPicPr>
+            <a:picLocks noChangeAspect="1"/>
+          </p:cNvPicPr>
+          <p:nvPr/>
+        </p:nvPicPr>
+        <p:blipFill>
+          <a:blip r:embed="rId3"/>
+          <a:stretch>
+            <a:fillRect/>
+          </a:stretch>
+        </p:blipFill>
+        <p:spPr>
+          <a:xfrm>
+            <a:off x="4009034" y="1883664"/>
+            <a:ext cx="256032" cy="256032"/>
+          </a:xfrm>
+          <a:prstGeom prst="rect">
+            <a:avLst/>
+          </a:prstGeom>
+        </p:spPr>
+      </p:pic>
+      <p:sp>
+        <p:nvSpPr>
+          <p:cNvPr id="18" name="Text 13"/>
           <p:cNvSpPr txBox="1"/>
           <p:nvPr/>
         </p:nvSpPr>
@@ -8668,7 +10527,7 @@
       </p:sp>
       <p:sp>
         <p:nvSpPr>
-          <p:cNvPr id="16" name="Text 14"/>
+          <p:cNvPr id="19" name="Text 14"/>
           <p:cNvSpPr txBox="1"/>
           <p:nvPr/>
         </p:nvSpPr>
@@ -8704,7 +10563,7 @@
       </p:sp>
       <p:sp>
         <p:nvSpPr>
-          <p:cNvPr id="17" name="Shape 15"/>
+          <p:cNvPr id="20" name="Shape 15"/>
           <p:cNvSpPr/>
           <p:nvPr/>
         </p:nvSpPr>
@@ -8729,7 +10588,7 @@
       </p:sp>
       <p:sp>
         <p:nvSpPr>
-          <p:cNvPr id="18" name="Shape 16"/>
+          <p:cNvPr id="21" name="Shape 16"/>
           <p:cNvSpPr/>
           <p:nvPr/>
         </p:nvSpPr>
@@ -8763,14 +10622,14 @@
       </p:sp>
       <p:sp>
         <p:nvSpPr>
-          <p:cNvPr id="19" name="Text 17"/>
-          <p:cNvSpPr txBox="1"/>
-          <p:nvPr/>
-        </p:nvSpPr>
-        <p:spPr>
-          <a:xfrm>
-            <a:off x="5492344" y="1783080"/>
-            <a:ext cx="420624" cy="420624"/>
+          <p:cNvPr id="22" name="Shape 17"/>
+          <p:cNvSpPr/>
+          <p:nvPr/>
+        </p:nvSpPr>
+        <p:spPr>
+          <a:xfrm>
+            <a:off x="5492344" y="1755648"/>
+            <a:ext cx="512064" cy="512064"/>
           </a:xfrm>
           <a:prstGeom prst="ellipse">
             <a:avLst/>
@@ -8778,30 +10637,41 @@
           <a:solidFill>
             <a:schemeClr val="accent1"/>
           </a:solidFill>
-          <a:ln/>
-        </p:spPr>
-        <p:txBody>
-          <a:bodyPr wrap="square" lIns="0" tIns="0" rIns="0" bIns="0" rtlCol="0" anchor="ctr"/>
-          <a:lstStyle/>
-          <a:p>
-            <a:pPr algn="ctr" indent="0" marL="0">
-              <a:buNone/>
-            </a:pPr>
-            <a:r>
-              <a:rPr lang="en-US" sz="1600" b="1" dirty="0">
-                <a:solidFill>
-                  <a:schemeClr val="bg1"/>
-                </a:solidFill>
-              </a:rPr>
-              <a:t>4</a:t>
-            </a:r>
-            <a:endParaRPr lang="en-US" sz="1600" dirty="0"/>
-          </a:p>
-        </p:txBody>
-      </p:sp>
-      <p:sp>
-        <p:nvSpPr>
-          <p:cNvPr id="20" name="Text 18"/>
+          <a:ln w="12700">
+            <a:solidFill>
+              <a:schemeClr val="accent1"/>
+            </a:solidFill>
+            <a:prstDash val="solid"/>
+          </a:ln>
+        </p:spPr>
+      </p:sp>
+      <p:pic>
+        <p:nvPicPr>
+          <p:cNvPr id="23" name="Image 3" descr="CheckDouble">    </p:cNvPr>
+          <p:cNvPicPr>
+            <a:picLocks noChangeAspect="1"/>
+          </p:cNvPicPr>
+          <p:nvPr/>
+        </p:nvPicPr>
+        <p:blipFill>
+          <a:blip r:embed="rId4"/>
+          <a:stretch>
+            <a:fillRect/>
+          </a:stretch>
+        </p:blipFill>
+        <p:spPr>
+          <a:xfrm>
+            <a:off x="5620360" y="1883664"/>
+            <a:ext cx="256032" cy="256032"/>
+          </a:xfrm>
+          <a:prstGeom prst="rect">
+            <a:avLst/>
+          </a:prstGeom>
+        </p:spPr>
+      </p:pic>
+      <p:sp>
+        <p:nvSpPr>
+          <p:cNvPr id="24" name="Text 18"/>
           <p:cNvSpPr txBox="1"/>
           <p:nvPr/>
         </p:nvSpPr>
@@ -8837,7 +10707,7 @@
       </p:sp>
       <p:sp>
         <p:nvSpPr>
-          <p:cNvPr id="21" name="Text 19"/>
+          <p:cNvPr id="25" name="Text 19"/>
           <p:cNvSpPr txBox="1"/>
           <p:nvPr/>
         </p:nvSpPr>
@@ -8873,7 +10743,7 @@
       </p:sp>
       <p:sp>
         <p:nvSpPr>
-          <p:cNvPr id="22" name="Shape 20"/>
+          <p:cNvPr id="26" name="Shape 20"/>
           <p:cNvSpPr/>
           <p:nvPr/>
         </p:nvSpPr>
@@ -8898,7 +10768,7 @@
       </p:sp>
       <p:sp>
         <p:nvSpPr>
-          <p:cNvPr id="23" name="Shape 21"/>
+          <p:cNvPr id="27" name="Shape 21"/>
           <p:cNvSpPr/>
           <p:nvPr/>
         </p:nvSpPr>
@@ -8932,14 +10802,14 @@
       </p:sp>
       <p:sp>
         <p:nvSpPr>
-          <p:cNvPr id="24" name="Text 22"/>
-          <p:cNvSpPr txBox="1"/>
-          <p:nvPr/>
-        </p:nvSpPr>
-        <p:spPr>
-          <a:xfrm>
-            <a:off x="7103669" y="1783080"/>
-            <a:ext cx="420624" cy="420624"/>
+          <p:cNvPr id="28" name="Shape 22"/>
+          <p:cNvSpPr/>
+          <p:nvPr/>
+        </p:nvSpPr>
+        <p:spPr>
+          <a:xfrm>
+            <a:off x="7103669" y="1755648"/>
+            <a:ext cx="512064" cy="512064"/>
           </a:xfrm>
           <a:prstGeom prst="ellipse">
             <a:avLst/>
@@ -8947,30 +10817,41 @@
           <a:solidFill>
             <a:schemeClr val="accent4"/>
           </a:solidFill>
-          <a:ln/>
-        </p:spPr>
-        <p:txBody>
-          <a:bodyPr wrap="square" lIns="0" tIns="0" rIns="0" bIns="0" rtlCol="0" anchor="ctr"/>
-          <a:lstStyle/>
-          <a:p>
-            <a:pPr algn="ctr" indent="0" marL="0">
-              <a:buNone/>
-            </a:pPr>
-            <a:r>
-              <a:rPr lang="en-US" sz="1600" b="1" dirty="0">
-                <a:solidFill>
-                  <a:schemeClr val="bg1"/>
-                </a:solidFill>
-              </a:rPr>
-              <a:t>5</a:t>
-            </a:r>
-            <a:endParaRPr lang="en-US" sz="1600" dirty="0"/>
-          </a:p>
-        </p:txBody>
-      </p:sp>
-      <p:sp>
-        <p:nvSpPr>
-          <p:cNvPr id="25" name="Text 23"/>
+          <a:ln w="12700">
+            <a:solidFill>
+              <a:schemeClr val="accent4"/>
+            </a:solidFill>
+            <a:prstDash val="solid"/>
+          </a:ln>
+        </p:spPr>
+      </p:sp>
+      <p:pic>
+        <p:nvPicPr>
+          <p:cNvPr id="29" name="Image 4" descr="ScaleBalanced">    </p:cNvPr>
+          <p:cNvPicPr>
+            <a:picLocks noChangeAspect="1"/>
+          </p:cNvPicPr>
+          <p:nvPr/>
+        </p:nvPicPr>
+        <p:blipFill>
+          <a:blip r:embed="rId5"/>
+          <a:stretch>
+            <a:fillRect/>
+          </a:stretch>
+        </p:blipFill>
+        <p:spPr>
+          <a:xfrm>
+            <a:off x="7231685" y="1883664"/>
+            <a:ext cx="256032" cy="256032"/>
+          </a:xfrm>
+          <a:prstGeom prst="rect">
+            <a:avLst/>
+          </a:prstGeom>
+        </p:spPr>
+      </p:pic>
+      <p:sp>
+        <p:nvSpPr>
+          <p:cNvPr id="30" name="Text 23"/>
           <p:cNvSpPr txBox="1"/>
           <p:nvPr/>
         </p:nvSpPr>
@@ -9006,7 +10887,7 @@
       </p:sp>
       <p:sp>
         <p:nvSpPr>
-          <p:cNvPr id="26" name="Text 24"/>
+          <p:cNvPr id="31" name="Text 24"/>
           <p:cNvSpPr txBox="1"/>
           <p:nvPr/>
         </p:nvSpPr>
@@ -9042,7 +10923,7 @@
       </p:sp>
       <p:sp>
         <p:nvSpPr>
-          <p:cNvPr id="27" name="Shape 25"/>
+          <p:cNvPr id="32" name="Shape 25"/>
           <p:cNvSpPr/>
           <p:nvPr/>
         </p:nvSpPr>
@@ -9067,7 +10948,7 @@
       </p:sp>
       <p:sp>
         <p:nvSpPr>
-          <p:cNvPr id="28" name="Shape 26"/>
+          <p:cNvPr id="33" name="Shape 26"/>
           <p:cNvSpPr/>
           <p:nvPr/>
         </p:nvSpPr>
@@ -9101,14 +10982,14 @@
       </p:sp>
       <p:sp>
         <p:nvSpPr>
-          <p:cNvPr id="29" name="Text 27"/>
-          <p:cNvSpPr txBox="1"/>
-          <p:nvPr/>
-        </p:nvSpPr>
-        <p:spPr>
-          <a:xfrm>
-            <a:off x="8714994" y="1783080"/>
-            <a:ext cx="420624" cy="420624"/>
+          <p:cNvPr id="34" name="Shape 27"/>
+          <p:cNvSpPr/>
+          <p:nvPr/>
+        </p:nvSpPr>
+        <p:spPr>
+          <a:xfrm>
+            <a:off x="8714994" y="1755648"/>
+            <a:ext cx="512064" cy="512064"/>
           </a:xfrm>
           <a:prstGeom prst="ellipse">
             <a:avLst/>
@@ -9116,30 +10997,41 @@
           <a:solidFill>
             <a:schemeClr val="accent5"/>
           </a:solidFill>
-          <a:ln/>
-        </p:spPr>
-        <p:txBody>
-          <a:bodyPr wrap="square" lIns="0" tIns="0" rIns="0" bIns="0" rtlCol="0" anchor="ctr"/>
-          <a:lstStyle/>
-          <a:p>
-            <a:pPr algn="ctr" indent="0" marL="0">
-              <a:buNone/>
-            </a:pPr>
-            <a:r>
-              <a:rPr lang="en-US" sz="1600" b="1" dirty="0">
-                <a:solidFill>
-                  <a:schemeClr val="bg1"/>
-                </a:solidFill>
-              </a:rPr>
-              <a:t>6</a:t>
-            </a:r>
-            <a:endParaRPr lang="en-US" sz="1600" dirty="0"/>
-          </a:p>
-        </p:txBody>
-      </p:sp>
-      <p:sp>
-        <p:nvSpPr>
-          <p:cNvPr id="30" name="Text 28"/>
+          <a:ln w="12700">
+            <a:solidFill>
+              <a:schemeClr val="accent5"/>
+            </a:solidFill>
+            <a:prstDash val="solid"/>
+          </a:ln>
+        </p:spPr>
+      </p:sp>
+      <p:pic>
+        <p:nvPicPr>
+          <p:cNvPr id="35" name="Image 5" descr="PenToSquare">    </p:cNvPr>
+          <p:cNvPicPr>
+            <a:picLocks noChangeAspect="1"/>
+          </p:cNvPicPr>
+          <p:nvPr/>
+        </p:nvPicPr>
+        <p:blipFill>
+          <a:blip r:embed="rId6"/>
+          <a:stretch>
+            <a:fillRect/>
+          </a:stretch>
+        </p:blipFill>
+        <p:spPr>
+          <a:xfrm>
+            <a:off x="8843010" y="1883664"/>
+            <a:ext cx="256032" cy="256032"/>
+          </a:xfrm>
+          <a:prstGeom prst="rect">
+            <a:avLst/>
+          </a:prstGeom>
+        </p:spPr>
+      </p:pic>
+      <p:sp>
+        <p:nvSpPr>
+          <p:cNvPr id="36" name="Text 28"/>
           <p:cNvSpPr txBox="1"/>
           <p:nvPr/>
         </p:nvSpPr>
@@ -9175,7 +11067,7 @@
       </p:sp>
       <p:sp>
         <p:nvSpPr>
-          <p:cNvPr id="31" name="Text 29"/>
+          <p:cNvPr id="37" name="Text 29"/>
           <p:cNvSpPr txBox="1"/>
           <p:nvPr/>
         </p:nvSpPr>
@@ -9211,7 +11103,7 @@
       </p:sp>
       <p:sp>
         <p:nvSpPr>
-          <p:cNvPr id="32" name="Shape 30"/>
+          <p:cNvPr id="38" name="Shape 30"/>
           <p:cNvSpPr/>
           <p:nvPr/>
         </p:nvSpPr>
@@ -9236,7 +11128,7 @@
       </p:sp>
       <p:sp>
         <p:nvSpPr>
-          <p:cNvPr id="33" name="Shape 31"/>
+          <p:cNvPr id="39" name="Shape 31"/>
           <p:cNvSpPr/>
           <p:nvPr/>
         </p:nvSpPr>
@@ -9270,14 +11162,14 @@
       </p:sp>
       <p:sp>
         <p:nvSpPr>
-          <p:cNvPr id="34" name="Text 32"/>
-          <p:cNvSpPr txBox="1"/>
-          <p:nvPr/>
-        </p:nvSpPr>
-        <p:spPr>
-          <a:xfrm>
-            <a:off x="10326319" y="1783080"/>
-            <a:ext cx="420624" cy="420624"/>
+          <p:cNvPr id="40" name="Shape 32"/>
+          <p:cNvSpPr/>
+          <p:nvPr/>
+        </p:nvSpPr>
+        <p:spPr>
+          <a:xfrm>
+            <a:off x="10326319" y="1755648"/>
+            <a:ext cx="512064" cy="512064"/>
           </a:xfrm>
           <a:prstGeom prst="ellipse">
             <a:avLst/>
@@ -9285,30 +11177,41 @@
           <a:solidFill>
             <a:schemeClr val="accent5"/>
           </a:solidFill>
-          <a:ln/>
-        </p:spPr>
-        <p:txBody>
-          <a:bodyPr wrap="square" lIns="0" tIns="0" rIns="0" bIns="0" rtlCol="0" anchor="ctr"/>
-          <a:lstStyle/>
-          <a:p>
-            <a:pPr algn="ctr" indent="0" marL="0">
-              <a:buNone/>
-            </a:pPr>
-            <a:r>
-              <a:rPr lang="en-US" sz="1600" b="1" dirty="0">
-                <a:solidFill>
-                  <a:schemeClr val="bg1"/>
-                </a:solidFill>
-              </a:rPr>
-              <a:t>7</a:t>
-            </a:r>
-            <a:endParaRPr lang="en-US" sz="1600" dirty="0"/>
-          </a:p>
-        </p:txBody>
-      </p:sp>
-      <p:sp>
-        <p:nvSpPr>
-          <p:cNvPr id="35" name="Text 33"/>
+          <a:ln w="12700">
+            <a:solidFill>
+              <a:schemeClr val="accent5"/>
+            </a:solidFill>
+            <a:prstDash val="solid"/>
+          </a:ln>
+        </p:spPr>
+      </p:sp>
+      <p:pic>
+        <p:nvPicPr>
+          <p:cNvPr id="41" name="Image 6" descr="Link">    </p:cNvPr>
+          <p:cNvPicPr>
+            <a:picLocks noChangeAspect="1"/>
+          </p:cNvPicPr>
+          <p:nvPr/>
+        </p:nvPicPr>
+        <p:blipFill>
+          <a:blip r:embed="rId7"/>
+          <a:stretch>
+            <a:fillRect/>
+          </a:stretch>
+        </p:blipFill>
+        <p:spPr>
+          <a:xfrm>
+            <a:off x="10454335" y="1883664"/>
+            <a:ext cx="256032" cy="256032"/>
+          </a:xfrm>
+          <a:prstGeom prst="rect">
+            <a:avLst/>
+          </a:prstGeom>
+        </p:spPr>
+      </p:pic>
+      <p:sp>
+        <p:nvSpPr>
+          <p:cNvPr id="42" name="Text 33"/>
           <p:cNvSpPr txBox="1"/>
           <p:nvPr/>
         </p:nvSpPr>
@@ -9344,7 +11247,7 @@
       </p:sp>
       <p:sp>
         <p:nvSpPr>
-          <p:cNvPr id="36" name="Text 34"/>
+          <p:cNvPr id="43" name="Text 34"/>
           <p:cNvSpPr txBox="1"/>
           <p:nvPr/>
         </p:nvSpPr>
@@ -9380,7 +11283,7 @@
       </p:sp>
       <p:sp>
         <p:nvSpPr>
-          <p:cNvPr id="37" name="Text 35"/>
+          <p:cNvPr id="44" name="Text 35"/>
           <p:cNvSpPr txBox="1"/>
           <p:nvPr/>
         </p:nvSpPr>
@@ -9420,7 +11323,7 @@
       </p:sp>
       <p:sp>
         <p:nvSpPr>
-          <p:cNvPr id="38" name="Text 36"/>
+          <p:cNvPr id="45" name="Text 36"/>
           <p:cNvSpPr txBox="1"/>
           <p:nvPr/>
         </p:nvSpPr>
@@ -9460,7 +11363,7 @@
       </p:sp>
       <p:sp>
         <p:nvSpPr>
-          <p:cNvPr id="39" name="Text 37"/>
+          <p:cNvPr id="46" name="Text 37"/>
           <p:cNvSpPr txBox="1"/>
           <p:nvPr/>
         </p:nvSpPr>
@@ -9500,7 +11403,7 @@
       </p:sp>
       <p:sp>
         <p:nvSpPr>
-          <p:cNvPr id="40" name="Shape 38"/>
+          <p:cNvPr id="47" name="Shape 38"/>
           <p:cNvSpPr/>
           <p:nvPr/>
         </p:nvSpPr>
@@ -9534,7 +11437,7 @@
       </p:sp>
       <p:sp>
         <p:nvSpPr>
-          <p:cNvPr id="41" name="Text 39"/>
+          <p:cNvPr id="48" name="Text 39"/>
           <p:cNvSpPr txBox="1"/>
           <p:nvPr/>
         </p:nvSpPr>
@@ -9700,7 +11603,56 @@
       </p:sp>
       <p:sp>
         <p:nvSpPr>
-          <p:cNvPr id="5" name="Text 3"/>
+          <p:cNvPr id="5" name="Shape 3"/>
+          <p:cNvSpPr/>
+          <p:nvPr/>
+        </p:nvSpPr>
+        <p:spPr>
+          <a:xfrm>
+            <a:off x="3154680" y="1737360"/>
+            <a:ext cx="566928" cy="566928"/>
+          </a:xfrm>
+          <a:prstGeom prst="ellipse">
+            <a:avLst/>
+          </a:prstGeom>
+          <a:solidFill>
+            <a:schemeClr val="accent6"/>
+          </a:solidFill>
+          <a:ln w="12700">
+            <a:solidFill>
+              <a:schemeClr val="accent6"/>
+            </a:solidFill>
+            <a:prstDash val="solid"/>
+          </a:ln>
+        </p:spPr>
+      </p:sp>
+      <p:pic>
+        <p:nvPicPr>
+          <p:cNvPr id="6" name="Image 0" descr="CircleCheck">    </p:cNvPr>
+          <p:cNvPicPr>
+            <a:picLocks noChangeAspect="1"/>
+          </p:cNvPicPr>
+          <p:nvPr/>
+        </p:nvPicPr>
+        <p:blipFill>
+          <a:blip r:embed="rId1"/>
+          <a:stretch>
+            <a:fillRect/>
+          </a:stretch>
+        </p:blipFill>
+        <p:spPr>
+          <a:xfrm>
+            <a:off x="3296412" y="1879092"/>
+            <a:ext cx="283464" cy="283464"/>
+          </a:xfrm>
+          <a:prstGeom prst="rect">
+            <a:avLst/>
+          </a:prstGeom>
+        </p:spPr>
+      </p:pic>
+      <p:sp>
+        <p:nvSpPr>
+          <p:cNvPr id="7" name="Text 4"/>
           <p:cNvSpPr txBox="1"/>
           <p:nvPr/>
         </p:nvSpPr>
@@ -9736,7 +11688,7 @@
       </p:sp>
       <p:sp>
         <p:nvSpPr>
-          <p:cNvPr id="6" name="Text 4"/>
+          <p:cNvPr id="8" name="Text 5"/>
           <p:cNvSpPr txBox="1"/>
           <p:nvPr/>
         </p:nvSpPr>
@@ -9772,7 +11724,7 @@
       </p:sp>
       <p:sp>
         <p:nvSpPr>
-          <p:cNvPr id="7" name="Shape 5"/>
+          <p:cNvPr id="9" name="Shape 6"/>
           <p:cNvSpPr/>
           <p:nvPr/>
         </p:nvSpPr>
@@ -9799,7 +11751,7 @@
       </p:sp>
       <p:sp>
         <p:nvSpPr>
-          <p:cNvPr id="8" name="Text 6"/>
+          <p:cNvPr id="10" name="Text 7"/>
           <p:cNvSpPr txBox="1"/>
           <p:nvPr/>
         </p:nvSpPr>
@@ -9839,7 +11791,56 @@
       </p:sp>
       <p:sp>
         <p:nvSpPr>
-          <p:cNvPr id="9" name="Text 7"/>
+          <p:cNvPr id="11" name="Shape 8"/>
+          <p:cNvSpPr/>
+          <p:nvPr/>
+        </p:nvSpPr>
+        <p:spPr>
+          <a:xfrm>
+            <a:off x="6941668" y="1737360"/>
+            <a:ext cx="566928" cy="566928"/>
+          </a:xfrm>
+          <a:prstGeom prst="ellipse">
+            <a:avLst/>
+          </a:prstGeom>
+          <a:solidFill>
+            <a:schemeClr val="accent4"/>
+          </a:solidFill>
+          <a:ln w="12700">
+            <a:solidFill>
+              <a:schemeClr val="accent4"/>
+            </a:solidFill>
+            <a:prstDash val="solid"/>
+          </a:ln>
+        </p:spPr>
+      </p:sp>
+      <p:pic>
+        <p:nvPicPr>
+          <p:cNvPr id="12" name="Image 1" descr="FileCircleMinus">    </p:cNvPr>
+          <p:cNvPicPr>
+            <a:picLocks noChangeAspect="1"/>
+          </p:cNvPicPr>
+          <p:nvPr/>
+        </p:nvPicPr>
+        <p:blipFill>
+          <a:blip r:embed="rId2"/>
+          <a:stretch>
+            <a:fillRect/>
+          </a:stretch>
+        </p:blipFill>
+        <p:spPr>
+          <a:xfrm>
+            <a:off x="7083400" y="1879092"/>
+            <a:ext cx="283464" cy="283464"/>
+          </a:xfrm>
+          <a:prstGeom prst="rect">
+            <a:avLst/>
+          </a:prstGeom>
+        </p:spPr>
+      </p:pic>
+      <p:sp>
+        <p:nvSpPr>
+          <p:cNvPr id="13" name="Text 9"/>
           <p:cNvSpPr txBox="1"/>
           <p:nvPr/>
         </p:nvSpPr>
@@ -9875,7 +11876,7 @@
       </p:sp>
       <p:sp>
         <p:nvSpPr>
-          <p:cNvPr id="10" name="Text 8"/>
+          <p:cNvPr id="14" name="Text 10"/>
           <p:cNvSpPr txBox="1"/>
           <p:nvPr/>
         </p:nvSpPr>
@@ -9911,7 +11912,7 @@
       </p:sp>
       <p:sp>
         <p:nvSpPr>
-          <p:cNvPr id="11" name="Shape 9"/>
+          <p:cNvPr id="15" name="Shape 11"/>
           <p:cNvSpPr/>
           <p:nvPr/>
         </p:nvSpPr>
@@ -9938,7 +11939,7 @@
       </p:sp>
       <p:sp>
         <p:nvSpPr>
-          <p:cNvPr id="12" name="Text 10"/>
+          <p:cNvPr id="16" name="Text 12"/>
           <p:cNvSpPr txBox="1"/>
           <p:nvPr/>
         </p:nvSpPr>
@@ -9978,7 +11979,56 @@
       </p:sp>
       <p:sp>
         <p:nvSpPr>
-          <p:cNvPr id="13" name="Text 11"/>
+          <p:cNvPr id="17" name="Shape 13"/>
+          <p:cNvSpPr/>
+          <p:nvPr/>
+        </p:nvSpPr>
+        <p:spPr>
+          <a:xfrm>
+            <a:off x="10728655" y="1737360"/>
+            <a:ext cx="566928" cy="566928"/>
+          </a:xfrm>
+          <a:prstGeom prst="ellipse">
+            <a:avLst/>
+          </a:prstGeom>
+          <a:solidFill>
+            <a:schemeClr val="accent5"/>
+          </a:solidFill>
+          <a:ln w="12700">
+            <a:solidFill>
+              <a:schemeClr val="accent5"/>
+            </a:solidFill>
+            <a:prstDash val="solid"/>
+          </a:ln>
+        </p:spPr>
+      </p:sp>
+      <p:pic>
+        <p:nvPicPr>
+          <p:cNvPr id="18" name="Image 2" descr="CircleQuestion">    </p:cNvPr>
+          <p:cNvPicPr>
+            <a:picLocks noChangeAspect="1"/>
+          </p:cNvPicPr>
+          <p:nvPr/>
+        </p:nvPicPr>
+        <p:blipFill>
+          <a:blip r:embed="rId3"/>
+          <a:stretch>
+            <a:fillRect/>
+          </a:stretch>
+        </p:blipFill>
+        <p:spPr>
+          <a:xfrm>
+            <a:off x="10870387" y="1879092"/>
+            <a:ext cx="283464" cy="283464"/>
+          </a:xfrm>
+          <a:prstGeom prst="rect">
+            <a:avLst/>
+          </a:prstGeom>
+        </p:spPr>
+      </p:pic>
+      <p:sp>
+        <p:nvSpPr>
+          <p:cNvPr id="19" name="Text 14"/>
           <p:cNvSpPr txBox="1"/>
           <p:nvPr/>
         </p:nvSpPr>
@@ -10014,7 +12064,7 @@
       </p:sp>
       <p:sp>
         <p:nvSpPr>
-          <p:cNvPr id="14" name="Text 12"/>
+          <p:cNvPr id="20" name="Text 15"/>
           <p:cNvSpPr txBox="1"/>
           <p:nvPr/>
         </p:nvSpPr>
@@ -10050,7 +12100,7 @@
       </p:sp>
       <p:sp>
         <p:nvSpPr>
-          <p:cNvPr id="15" name="Shape 13"/>
+          <p:cNvPr id="21" name="Shape 16"/>
           <p:cNvSpPr/>
           <p:nvPr/>
         </p:nvSpPr>
@@ -10084,7 +12134,7 @@
       </p:sp>
       <p:sp>
         <p:nvSpPr>
-          <p:cNvPr id="16" name="Text 14"/>
+          <p:cNvPr id="22" name="Text 17"/>
           <p:cNvSpPr txBox="1"/>
           <p:nvPr/>
         </p:nvSpPr>
@@ -10120,7 +12170,7 @@
       </p:sp>
       <p:sp>
         <p:nvSpPr>
-          <p:cNvPr id="17" name="Text 15"/>
+          <p:cNvPr id="23" name="Text 18"/>
           <p:cNvSpPr txBox="1"/>
           <p:nvPr/>
         </p:nvSpPr>
@@ -10184,7 +12234,7 @@
       </p:sp>
       <p:sp>
         <p:nvSpPr>
-          <p:cNvPr id="18" name="Shape 16"/>
+          <p:cNvPr id="24" name="Shape 19"/>
           <p:cNvSpPr/>
           <p:nvPr/>
         </p:nvSpPr>
@@ -10218,7 +12268,7 @@
       </p:sp>
       <p:sp>
         <p:nvSpPr>
-          <p:cNvPr id="19" name="Text 17"/>
+          <p:cNvPr id="25" name="Text 20"/>
           <p:cNvSpPr txBox="1"/>
           <p:nvPr/>
         </p:nvSpPr>
@@ -10254,7 +12304,7 @@
       </p:sp>
       <p:sp>
         <p:nvSpPr>
-          <p:cNvPr id="20" name="Text 18"/>
+          <p:cNvPr id="26" name="Text 21"/>
           <p:cNvSpPr txBox="1"/>
           <p:nvPr/>
         </p:nvSpPr>
@@ -10617,6 +12667,55 @@
         </p:nvSpPr>
         <p:spPr>
           <a:xfrm>
+            <a:off x="5044288" y="1645920"/>
+            <a:ext cx="566928" cy="566928"/>
+          </a:xfrm>
+          <a:prstGeom prst="ellipse">
+            <a:avLst/>
+          </a:prstGeom>
+          <a:solidFill>
+            <a:schemeClr val="accent3"/>
+          </a:solidFill>
+          <a:ln w="12700">
+            <a:solidFill>
+              <a:schemeClr val="accent3"/>
+            </a:solidFill>
+            <a:prstDash val="solid"/>
+          </a:ln>
+        </p:spPr>
+      </p:sp>
+      <p:pic>
+        <p:nvPicPr>
+          <p:cNvPr id="8" name="Image 0" descr="ClipboardCheck">    </p:cNvPr>
+          <p:cNvPicPr>
+            <a:picLocks noChangeAspect="1"/>
+          </p:cNvPicPr>
+          <p:nvPr/>
+        </p:nvPicPr>
+        <p:blipFill>
+          <a:blip r:embed="rId1"/>
+          <a:stretch>
+            <a:fillRect/>
+          </a:stretch>
+        </p:blipFill>
+        <p:spPr>
+          <a:xfrm>
+            <a:off x="5186020" y="1787652"/>
+            <a:ext cx="283464" cy="283464"/>
+          </a:xfrm>
+          <a:prstGeom prst="rect">
+            <a:avLst/>
+          </a:prstGeom>
+        </p:spPr>
+      </p:pic>
+      <p:sp>
+        <p:nvSpPr>
+          <p:cNvPr id="9" name="Shape 6"/>
+          <p:cNvSpPr/>
+          <p:nvPr/>
+        </p:nvSpPr>
+        <p:spPr>
+          <a:xfrm>
             <a:off x="6278728" y="1508760"/>
             <a:ext cx="5364328" cy="4343400"/>
           </a:xfrm>
@@ -10645,7 +12744,56 @@
       </p:sp>
       <p:sp>
         <p:nvSpPr>
-          <p:cNvPr id="8" name="Text 6"/>
+          <p:cNvPr id="10" name="Shape 7"/>
+          <p:cNvSpPr/>
+          <p:nvPr/>
+        </p:nvSpPr>
+        <p:spPr>
+          <a:xfrm>
+            <a:off x="10774375" y="1645920"/>
+            <a:ext cx="566928" cy="566928"/>
+          </a:xfrm>
+          <a:prstGeom prst="ellipse">
+            <a:avLst/>
+          </a:prstGeom>
+          <a:solidFill>
+            <a:schemeClr val="accent4"/>
+          </a:solidFill>
+          <a:ln w="12700">
+            <a:solidFill>
+              <a:schemeClr val="accent4"/>
+            </a:solidFill>
+            <a:prstDash val="solid"/>
+          </a:ln>
+        </p:spPr>
+      </p:sp>
+      <p:pic>
+        <p:nvPicPr>
+          <p:cNvPr id="11" name="Image 1" descr="TriangleExclamation">    </p:cNvPr>
+          <p:cNvPicPr>
+            <a:picLocks noChangeAspect="1"/>
+          </p:cNvPicPr>
+          <p:nvPr/>
+        </p:nvPicPr>
+        <p:blipFill>
+          <a:blip r:embed="rId2"/>
+          <a:stretch>
+            <a:fillRect/>
+          </a:stretch>
+        </p:blipFill>
+        <p:spPr>
+          <a:xfrm>
+            <a:off x="10916107" y="1787652"/>
+            <a:ext cx="283464" cy="283464"/>
+          </a:xfrm>
+          <a:prstGeom prst="rect">
+            <a:avLst/>
+          </a:prstGeom>
+        </p:spPr>
+      </p:pic>
+      <p:sp>
+        <p:nvSpPr>
+          <p:cNvPr id="12" name="Text 8"/>
           <p:cNvSpPr txBox="1"/>
           <p:nvPr/>
         </p:nvSpPr>
@@ -10685,7 +12833,7 @@
       </p:sp>
       <p:sp>
         <p:nvSpPr>
-          <p:cNvPr id="9" name="Text 7"/>
+          <p:cNvPr id="13" name="Text 9"/>
           <p:cNvSpPr txBox="1"/>
           <p:nvPr/>
         </p:nvSpPr>
@@ -10721,7 +12869,7 @@
       </p:sp>
       <p:sp>
         <p:nvSpPr>
-          <p:cNvPr id="10" name="Text 8"/>
+          <p:cNvPr id="14" name="Text 10"/>
           <p:cNvSpPr txBox="1"/>
           <p:nvPr/>
         </p:nvSpPr>
@@ -10905,7 +13053,7 @@
       </p:sp>
       <p:sp>
         <p:nvSpPr>
-          <p:cNvPr id="11" name="Text 9"/>
+          <p:cNvPr id="15" name="Text 11"/>
           <p:cNvSpPr txBox="1"/>
           <p:nvPr/>
         </p:nvSpPr>
@@ -11892,7 +14040,7 @@
                   <a:schemeClr val="tx2"/>
                 </a:solidFill>
               </a:rPr>
-              <a:t>Safe by design, provable by log</a:t>
+              <a:t>The app, as built</a:t>
             </a:r>
             <a:endParaRPr lang="en-US" sz="3600" dirty="0"/>
           </a:p>
@@ -11906,12 +14054,12 @@
         </p:nvSpPr>
         <p:spPr>
           <a:xfrm>
-            <a:off x="548640" y="1508760"/>
-            <a:ext cx="5120640" cy="4526280"/>
+            <a:off x="548640" y="1463040"/>
+            <a:ext cx="6126480" cy="4480560"/>
           </a:xfrm>
           <a:prstGeom prst="roundRect">
             <a:avLst>
-              <a:gd name="adj" fmla="val 2424"/>
+              <a:gd name="adj" fmla="val 2449"/>
             </a:avLst>
           </a:prstGeom>
           <a:solidFill>
@@ -11932,16 +14080,40 @@
           </a:effectLst>
         </p:spPr>
       </p:sp>
-      <p:sp>
-        <p:nvSpPr>
-          <p:cNvPr id="4" name="Text 2"/>
+      <p:pic>
+        <p:nvPicPr>
+          <p:cNvPr id="4" name="Image 0" descr="Bhoomi Kaaval home page">    </p:cNvPr>
+          <p:cNvPicPr>
+            <a:picLocks noChangeAspect="1"/>
+          </p:cNvPicPr>
+          <p:nvPr/>
+        </p:nvPicPr>
+        <p:blipFill>
+          <a:blip r:embed="rId1"/>
+          <a:stretch>
+            <a:fillRect/>
+          </a:stretch>
+        </p:blipFill>
+        <p:spPr>
+          <a:xfrm>
+            <a:off x="685800" y="1600200"/>
+            <a:ext cx="5852160" cy="2834640"/>
+          </a:xfrm>
+          <a:prstGeom prst="rect">
+            <a:avLst/>
+          </a:prstGeom>
+        </p:spPr>
+      </p:pic>
+      <p:sp>
+        <p:nvSpPr>
+          <p:cNvPr id="5" name="Text 2"/>
           <p:cNvSpPr txBox="1"/>
           <p:nvPr/>
         </p:nvSpPr>
         <p:spPr>
           <a:xfrm>
-            <a:off x="822960" y="1645920"/>
-            <a:ext cx="4572000" cy="457200"/>
+            <a:off x="731520" y="4526280"/>
+            <a:ext cx="5760720" cy="365760"/>
           </a:xfrm>
           <a:prstGeom prst="rect">
             <a:avLst/>
@@ -11957,27 +14129,27 @@
               <a:buNone/>
             </a:pPr>
             <a:r>
-              <a:rPr lang="en-US" sz="2200" b="1" dirty="0">
+              <a:rPr lang="en-US" sz="1800" b="1" dirty="0">
                 <a:solidFill>
                   <a:schemeClr val="tx2"/>
                 </a:solidFill>
               </a:rPr>
-              <a:t>Safe by design</a:t>
-            </a:r>
-            <a:endParaRPr lang="en-US" sz="2200" dirty="0"/>
-          </a:p>
-        </p:txBody>
-      </p:sp>
-      <p:sp>
-        <p:nvSpPr>
-          <p:cNvPr id="5" name="Text 3"/>
+              <a:t>Home</a:t>
+            </a:r>
+            <a:endParaRPr lang="en-US" sz="1800" dirty="0"/>
+          </a:p>
+        </p:txBody>
+      </p:sp>
+      <p:sp>
+        <p:nvSpPr>
+          <p:cNvPr id="6" name="Text 3"/>
           <p:cNvSpPr txBox="1"/>
           <p:nvPr/>
         </p:nvSpPr>
         <p:spPr>
           <a:xfrm>
-            <a:off x="822960" y="2240280"/>
-            <a:ext cx="4572000" cy="2743200"/>
+            <a:off x="731520" y="4937760"/>
+            <a:ext cx="5760720" cy="868680"/>
           </a:xfrm>
           <a:prstGeom prst="rect">
             <a:avLst/>
@@ -11986,100 +14158,6 @@
           <a:ln/>
         </p:spPr>
         <p:txBody>
-          <a:bodyPr wrap="square" lIns="635" tIns="635" rIns="635" bIns="635" rtlCol="0" anchor="t"/>
-          <a:lstStyle/>
-          <a:p>
-            <a:pPr marL="177800" indent="-177800">
-              <a:spcAft>
-                <a:spcPts val="1000"/>
-              </a:spcAft>
-              <a:buSzPct val="100000"/>
-              <a:buChar char="•"/>
-            </a:pPr>
-            <a:r>
-              <a:rPr lang="en-US" sz="1600" dirty="0">
-                <a:solidFill>
-                  <a:schemeClr val="tx1"/>
-                </a:solidFill>
-              </a:rPr>
-              <a:t>Aadhaar and PAN numbers are masked before any image is sent to a model</a:t>
-            </a:r>
-            <a:endParaRPr lang="en-US" sz="1600" dirty="0"/>
-          </a:p>
-          <a:p>
-            <a:pPr marL="177800" indent="-177800">
-              <a:spcAft>
-                <a:spcPts val="1000"/>
-              </a:spcAft>
-              <a:buSzPct val="100000"/>
-              <a:buChar char="•"/>
-            </a:pPr>
-            <a:r>
-              <a:rPr lang="en-US" sz="1600" dirty="0">
-                <a:solidFill>
-                  <a:schemeClr val="tx1"/>
-                </a:solidFill>
-              </a:rPr>
-              <a:t>Never “clean”, never “safe”, never a title score</a:t>
-            </a:r>
-            <a:endParaRPr lang="en-US" sz="1600" dirty="0"/>
-          </a:p>
-          <a:p>
-            <a:pPr marL="177800" indent="-177800">
-              <a:spcAft>
-                <a:spcPts val="1000"/>
-              </a:spcAft>
-              <a:buSzPct val="100000"/>
-              <a:buChar char="•"/>
-            </a:pPr>
-            <a:r>
-              <a:rPr lang="en-US" sz="1600" dirty="0">
-                <a:solidFill>
-                  <a:schemeClr val="tx1"/>
-                </a:solidFill>
-              </a:rPr>
-              <a:t>Legal wording comes from a fixed library, not AI text</a:t>
-            </a:r>
-            <a:endParaRPr lang="en-US" sz="1600" dirty="0"/>
-          </a:p>
-          <a:p>
-            <a:pPr marL="177800" indent="-177800">
-              <a:spcAft>
-                <a:spcPts val="1000"/>
-              </a:spcAft>
-              <a:buSzPct val="100000"/>
-              <a:buChar char="•"/>
-            </a:pPr>
-            <a:r>
-              <a:rPr lang="en-US" sz="1600" dirty="0">
-                <a:solidFill>
-                  <a:schemeClr val="tx1"/>
-                </a:solidFill>
-              </a:rPr>
-              <a:t>Every result lists what we did not check</a:t>
-            </a:r>
-            <a:endParaRPr lang="en-US" sz="1600" dirty="0"/>
-          </a:p>
-        </p:txBody>
-      </p:sp>
-      <p:sp>
-        <p:nvSpPr>
-          <p:cNvPr id="6" name="Text 4"/>
-          <p:cNvSpPr txBox="1"/>
-          <p:nvPr/>
-        </p:nvSpPr>
-        <p:spPr>
-          <a:xfrm>
-            <a:off x="822960" y="5166360"/>
-            <a:ext cx="4572000" cy="731520"/>
-          </a:xfrm>
-          <a:prstGeom prst="rect">
-            <a:avLst/>
-          </a:prstGeom>
-          <a:noFill/>
-          <a:ln/>
-        </p:spPr>
-        <p:txBody>
           <a:bodyPr wrap="square" lIns="0" tIns="0" rIns="0" bIns="0" rtlCol="0" anchor="t"/>
           <a:lstStyle/>
           <a:p>
@@ -12092,7 +14170,7 @@
                   <a:srgbClr val="5B7276"/>
                 </a:solidFill>
               </a:rPr>
-              <a:t>Names are stored in the log only as salted commitments.</a:t>
+              <a:t>A website-style landing page: what it does, three simple steps, why it can be trusted, and what it never does.</a:t>
             </a:r>
             <a:endParaRPr lang="en-US" sz="1400" dirty="0"/>
           </a:p>
@@ -12100,18 +14178,18 @@
       </p:sp>
       <p:sp>
         <p:nvSpPr>
-          <p:cNvPr id="7" name="Shape 5"/>
+          <p:cNvPr id="7" name="Shape 4"/>
           <p:cNvSpPr/>
           <p:nvPr/>
         </p:nvSpPr>
         <p:spPr>
           <a:xfrm>
-            <a:off x="5943600" y="1508760"/>
-            <a:ext cx="5699455" cy="4526280"/>
+            <a:off x="6903720" y="1463040"/>
+            <a:ext cx="4739335" cy="2148840"/>
           </a:xfrm>
           <a:prstGeom prst="roundRect">
             <a:avLst>
-              <a:gd name="adj" fmla="val 2424"/>
+              <a:gd name="adj" fmla="val 5106"/>
             </a:avLst>
           </a:prstGeom>
           <a:solidFill>
@@ -12132,16 +14210,40 @@
           </a:effectLst>
         </p:spPr>
       </p:sp>
-      <p:sp>
-        <p:nvSpPr>
-          <p:cNvPr id="8" name="Text 6"/>
+      <p:pic>
+        <p:nvPicPr>
+          <p:cNvPr id="8" name="Image 1" descr="Findings screen">    </p:cNvPr>
+          <p:cNvPicPr>
+            <a:picLocks noChangeAspect="1"/>
+          </p:cNvPicPr>
+          <p:nvPr/>
+        </p:nvPicPr>
+        <p:blipFill>
+          <a:blip r:embed="rId2"/>
+          <a:stretch>
+            <a:fillRect/>
+          </a:stretch>
+        </p:blipFill>
+        <p:spPr>
+          <a:xfrm>
+            <a:off x="7040880" y="1572768"/>
+            <a:ext cx="4465015" cy="1627870"/>
+          </a:xfrm>
+          <a:prstGeom prst="rect">
+            <a:avLst/>
+          </a:prstGeom>
+        </p:spPr>
+      </p:pic>
+      <p:sp>
+        <p:nvSpPr>
+          <p:cNvPr id="9" name="Text 5"/>
           <p:cNvSpPr txBox="1"/>
           <p:nvPr/>
         </p:nvSpPr>
         <p:spPr>
           <a:xfrm>
-            <a:off x="6217920" y="1645920"/>
-            <a:ext cx="5150815" cy="457200"/>
+            <a:off x="7086600" y="3255264"/>
+            <a:ext cx="4373575" cy="292608"/>
           </a:xfrm>
           <a:prstGeom prst="rect">
             <a:avLst/>
@@ -12157,54 +14259,85 @@
               <a:buNone/>
             </a:pPr>
             <a:r>
-              <a:rPr lang="en-US" sz="2200" b="1" dirty="0">
-                <a:solidFill>
-                  <a:schemeClr val="tx2"/>
-                </a:solidFill>
-              </a:rPr>
-              <a:t>Tamper-evident decision record</a:t>
-            </a:r>
-            <a:endParaRPr lang="en-US" sz="2200" dirty="0"/>
-          </a:p>
-        </p:txBody>
-      </p:sp>
-      <p:sp>
-        <p:nvSpPr>
-          <p:cNvPr id="9" name="Shape 7"/>
+              <a:rPr lang="en-US" sz="1300" dirty="0">
+                <a:solidFill>
+                  <a:srgbClr val="5B7276"/>
+                </a:solidFill>
+              </a:rPr>
+              <a:t>Findings, each with its page and quote</a:t>
+            </a:r>
+            <a:endParaRPr lang="en-US" sz="1300" dirty="0"/>
+          </a:p>
+        </p:txBody>
+      </p:sp>
+      <p:sp>
+        <p:nvSpPr>
+          <p:cNvPr id="10" name="Shape 6"/>
           <p:cNvSpPr/>
           <p:nvPr/>
         </p:nvSpPr>
         <p:spPr>
           <a:xfrm>
-            <a:off x="6217920" y="2331720"/>
-            <a:ext cx="1508760" cy="1371600"/>
+            <a:off x="6903720" y="3749040"/>
+            <a:ext cx="4739335" cy="2194560"/>
           </a:xfrm>
           <a:prstGeom prst="roundRect">
             <a:avLst>
-              <a:gd name="adj" fmla="val 6667"/>
+              <a:gd name="adj" fmla="val 5000"/>
             </a:avLst>
           </a:prstGeom>
           <a:solidFill>
-            <a:srgbClr val="ECFDF5"/>
-          </a:solidFill>
-          <a:ln w="25400">
+            <a:schemeClr val="bg1"/>
+          </a:solidFill>
+          <a:ln w="12700">
             <a:solidFill>
-              <a:schemeClr val="accent6"/>
+              <a:srgbClr val="E4ECE8"/>
             </a:solidFill>
             <a:prstDash val="solid"/>
           </a:ln>
-        </p:spPr>
-      </p:sp>
-      <p:sp>
-        <p:nvSpPr>
-          <p:cNvPr id="10" name="Text 8"/>
+          <a:effectLst>
+            <a:outerShdw sx="100000" sy="100000" kx="0" ky="0" algn="bl" rotWithShape="0" blurRad="76200" dist="25400" dir="5400000">
+              <a:srgbClr val="000000">
+                <a:alpha val="12000"/>
+              </a:srgbClr>
+            </a:outerShdw>
+          </a:effectLst>
+        </p:spPr>
+      </p:sp>
+      <p:pic>
+        <p:nvPicPr>
+          <p:cNvPr id="11" name="Image 2" descr="Ledger screen">    </p:cNvPr>
+          <p:cNvPicPr>
+            <a:picLocks noChangeAspect="1"/>
+          </p:cNvPicPr>
+          <p:nvPr/>
+        </p:nvPicPr>
+        <p:blipFill>
+          <a:blip r:embed="rId3"/>
+          <a:stretch>
+            <a:fillRect/>
+          </a:stretch>
+        </p:blipFill>
+        <p:spPr>
+          <a:xfrm>
+            <a:off x="7040880" y="3858768"/>
+            <a:ext cx="4465015" cy="1372062"/>
+          </a:xfrm>
+          <a:prstGeom prst="rect">
+            <a:avLst/>
+          </a:prstGeom>
+        </p:spPr>
+      </p:pic>
+      <p:sp>
+        <p:nvSpPr>
+          <p:cNvPr id="12" name="Text 7"/>
           <p:cNvSpPr txBox="1"/>
           <p:nvPr/>
         </p:nvSpPr>
         <p:spPr>
           <a:xfrm>
-            <a:off x="6309360" y="2423160"/>
-            <a:ext cx="1325880" cy="365760"/>
+            <a:off x="7086600" y="5349240"/>
+            <a:ext cx="4373575" cy="292608"/>
           </a:xfrm>
           <a:prstGeom prst="rect">
             <a:avLst/>
@@ -12220,27 +14353,27 @@
               <a:buNone/>
             </a:pPr>
             <a:r>
-              <a:rPr lang="en-US" sz="1600" b="1" dirty="0">
-                <a:solidFill>
-                  <a:srgbClr val="065F46"/>
-                </a:solidFill>
-              </a:rPr>
-              <a:t>Block 1</a:t>
-            </a:r>
-            <a:endParaRPr lang="en-US" sz="1600" dirty="0"/>
-          </a:p>
-        </p:txBody>
-      </p:sp>
-      <p:sp>
-        <p:nvSpPr>
-          <p:cNvPr id="11" name="Text 9"/>
+              <a:rPr lang="en-US" sz="1300" dirty="0">
+                <a:solidFill>
+                  <a:srgbClr val="5B7276"/>
+                </a:solidFill>
+              </a:rPr>
+              <a:t>Ledger chain and the tamper alert</a:t>
+            </a:r>
+            <a:endParaRPr lang="en-US" sz="1300" dirty="0"/>
+          </a:p>
+        </p:txBody>
+      </p:sp>
+      <p:sp>
+        <p:nvSpPr>
+          <p:cNvPr id="13" name="Text 8"/>
           <p:cNvSpPr txBox="1"/>
           <p:nvPr/>
         </p:nvSpPr>
         <p:spPr>
           <a:xfrm>
-            <a:off x="6309360" y="2834640"/>
-            <a:ext cx="1325880" cy="777240"/>
+            <a:off x="548640" y="6035040"/>
+            <a:ext cx="11094415" cy="274320"/>
           </a:xfrm>
           <a:prstGeom prst="rect">
             <a:avLst/>
@@ -12256,338 +14389,14 @@
               <a:buNone/>
             </a:pPr>
             <a:r>
-              <a:rPr lang="en-US" sz="1200" dirty="0">
+              <a:rPr lang="en-US" sz="1100" dirty="0">
                 <a:solidFill>
                   <a:srgbClr val="5B7276"/>
                 </a:solidFill>
               </a:rPr>
-              <a:t>prev hash → this hash</a:t>
-            </a:r>
-            <a:endParaRPr lang="en-US" sz="1200" dirty="0"/>
-          </a:p>
-        </p:txBody>
-      </p:sp>
-      <p:sp>
-        <p:nvSpPr>
-          <p:cNvPr id="12" name="Shape 10"/>
-          <p:cNvSpPr/>
-          <p:nvPr/>
-        </p:nvSpPr>
-        <p:spPr>
-          <a:xfrm>
-            <a:off x="7754112" y="2880360"/>
-            <a:ext cx="257404" cy="274320"/>
-          </a:xfrm>
-          <a:prstGeom prst="rightArrow">
-            <a:avLst/>
-          </a:prstGeom>
-          <a:solidFill>
-            <a:schemeClr val="accent2"/>
-          </a:solidFill>
-          <a:ln w="12700">
-            <a:solidFill>
-              <a:schemeClr val="accent2"/>
-            </a:solidFill>
-            <a:prstDash val="solid"/>
-          </a:ln>
-        </p:spPr>
-      </p:sp>
-      <p:sp>
-        <p:nvSpPr>
-          <p:cNvPr id="13" name="Shape 11"/>
-          <p:cNvSpPr/>
-          <p:nvPr/>
-        </p:nvSpPr>
-        <p:spPr>
-          <a:xfrm>
-            <a:off x="8038948" y="2331720"/>
-            <a:ext cx="1508760" cy="1371600"/>
-          </a:xfrm>
-          <a:prstGeom prst="roundRect">
-            <a:avLst>
-              <a:gd name="adj" fmla="val 6667"/>
-            </a:avLst>
-          </a:prstGeom>
-          <a:solidFill>
-            <a:srgbClr val="ECFDF5"/>
-          </a:solidFill>
-          <a:ln w="25400">
-            <a:solidFill>
-              <a:schemeClr val="accent6"/>
-            </a:solidFill>
-            <a:prstDash val="solid"/>
-          </a:ln>
-        </p:spPr>
-      </p:sp>
-      <p:sp>
-        <p:nvSpPr>
-          <p:cNvPr id="14" name="Text 12"/>
-          <p:cNvSpPr txBox="1"/>
-          <p:nvPr/>
-        </p:nvSpPr>
-        <p:spPr>
-          <a:xfrm>
-            <a:off x="8130388" y="2423160"/>
-            <a:ext cx="1325880" cy="365760"/>
-          </a:xfrm>
-          <a:prstGeom prst="rect">
-            <a:avLst/>
-          </a:prstGeom>
-          <a:noFill/>
-          <a:ln/>
-        </p:spPr>
-        <p:txBody>
-          <a:bodyPr wrap="square" lIns="0" tIns="0" rIns="0" bIns="0" rtlCol="0" anchor="t"/>
-          <a:lstStyle/>
-          <a:p>
-            <a:pPr indent="0" marL="0">
-              <a:buNone/>
-            </a:pPr>
-            <a:r>
-              <a:rPr lang="en-US" sz="1600" b="1" dirty="0">
-                <a:solidFill>
-                  <a:srgbClr val="065F46"/>
-                </a:solidFill>
-              </a:rPr>
-              <a:t>Block 2</a:t>
-            </a:r>
-            <a:endParaRPr lang="en-US" sz="1600" dirty="0"/>
-          </a:p>
-        </p:txBody>
-      </p:sp>
-      <p:sp>
-        <p:nvSpPr>
-          <p:cNvPr id="15" name="Text 13"/>
-          <p:cNvSpPr txBox="1"/>
-          <p:nvPr/>
-        </p:nvSpPr>
-        <p:spPr>
-          <a:xfrm>
-            <a:off x="8130388" y="2834640"/>
-            <a:ext cx="1325880" cy="777240"/>
-          </a:xfrm>
-          <a:prstGeom prst="rect">
-            <a:avLst/>
-          </a:prstGeom>
-          <a:noFill/>
-          <a:ln/>
-        </p:spPr>
-        <p:txBody>
-          <a:bodyPr wrap="square" lIns="0" tIns="0" rIns="0" bIns="0" rtlCol="0" anchor="t"/>
-          <a:lstStyle/>
-          <a:p>
-            <a:pPr indent="0" marL="0">
-              <a:buNone/>
-            </a:pPr>
-            <a:r>
-              <a:rPr lang="en-US" sz="1200" dirty="0">
-                <a:solidFill>
-                  <a:srgbClr val="5B7276"/>
-                </a:solidFill>
-              </a:rPr>
-              <a:t>prev hash → this hash</a:t>
-            </a:r>
-            <a:endParaRPr lang="en-US" sz="1200" dirty="0"/>
-          </a:p>
-        </p:txBody>
-      </p:sp>
-      <p:sp>
-        <p:nvSpPr>
-          <p:cNvPr id="16" name="Shape 14"/>
-          <p:cNvSpPr/>
-          <p:nvPr/>
-        </p:nvSpPr>
-        <p:spPr>
-          <a:xfrm>
-            <a:off x="9575140" y="2880360"/>
-            <a:ext cx="257404" cy="274320"/>
-          </a:xfrm>
-          <a:prstGeom prst="rightArrow">
-            <a:avLst/>
-          </a:prstGeom>
-          <a:solidFill>
-            <a:schemeClr val="accent2"/>
-          </a:solidFill>
-          <a:ln w="12700">
-            <a:solidFill>
-              <a:schemeClr val="accent2"/>
-            </a:solidFill>
-            <a:prstDash val="solid"/>
-          </a:ln>
-        </p:spPr>
-      </p:sp>
-      <p:sp>
-        <p:nvSpPr>
-          <p:cNvPr id="17" name="Shape 15"/>
-          <p:cNvSpPr/>
-          <p:nvPr/>
-        </p:nvSpPr>
-        <p:spPr>
-          <a:xfrm>
-            <a:off x="9859975" y="2331720"/>
-            <a:ext cx="1508760" cy="1371600"/>
-          </a:xfrm>
-          <a:prstGeom prst="roundRect">
-            <a:avLst>
-              <a:gd name="adj" fmla="val 6667"/>
-            </a:avLst>
-          </a:prstGeom>
-          <a:solidFill>
-            <a:srgbClr val="FFF1F2"/>
-          </a:solidFill>
-          <a:ln w="25400">
-            <a:solidFill>
-              <a:schemeClr val="accent3"/>
-            </a:solidFill>
-            <a:prstDash val="solid"/>
-          </a:ln>
-        </p:spPr>
-      </p:sp>
-      <p:sp>
-        <p:nvSpPr>
-          <p:cNvPr id="18" name="Text 16"/>
-          <p:cNvSpPr txBox="1"/>
-          <p:nvPr/>
-        </p:nvSpPr>
-        <p:spPr>
-          <a:xfrm>
-            <a:off x="9951415" y="2423160"/>
-            <a:ext cx="1325880" cy="365760"/>
-          </a:xfrm>
-          <a:prstGeom prst="rect">
-            <a:avLst/>
-          </a:prstGeom>
-          <a:noFill/>
-          <a:ln/>
-        </p:spPr>
-        <p:txBody>
-          <a:bodyPr wrap="square" lIns="0" tIns="0" rIns="0" bIns="0" rtlCol="0" anchor="t"/>
-          <a:lstStyle/>
-          <a:p>
-            <a:pPr indent="0" marL="0">
-              <a:buNone/>
-            </a:pPr>
-            <a:r>
-              <a:rPr lang="en-US" sz="1600" b="1" dirty="0">
-                <a:solidFill>
-                  <a:srgbClr val="9F1239"/>
-                </a:solidFill>
-              </a:rPr>
-              <a:t>Block 3</a:t>
-            </a:r>
-            <a:endParaRPr lang="en-US" sz="1600" dirty="0"/>
-          </a:p>
-        </p:txBody>
-      </p:sp>
-      <p:sp>
-        <p:nvSpPr>
-          <p:cNvPr id="19" name="Text 17"/>
-          <p:cNvSpPr txBox="1"/>
-          <p:nvPr/>
-        </p:nvSpPr>
-        <p:spPr>
-          <a:xfrm>
-            <a:off x="9951415" y="2834640"/>
-            <a:ext cx="1325880" cy="777240"/>
-          </a:xfrm>
-          <a:prstGeom prst="rect">
-            <a:avLst/>
-          </a:prstGeom>
-          <a:noFill/>
-          <a:ln/>
-        </p:spPr>
-        <p:txBody>
-          <a:bodyPr wrap="square" lIns="0" tIns="0" rIns="0" bIns="0" rtlCol="0" anchor="t"/>
-          <a:lstStyle/>
-          <a:p>
-            <a:pPr indent="0" marL="0">
-              <a:buNone/>
-            </a:pPr>
-            <a:r>
-              <a:rPr lang="en-US" sz="1200" dirty="0">
-                <a:solidFill>
-                  <a:srgbClr val="5B7276"/>
-                </a:solidFill>
-              </a:rPr>
-              <a:t>edited after the fact</a:t>
-            </a:r>
-            <a:endParaRPr lang="en-US" sz="1200" dirty="0"/>
-          </a:p>
-        </p:txBody>
-      </p:sp>
-      <p:sp>
-        <p:nvSpPr>
-          <p:cNvPr id="20" name="Text 18"/>
-          <p:cNvSpPr txBox="1"/>
-          <p:nvPr/>
-        </p:nvSpPr>
-        <p:spPr>
-          <a:xfrm>
-            <a:off x="6217920" y="3931920"/>
-            <a:ext cx="5150815" cy="457200"/>
-          </a:xfrm>
-          <a:prstGeom prst="roundRect">
-            <a:avLst>
-              <a:gd name="adj" fmla="val 20000"/>
-            </a:avLst>
-          </a:prstGeom>
-          <a:solidFill>
-            <a:schemeClr val="accent3"/>
-          </a:solidFill>
-          <a:ln/>
-        </p:spPr>
-        <p:txBody>
-          <a:bodyPr wrap="square" lIns="0" tIns="0" rIns="0" bIns="0" rtlCol="0" anchor="ctr"/>
-          <a:lstStyle/>
-          <a:p>
-            <a:pPr algn="ctr" indent="0" marL="0">
-              <a:buNone/>
-            </a:pPr>
-            <a:r>
-              <a:rPr lang="en-US" sz="1600" b="1" dirty="0">
-                <a:solidFill>
-                  <a:schemeClr val="bg1"/>
-                </a:solidFill>
-              </a:rPr>
-              <a:t>Verification fails at block 3</a:t>
-            </a:r>
-            <a:endParaRPr lang="en-US" sz="1600" dirty="0"/>
-          </a:p>
-        </p:txBody>
-      </p:sp>
-      <p:sp>
-        <p:nvSpPr>
-          <p:cNvPr id="21" name="Text 19"/>
-          <p:cNvSpPr txBox="1"/>
-          <p:nvPr/>
-        </p:nvSpPr>
-        <p:spPr>
-          <a:xfrm>
-            <a:off x="6217920" y="4526280"/>
-            <a:ext cx="5150815" cy="1417320"/>
-          </a:xfrm>
-          <a:prstGeom prst="rect">
-            <a:avLst/>
-          </a:prstGeom>
-          <a:noFill/>
-          <a:ln/>
-        </p:spPr>
-        <p:txBody>
-          <a:bodyPr wrap="square" lIns="0" tIns="0" rIns="0" bIns="0" rtlCol="0" anchor="t"/>
-          <a:lstStyle/>
-          <a:p>
-            <a:pPr indent="0" marL="0">
-              <a:buNone/>
-            </a:pPr>
-            <a:r>
-              <a:rPr lang="en-US" sz="1400" dirty="0">
-                <a:solidFill>
-                  <a:schemeClr val="tx1"/>
-                </a:solidFill>
-              </a:rPr>
-              <a:t>Each entry binds: SHA-256 of the original files, extraction hash, ruleset and model version, salted name commitments, and an Ed25519 signature. A hash-chained, signed log: not a blockchain, and it proves integrity, not fault.</a:t>
-            </a:r>
-            <a:endParaRPr lang="en-US" sz="1400" dirty="0"/>
+              <a:t>Rendered from the app's own pages and styles (synthetic sample data).</a:t>
+            </a:r>
+            <a:endParaRPr lang="en-US" sz="1100" dirty="0"/>
           </a:p>
         </p:txBody>
       </p:sp>
@@ -12648,7 +14457,7 @@
                   <a:schemeClr val="tx2"/>
                 </a:solidFill>
               </a:rPr>
-              <a:t>Models and tools</a:t>
+              <a:t>Safe by design, provable by log</a:t>
             </a:r>
             <a:endParaRPr lang="en-US" sz="3600" dirty="0"/>
           </a:p>
@@ -12662,12 +14471,12 @@
         </p:nvSpPr>
         <p:spPr>
           <a:xfrm>
-            <a:off x="548640" y="1554480"/>
-            <a:ext cx="3520440" cy="2194560"/>
+            <a:off x="548640" y="1508760"/>
+            <a:ext cx="5120640" cy="4526280"/>
           </a:xfrm>
           <a:prstGeom prst="roundRect">
             <a:avLst>
-              <a:gd name="adj" fmla="val 5000"/>
+              <a:gd name="adj" fmla="val 2424"/>
             </a:avLst>
           </a:prstGeom>
           <a:solidFill>
@@ -12696,8 +14505,8 @@
         </p:nvSpPr>
         <p:spPr>
           <a:xfrm>
-            <a:off x="822960" y="1810512"/>
-            <a:ext cx="365760" cy="365760"/>
+            <a:off x="4800600" y="1645920"/>
+            <a:ext cx="566928" cy="566928"/>
           </a:xfrm>
           <a:prstGeom prst="ellipse">
             <a:avLst/>
@@ -12713,16 +14522,40 @@
           </a:ln>
         </p:spPr>
       </p:sp>
-      <p:sp>
-        <p:nvSpPr>
-          <p:cNvPr id="5" name="Text 3"/>
+      <p:pic>
+        <p:nvPicPr>
+          <p:cNvPr id="5" name="Image 0" descr="ShieldHalved">    </p:cNvPr>
+          <p:cNvPicPr>
+            <a:picLocks noChangeAspect="1"/>
+          </p:cNvPicPr>
+          <p:nvPr/>
+        </p:nvPicPr>
+        <p:blipFill>
+          <a:blip r:embed="rId1"/>
+          <a:stretch>
+            <a:fillRect/>
+          </a:stretch>
+        </p:blipFill>
+        <p:spPr>
+          <a:xfrm>
+            <a:off x="4942332" y="1787652"/>
+            <a:ext cx="283464" cy="283464"/>
+          </a:xfrm>
+          <a:prstGeom prst="rect">
+            <a:avLst/>
+          </a:prstGeom>
+        </p:spPr>
+      </p:pic>
+      <p:sp>
+        <p:nvSpPr>
+          <p:cNvPr id="6" name="Text 3"/>
           <p:cNvSpPr txBox="1"/>
           <p:nvPr/>
         </p:nvSpPr>
         <p:spPr>
           <a:xfrm>
-            <a:off x="1325880" y="1755648"/>
-            <a:ext cx="2514600" cy="457200"/>
+            <a:off x="822960" y="1645920"/>
+            <a:ext cx="4572000" cy="457200"/>
           </a:xfrm>
           <a:prstGeom prst="rect">
             <a:avLst/>
@@ -12731,34 +14564,34 @@
           <a:ln/>
         </p:spPr>
         <p:txBody>
-          <a:bodyPr wrap="square" lIns="0" tIns="0" rIns="0" bIns="0" rtlCol="0" anchor="ctr"/>
+          <a:bodyPr wrap="square" lIns="0" tIns="0" rIns="0" bIns="0" rtlCol="0" anchor="t"/>
           <a:lstStyle/>
           <a:p>
             <a:pPr indent="0" marL="0">
               <a:buNone/>
             </a:pPr>
             <a:r>
-              <a:rPr lang="en-US" sz="1800" b="1" dirty="0">
+              <a:rPr lang="en-US" sz="2200" b="1" dirty="0">
                 <a:solidFill>
                   <a:schemeClr val="tx2"/>
                 </a:solidFill>
               </a:rPr>
-              <a:t>Vision LLM</a:t>
-            </a:r>
-            <a:endParaRPr lang="en-US" sz="1800" dirty="0"/>
-          </a:p>
-        </p:txBody>
-      </p:sp>
-      <p:sp>
-        <p:nvSpPr>
-          <p:cNvPr id="6" name="Text 4"/>
+              <a:t>Safe by design</a:t>
+            </a:r>
+            <a:endParaRPr lang="en-US" sz="2200" dirty="0"/>
+          </a:p>
+        </p:txBody>
+      </p:sp>
+      <p:sp>
+        <p:nvSpPr>
+          <p:cNvPr id="7" name="Text 4"/>
           <p:cNvSpPr txBox="1"/>
           <p:nvPr/>
         </p:nvSpPr>
         <p:spPr>
           <a:xfrm>
-            <a:off x="822960" y="2331720"/>
-            <a:ext cx="2971800" cy="1325880"/>
+            <a:off x="822960" y="2240280"/>
+            <a:ext cx="4572000" cy="2743200"/>
           </a:xfrm>
           <a:prstGeom prst="rect">
             <a:avLst/>
@@ -12767,6 +14600,100 @@
           <a:ln/>
         </p:spPr>
         <p:txBody>
+          <a:bodyPr wrap="square" lIns="635" tIns="635" rIns="635" bIns="635" rtlCol="0" anchor="t"/>
+          <a:lstStyle/>
+          <a:p>
+            <a:pPr marL="177800" indent="-177800">
+              <a:spcAft>
+                <a:spcPts val="1000"/>
+              </a:spcAft>
+              <a:buSzPct val="100000"/>
+              <a:buChar char="•"/>
+            </a:pPr>
+            <a:r>
+              <a:rPr lang="en-US" sz="1600" dirty="0">
+                <a:solidFill>
+                  <a:schemeClr val="tx1"/>
+                </a:solidFill>
+              </a:rPr>
+              <a:t>Aadhaar and PAN numbers are masked before any image is sent to a model</a:t>
+            </a:r>
+            <a:endParaRPr lang="en-US" sz="1600" dirty="0"/>
+          </a:p>
+          <a:p>
+            <a:pPr marL="177800" indent="-177800">
+              <a:spcAft>
+                <a:spcPts val="1000"/>
+              </a:spcAft>
+              <a:buSzPct val="100000"/>
+              <a:buChar char="•"/>
+            </a:pPr>
+            <a:r>
+              <a:rPr lang="en-US" sz="1600" dirty="0">
+                <a:solidFill>
+                  <a:schemeClr val="tx1"/>
+                </a:solidFill>
+              </a:rPr>
+              <a:t>Never “clean”, never “safe”, never a title score</a:t>
+            </a:r>
+            <a:endParaRPr lang="en-US" sz="1600" dirty="0"/>
+          </a:p>
+          <a:p>
+            <a:pPr marL="177800" indent="-177800">
+              <a:spcAft>
+                <a:spcPts val="1000"/>
+              </a:spcAft>
+              <a:buSzPct val="100000"/>
+              <a:buChar char="•"/>
+            </a:pPr>
+            <a:r>
+              <a:rPr lang="en-US" sz="1600" dirty="0">
+                <a:solidFill>
+                  <a:schemeClr val="tx1"/>
+                </a:solidFill>
+              </a:rPr>
+              <a:t>Legal wording comes from a fixed library, not AI text</a:t>
+            </a:r>
+            <a:endParaRPr lang="en-US" sz="1600" dirty="0"/>
+          </a:p>
+          <a:p>
+            <a:pPr marL="177800" indent="-177800">
+              <a:spcAft>
+                <a:spcPts val="1000"/>
+              </a:spcAft>
+              <a:buSzPct val="100000"/>
+              <a:buChar char="•"/>
+            </a:pPr>
+            <a:r>
+              <a:rPr lang="en-US" sz="1600" dirty="0">
+                <a:solidFill>
+                  <a:schemeClr val="tx1"/>
+                </a:solidFill>
+              </a:rPr>
+              <a:t>Every result lists what we did not check</a:t>
+            </a:r>
+            <a:endParaRPr lang="en-US" sz="1600" dirty="0"/>
+          </a:p>
+        </p:txBody>
+      </p:sp>
+      <p:sp>
+        <p:nvSpPr>
+          <p:cNvPr id="8" name="Text 5"/>
+          <p:cNvSpPr txBox="1"/>
+          <p:nvPr/>
+        </p:nvSpPr>
+        <p:spPr>
+          <a:xfrm>
+            <a:off x="822960" y="5166360"/>
+            <a:ext cx="4572000" cy="731520"/>
+          </a:xfrm>
+          <a:prstGeom prst="rect">
+            <a:avLst/>
+          </a:prstGeom>
+          <a:noFill/>
+          <a:ln/>
+        </p:spPr>
+        <p:txBody>
           <a:bodyPr wrap="square" lIns="0" tIns="0" rIns="0" bIns="0" rtlCol="0" anchor="t"/>
           <a:lstStyle/>
           <a:p>
@@ -12776,10 +14703,10 @@
             <a:r>
               <a:rPr lang="en-US" sz="1400" dirty="0">
                 <a:solidFill>
-                  <a:schemeClr val="tx1"/>
-                </a:solidFill>
-              </a:rPr>
-              <a:t>Gemini Flash reads the page images. One provider interface: Claude also supported, a self-hosted model can be swapped in.</a:t>
+                  <a:srgbClr val="5B7276"/>
+                </a:solidFill>
+              </a:rPr>
+              <a:t>Names are stored in the log only as salted commitments.</a:t>
             </a:r>
             <a:endParaRPr lang="en-US" sz="1400" dirty="0"/>
           </a:p>
@@ -12787,18 +14714,18 @@
       </p:sp>
       <p:sp>
         <p:nvSpPr>
-          <p:cNvPr id="7" name="Shape 5"/>
+          <p:cNvPr id="9" name="Shape 6"/>
           <p:cNvSpPr/>
           <p:nvPr/>
         </p:nvSpPr>
         <p:spPr>
           <a:xfrm>
-            <a:off x="4335628" y="1554480"/>
-            <a:ext cx="3520440" cy="2194560"/>
+            <a:off x="5943600" y="1508760"/>
+            <a:ext cx="5699455" cy="4526280"/>
           </a:xfrm>
           <a:prstGeom prst="roundRect">
             <a:avLst>
-              <a:gd name="adj" fmla="val 5000"/>
+              <a:gd name="adj" fmla="val 2424"/>
             </a:avLst>
           </a:prstGeom>
           <a:solidFill>
@@ -12821,14 +14748,14 @@
       </p:sp>
       <p:sp>
         <p:nvSpPr>
-          <p:cNvPr id="8" name="Shape 6"/>
+          <p:cNvPr id="10" name="Shape 7"/>
           <p:cNvSpPr/>
           <p:nvPr/>
         </p:nvSpPr>
         <p:spPr>
           <a:xfrm>
-            <a:off x="4609948" y="1810512"/>
-            <a:ext cx="365760" cy="365760"/>
+            <a:off x="10774375" y="1645920"/>
+            <a:ext cx="566928" cy="566928"/>
           </a:xfrm>
           <a:prstGeom prst="ellipse">
             <a:avLst/>
@@ -12844,16 +14771,40 @@
           </a:ln>
         </p:spPr>
       </p:sp>
-      <p:sp>
-        <p:nvSpPr>
-          <p:cNvPr id="9" name="Text 7"/>
+      <p:pic>
+        <p:nvPicPr>
+          <p:cNvPr id="11" name="Image 1" descr="Link">    </p:cNvPr>
+          <p:cNvPicPr>
+            <a:picLocks noChangeAspect="1"/>
+          </p:cNvPicPr>
+          <p:nvPr/>
+        </p:nvPicPr>
+        <p:blipFill>
+          <a:blip r:embed="rId2"/>
+          <a:stretch>
+            <a:fillRect/>
+          </a:stretch>
+        </p:blipFill>
+        <p:spPr>
+          <a:xfrm>
+            <a:off x="10916107" y="1787652"/>
+            <a:ext cx="283464" cy="283464"/>
+          </a:xfrm>
+          <a:prstGeom prst="rect">
+            <a:avLst/>
+          </a:prstGeom>
+        </p:spPr>
+      </p:pic>
+      <p:sp>
+        <p:nvSpPr>
+          <p:cNvPr id="12" name="Text 8"/>
           <p:cNvSpPr txBox="1"/>
           <p:nvPr/>
         </p:nvSpPr>
         <p:spPr>
           <a:xfrm>
-            <a:off x="5112868" y="1755648"/>
-            <a:ext cx="2514600" cy="457200"/>
+            <a:off x="6217920" y="1645920"/>
+            <a:ext cx="5150815" cy="457200"/>
           </a:xfrm>
           <a:prstGeom prst="rect">
             <a:avLst/>
@@ -12862,106 +14813,135 @@
           <a:ln/>
         </p:spPr>
         <p:txBody>
-          <a:bodyPr wrap="square" lIns="0" tIns="0" rIns="0" bIns="0" rtlCol="0" anchor="ctr"/>
+          <a:bodyPr wrap="square" lIns="0" tIns="0" rIns="0" bIns="0" rtlCol="0" anchor="t"/>
           <a:lstStyle/>
           <a:p>
             <a:pPr indent="0" marL="0">
               <a:buNone/>
             </a:pPr>
             <a:r>
-              <a:rPr lang="en-US" sz="1800" b="1" dirty="0">
+              <a:rPr lang="en-US" sz="2200" b="1" dirty="0">
                 <a:solidFill>
                   <a:schemeClr val="tx2"/>
                 </a:solidFill>
               </a:rPr>
-              <a:t>Local reader</a:t>
-            </a:r>
-            <a:endParaRPr lang="en-US" sz="1800" dirty="0"/>
-          </a:p>
-        </p:txBody>
-      </p:sp>
-      <p:sp>
-        <p:nvSpPr>
-          <p:cNvPr id="10" name="Text 8"/>
-          <p:cNvSpPr txBox="1"/>
-          <p:nvPr/>
-        </p:nvSpPr>
-        <p:spPr>
-          <a:xfrm>
-            <a:off x="4609948" y="2331720"/>
-            <a:ext cx="2971800" cy="1325880"/>
-          </a:xfrm>
-          <a:prstGeom prst="rect">
-            <a:avLst/>
-          </a:prstGeom>
-          <a:noFill/>
-          <a:ln/>
-        </p:spPr>
-        <p:txBody>
-          <a:bodyPr wrap="square" lIns="0" tIns="0" rIns="0" bIns="0" rtlCol="0" anchor="t"/>
-          <a:lstStyle/>
-          <a:p>
-            <a:pPr indent="0" marL="0">
-              <a:buNone/>
-            </a:pPr>
-            <a:r>
-              <a:rPr lang="en-US" sz="1400" dirty="0">
-                <a:solidFill>
-                  <a:schemeClr val="tx1"/>
-                </a:solidFill>
-              </a:rPr>
-              <a:t>Tesseract 5 (English, Hindi, Marathi, Assamese packs) and the PDF text layer. Cross-checks the model and finds ID numbers to mask.</a:t>
-            </a:r>
-            <a:endParaRPr lang="en-US" sz="1400" dirty="0"/>
-          </a:p>
-        </p:txBody>
-      </p:sp>
-      <p:sp>
-        <p:nvSpPr>
-          <p:cNvPr id="11" name="Shape 9"/>
+              <a:t>Tamper-evident decision record</a:t>
+            </a:r>
+            <a:endParaRPr lang="en-US" sz="2200" dirty="0"/>
+          </a:p>
+        </p:txBody>
+      </p:sp>
+      <p:sp>
+        <p:nvSpPr>
+          <p:cNvPr id="13" name="Shape 9"/>
           <p:cNvSpPr/>
           <p:nvPr/>
         </p:nvSpPr>
         <p:spPr>
           <a:xfrm>
-            <a:off x="8122615" y="1554480"/>
-            <a:ext cx="3520440" cy="2194560"/>
+            <a:off x="6217920" y="2331720"/>
+            <a:ext cx="1508760" cy="1371600"/>
           </a:xfrm>
           <a:prstGeom prst="roundRect">
             <a:avLst>
-              <a:gd name="adj" fmla="val 5000"/>
+              <a:gd name="adj" fmla="val 6667"/>
             </a:avLst>
           </a:prstGeom>
           <a:solidFill>
-            <a:schemeClr val="bg1"/>
-          </a:solidFill>
-          <a:ln w="12700">
+            <a:srgbClr val="ECFDF5"/>
+          </a:solidFill>
+          <a:ln w="25400">
             <a:solidFill>
-              <a:srgbClr val="E4ECE8"/>
+              <a:schemeClr val="accent6"/>
             </a:solidFill>
             <a:prstDash val="solid"/>
           </a:ln>
-          <a:effectLst>
-            <a:outerShdw sx="100000" sy="100000" kx="0" ky="0" algn="bl" rotWithShape="0" blurRad="76200" dist="25400" dir="5400000">
-              <a:srgbClr val="000000">
-                <a:alpha val="12000"/>
-              </a:srgbClr>
-            </a:outerShdw>
-          </a:effectLst>
-        </p:spPr>
-      </p:sp>
-      <p:sp>
-        <p:nvSpPr>
-          <p:cNvPr id="12" name="Shape 10"/>
+        </p:spPr>
+      </p:sp>
+      <p:sp>
+        <p:nvSpPr>
+          <p:cNvPr id="14" name="Text 10"/>
+          <p:cNvSpPr txBox="1"/>
+          <p:nvPr/>
+        </p:nvSpPr>
+        <p:spPr>
+          <a:xfrm>
+            <a:off x="6309360" y="2423160"/>
+            <a:ext cx="1325880" cy="365760"/>
+          </a:xfrm>
+          <a:prstGeom prst="rect">
+            <a:avLst/>
+          </a:prstGeom>
+          <a:noFill/>
+          <a:ln/>
+        </p:spPr>
+        <p:txBody>
+          <a:bodyPr wrap="square" lIns="0" tIns="0" rIns="0" bIns="0" rtlCol="0" anchor="t"/>
+          <a:lstStyle/>
+          <a:p>
+            <a:pPr indent="0" marL="0">
+              <a:buNone/>
+            </a:pPr>
+            <a:r>
+              <a:rPr lang="en-US" sz="1600" b="1" dirty="0">
+                <a:solidFill>
+                  <a:srgbClr val="065F46"/>
+                </a:solidFill>
+              </a:rPr>
+              <a:t>Block 1</a:t>
+            </a:r>
+            <a:endParaRPr lang="en-US" sz="1600" dirty="0"/>
+          </a:p>
+        </p:txBody>
+      </p:sp>
+      <p:sp>
+        <p:nvSpPr>
+          <p:cNvPr id="15" name="Text 11"/>
+          <p:cNvSpPr txBox="1"/>
+          <p:nvPr/>
+        </p:nvSpPr>
+        <p:spPr>
+          <a:xfrm>
+            <a:off x="6309360" y="2834640"/>
+            <a:ext cx="1325880" cy="777240"/>
+          </a:xfrm>
+          <a:prstGeom prst="rect">
+            <a:avLst/>
+          </a:prstGeom>
+          <a:noFill/>
+          <a:ln/>
+        </p:spPr>
+        <p:txBody>
+          <a:bodyPr wrap="square" lIns="0" tIns="0" rIns="0" bIns="0" rtlCol="0" anchor="t"/>
+          <a:lstStyle/>
+          <a:p>
+            <a:pPr indent="0" marL="0">
+              <a:buNone/>
+            </a:pPr>
+            <a:r>
+              <a:rPr lang="en-US" sz="1200" dirty="0">
+                <a:solidFill>
+                  <a:srgbClr val="5B7276"/>
+                </a:solidFill>
+              </a:rPr>
+              <a:t>prev hash → this hash</a:t>
+            </a:r>
+            <a:endParaRPr lang="en-US" sz="1200" dirty="0"/>
+          </a:p>
+        </p:txBody>
+      </p:sp>
+      <p:sp>
+        <p:nvSpPr>
+          <p:cNvPr id="16" name="Shape 12"/>
           <p:cNvSpPr/>
           <p:nvPr/>
         </p:nvSpPr>
         <p:spPr>
           <a:xfrm>
-            <a:off x="8396935" y="1810512"/>
-            <a:ext cx="365760" cy="365760"/>
-          </a:xfrm>
-          <a:prstGeom prst="ellipse">
+            <a:off x="7754112" y="2880360"/>
+            <a:ext cx="257404" cy="274320"/>
+          </a:xfrm>
+          <a:prstGeom prst="rightArrow">
             <a:avLst/>
           </a:prstGeom>
           <a:solidFill>
@@ -12977,130 +14957,123 @@
       </p:sp>
       <p:sp>
         <p:nvSpPr>
-          <p:cNvPr id="13" name="Text 11"/>
-          <p:cNvSpPr txBox="1"/>
-          <p:nvPr/>
-        </p:nvSpPr>
-        <p:spPr>
-          <a:xfrm>
-            <a:off x="8899855" y="1755648"/>
-            <a:ext cx="2514600" cy="457200"/>
-          </a:xfrm>
-          <a:prstGeom prst="rect">
-            <a:avLst/>
-          </a:prstGeom>
-          <a:noFill/>
-          <a:ln/>
-        </p:spPr>
-        <p:txBody>
-          <a:bodyPr wrap="square" lIns="0" tIns="0" rIns="0" bIns="0" rtlCol="0" anchor="ctr"/>
-          <a:lstStyle/>
-          <a:p>
-            <a:pPr indent="0" marL="0">
-              <a:buNone/>
-            </a:pPr>
-            <a:r>
-              <a:rPr lang="en-US" sz="1800" b="1" dirty="0">
-                <a:solidFill>
-                  <a:schemeClr val="tx2"/>
-                </a:solidFill>
-              </a:rPr>
-              <a:t>Cline SDK agent</a:t>
-            </a:r>
-            <a:endParaRPr lang="en-US" sz="1800" dirty="0"/>
-          </a:p>
-        </p:txBody>
-      </p:sp>
-      <p:sp>
-        <p:nvSpPr>
-          <p:cNvPr id="14" name="Text 12"/>
-          <p:cNvSpPr txBox="1"/>
-          <p:nvPr/>
-        </p:nvSpPr>
-        <p:spPr>
-          <a:xfrm>
-            <a:off x="8396935" y="2331720"/>
-            <a:ext cx="2971800" cy="1325880"/>
-          </a:xfrm>
-          <a:prstGeom prst="rect">
-            <a:avLst/>
-          </a:prstGeom>
-          <a:noFill/>
-          <a:ln/>
-        </p:spPr>
-        <p:txBody>
-          <a:bodyPr wrap="square" lIns="0" tIns="0" rIns="0" bIns="0" rtlCol="0" anchor="t"/>
-          <a:lstStyle/>
-          <a:p>
-            <a:pPr indent="0" marL="0">
-              <a:buNone/>
-            </a:pPr>
-            <a:r>
-              <a:rPr lang="en-US" sz="1400" dirty="0">
-                <a:solidFill>
-                  <a:schemeClr val="tx1"/>
-                </a:solidFill>
-              </a:rPr>
-              <a:t>@cline/sdk on Node 22 reviews fields the extractor could not read. It can only propose; Python re-checks.</a:t>
-            </a:r>
-            <a:endParaRPr lang="en-US" sz="1400" dirty="0"/>
-          </a:p>
-        </p:txBody>
-      </p:sp>
-      <p:sp>
-        <p:nvSpPr>
-          <p:cNvPr id="15" name="Shape 13"/>
+          <p:cNvPr id="17" name="Shape 13"/>
           <p:cNvSpPr/>
           <p:nvPr/>
         </p:nvSpPr>
         <p:spPr>
           <a:xfrm>
-            <a:off x="548640" y="4023360"/>
-            <a:ext cx="3520440" cy="2194560"/>
+            <a:off x="8038948" y="2331720"/>
+            <a:ext cx="1508760" cy="1371600"/>
           </a:xfrm>
           <a:prstGeom prst="roundRect">
             <a:avLst>
-              <a:gd name="adj" fmla="val 5000"/>
+              <a:gd name="adj" fmla="val 6667"/>
             </a:avLst>
           </a:prstGeom>
           <a:solidFill>
-            <a:schemeClr val="bg1"/>
-          </a:solidFill>
-          <a:ln w="12700">
+            <a:srgbClr val="ECFDF5"/>
+          </a:solidFill>
+          <a:ln w="25400">
             <a:solidFill>
-              <a:srgbClr val="E4ECE8"/>
+              <a:schemeClr val="accent6"/>
             </a:solidFill>
             <a:prstDash val="solid"/>
           </a:ln>
-          <a:effectLst>
-            <a:outerShdw sx="100000" sy="100000" kx="0" ky="0" algn="bl" rotWithShape="0" blurRad="76200" dist="25400" dir="5400000">
-              <a:srgbClr val="000000">
-                <a:alpha val="12000"/>
-              </a:srgbClr>
-            </a:outerShdw>
-          </a:effectLst>
-        </p:spPr>
-      </p:sp>
-      <p:sp>
-        <p:nvSpPr>
-          <p:cNvPr id="16" name="Shape 14"/>
+        </p:spPr>
+      </p:sp>
+      <p:sp>
+        <p:nvSpPr>
+          <p:cNvPr id="18" name="Text 14"/>
+          <p:cNvSpPr txBox="1"/>
+          <p:nvPr/>
+        </p:nvSpPr>
+        <p:spPr>
+          <a:xfrm>
+            <a:off x="8130388" y="2423160"/>
+            <a:ext cx="1325880" cy="365760"/>
+          </a:xfrm>
+          <a:prstGeom prst="rect">
+            <a:avLst/>
+          </a:prstGeom>
+          <a:noFill/>
+          <a:ln/>
+        </p:spPr>
+        <p:txBody>
+          <a:bodyPr wrap="square" lIns="0" tIns="0" rIns="0" bIns="0" rtlCol="0" anchor="t"/>
+          <a:lstStyle/>
+          <a:p>
+            <a:pPr indent="0" marL="0">
+              <a:buNone/>
+            </a:pPr>
+            <a:r>
+              <a:rPr lang="en-US" sz="1600" b="1" dirty="0">
+                <a:solidFill>
+                  <a:srgbClr val="065F46"/>
+                </a:solidFill>
+              </a:rPr>
+              <a:t>Block 2</a:t>
+            </a:r>
+            <a:endParaRPr lang="en-US" sz="1600" dirty="0"/>
+          </a:p>
+        </p:txBody>
+      </p:sp>
+      <p:sp>
+        <p:nvSpPr>
+          <p:cNvPr id="19" name="Text 15"/>
+          <p:cNvSpPr txBox="1"/>
+          <p:nvPr/>
+        </p:nvSpPr>
+        <p:spPr>
+          <a:xfrm>
+            <a:off x="8130388" y="2834640"/>
+            <a:ext cx="1325880" cy="777240"/>
+          </a:xfrm>
+          <a:prstGeom prst="rect">
+            <a:avLst/>
+          </a:prstGeom>
+          <a:noFill/>
+          <a:ln/>
+        </p:spPr>
+        <p:txBody>
+          <a:bodyPr wrap="square" lIns="0" tIns="0" rIns="0" bIns="0" rtlCol="0" anchor="t"/>
+          <a:lstStyle/>
+          <a:p>
+            <a:pPr indent="0" marL="0">
+              <a:buNone/>
+            </a:pPr>
+            <a:r>
+              <a:rPr lang="en-US" sz="1200" dirty="0">
+                <a:solidFill>
+                  <a:srgbClr val="5B7276"/>
+                </a:solidFill>
+              </a:rPr>
+              <a:t>prev hash → this hash</a:t>
+            </a:r>
+            <a:endParaRPr lang="en-US" sz="1200" dirty="0"/>
+          </a:p>
+        </p:txBody>
+      </p:sp>
+      <p:sp>
+        <p:nvSpPr>
+          <p:cNvPr id="20" name="Shape 16"/>
           <p:cNvSpPr/>
           <p:nvPr/>
         </p:nvSpPr>
         <p:spPr>
           <a:xfrm>
-            <a:off x="822960" y="4279392"/>
-            <a:ext cx="365760" cy="365760"/>
-          </a:xfrm>
-          <a:prstGeom prst="ellipse">
-            <a:avLst/>
-          </a:prstGeom>
-          <a:solidFill>
-            <a:schemeClr val="accent1"/>
+            <a:off x="9575140" y="2880360"/>
+            <a:ext cx="257404" cy="274320"/>
+          </a:xfrm>
+          <a:prstGeom prst="rightArrow">
+            <a:avLst/>
+          </a:prstGeom>
+          <a:solidFill>
+            <a:schemeClr val="accent2"/>
           </a:solidFill>
           <a:ln w="12700">
             <a:solidFill>
-              <a:schemeClr val="accent1"/>
+              <a:schemeClr val="accent2"/>
             </a:solidFill>
             <a:prstDash val="solid"/>
           </a:ln>
@@ -13108,145 +15081,41 @@
       </p:sp>
       <p:sp>
         <p:nvSpPr>
-          <p:cNvPr id="17" name="Text 15"/>
-          <p:cNvSpPr txBox="1"/>
-          <p:nvPr/>
-        </p:nvSpPr>
-        <p:spPr>
-          <a:xfrm>
-            <a:off x="1325880" y="4224528"/>
-            <a:ext cx="2514600" cy="457200"/>
-          </a:xfrm>
-          <a:prstGeom prst="rect">
-            <a:avLst/>
-          </a:prstGeom>
-          <a:noFill/>
-          <a:ln/>
-        </p:spPr>
-        <p:txBody>
-          <a:bodyPr wrap="square" lIns="0" tIns="0" rIns="0" bIns="0" rtlCol="0" anchor="ctr"/>
-          <a:lstStyle/>
-          <a:p>
-            <a:pPr indent="0" marL="0">
-              <a:buNone/>
-            </a:pPr>
-            <a:r>
-              <a:rPr lang="en-US" sz="1800" b="1" dirty="0">
-                <a:solidFill>
-                  <a:schemeClr val="tx2"/>
-                </a:solidFill>
-              </a:rPr>
-              <a:t>Python core</a:t>
-            </a:r>
-            <a:endParaRPr lang="en-US" sz="1800" dirty="0"/>
-          </a:p>
-        </p:txBody>
-      </p:sp>
-      <p:sp>
-        <p:nvSpPr>
-          <p:cNvPr id="18" name="Text 16"/>
-          <p:cNvSpPr txBox="1"/>
-          <p:nvPr/>
-        </p:nvSpPr>
-        <p:spPr>
-          <a:xfrm>
-            <a:off x="822960" y="4800600"/>
-            <a:ext cx="2971800" cy="1325880"/>
-          </a:xfrm>
-          <a:prstGeom prst="rect">
-            <a:avLst/>
-          </a:prstGeom>
-          <a:noFill/>
-          <a:ln/>
-        </p:spPr>
-        <p:txBody>
-          <a:bodyPr wrap="square" lIns="0" tIns="0" rIns="0" bIns="0" rtlCol="0" anchor="t"/>
-          <a:lstStyle/>
-          <a:p>
-            <a:pPr indent="0" marL="0">
-              <a:buNone/>
-            </a:pPr>
-            <a:r>
-              <a:rPr lang="en-US" sz="1400" dirty="0">
-                <a:solidFill>
-                  <a:schemeClr val="tx1"/>
-                </a:solidFill>
-              </a:rPr>
-              <a:t>PyMuPDF, OpenCV, pydantic and rapidfuzz for ingest, preprocessing, validation and matching.</a:t>
-            </a:r>
-            <a:endParaRPr lang="en-US" sz="1400" dirty="0"/>
-          </a:p>
-        </p:txBody>
-      </p:sp>
-      <p:sp>
-        <p:nvSpPr>
-          <p:cNvPr id="19" name="Shape 17"/>
+          <p:cNvPr id="21" name="Shape 17"/>
           <p:cNvSpPr/>
           <p:nvPr/>
         </p:nvSpPr>
         <p:spPr>
           <a:xfrm>
-            <a:off x="4335628" y="4023360"/>
-            <a:ext cx="3520440" cy="2194560"/>
+            <a:off x="9859975" y="2331720"/>
+            <a:ext cx="1508760" cy="1371600"/>
           </a:xfrm>
           <a:prstGeom prst="roundRect">
             <a:avLst>
-              <a:gd name="adj" fmla="val 5000"/>
+              <a:gd name="adj" fmla="val 6667"/>
             </a:avLst>
           </a:prstGeom>
           <a:solidFill>
-            <a:schemeClr val="bg1"/>
-          </a:solidFill>
-          <a:ln w="12700">
+            <a:srgbClr val="FFF1F2"/>
+          </a:solidFill>
+          <a:ln w="25400">
             <a:solidFill>
-              <a:srgbClr val="E4ECE8"/>
+              <a:schemeClr val="accent3"/>
             </a:solidFill>
             <a:prstDash val="solid"/>
           </a:ln>
-          <a:effectLst>
-            <a:outerShdw sx="100000" sy="100000" kx="0" ky="0" algn="bl" rotWithShape="0" blurRad="76200" dist="25400" dir="5400000">
-              <a:srgbClr val="000000">
-                <a:alpha val="12000"/>
-              </a:srgbClr>
-            </a:outerShdw>
-          </a:effectLst>
-        </p:spPr>
-      </p:sp>
-      <p:sp>
-        <p:nvSpPr>
-          <p:cNvPr id="20" name="Shape 18"/>
-          <p:cNvSpPr/>
-          <p:nvPr/>
-        </p:nvSpPr>
-        <p:spPr>
-          <a:xfrm>
-            <a:off x="4609948" y="4279392"/>
-            <a:ext cx="365760" cy="365760"/>
-          </a:xfrm>
-          <a:prstGeom prst="ellipse">
-            <a:avLst/>
-          </a:prstGeom>
-          <a:solidFill>
-            <a:schemeClr val="accent1"/>
-          </a:solidFill>
-          <a:ln w="12700">
-            <a:solidFill>
-              <a:schemeClr val="accent1"/>
-            </a:solidFill>
-            <a:prstDash val="solid"/>
-          </a:ln>
-        </p:spPr>
-      </p:sp>
-      <p:sp>
-        <p:nvSpPr>
-          <p:cNvPr id="21" name="Text 19"/>
+        </p:spPr>
+      </p:sp>
+      <p:sp>
+        <p:nvSpPr>
+          <p:cNvPr id="22" name="Text 18"/>
           <p:cNvSpPr txBox="1"/>
           <p:nvPr/>
         </p:nvSpPr>
         <p:spPr>
           <a:xfrm>
-            <a:off x="5112868" y="4224528"/>
-            <a:ext cx="2514600" cy="457200"/>
+            <a:off x="9951415" y="2423160"/>
+            <a:ext cx="1325880" cy="365760"/>
           </a:xfrm>
           <a:prstGeom prst="rect">
             <a:avLst/>
@@ -13255,34 +15124,34 @@
           <a:ln/>
         </p:spPr>
         <p:txBody>
-          <a:bodyPr wrap="square" lIns="0" tIns="0" rIns="0" bIns="0" rtlCol="0" anchor="ctr"/>
+          <a:bodyPr wrap="square" lIns="0" tIns="0" rIns="0" bIns="0" rtlCol="0" anchor="t"/>
           <a:lstStyle/>
           <a:p>
             <a:pPr indent="0" marL="0">
               <a:buNone/>
             </a:pPr>
             <a:r>
-              <a:rPr lang="en-US" sz="1800" b="1" dirty="0">
-                <a:solidFill>
-                  <a:schemeClr val="tx2"/>
-                </a:solidFill>
-              </a:rPr>
-              <a:t>Rules + ledger</a:t>
-            </a:r>
-            <a:endParaRPr lang="en-US" sz="1800" dirty="0"/>
-          </a:p>
-        </p:txBody>
-      </p:sp>
-      <p:sp>
-        <p:nvSpPr>
-          <p:cNvPr id="22" name="Text 20"/>
+              <a:rPr lang="en-US" sz="1600" b="1" dirty="0">
+                <a:solidFill>
+                  <a:srgbClr val="9F1239"/>
+                </a:solidFill>
+              </a:rPr>
+              <a:t>Block 3</a:t>
+            </a:r>
+            <a:endParaRPr lang="en-US" sz="1600" dirty="0"/>
+          </a:p>
+        </p:txBody>
+      </p:sp>
+      <p:sp>
+        <p:nvSpPr>
+          <p:cNvPr id="23" name="Text 19"/>
           <p:cNvSpPr txBox="1"/>
           <p:nvPr/>
         </p:nvSpPr>
         <p:spPr>
           <a:xfrm>
-            <a:off x="4609948" y="4800600"/>
-            <a:ext cx="2971800" cy="1325880"/>
+            <a:off x="9951415" y="2834640"/>
+            <a:ext cx="1325880" cy="777240"/>
           </a:xfrm>
           <a:prstGeom prst="rect">
             <a:avLst/>
@@ -13298,86 +15167,67 @@
               <a:buNone/>
             </a:pPr>
             <a:r>
-              <a:rPr lang="en-US" sz="1400" dirty="0">
-                <a:solidFill>
-                  <a:schemeClr val="tx1"/>
-                </a:solidFill>
-              </a:rPr>
-              <a:t>Deterministic Python rules, SQLite, SHA-256 hash chain, Ed25519 signatures, salted HMAC commitments.</a:t>
-            </a:r>
-            <a:endParaRPr lang="en-US" sz="1400" dirty="0"/>
-          </a:p>
-        </p:txBody>
-      </p:sp>
-      <p:sp>
-        <p:nvSpPr>
-          <p:cNvPr id="23" name="Shape 21"/>
-          <p:cNvSpPr/>
-          <p:nvPr/>
-        </p:nvSpPr>
-        <p:spPr>
-          <a:xfrm>
-            <a:off x="8122615" y="4023360"/>
-            <a:ext cx="3520440" cy="2194560"/>
+              <a:rPr lang="en-US" sz="1200" dirty="0">
+                <a:solidFill>
+                  <a:srgbClr val="5B7276"/>
+                </a:solidFill>
+              </a:rPr>
+              <a:t>edited after the fact</a:t>
+            </a:r>
+            <a:endParaRPr lang="en-US" sz="1200" dirty="0"/>
+          </a:p>
+        </p:txBody>
+      </p:sp>
+      <p:sp>
+        <p:nvSpPr>
+          <p:cNvPr id="24" name="Text 20"/>
+          <p:cNvSpPr txBox="1"/>
+          <p:nvPr/>
+        </p:nvSpPr>
+        <p:spPr>
+          <a:xfrm>
+            <a:off x="6217920" y="3931920"/>
+            <a:ext cx="5150815" cy="457200"/>
           </a:xfrm>
           <a:prstGeom prst="roundRect">
             <a:avLst>
-              <a:gd name="adj" fmla="val 5000"/>
+              <a:gd name="adj" fmla="val 20000"/>
             </a:avLst>
           </a:prstGeom>
           <a:solidFill>
-            <a:schemeClr val="bg1"/>
-          </a:solidFill>
-          <a:ln w="12700">
-            <a:solidFill>
-              <a:srgbClr val="E4ECE8"/>
-            </a:solidFill>
-            <a:prstDash val="solid"/>
-          </a:ln>
-          <a:effectLst>
-            <a:outerShdw sx="100000" sy="100000" kx="0" ky="0" algn="bl" rotWithShape="0" blurRad="76200" dist="25400" dir="5400000">
-              <a:srgbClr val="000000">
-                <a:alpha val="12000"/>
-              </a:srgbClr>
-            </a:outerShdw>
-          </a:effectLst>
-        </p:spPr>
-      </p:sp>
-      <p:sp>
-        <p:nvSpPr>
-          <p:cNvPr id="24" name="Shape 22"/>
-          <p:cNvSpPr/>
-          <p:nvPr/>
-        </p:nvSpPr>
-        <p:spPr>
-          <a:xfrm>
-            <a:off x="8396935" y="4279392"/>
-            <a:ext cx="365760" cy="365760"/>
-          </a:xfrm>
-          <a:prstGeom prst="ellipse">
-            <a:avLst/>
-          </a:prstGeom>
-          <a:solidFill>
-            <a:schemeClr val="accent1"/>
-          </a:solidFill>
-          <a:ln w="12700">
-            <a:solidFill>
-              <a:schemeClr val="accent1"/>
-            </a:solidFill>
-            <a:prstDash val="solid"/>
-          </a:ln>
-        </p:spPr>
-      </p:sp>
-      <p:sp>
-        <p:nvSpPr>
-          <p:cNvPr id="25" name="Text 23"/>
+            <a:schemeClr val="accent3"/>
+          </a:solidFill>
+          <a:ln/>
+        </p:spPr>
+        <p:txBody>
+          <a:bodyPr wrap="square" lIns="0" tIns="0" rIns="0" bIns="0" rtlCol="0" anchor="ctr"/>
+          <a:lstStyle/>
+          <a:p>
+            <a:pPr algn="ctr" indent="0" marL="0">
+              <a:buNone/>
+            </a:pPr>
+            <a:r>
+              <a:rPr lang="en-US" sz="1600" b="1" dirty="0">
+                <a:solidFill>
+                  <a:schemeClr val="bg1"/>
+                </a:solidFill>
+              </a:rPr>
+              <a:t>Verification fails at block 3</a:t>
+            </a:r>
+            <a:endParaRPr lang="en-US" sz="1600" dirty="0"/>
+          </a:p>
+        </p:txBody>
+      </p:sp>
+      <p:sp>
+        <p:nvSpPr>
+          <p:cNvPr id="25" name="Text 21"/>
           <p:cNvSpPr txBox="1"/>
           <p:nvPr/>
         </p:nvSpPr>
         <p:spPr>
           <a:xfrm>
-            <a:off x="8899855" y="4224528"/>
-            <a:ext cx="2514600" cy="457200"/>
+            <a:off x="6217920" y="4526280"/>
+            <a:ext cx="5150815" cy="1417320"/>
           </a:xfrm>
           <a:prstGeom prst="rect">
             <a:avLst/>
@@ -13386,55 +15236,19 @@
           <a:ln/>
         </p:spPr>
         <p:txBody>
-          <a:bodyPr wrap="square" lIns="0" tIns="0" rIns="0" bIns="0" rtlCol="0" anchor="ctr"/>
+          <a:bodyPr wrap="square" lIns="0" tIns="0" rIns="0" bIns="0" rtlCol="0" anchor="t"/>
           <a:lstStyle/>
           <a:p>
             <a:pPr indent="0" marL="0">
               <a:buNone/>
             </a:pPr>
             <a:r>
-              <a:rPr lang="en-US" sz="1800" b="1" dirty="0">
-                <a:solidFill>
-                  <a:schemeClr val="tx2"/>
-                </a:solidFill>
-              </a:rPr>
-              <a:t>Streamlit app</a:t>
-            </a:r>
-            <a:endParaRPr lang="en-US" sz="1800" dirty="0"/>
-          </a:p>
-        </p:txBody>
-      </p:sp>
-      <p:sp>
-        <p:nvSpPr>
-          <p:cNvPr id="26" name="Text 24"/>
-          <p:cNvSpPr txBox="1"/>
-          <p:nvPr/>
-        </p:nvSpPr>
-        <p:spPr>
-          <a:xfrm>
-            <a:off x="8396935" y="4800600"/>
-            <a:ext cx="2971800" cy="1325880"/>
-          </a:xfrm>
-          <a:prstGeom prst="rect">
-            <a:avLst/>
-          </a:prstGeom>
-          <a:noFill/>
-          <a:ln/>
-        </p:spPr>
-        <p:txBody>
-          <a:bodyPr wrap="square" lIns="0" tIns="0" rIns="0" bIns="0" rtlCol="0" anchor="t"/>
-          <a:lstStyle/>
-          <a:p>
-            <a:pPr indent="0" marL="0">
-              <a:buNone/>
-            </a:pPr>
-            <a:r>
               <a:rPr lang="en-US" sz="1400" dirty="0">
                 <a:solidFill>
                   <a:schemeClr val="tx1"/>
                 </a:solidFill>
               </a:rPr>
-              <a:t>Website-style interface with SVG illustrations. Runs offline from cached extractions for the demo.</a:t>
+              <a:t>Each entry binds: SHA-256 of the original files, extraction hash, ruleset and model version, salted name commitments, and an Ed25519 signature. A hash-chained, signed log: not a blockchain, and it proves integrity, not fault.</a:t>
             </a:r>
             <a:endParaRPr lang="en-US" sz="1400" dirty="0"/>
           </a:p>

--- a/docs/Bhoomi_Kaaval_Deck.pptx
+++ b/docs/Bhoomi_Kaaval_Deck.pptx
@@ -122,18 +122,18 @@
   <p:extLst>
     <p:ext uri="{521415D9-36F7-43E2-AB2F-B90AF26B5E84}">
       <p14:sectionLst xmlns:p14="http://schemas.microsoft.com/office/powerpoint/2010/main">
-        <p14:section name="Opening" id="{70c68c9b-65d1-592a-c912-313cccdc4302}">
+        <p14:section name="Opening" id="{a49cc097-f221-494d-e241-100d08fbf533}">
           <p14:sldIdLst>
             <p14:sldId id="256"/>
           </p14:sldIdLst>
         </p14:section>
-        <p14:section name="Problem and solution" id="{782a356c-72b0-46ad-c7a1-a309ef2cb65a}">
+        <p14:section name="Problem and solution" id="{f648e6f2-9110-fd19-1718-1b6234c09db4}">
           <p14:sldIdLst>
             <p14:sldId id="257"/>
             <p14:sldId id="258"/>
           </p14:sldIdLst>
         </p14:section>
-        <p14:section name="How it works" id="{fdd06512-c318-9639-ff7b-9d945ba90245}">
+        <p14:section name="How it works" id="{7b8efe62-fecc-a114-001c-0407b1102044}">
           <p14:sldIdLst>
             <p14:sldId id="259"/>
             <p14:sldId id="260"/>
@@ -143,20 +143,20 @@
             <p14:sldId id="264"/>
           </p14:sldIdLst>
         </p14:section>
-        <p14:section name="Tools and Cline" id="{6b973eeb-29af-7791-46e0-996c9b5f788b}">
+        <p14:section name="Tools and Cline" id="{239739d6-7e8f-0d4a-b561-5f104806adb9}">
           <p14:sldIdLst>
             <p14:sldId id="265"/>
             <p14:sldId id="266"/>
           </p14:sldIdLst>
         </p14:section>
-        <p14:section name="Proof" id="{3af85e37-20d0-d060-f7b0-468049cf5e2e}">
+        <p14:section name="Proof" id="{6bcf06a5-f34d-c760-0f84-4efa2019f401}">
           <p14:sldIdLst>
             <p14:sldId id="267"/>
             <p14:sldId id="268"/>
             <p14:sldId id="269"/>
           </p14:sldIdLst>
         </p14:section>
-        <p14:section name="Wrap-up" id="{de1d9a7d-1e80-5578-01b9-ed3825f37942}">
+        <p14:section name="Wrap-up" id="{6c0e32eb-7399-2ab2-acac-b1a9d49b8efb}">
           <p14:sldIdLst>
             <p14:sldId id="270"/>
             <p14:sldId id="271"/>
@@ -1240,7 +1240,7 @@
           <a:p>
             <a:r>
               <a:rPr lang="en-US" dirty="0"/>
-              <a:t>Real documents found real bugs that clean test files never showed. The redaction one matters most: a privacy guarantee is only as good as the formats it has been tested on, so each fix has a regression test.</a:t>
+              <a:t>Real documents found real bugs that clean test files never showed. The redaction one matters most: a privacy guarantee is only as good as the formats it has been tested on.</a:t>
             </a:r>
             <a:endParaRPr lang="en-US" dirty="0"/>
           </a:p>
@@ -1416,7 +1416,7 @@
           <a:p>
             <a:r>
               <a:rPr lang="en-US" dirty="0"/>
-              <a:t>We would rather show our limits than overclaim. The next step that matters most is a pilot with a real registry feed and a self-hosted model.</a:t>
+              <a:t>Left: exactly what we have and have not tested, so nothing is overclaimed. Right: the roadmap, with the pilot and a self-hosted model first, because those matter most for real use.</a:t>
             </a:r>
             <a:endParaRPr lang="en-US" dirty="0"/>
           </a:p>
@@ -5724,8 +5724,8 @@
         </p:nvSpPr>
         <p:spPr>
           <a:xfrm>
-            <a:off x="548640" y="1508760"/>
-            <a:ext cx="6035040" cy="320040"/>
+            <a:off x="548640" y="1481328"/>
+            <a:ext cx="3749040" cy="457200"/>
           </a:xfrm>
           <a:prstGeom prst="rect">
             <a:avLst/>
@@ -5734,21 +5734,21 @@
           <a:ln/>
         </p:spPr>
         <p:txBody>
-          <a:bodyPr wrap="square" lIns="0" tIns="0" rIns="0" bIns="0" rtlCol="0" anchor="t"/>
+          <a:bodyPr wrap="square" lIns="0" tIns="0" rIns="0" bIns="0" rtlCol="0" anchor="ctr"/>
           <a:lstStyle/>
           <a:p>
             <a:pPr indent="0" marL="0">
               <a:buNone/>
             </a:pPr>
             <a:r>
-              <a:rPr lang="en-US" sz="1400" b="1" dirty="0">
-                <a:solidFill>
-                  <a:srgbClr val="5B7276"/>
-                </a:solidFill>
-              </a:rPr>
-              <a:t>What went wrong</a:t>
-            </a:r>
-            <a:endParaRPr lang="en-US" sz="1400" dirty="0"/>
+              <a:rPr lang="en-US" sz="1500" b="1" dirty="0">
+                <a:solidFill>
+                  <a:schemeClr val="tx2"/>
+                </a:solidFill>
+              </a:rPr>
+              <a:t>5 problems found with real inputs, all fixed:</a:t>
+            </a:r>
+            <a:endParaRPr lang="en-US" sz="1500" dirty="0"/>
           </a:p>
         </p:txBody>
       </p:sp>
@@ -5760,48 +5760,172 @@
         </p:nvSpPr>
         <p:spPr>
           <a:xfrm>
-            <a:off x="7040880" y="1508760"/>
-            <a:ext cx="4602175" cy="320040"/>
-          </a:xfrm>
-          <a:prstGeom prst="rect">
-            <a:avLst/>
-          </a:prstGeom>
-          <a:noFill/>
-          <a:ln/>
-        </p:spPr>
-        <p:txBody>
-          <a:bodyPr wrap="square" lIns="0" tIns="0" rIns="0" bIns="0" rtlCol="0" anchor="t"/>
-          <a:lstStyle/>
-          <a:p>
-            <a:pPr indent="0" marL="0">
-              <a:buNone/>
-            </a:pPr>
-            <a:r>
-              <a:rPr lang="en-US" sz="1400" b="1" dirty="0">
-                <a:solidFill>
-                  <a:srgbClr val="5B7276"/>
-                </a:solidFill>
-              </a:rPr>
-              <a:t>What we did</a:t>
-            </a:r>
-            <a:endParaRPr lang="en-US" sz="1400" dirty="0"/>
-          </a:p>
-        </p:txBody>
-      </p:sp>
-      <p:sp>
-        <p:nvSpPr>
-          <p:cNvPr id="5" name="Shape 3"/>
-          <p:cNvSpPr/>
-          <p:nvPr/>
-        </p:nvSpPr>
-        <p:spPr>
-          <a:xfrm>
-            <a:off x="548640" y="1920240"/>
-            <a:ext cx="6035040" cy="786384"/>
+            <a:off x="4389120" y="1481328"/>
+            <a:ext cx="1691640" cy="457200"/>
           </a:xfrm>
           <a:prstGeom prst="roundRect">
             <a:avLst>
-              <a:gd name="adj" fmla="val 13953"/>
+              <a:gd name="adj" fmla="val 24000"/>
+            </a:avLst>
+          </a:prstGeom>
+          <a:solidFill>
+            <a:schemeClr val="accent3"/>
+          </a:solidFill>
+          <a:ln/>
+        </p:spPr>
+        <p:txBody>
+          <a:bodyPr wrap="square" lIns="0" tIns="0" rIns="0" bIns="0" rtlCol="0" anchor="ctr"/>
+          <a:lstStyle/>
+          <a:p>
+            <a:pPr algn="ctr" indent="0" marL="0">
+              <a:buNone/>
+            </a:pPr>
+            <a:r>
+              <a:rPr lang="en-US" sz="1400" b="1" dirty="0">
+                <a:solidFill>
+                  <a:schemeClr val="bg1"/>
+                </a:solidFill>
+              </a:rPr>
+              <a:t>Privacy  ·  1</a:t>
+            </a:r>
+            <a:endParaRPr lang="en-US" sz="1400" dirty="0"/>
+          </a:p>
+        </p:txBody>
+      </p:sp>
+      <p:sp>
+        <p:nvSpPr>
+          <p:cNvPr id="5" name="Text 3"/>
+          <p:cNvSpPr txBox="1"/>
+          <p:nvPr/>
+        </p:nvSpPr>
+        <p:spPr>
+          <a:xfrm>
+            <a:off x="6172200" y="1481328"/>
+            <a:ext cx="1691640" cy="457200"/>
+          </a:xfrm>
+          <a:prstGeom prst="roundRect">
+            <a:avLst>
+              <a:gd name="adj" fmla="val 24000"/>
+            </a:avLst>
+          </a:prstGeom>
+          <a:solidFill>
+            <a:schemeClr val="accent4"/>
+          </a:solidFill>
+          <a:ln/>
+        </p:spPr>
+        <p:txBody>
+          <a:bodyPr wrap="square" lIns="0" tIns="0" rIns="0" bIns="0" rtlCol="0" anchor="ctr"/>
+          <a:lstStyle/>
+          <a:p>
+            <a:pPr algn="ctr" indent="0" marL="0">
+              <a:buNone/>
+            </a:pPr>
+            <a:r>
+              <a:rPr lang="en-US" sz="1400" b="1" dirty="0">
+                <a:solidFill>
+                  <a:schemeClr val="bg1"/>
+                </a:solidFill>
+              </a:rPr>
+              <a:t>Reliability  ·  2</a:t>
+            </a:r>
+            <a:endParaRPr lang="en-US" sz="1400" dirty="0"/>
+          </a:p>
+        </p:txBody>
+      </p:sp>
+      <p:sp>
+        <p:nvSpPr>
+          <p:cNvPr id="6" name="Text 4"/>
+          <p:cNvSpPr txBox="1"/>
+          <p:nvPr/>
+        </p:nvSpPr>
+        <p:spPr>
+          <a:xfrm>
+            <a:off x="7955280" y="1481328"/>
+            <a:ext cx="1691640" cy="457200"/>
+          </a:xfrm>
+          <a:prstGeom prst="roundRect">
+            <a:avLst>
+              <a:gd name="adj" fmla="val 24000"/>
+            </a:avLst>
+          </a:prstGeom>
+          <a:solidFill>
+            <a:schemeClr val="accent5"/>
+          </a:solidFill>
+          <a:ln/>
+        </p:spPr>
+        <p:txBody>
+          <a:bodyPr wrap="square" lIns="0" tIns="0" rIns="0" bIns="0" rtlCol="0" anchor="ctr"/>
+          <a:lstStyle/>
+          <a:p>
+            <a:pPr algn="ctr" indent="0" marL="0">
+              <a:buNone/>
+            </a:pPr>
+            <a:r>
+              <a:rPr lang="en-US" sz="1400" b="1" dirty="0">
+                <a:solidFill>
+                  <a:schemeClr val="bg1"/>
+                </a:solidFill>
+              </a:rPr>
+              <a:t>Integration  ·  1</a:t>
+            </a:r>
+            <a:endParaRPr lang="en-US" sz="1400" dirty="0"/>
+          </a:p>
+        </p:txBody>
+      </p:sp>
+      <p:sp>
+        <p:nvSpPr>
+          <p:cNvPr id="7" name="Text 5"/>
+          <p:cNvSpPr txBox="1"/>
+          <p:nvPr/>
+        </p:nvSpPr>
+        <p:spPr>
+          <a:xfrm>
+            <a:off x="9738360" y="1481328"/>
+            <a:ext cx="1691640" cy="457200"/>
+          </a:xfrm>
+          <a:prstGeom prst="roundRect">
+            <a:avLst>
+              <a:gd name="adj" fmla="val 24000"/>
+            </a:avLst>
+          </a:prstGeom>
+          <a:solidFill>
+            <a:schemeClr val="accent1"/>
+          </a:solidFill>
+          <a:ln/>
+        </p:spPr>
+        <p:txBody>
+          <a:bodyPr wrap="square" lIns="0" tIns="0" rIns="0" bIns="0" rtlCol="0" anchor="ctr"/>
+          <a:lstStyle/>
+          <a:p>
+            <a:pPr algn="ctr" indent="0" marL="0">
+              <a:buNone/>
+            </a:pPr>
+            <a:r>
+              <a:rPr lang="en-US" sz="1400" b="1" dirty="0">
+                <a:solidFill>
+                  <a:schemeClr val="bg1"/>
+                </a:solidFill>
+              </a:rPr>
+              <a:t>Cost and quota  ·  1</a:t>
+            </a:r>
+            <a:endParaRPr lang="en-US" sz="1400" dirty="0"/>
+          </a:p>
+        </p:txBody>
+      </p:sp>
+      <p:sp>
+        <p:nvSpPr>
+          <p:cNvPr id="8" name="Shape 6"/>
+          <p:cNvSpPr/>
+          <p:nvPr/>
+        </p:nvSpPr>
+        <p:spPr>
+          <a:xfrm>
+            <a:off x="548640" y="2148840"/>
+            <a:ext cx="6309360" cy="694944"/>
+          </a:xfrm>
+          <a:prstGeom prst="roundRect">
+            <a:avLst>
+              <a:gd name="adj" fmla="val 15789"/>
             </a:avLst>
           </a:prstGeom>
           <a:solidFill>
@@ -5824,14 +5948,63 @@
       </p:sp>
       <p:sp>
         <p:nvSpPr>
-          <p:cNvPr id="6" name="Text 4"/>
+          <p:cNvPr id="9" name="Shape 7"/>
+          <p:cNvSpPr/>
+          <p:nvPr/>
+        </p:nvSpPr>
+        <p:spPr>
+          <a:xfrm>
+            <a:off x="685800" y="2249424"/>
+            <a:ext cx="457200" cy="457200"/>
+          </a:xfrm>
+          <a:prstGeom prst="ellipse">
+            <a:avLst/>
+          </a:prstGeom>
+          <a:solidFill>
+            <a:schemeClr val="accent3"/>
+          </a:solidFill>
+          <a:ln w="12700">
+            <a:solidFill>
+              <a:schemeClr val="accent3"/>
+            </a:solidFill>
+            <a:prstDash val="solid"/>
+          </a:ln>
+        </p:spPr>
+      </p:sp>
+      <p:pic>
+        <p:nvPicPr>
+          <p:cNvPr id="10" name="Image 0" descr="ShieldHalved">    </p:cNvPr>
+          <p:cNvPicPr>
+            <a:picLocks noChangeAspect="1"/>
+          </p:cNvPicPr>
+          <p:nvPr/>
+        </p:nvPicPr>
+        <p:blipFill>
+          <a:blip r:embed="rId1"/>
+          <a:stretch>
+            <a:fillRect/>
+          </a:stretch>
+        </p:blipFill>
+        <p:spPr>
+          <a:xfrm>
+            <a:off x="800100" y="2363724"/>
+            <a:ext cx="228600" cy="228600"/>
+          </a:xfrm>
+          <a:prstGeom prst="rect">
+            <a:avLst/>
+          </a:prstGeom>
+        </p:spPr>
+      </p:pic>
+      <p:sp>
+        <p:nvSpPr>
+          <p:cNvPr id="11" name="Text 8"/>
           <p:cNvSpPr txBox="1"/>
           <p:nvPr/>
         </p:nvSpPr>
         <p:spPr>
           <a:xfrm>
-            <a:off x="731520" y="1920240"/>
-            <a:ext cx="5669280" cy="786384"/>
+            <a:off x="1280160" y="2148840"/>
+            <a:ext cx="5440680" cy="694944"/>
           </a:xfrm>
           <a:prstGeom prst="rect">
             <a:avLst/>
@@ -5860,13 +6033,13 @@
       </p:sp>
       <p:sp>
         <p:nvSpPr>
-          <p:cNvPr id="7" name="Shape 5"/>
+          <p:cNvPr id="12" name="Shape 9"/>
           <p:cNvSpPr/>
           <p:nvPr/>
         </p:nvSpPr>
         <p:spPr>
           <a:xfrm>
-            <a:off x="6675120" y="2194560"/>
+            <a:off x="6922008" y="2377440"/>
             <a:ext cx="274320" cy="237744"/>
           </a:xfrm>
           <a:prstGeom prst="rightArrow">
@@ -5885,18 +6058,18 @@
       </p:sp>
       <p:sp>
         <p:nvSpPr>
-          <p:cNvPr id="8" name="Shape 6"/>
+          <p:cNvPr id="13" name="Shape 10"/>
           <p:cNvSpPr/>
           <p:nvPr/>
         </p:nvSpPr>
         <p:spPr>
           <a:xfrm>
-            <a:off x="7040880" y="1920240"/>
-            <a:ext cx="4602175" cy="786384"/>
+            <a:off x="7269480" y="2148840"/>
+            <a:ext cx="4373575" cy="694944"/>
           </a:xfrm>
           <a:prstGeom prst="roundRect">
             <a:avLst>
-              <a:gd name="adj" fmla="val 13953"/>
+              <a:gd name="adj" fmla="val 15789"/>
             </a:avLst>
           </a:prstGeom>
           <a:solidFill>
@@ -5912,14 +6085,63 @@
       </p:sp>
       <p:sp>
         <p:nvSpPr>
-          <p:cNvPr id="9" name="Text 7"/>
+          <p:cNvPr id="14" name="Shape 11"/>
+          <p:cNvSpPr/>
+          <p:nvPr/>
+        </p:nvSpPr>
+        <p:spPr>
+          <a:xfrm>
+            <a:off x="7406640" y="2276856"/>
+            <a:ext cx="402336" cy="402336"/>
+          </a:xfrm>
+          <a:prstGeom prst="ellipse">
+            <a:avLst/>
+          </a:prstGeom>
+          <a:solidFill>
+            <a:schemeClr val="accent6"/>
+          </a:solidFill>
+          <a:ln w="12700">
+            <a:solidFill>
+              <a:schemeClr val="accent6"/>
+            </a:solidFill>
+            <a:prstDash val="solid"/>
+          </a:ln>
+        </p:spPr>
+      </p:sp>
+      <p:pic>
+        <p:nvPicPr>
+          <p:cNvPr id="15" name="Image 1" descr="CircleCheck">    </p:cNvPr>
+          <p:cNvPicPr>
+            <a:picLocks noChangeAspect="1"/>
+          </p:cNvPicPr>
+          <p:nvPr/>
+        </p:nvPicPr>
+        <p:blipFill>
+          <a:blip r:embed="rId2"/>
+          <a:stretch>
+            <a:fillRect/>
+          </a:stretch>
+        </p:blipFill>
+        <p:spPr>
+          <a:xfrm>
+            <a:off x="7507224" y="2377440"/>
+            <a:ext cx="201168" cy="201168"/>
+          </a:xfrm>
+          <a:prstGeom prst="rect">
+            <a:avLst/>
+          </a:prstGeom>
+        </p:spPr>
+      </p:pic>
+      <p:sp>
+        <p:nvSpPr>
+          <p:cNvPr id="16" name="Text 12"/>
           <p:cNvSpPr txBox="1"/>
           <p:nvPr/>
         </p:nvSpPr>
         <p:spPr>
           <a:xfrm>
-            <a:off x="7223760" y="1920240"/>
-            <a:ext cx="4236415" cy="786384"/>
+            <a:off x="7927848" y="2148840"/>
+            <a:ext cx="3596335" cy="694944"/>
           </a:xfrm>
           <a:prstGeom prst="rect">
             <a:avLst/>
@@ -5948,18 +6170,18 @@
       </p:sp>
       <p:sp>
         <p:nvSpPr>
-          <p:cNvPr id="10" name="Shape 8"/>
+          <p:cNvPr id="17" name="Shape 13"/>
           <p:cNvSpPr/>
           <p:nvPr/>
         </p:nvSpPr>
         <p:spPr>
           <a:xfrm>
-            <a:off x="548640" y="2816352"/>
-            <a:ext cx="6035040" cy="786384"/>
+            <a:off x="548640" y="2953512"/>
+            <a:ext cx="6309360" cy="694944"/>
           </a:xfrm>
           <a:prstGeom prst="roundRect">
             <a:avLst>
-              <a:gd name="adj" fmla="val 13953"/>
+              <a:gd name="adj" fmla="val 15789"/>
             </a:avLst>
           </a:prstGeom>
           <a:solidFill>
@@ -5982,14 +6204,63 @@
       </p:sp>
       <p:sp>
         <p:nvSpPr>
-          <p:cNvPr id="11" name="Text 9"/>
+          <p:cNvPr id="18" name="Shape 14"/>
+          <p:cNvSpPr/>
+          <p:nvPr/>
+        </p:nvSpPr>
+        <p:spPr>
+          <a:xfrm>
+            <a:off x="685800" y="3054096"/>
+            <a:ext cx="457200" cy="457200"/>
+          </a:xfrm>
+          <a:prstGeom prst="ellipse">
+            <a:avLst/>
+          </a:prstGeom>
+          <a:solidFill>
+            <a:schemeClr val="accent4"/>
+          </a:solidFill>
+          <a:ln w="12700">
+            <a:solidFill>
+              <a:schemeClr val="accent4"/>
+            </a:solidFill>
+            <a:prstDash val="solid"/>
+          </a:ln>
+        </p:spPr>
+      </p:sp>
+      <p:pic>
+        <p:nvPicPr>
+          <p:cNvPr id="19" name="Image 2" descr="Brain">    </p:cNvPr>
+          <p:cNvPicPr>
+            <a:picLocks noChangeAspect="1"/>
+          </p:cNvPicPr>
+          <p:nvPr/>
+        </p:nvPicPr>
+        <p:blipFill>
+          <a:blip r:embed="rId3"/>
+          <a:stretch>
+            <a:fillRect/>
+          </a:stretch>
+        </p:blipFill>
+        <p:spPr>
+          <a:xfrm>
+            <a:off x="800100" y="3168396"/>
+            <a:ext cx="228600" cy="228600"/>
+          </a:xfrm>
+          <a:prstGeom prst="rect">
+            <a:avLst/>
+          </a:prstGeom>
+        </p:spPr>
+      </p:pic>
+      <p:sp>
+        <p:nvSpPr>
+          <p:cNvPr id="20" name="Text 15"/>
           <p:cNvSpPr txBox="1"/>
           <p:nvPr/>
         </p:nvSpPr>
         <p:spPr>
           <a:xfrm>
-            <a:off x="731520" y="2816352"/>
-            <a:ext cx="5669280" cy="786384"/>
+            <a:off x="1280160" y="2953512"/>
+            <a:ext cx="5440680" cy="694944"/>
           </a:xfrm>
           <a:prstGeom prst="rect">
             <a:avLst/>
@@ -6018,13 +6289,13 @@
       </p:sp>
       <p:sp>
         <p:nvSpPr>
-          <p:cNvPr id="12" name="Shape 10"/>
+          <p:cNvPr id="21" name="Shape 16"/>
           <p:cNvSpPr/>
           <p:nvPr/>
         </p:nvSpPr>
         <p:spPr>
           <a:xfrm>
-            <a:off x="6675120" y="3090672"/>
+            <a:off x="6922008" y="3182112"/>
             <a:ext cx="274320" cy="237744"/>
           </a:xfrm>
           <a:prstGeom prst="rightArrow">
@@ -6043,18 +6314,18 @@
       </p:sp>
       <p:sp>
         <p:nvSpPr>
-          <p:cNvPr id="13" name="Shape 11"/>
+          <p:cNvPr id="22" name="Shape 17"/>
           <p:cNvSpPr/>
           <p:nvPr/>
         </p:nvSpPr>
         <p:spPr>
           <a:xfrm>
-            <a:off x="7040880" y="2816352"/>
-            <a:ext cx="4602175" cy="786384"/>
+            <a:off x="7269480" y="2953512"/>
+            <a:ext cx="4373575" cy="694944"/>
           </a:xfrm>
           <a:prstGeom prst="roundRect">
             <a:avLst>
-              <a:gd name="adj" fmla="val 13953"/>
+              <a:gd name="adj" fmla="val 15789"/>
             </a:avLst>
           </a:prstGeom>
           <a:solidFill>
@@ -6070,14 +6341,63 @@
       </p:sp>
       <p:sp>
         <p:nvSpPr>
-          <p:cNvPr id="14" name="Text 12"/>
+          <p:cNvPr id="23" name="Shape 18"/>
+          <p:cNvSpPr/>
+          <p:nvPr/>
+        </p:nvSpPr>
+        <p:spPr>
+          <a:xfrm>
+            <a:off x="7406640" y="3081528"/>
+            <a:ext cx="402336" cy="402336"/>
+          </a:xfrm>
+          <a:prstGeom prst="ellipse">
+            <a:avLst/>
+          </a:prstGeom>
+          <a:solidFill>
+            <a:schemeClr val="accent6"/>
+          </a:solidFill>
+          <a:ln w="12700">
+            <a:solidFill>
+              <a:schemeClr val="accent6"/>
+            </a:solidFill>
+            <a:prstDash val="solid"/>
+          </a:ln>
+        </p:spPr>
+      </p:sp>
+      <p:pic>
+        <p:nvPicPr>
+          <p:cNvPr id="24" name="Image 3" descr="CircleCheck">    </p:cNvPr>
+          <p:cNvPicPr>
+            <a:picLocks noChangeAspect="1"/>
+          </p:cNvPicPr>
+          <p:nvPr/>
+        </p:nvPicPr>
+        <p:blipFill>
+          <a:blip r:embed="rId4"/>
+          <a:stretch>
+            <a:fillRect/>
+          </a:stretch>
+        </p:blipFill>
+        <p:spPr>
+          <a:xfrm>
+            <a:off x="7507224" y="3182112"/>
+            <a:ext cx="201168" cy="201168"/>
+          </a:xfrm>
+          <a:prstGeom prst="rect">
+            <a:avLst/>
+          </a:prstGeom>
+        </p:spPr>
+      </p:pic>
+      <p:sp>
+        <p:nvSpPr>
+          <p:cNvPr id="25" name="Text 19"/>
           <p:cNvSpPr txBox="1"/>
           <p:nvPr/>
         </p:nvSpPr>
         <p:spPr>
           <a:xfrm>
-            <a:off x="7223760" y="2816352"/>
-            <a:ext cx="4236415" cy="786384"/>
+            <a:off x="7927848" y="2953512"/>
+            <a:ext cx="3596335" cy="694944"/>
           </a:xfrm>
           <a:prstGeom prst="rect">
             <a:avLst/>
@@ -6106,18 +6426,18 @@
       </p:sp>
       <p:sp>
         <p:nvSpPr>
-          <p:cNvPr id="15" name="Shape 13"/>
+          <p:cNvPr id="26" name="Shape 20"/>
           <p:cNvSpPr/>
           <p:nvPr/>
         </p:nvSpPr>
         <p:spPr>
           <a:xfrm>
-            <a:off x="548640" y="3712464"/>
-            <a:ext cx="6035040" cy="786384"/>
+            <a:off x="548640" y="3758184"/>
+            <a:ext cx="6309360" cy="694944"/>
           </a:xfrm>
           <a:prstGeom prst="roundRect">
             <a:avLst>
-              <a:gd name="adj" fmla="val 13953"/>
+              <a:gd name="adj" fmla="val 15789"/>
             </a:avLst>
           </a:prstGeom>
           <a:solidFill>
@@ -6140,14 +6460,63 @@
       </p:sp>
       <p:sp>
         <p:nvSpPr>
-          <p:cNvPr id="16" name="Text 14"/>
+          <p:cNvPr id="27" name="Shape 21"/>
+          <p:cNvSpPr/>
+          <p:nvPr/>
+        </p:nvSpPr>
+        <p:spPr>
+          <a:xfrm>
+            <a:off x="685800" y="3858768"/>
+            <a:ext cx="457200" cy="457200"/>
+          </a:xfrm>
+          <a:prstGeom prst="ellipse">
+            <a:avLst/>
+          </a:prstGeom>
+          <a:solidFill>
+            <a:schemeClr val="accent4"/>
+          </a:solidFill>
+          <a:ln w="12700">
+            <a:solidFill>
+              <a:schemeClr val="accent4"/>
+            </a:solidFill>
+            <a:prstDash val="solid"/>
+          </a:ln>
+        </p:spPr>
+      </p:sp>
+      <p:pic>
+        <p:nvPicPr>
+          <p:cNvPr id="28" name="Image 4" descr="Repeat">    </p:cNvPr>
+          <p:cNvPicPr>
+            <a:picLocks noChangeAspect="1"/>
+          </p:cNvPicPr>
+          <p:nvPr/>
+        </p:nvPicPr>
+        <p:blipFill>
+          <a:blip r:embed="rId5"/>
+          <a:stretch>
+            <a:fillRect/>
+          </a:stretch>
+        </p:blipFill>
+        <p:spPr>
+          <a:xfrm>
+            <a:off x="800100" y="3973068"/>
+            <a:ext cx="228600" cy="228600"/>
+          </a:xfrm>
+          <a:prstGeom prst="rect">
+            <a:avLst/>
+          </a:prstGeom>
+        </p:spPr>
+      </p:pic>
+      <p:sp>
+        <p:nvSpPr>
+          <p:cNvPr id="29" name="Text 22"/>
           <p:cNvSpPr txBox="1"/>
           <p:nvPr/>
         </p:nvSpPr>
         <p:spPr>
           <a:xfrm>
-            <a:off x="731520" y="3712464"/>
-            <a:ext cx="5669280" cy="786384"/>
+            <a:off x="1280160" y="3758184"/>
+            <a:ext cx="5440680" cy="694944"/>
           </a:xfrm>
           <a:prstGeom prst="rect">
             <a:avLst/>
@@ -6176,13 +6545,13 @@
       </p:sp>
       <p:sp>
         <p:nvSpPr>
-          <p:cNvPr id="17" name="Shape 15"/>
+          <p:cNvPr id="30" name="Shape 23"/>
           <p:cNvSpPr/>
           <p:nvPr/>
         </p:nvSpPr>
         <p:spPr>
           <a:xfrm>
-            <a:off x="6675120" y="3986784"/>
+            <a:off x="6922008" y="3986784"/>
             <a:ext cx="274320" cy="237744"/>
           </a:xfrm>
           <a:prstGeom prst="rightArrow">
@@ -6201,18 +6570,18 @@
       </p:sp>
       <p:sp>
         <p:nvSpPr>
-          <p:cNvPr id="18" name="Shape 16"/>
+          <p:cNvPr id="31" name="Shape 24"/>
           <p:cNvSpPr/>
           <p:nvPr/>
         </p:nvSpPr>
         <p:spPr>
           <a:xfrm>
-            <a:off x="7040880" y="3712464"/>
-            <a:ext cx="4602175" cy="786384"/>
+            <a:off x="7269480" y="3758184"/>
+            <a:ext cx="4373575" cy="694944"/>
           </a:xfrm>
           <a:prstGeom prst="roundRect">
             <a:avLst>
-              <a:gd name="adj" fmla="val 13953"/>
+              <a:gd name="adj" fmla="val 15789"/>
             </a:avLst>
           </a:prstGeom>
           <a:solidFill>
@@ -6228,14 +6597,63 @@
       </p:sp>
       <p:sp>
         <p:nvSpPr>
-          <p:cNvPr id="19" name="Text 17"/>
+          <p:cNvPr id="32" name="Shape 25"/>
+          <p:cNvSpPr/>
+          <p:nvPr/>
+        </p:nvSpPr>
+        <p:spPr>
+          <a:xfrm>
+            <a:off x="7406640" y="3886200"/>
+            <a:ext cx="402336" cy="402336"/>
+          </a:xfrm>
+          <a:prstGeom prst="ellipse">
+            <a:avLst/>
+          </a:prstGeom>
+          <a:solidFill>
+            <a:schemeClr val="accent6"/>
+          </a:solidFill>
+          <a:ln w="12700">
+            <a:solidFill>
+              <a:schemeClr val="accent6"/>
+            </a:solidFill>
+            <a:prstDash val="solid"/>
+          </a:ln>
+        </p:spPr>
+      </p:sp>
+      <p:pic>
+        <p:nvPicPr>
+          <p:cNvPr id="33" name="Image 5" descr="CircleCheck">    </p:cNvPr>
+          <p:cNvPicPr>
+            <a:picLocks noChangeAspect="1"/>
+          </p:cNvPicPr>
+          <p:nvPr/>
+        </p:nvPicPr>
+        <p:blipFill>
+          <a:blip r:embed="rId6"/>
+          <a:stretch>
+            <a:fillRect/>
+          </a:stretch>
+        </p:blipFill>
+        <p:spPr>
+          <a:xfrm>
+            <a:off x="7507224" y="3986784"/>
+            <a:ext cx="201168" cy="201168"/>
+          </a:xfrm>
+          <a:prstGeom prst="rect">
+            <a:avLst/>
+          </a:prstGeom>
+        </p:spPr>
+      </p:pic>
+      <p:sp>
+        <p:nvSpPr>
+          <p:cNvPr id="34" name="Text 26"/>
           <p:cNvSpPr txBox="1"/>
           <p:nvPr/>
         </p:nvSpPr>
         <p:spPr>
           <a:xfrm>
-            <a:off x="7223760" y="3712464"/>
-            <a:ext cx="4236415" cy="786384"/>
+            <a:off x="7927848" y="3758184"/>
+            <a:ext cx="3596335" cy="694944"/>
           </a:xfrm>
           <a:prstGeom prst="rect">
             <a:avLst/>
@@ -6264,18 +6682,18 @@
       </p:sp>
       <p:sp>
         <p:nvSpPr>
-          <p:cNvPr id="20" name="Shape 18"/>
+          <p:cNvPr id="35" name="Shape 27"/>
           <p:cNvSpPr/>
           <p:nvPr/>
         </p:nvSpPr>
         <p:spPr>
           <a:xfrm>
-            <a:off x="548640" y="4608576"/>
-            <a:ext cx="6035040" cy="786384"/>
+            <a:off x="548640" y="4562856"/>
+            <a:ext cx="6309360" cy="694944"/>
           </a:xfrm>
           <a:prstGeom prst="roundRect">
             <a:avLst>
-              <a:gd name="adj" fmla="val 13953"/>
+              <a:gd name="adj" fmla="val 15789"/>
             </a:avLst>
           </a:prstGeom>
           <a:solidFill>
@@ -6298,14 +6716,63 @@
       </p:sp>
       <p:sp>
         <p:nvSpPr>
-          <p:cNvPr id="21" name="Text 19"/>
+          <p:cNvPr id="36" name="Shape 28"/>
+          <p:cNvSpPr/>
+          <p:nvPr/>
+        </p:nvSpPr>
+        <p:spPr>
+          <a:xfrm>
+            <a:off x="685800" y="4663440"/>
+            <a:ext cx="457200" cy="457200"/>
+          </a:xfrm>
+          <a:prstGeom prst="ellipse">
+            <a:avLst/>
+          </a:prstGeom>
+          <a:solidFill>
+            <a:schemeClr val="accent5"/>
+          </a:solidFill>
+          <a:ln w="12700">
+            <a:solidFill>
+              <a:schemeClr val="accent5"/>
+            </a:solidFill>
+            <a:prstDash val="solid"/>
+          </a:ln>
+        </p:spPr>
+      </p:sp>
+      <p:pic>
+        <p:nvPicPr>
+          <p:cNvPr id="37" name="Image 6" descr="Plug">    </p:cNvPr>
+          <p:cNvPicPr>
+            <a:picLocks noChangeAspect="1"/>
+          </p:cNvPicPr>
+          <p:nvPr/>
+        </p:nvPicPr>
+        <p:blipFill>
+          <a:blip r:embed="rId7"/>
+          <a:stretch>
+            <a:fillRect/>
+          </a:stretch>
+        </p:blipFill>
+        <p:spPr>
+          <a:xfrm>
+            <a:off x="800100" y="4777740"/>
+            <a:ext cx="228600" cy="228600"/>
+          </a:xfrm>
+          <a:prstGeom prst="rect">
+            <a:avLst/>
+          </a:prstGeom>
+        </p:spPr>
+      </p:pic>
+      <p:sp>
+        <p:nvSpPr>
+          <p:cNvPr id="38" name="Text 29"/>
           <p:cNvSpPr txBox="1"/>
           <p:nvPr/>
         </p:nvSpPr>
         <p:spPr>
           <a:xfrm>
-            <a:off x="731520" y="4608576"/>
-            <a:ext cx="5669280" cy="786384"/>
+            <a:off x="1280160" y="4562856"/>
+            <a:ext cx="5440680" cy="694944"/>
           </a:xfrm>
           <a:prstGeom prst="rect">
             <a:avLst/>
@@ -6334,13 +6801,13 @@
       </p:sp>
       <p:sp>
         <p:nvSpPr>
-          <p:cNvPr id="22" name="Shape 20"/>
+          <p:cNvPr id="39" name="Shape 30"/>
           <p:cNvSpPr/>
           <p:nvPr/>
         </p:nvSpPr>
         <p:spPr>
           <a:xfrm>
-            <a:off x="6675120" y="4882896"/>
+            <a:off x="6922008" y="4791456"/>
             <a:ext cx="274320" cy="237744"/>
           </a:xfrm>
           <a:prstGeom prst="rightArrow">
@@ -6359,18 +6826,18 @@
       </p:sp>
       <p:sp>
         <p:nvSpPr>
-          <p:cNvPr id="23" name="Shape 21"/>
+          <p:cNvPr id="40" name="Shape 31"/>
           <p:cNvSpPr/>
           <p:nvPr/>
         </p:nvSpPr>
         <p:spPr>
           <a:xfrm>
-            <a:off x="7040880" y="4608576"/>
-            <a:ext cx="4602175" cy="786384"/>
+            <a:off x="7269480" y="4562856"/>
+            <a:ext cx="4373575" cy="694944"/>
           </a:xfrm>
           <a:prstGeom prst="roundRect">
             <a:avLst>
-              <a:gd name="adj" fmla="val 13953"/>
+              <a:gd name="adj" fmla="val 15789"/>
             </a:avLst>
           </a:prstGeom>
           <a:solidFill>
@@ -6386,14 +6853,63 @@
       </p:sp>
       <p:sp>
         <p:nvSpPr>
-          <p:cNvPr id="24" name="Text 22"/>
+          <p:cNvPr id="41" name="Shape 32"/>
+          <p:cNvSpPr/>
+          <p:nvPr/>
+        </p:nvSpPr>
+        <p:spPr>
+          <a:xfrm>
+            <a:off x="7406640" y="4690872"/>
+            <a:ext cx="402336" cy="402336"/>
+          </a:xfrm>
+          <a:prstGeom prst="ellipse">
+            <a:avLst/>
+          </a:prstGeom>
+          <a:solidFill>
+            <a:schemeClr val="accent6"/>
+          </a:solidFill>
+          <a:ln w="12700">
+            <a:solidFill>
+              <a:schemeClr val="accent6"/>
+            </a:solidFill>
+            <a:prstDash val="solid"/>
+          </a:ln>
+        </p:spPr>
+      </p:sp>
+      <p:pic>
+        <p:nvPicPr>
+          <p:cNvPr id="42" name="Image 7" descr="CircleCheck">    </p:cNvPr>
+          <p:cNvPicPr>
+            <a:picLocks noChangeAspect="1"/>
+          </p:cNvPicPr>
+          <p:nvPr/>
+        </p:nvPicPr>
+        <p:blipFill>
+          <a:blip r:embed="rId8"/>
+          <a:stretch>
+            <a:fillRect/>
+          </a:stretch>
+        </p:blipFill>
+        <p:spPr>
+          <a:xfrm>
+            <a:off x="7507224" y="4791456"/>
+            <a:ext cx="201168" cy="201168"/>
+          </a:xfrm>
+          <a:prstGeom prst="rect">
+            <a:avLst/>
+          </a:prstGeom>
+        </p:spPr>
+      </p:pic>
+      <p:sp>
+        <p:nvSpPr>
+          <p:cNvPr id="43" name="Text 33"/>
           <p:cNvSpPr txBox="1"/>
           <p:nvPr/>
         </p:nvSpPr>
         <p:spPr>
           <a:xfrm>
-            <a:off x="7223760" y="4608576"/>
-            <a:ext cx="4236415" cy="786384"/>
+            <a:off x="7927848" y="4562856"/>
+            <a:ext cx="3596335" cy="694944"/>
           </a:xfrm>
           <a:prstGeom prst="rect">
             <a:avLst/>
@@ -6422,18 +6938,18 @@
       </p:sp>
       <p:sp>
         <p:nvSpPr>
-          <p:cNvPr id="25" name="Shape 23"/>
+          <p:cNvPr id="44" name="Shape 34"/>
           <p:cNvSpPr/>
           <p:nvPr/>
         </p:nvSpPr>
         <p:spPr>
           <a:xfrm>
-            <a:off x="548640" y="5504688"/>
-            <a:ext cx="6035040" cy="786384"/>
+            <a:off x="548640" y="5367528"/>
+            <a:ext cx="6309360" cy="694944"/>
           </a:xfrm>
           <a:prstGeom prst="roundRect">
             <a:avLst>
-              <a:gd name="adj" fmla="val 13953"/>
+              <a:gd name="adj" fmla="val 15789"/>
             </a:avLst>
           </a:prstGeom>
           <a:solidFill>
@@ -6456,14 +6972,63 @@
       </p:sp>
       <p:sp>
         <p:nvSpPr>
-          <p:cNvPr id="26" name="Text 24"/>
+          <p:cNvPr id="45" name="Shape 35"/>
+          <p:cNvSpPr/>
+          <p:nvPr/>
+        </p:nvSpPr>
+        <p:spPr>
+          <a:xfrm>
+            <a:off x="685800" y="5468112"/>
+            <a:ext cx="457200" cy="457200"/>
+          </a:xfrm>
+          <a:prstGeom prst="ellipse">
+            <a:avLst/>
+          </a:prstGeom>
+          <a:solidFill>
+            <a:schemeClr val="accent1"/>
+          </a:solidFill>
+          <a:ln w="12700">
+            <a:solidFill>
+              <a:schemeClr val="accent1"/>
+            </a:solidFill>
+            <a:prstDash val="solid"/>
+          </a:ln>
+        </p:spPr>
+      </p:sp>
+      <p:pic>
+        <p:nvPicPr>
+          <p:cNvPr id="46" name="Image 8" descr="Coins">    </p:cNvPr>
+          <p:cNvPicPr>
+            <a:picLocks noChangeAspect="1"/>
+          </p:cNvPicPr>
+          <p:nvPr/>
+        </p:nvPicPr>
+        <p:blipFill>
+          <a:blip r:embed="rId9"/>
+          <a:stretch>
+            <a:fillRect/>
+          </a:stretch>
+        </p:blipFill>
+        <p:spPr>
+          <a:xfrm>
+            <a:off x="800100" y="5582412"/>
+            <a:ext cx="228600" cy="228600"/>
+          </a:xfrm>
+          <a:prstGeom prst="rect">
+            <a:avLst/>
+          </a:prstGeom>
+        </p:spPr>
+      </p:pic>
+      <p:sp>
+        <p:nvSpPr>
+          <p:cNvPr id="47" name="Text 36"/>
           <p:cNvSpPr txBox="1"/>
           <p:nvPr/>
         </p:nvSpPr>
         <p:spPr>
           <a:xfrm>
-            <a:off x="731520" y="5504688"/>
-            <a:ext cx="5669280" cy="786384"/>
+            <a:off x="1280160" y="5367528"/>
+            <a:ext cx="5440680" cy="694944"/>
           </a:xfrm>
           <a:prstGeom prst="rect">
             <a:avLst/>
@@ -6492,13 +7057,13 @@
       </p:sp>
       <p:sp>
         <p:nvSpPr>
-          <p:cNvPr id="27" name="Shape 25"/>
+          <p:cNvPr id="48" name="Shape 37"/>
           <p:cNvSpPr/>
           <p:nvPr/>
         </p:nvSpPr>
         <p:spPr>
           <a:xfrm>
-            <a:off x="6675120" y="5779008"/>
+            <a:off x="6922008" y="5596128"/>
             <a:ext cx="274320" cy="237744"/>
           </a:xfrm>
           <a:prstGeom prst="rightArrow">
@@ -6517,18 +7082,18 @@
       </p:sp>
       <p:sp>
         <p:nvSpPr>
-          <p:cNvPr id="28" name="Shape 26"/>
+          <p:cNvPr id="49" name="Shape 38"/>
           <p:cNvSpPr/>
           <p:nvPr/>
         </p:nvSpPr>
         <p:spPr>
           <a:xfrm>
-            <a:off x="7040880" y="5504688"/>
-            <a:ext cx="4602175" cy="786384"/>
+            <a:off x="7269480" y="5367528"/>
+            <a:ext cx="4373575" cy="694944"/>
           </a:xfrm>
           <a:prstGeom prst="roundRect">
             <a:avLst>
-              <a:gd name="adj" fmla="val 13953"/>
+              <a:gd name="adj" fmla="val 15789"/>
             </a:avLst>
           </a:prstGeom>
           <a:solidFill>
@@ -6544,14 +7109,63 @@
       </p:sp>
       <p:sp>
         <p:nvSpPr>
-          <p:cNvPr id="29" name="Text 27"/>
+          <p:cNvPr id="50" name="Shape 39"/>
+          <p:cNvSpPr/>
+          <p:nvPr/>
+        </p:nvSpPr>
+        <p:spPr>
+          <a:xfrm>
+            <a:off x="7406640" y="5495544"/>
+            <a:ext cx="402336" cy="402336"/>
+          </a:xfrm>
+          <a:prstGeom prst="ellipse">
+            <a:avLst/>
+          </a:prstGeom>
+          <a:solidFill>
+            <a:schemeClr val="accent6"/>
+          </a:solidFill>
+          <a:ln w="12700">
+            <a:solidFill>
+              <a:schemeClr val="accent6"/>
+            </a:solidFill>
+            <a:prstDash val="solid"/>
+          </a:ln>
+        </p:spPr>
+      </p:sp>
+      <p:pic>
+        <p:nvPicPr>
+          <p:cNvPr id="51" name="Image 9" descr="CircleCheck">    </p:cNvPr>
+          <p:cNvPicPr>
+            <a:picLocks noChangeAspect="1"/>
+          </p:cNvPicPr>
+          <p:nvPr/>
+        </p:nvPicPr>
+        <p:blipFill>
+          <a:blip r:embed="rId10"/>
+          <a:stretch>
+            <a:fillRect/>
+          </a:stretch>
+        </p:blipFill>
+        <p:spPr>
+          <a:xfrm>
+            <a:off x="7507224" y="5596128"/>
+            <a:ext cx="201168" cy="201168"/>
+          </a:xfrm>
+          <a:prstGeom prst="rect">
+            <a:avLst/>
+          </a:prstGeom>
+        </p:spPr>
+      </p:pic>
+      <p:sp>
+        <p:nvSpPr>
+          <p:cNvPr id="52" name="Text 40"/>
           <p:cNvSpPr txBox="1"/>
           <p:nvPr/>
         </p:nvSpPr>
         <p:spPr>
           <a:xfrm>
-            <a:off x="7223760" y="5504688"/>
-            <a:ext cx="4236415" cy="786384"/>
+            <a:off x="7927848" y="5367528"/>
+            <a:ext cx="3596335" cy="694944"/>
           </a:xfrm>
           <a:prstGeom prst="rect">
             <a:avLst/>
@@ -8052,7 +8666,7 @@
         <p:spPr>
           <a:xfrm>
             <a:off x="548640" y="1508760"/>
-            <a:ext cx="5364328" cy="4526280"/>
+            <a:ext cx="5486400" cy="4526280"/>
           </a:xfrm>
           <a:prstGeom prst="roundRect">
             <a:avLst>
@@ -8085,8 +8699,8 @@
         </p:nvSpPr>
         <p:spPr>
           <a:xfrm>
-            <a:off x="822960" y="1645920"/>
-            <a:ext cx="4815688" cy="457200"/>
+            <a:off x="822960" y="1627632"/>
+            <a:ext cx="4937760" cy="457200"/>
           </a:xfrm>
           <a:prstGeom prst="rect">
             <a:avLst/>
@@ -8102,27 +8716,54 @@
               <a:buNone/>
             </a:pPr>
             <a:r>
-              <a:rPr lang="en-US" sz="2200" b="1" dirty="0">
+              <a:rPr lang="en-US" sz="2000" b="1" dirty="0">
                 <a:solidFill>
                   <a:schemeClr val="accent4"/>
                 </a:solidFill>
               </a:rPr>
-              <a:t>Honest limits</a:t>
-            </a:r>
-            <a:endParaRPr lang="en-US" sz="2200" dirty="0"/>
-          </a:p>
-        </p:txBody>
-      </p:sp>
-      <p:sp>
-        <p:nvSpPr>
-          <p:cNvPr id="5" name="Text 3"/>
+              <a:t>What we have and have not tested</a:t>
+            </a:r>
+            <a:endParaRPr lang="en-US" sz="2000" dirty="0"/>
+          </a:p>
+        </p:txBody>
+      </p:sp>
+      <p:sp>
+        <p:nvSpPr>
+          <p:cNvPr id="5" name="Shape 3"/>
+          <p:cNvSpPr/>
+          <p:nvPr/>
+        </p:nvSpPr>
+        <p:spPr>
+          <a:xfrm>
+            <a:off x="777240" y="2194560"/>
+            <a:ext cx="5029200" cy="457200"/>
+          </a:xfrm>
+          <a:prstGeom prst="roundRect">
+            <a:avLst>
+              <a:gd name="adj" fmla="val 16000"/>
+            </a:avLst>
+          </a:prstGeom>
+          <a:solidFill>
+            <a:srgbClr val="F0FDFA"/>
+          </a:solidFill>
+          <a:ln w="9525">
+            <a:solidFill>
+              <a:srgbClr val="E4ECE8"/>
+            </a:solidFill>
+            <a:prstDash val="solid"/>
+          </a:ln>
+        </p:spPr>
+      </p:sp>
+      <p:sp>
+        <p:nvSpPr>
+          <p:cNvPr id="6" name="Text 4"/>
           <p:cNvSpPr txBox="1"/>
           <p:nvPr/>
         </p:nvSpPr>
         <p:spPr>
           <a:xfrm>
-            <a:off x="822960" y="2194560"/>
-            <a:ext cx="4815688" cy="3749040"/>
+            <a:off x="914400" y="2194560"/>
+            <a:ext cx="3429000" cy="457200"/>
           </a:xfrm>
           <a:prstGeom prst="rect">
             <a:avLst/>
@@ -8131,110 +8772,625 @@
           <a:ln/>
         </p:spPr>
         <p:txBody>
-          <a:bodyPr wrap="square" lIns="635" tIns="635" rIns="635" bIns="635" rtlCol="0" anchor="t"/>
-          <a:lstStyle/>
-          <a:p>
-            <a:pPr marL="177800" indent="-177800">
-              <a:spcAft>
-                <a:spcPts val="1200"/>
-              </a:spcAft>
-              <a:buSzPct val="100000"/>
-              <a:buChar char="•"/>
-            </a:pPr>
-            <a:r>
-              <a:rPr lang="en-US" sz="1700" dirty="0">
+          <a:bodyPr wrap="square" lIns="0" tIns="0" rIns="0" bIns="0" rtlCol="0" anchor="ctr"/>
+          <a:lstStyle/>
+          <a:p>
+            <a:pPr indent="0" marL="0">
+              <a:buNone/>
+            </a:pPr>
+            <a:r>
+              <a:rPr lang="en-US" sz="1300" dirty="0">
                 <a:solidFill>
                   <a:schemeClr val="tx1"/>
                 </a:solidFill>
               </a:rPr>
-              <a:t>Synthetic documents, one model: this shows the logic, not real-world accuracy</a:t>
-            </a:r>
-            <a:endParaRPr lang="en-US" sz="1700" dirty="0"/>
-          </a:p>
-          <a:p>
-            <a:pPr marL="177800" indent="-177800">
-              <a:spcAft>
-                <a:spcPts val="1200"/>
-              </a:spcAft>
-              <a:buSzPct val="100000"/>
-              <a:buChar char="•"/>
-            </a:pPr>
-            <a:r>
-              <a:rPr lang="en-US" sz="1700" dirty="0">
+              <a:t>English, typed deeds (digital and scanned)</a:t>
+            </a:r>
+            <a:endParaRPr lang="en-US" sz="1300" dirty="0"/>
+          </a:p>
+        </p:txBody>
+      </p:sp>
+      <p:sp>
+        <p:nvSpPr>
+          <p:cNvPr id="7" name="Text 5"/>
+          <p:cNvSpPr txBox="1"/>
+          <p:nvPr/>
+        </p:nvSpPr>
+        <p:spPr>
+          <a:xfrm>
+            <a:off x="4480560" y="2249424"/>
+            <a:ext cx="1234440" cy="347472"/>
+          </a:xfrm>
+          <a:prstGeom prst="roundRect">
+            <a:avLst>
+              <a:gd name="adj" fmla="val 26316"/>
+            </a:avLst>
+          </a:prstGeom>
+          <a:solidFill>
+            <a:schemeClr val="accent6"/>
+          </a:solidFill>
+          <a:ln/>
+        </p:spPr>
+        <p:txBody>
+          <a:bodyPr wrap="square" lIns="0" tIns="0" rIns="0" bIns="0" rtlCol="0" anchor="ctr"/>
+          <a:lstStyle/>
+          <a:p>
+            <a:pPr algn="ctr" indent="0" marL="0">
+              <a:buNone/>
+            </a:pPr>
+            <a:r>
+              <a:rPr lang="en-US" sz="1300" b="1" dirty="0">
+                <a:solidFill>
+                  <a:schemeClr val="bg1"/>
+                </a:solidFill>
+              </a:rPr>
+              <a:t>Tested</a:t>
+            </a:r>
+            <a:endParaRPr lang="en-US" sz="1300" dirty="0"/>
+          </a:p>
+        </p:txBody>
+      </p:sp>
+      <p:sp>
+        <p:nvSpPr>
+          <p:cNvPr id="8" name="Shape 6"/>
+          <p:cNvSpPr/>
+          <p:nvPr/>
+        </p:nvSpPr>
+        <p:spPr>
+          <a:xfrm>
+            <a:off x="777240" y="2724912"/>
+            <a:ext cx="5029200" cy="457200"/>
+          </a:xfrm>
+          <a:prstGeom prst="roundRect">
+            <a:avLst>
+              <a:gd name="adj" fmla="val 16000"/>
+            </a:avLst>
+          </a:prstGeom>
+          <a:solidFill>
+            <a:schemeClr val="bg1"/>
+          </a:solidFill>
+          <a:ln w="9525">
+            <a:solidFill>
+              <a:srgbClr val="E4ECE8"/>
+            </a:solidFill>
+            <a:prstDash val="solid"/>
+          </a:ln>
+        </p:spPr>
+      </p:sp>
+      <p:sp>
+        <p:nvSpPr>
+          <p:cNvPr id="9" name="Text 7"/>
+          <p:cNvSpPr txBox="1"/>
+          <p:nvPr/>
+        </p:nvSpPr>
+        <p:spPr>
+          <a:xfrm>
+            <a:off x="914400" y="2724912"/>
+            <a:ext cx="3429000" cy="457200"/>
+          </a:xfrm>
+          <a:prstGeom prst="rect">
+            <a:avLst/>
+          </a:prstGeom>
+          <a:noFill/>
+          <a:ln/>
+        </p:spPr>
+        <p:txBody>
+          <a:bodyPr wrap="square" lIns="0" tIns="0" rIns="0" bIns="0" rtlCol="0" anchor="ctr"/>
+          <a:lstStyle/>
+          <a:p>
+            <a:pPr indent="0" marL="0">
+              <a:buNone/>
+            </a:pPr>
+            <a:r>
+              <a:rPr lang="en-US" sz="1300" dirty="0">
                 <a:solidFill>
                   <a:schemeClr val="tx1"/>
                 </a:solidFill>
               </a:rPr>
-              <a:t>English and Hindi tested; Assamese not tested</a:t>
-            </a:r>
-            <a:endParaRPr lang="en-US" sz="1700" dirty="0"/>
-          </a:p>
-          <a:p>
-            <a:pPr marL="177800" indent="-177800">
-              <a:spcAft>
-                <a:spcPts val="1200"/>
-              </a:spcAft>
-              <a:buSzPct val="100000"/>
-              <a:buChar char="•"/>
-            </a:pPr>
-            <a:r>
-              <a:rPr lang="en-US" sz="1700" dirty="0">
+              <a:t>Hindi, typed deeds (digital and scanned)</a:t>
+            </a:r>
+            <a:endParaRPr lang="en-US" sz="1300" dirty="0"/>
+          </a:p>
+        </p:txBody>
+      </p:sp>
+      <p:sp>
+        <p:nvSpPr>
+          <p:cNvPr id="10" name="Text 8"/>
+          <p:cNvSpPr txBox="1"/>
+          <p:nvPr/>
+        </p:nvSpPr>
+        <p:spPr>
+          <a:xfrm>
+            <a:off x="4480560" y="2779776"/>
+            <a:ext cx="1234440" cy="347472"/>
+          </a:xfrm>
+          <a:prstGeom prst="roundRect">
+            <a:avLst>
+              <a:gd name="adj" fmla="val 26316"/>
+            </a:avLst>
+          </a:prstGeom>
+          <a:solidFill>
+            <a:schemeClr val="accent6"/>
+          </a:solidFill>
+          <a:ln/>
+        </p:spPr>
+        <p:txBody>
+          <a:bodyPr wrap="square" lIns="0" tIns="0" rIns="0" bIns="0" rtlCol="0" anchor="ctr"/>
+          <a:lstStyle/>
+          <a:p>
+            <a:pPr algn="ctr" indent="0" marL="0">
+              <a:buNone/>
+            </a:pPr>
+            <a:r>
+              <a:rPr lang="en-US" sz="1300" b="1" dirty="0">
+                <a:solidFill>
+                  <a:schemeClr val="bg1"/>
+                </a:solidFill>
+              </a:rPr>
+              <a:t>Tested</a:t>
+            </a:r>
+            <a:endParaRPr lang="en-US" sz="1300" dirty="0"/>
+          </a:p>
+        </p:txBody>
+      </p:sp>
+      <p:sp>
+        <p:nvSpPr>
+          <p:cNvPr id="11" name="Shape 9"/>
+          <p:cNvSpPr/>
+          <p:nvPr/>
+        </p:nvSpPr>
+        <p:spPr>
+          <a:xfrm>
+            <a:off x="777240" y="3255264"/>
+            <a:ext cx="5029200" cy="457200"/>
+          </a:xfrm>
+          <a:prstGeom prst="roundRect">
+            <a:avLst>
+              <a:gd name="adj" fmla="val 16000"/>
+            </a:avLst>
+          </a:prstGeom>
+          <a:solidFill>
+            <a:srgbClr val="F0FDFA"/>
+          </a:solidFill>
+          <a:ln w="9525">
+            <a:solidFill>
+              <a:srgbClr val="E4ECE8"/>
+            </a:solidFill>
+            <a:prstDash val="solid"/>
+          </a:ln>
+        </p:spPr>
+      </p:sp>
+      <p:sp>
+        <p:nvSpPr>
+          <p:cNvPr id="12" name="Text 10"/>
+          <p:cNvSpPr txBox="1"/>
+          <p:nvPr/>
+        </p:nvSpPr>
+        <p:spPr>
+          <a:xfrm>
+            <a:off x="914400" y="3255264"/>
+            <a:ext cx="3429000" cy="457200"/>
+          </a:xfrm>
+          <a:prstGeom prst="rect">
+            <a:avLst/>
+          </a:prstGeom>
+          <a:noFill/>
+          <a:ln/>
+        </p:spPr>
+        <p:txBody>
+          <a:bodyPr wrap="square" lIns="0" tIns="0" rIns="0" bIns="0" rtlCol="0" anchor="ctr"/>
+          <a:lstStyle/>
+          <a:p>
+            <a:pPr indent="0" marL="0">
+              <a:buNone/>
+            </a:pPr>
+            <a:r>
+              <a:rPr lang="en-US" sz="1300" dirty="0">
                 <a:solidFill>
                   <a:schemeClr val="tx1"/>
                 </a:solidFill>
               </a:rPr>
-              <a:t>Handwriting tested with a handwriting font, which is tidier than real writing</a:t>
-            </a:r>
-            <a:endParaRPr lang="en-US" sz="1700" dirty="0"/>
-          </a:p>
-          <a:p>
-            <a:pPr marL="177800" indent="-177800">
-              <a:spcAft>
-                <a:spcPts val="1200"/>
-              </a:spcAft>
-              <a:buSzPct val="100000"/>
-              <a:buChar char="•"/>
-            </a:pPr>
-            <a:r>
-              <a:rPr lang="en-US" sz="1700" dirty="0">
+              <a:t>Handwriting, using a handwriting font</a:t>
+            </a:r>
+            <a:endParaRPr lang="en-US" sz="1300" dirty="0"/>
+          </a:p>
+        </p:txBody>
+      </p:sp>
+      <p:sp>
+        <p:nvSpPr>
+          <p:cNvPr id="13" name="Text 11"/>
+          <p:cNvSpPr txBox="1"/>
+          <p:nvPr/>
+        </p:nvSpPr>
+        <p:spPr>
+          <a:xfrm>
+            <a:off x="4480560" y="3310128"/>
+            <a:ext cx="1234440" cy="347472"/>
+          </a:xfrm>
+          <a:prstGeom prst="roundRect">
+            <a:avLst>
+              <a:gd name="adj" fmla="val 26316"/>
+            </a:avLst>
+          </a:prstGeom>
+          <a:solidFill>
+            <a:schemeClr val="accent4"/>
+          </a:solidFill>
+          <a:ln/>
+        </p:spPr>
+        <p:txBody>
+          <a:bodyPr wrap="square" lIns="0" tIns="0" rIns="0" bIns="0" rtlCol="0" anchor="ctr"/>
+          <a:lstStyle/>
+          <a:p>
+            <a:pPr algn="ctr" indent="0" marL="0">
+              <a:buNone/>
+            </a:pPr>
+            <a:r>
+              <a:rPr lang="en-US" sz="1300" b="1" dirty="0">
+                <a:solidFill>
+                  <a:schemeClr val="bg1"/>
+                </a:solidFill>
+              </a:rPr>
+              <a:t>Partly</a:t>
+            </a:r>
+            <a:endParaRPr lang="en-US" sz="1300" dirty="0"/>
+          </a:p>
+        </p:txBody>
+      </p:sp>
+      <p:sp>
+        <p:nvSpPr>
+          <p:cNvPr id="14" name="Shape 12"/>
+          <p:cNvSpPr/>
+          <p:nvPr/>
+        </p:nvSpPr>
+        <p:spPr>
+          <a:xfrm>
+            <a:off x="777240" y="3785616"/>
+            <a:ext cx="5029200" cy="457200"/>
+          </a:xfrm>
+          <a:prstGeom prst="roundRect">
+            <a:avLst>
+              <a:gd name="adj" fmla="val 16000"/>
+            </a:avLst>
+          </a:prstGeom>
+          <a:solidFill>
+            <a:schemeClr val="bg1"/>
+          </a:solidFill>
+          <a:ln w="9525">
+            <a:solidFill>
+              <a:srgbClr val="E4ECE8"/>
+            </a:solidFill>
+            <a:prstDash val="solid"/>
+          </a:ln>
+        </p:spPr>
+      </p:sp>
+      <p:sp>
+        <p:nvSpPr>
+          <p:cNvPr id="15" name="Text 13"/>
+          <p:cNvSpPr txBox="1"/>
+          <p:nvPr/>
+        </p:nvSpPr>
+        <p:spPr>
+          <a:xfrm>
+            <a:off x="914400" y="3785616"/>
+            <a:ext cx="3429000" cy="457200"/>
+          </a:xfrm>
+          <a:prstGeom prst="rect">
+            <a:avLst/>
+          </a:prstGeom>
+          <a:noFill/>
+          <a:ln/>
+        </p:spPr>
+        <p:txBody>
+          <a:bodyPr wrap="square" lIns="0" tIns="0" rIns="0" bIns="0" rtlCol="0" anchor="ctr"/>
+          <a:lstStyle/>
+          <a:p>
+            <a:pPr indent="0" marL="0">
+              <a:buNone/>
+            </a:pPr>
+            <a:r>
+              <a:rPr lang="en-US" sz="1300" dirty="0">
                 <a:solidFill>
                   <a:schemeClr val="tx1"/>
                 </a:solidFill>
               </a:rPr>
-              <a:t>Handwritten ID numbers cannot be masked automatically</a:t>
-            </a:r>
-            <a:endParaRPr lang="en-US" sz="1700" dirty="0"/>
-          </a:p>
-          <a:p>
-            <a:pPr marL="177800" indent="-177800">
-              <a:spcAft>
-                <a:spcPts val="1200"/>
-              </a:spcAft>
-              <a:buSzPct val="100000"/>
-              <a:buChar char="•"/>
-            </a:pPr>
-            <a:r>
-              <a:rPr lang="en-US" sz="1700" dirty="0">
+              <a:t>Real handwritten deeds</a:t>
+            </a:r>
+            <a:endParaRPr lang="en-US" sz="1300" dirty="0"/>
+          </a:p>
+        </p:txBody>
+      </p:sp>
+      <p:sp>
+        <p:nvSpPr>
+          <p:cNvPr id="16" name="Text 14"/>
+          <p:cNvSpPr txBox="1"/>
+          <p:nvPr/>
+        </p:nvSpPr>
+        <p:spPr>
+          <a:xfrm>
+            <a:off x="4480560" y="3840480"/>
+            <a:ext cx="1234440" cy="347472"/>
+          </a:xfrm>
+          <a:prstGeom prst="roundRect">
+            <a:avLst>
+              <a:gd name="adj" fmla="val 26316"/>
+            </a:avLst>
+          </a:prstGeom>
+          <a:solidFill>
+            <a:schemeClr val="accent3"/>
+          </a:solidFill>
+          <a:ln/>
+        </p:spPr>
+        <p:txBody>
+          <a:bodyPr wrap="square" lIns="0" tIns="0" rIns="0" bIns="0" rtlCol="0" anchor="ctr"/>
+          <a:lstStyle/>
+          <a:p>
+            <a:pPr algn="ctr" indent="0" marL="0">
+              <a:buNone/>
+            </a:pPr>
+            <a:r>
+              <a:rPr lang="en-US" sz="1300" b="1" dirty="0">
+                <a:solidFill>
+                  <a:schemeClr val="bg1"/>
+                </a:solidFill>
+              </a:rPr>
+              <a:t>Not tested</a:t>
+            </a:r>
+            <a:endParaRPr lang="en-US" sz="1300" dirty="0"/>
+          </a:p>
+        </p:txBody>
+      </p:sp>
+      <p:sp>
+        <p:nvSpPr>
+          <p:cNvPr id="17" name="Shape 15"/>
+          <p:cNvSpPr/>
+          <p:nvPr/>
+        </p:nvSpPr>
+        <p:spPr>
+          <a:xfrm>
+            <a:off x="777240" y="4315968"/>
+            <a:ext cx="5029200" cy="457200"/>
+          </a:xfrm>
+          <a:prstGeom prst="roundRect">
+            <a:avLst>
+              <a:gd name="adj" fmla="val 16000"/>
+            </a:avLst>
+          </a:prstGeom>
+          <a:solidFill>
+            <a:srgbClr val="F0FDFA"/>
+          </a:solidFill>
+          <a:ln w="9525">
+            <a:solidFill>
+              <a:srgbClr val="E4ECE8"/>
+            </a:solidFill>
+            <a:prstDash val="solid"/>
+          </a:ln>
+        </p:spPr>
+      </p:sp>
+      <p:sp>
+        <p:nvSpPr>
+          <p:cNvPr id="18" name="Text 16"/>
+          <p:cNvSpPr txBox="1"/>
+          <p:nvPr/>
+        </p:nvSpPr>
+        <p:spPr>
+          <a:xfrm>
+            <a:off x="914400" y="4315968"/>
+            <a:ext cx="3429000" cy="457200"/>
+          </a:xfrm>
+          <a:prstGeom prst="rect">
+            <a:avLst/>
+          </a:prstGeom>
+          <a:noFill/>
+          <a:ln/>
+        </p:spPr>
+        <p:txBody>
+          <a:bodyPr wrap="square" lIns="0" tIns="0" rIns="0" bIns="0" rtlCol="0" anchor="ctr"/>
+          <a:lstStyle/>
+          <a:p>
+            <a:pPr indent="0" marL="0">
+              <a:buNone/>
+            </a:pPr>
+            <a:r>
+              <a:rPr lang="en-US" sz="1300" dirty="0">
                 <a:solidFill>
                   <a:schemeClr val="tx1"/>
                 </a:solidFill>
               </a:rPr>
-              <a:t>A deed-only view cannot see inheritance, mutations or litigation</a:t>
-            </a:r>
-            <a:endParaRPr lang="en-US" sz="1700" dirty="0"/>
-          </a:p>
-        </p:txBody>
-      </p:sp>
-      <p:sp>
-        <p:nvSpPr>
-          <p:cNvPr id="6" name="Shape 4"/>
+              <a:t>Assamese deeds</a:t>
+            </a:r>
+            <a:endParaRPr lang="en-US" sz="1300" dirty="0"/>
+          </a:p>
+        </p:txBody>
+      </p:sp>
+      <p:sp>
+        <p:nvSpPr>
+          <p:cNvPr id="19" name="Text 17"/>
+          <p:cNvSpPr txBox="1"/>
+          <p:nvPr/>
+        </p:nvSpPr>
+        <p:spPr>
+          <a:xfrm>
+            <a:off x="4480560" y="4370832"/>
+            <a:ext cx="1234440" cy="347472"/>
+          </a:xfrm>
+          <a:prstGeom prst="roundRect">
+            <a:avLst>
+              <a:gd name="adj" fmla="val 26316"/>
+            </a:avLst>
+          </a:prstGeom>
+          <a:solidFill>
+            <a:schemeClr val="accent3"/>
+          </a:solidFill>
+          <a:ln/>
+        </p:spPr>
+        <p:txBody>
+          <a:bodyPr wrap="square" lIns="0" tIns="0" rIns="0" bIns="0" rtlCol="0" anchor="ctr"/>
+          <a:lstStyle/>
+          <a:p>
+            <a:pPr algn="ctr" indent="0" marL="0">
+              <a:buNone/>
+            </a:pPr>
+            <a:r>
+              <a:rPr lang="en-US" sz="1300" b="1" dirty="0">
+                <a:solidFill>
+                  <a:schemeClr val="bg1"/>
+                </a:solidFill>
+              </a:rPr>
+              <a:t>Not tested</a:t>
+            </a:r>
+            <a:endParaRPr lang="en-US" sz="1300" dirty="0"/>
+          </a:p>
+        </p:txBody>
+      </p:sp>
+      <p:sp>
+        <p:nvSpPr>
+          <p:cNvPr id="20" name="Shape 18"/>
           <p:cNvSpPr/>
           <p:nvPr/>
         </p:nvSpPr>
         <p:spPr>
           <a:xfrm>
-            <a:off x="6278728" y="1508760"/>
-            <a:ext cx="5364328" cy="4526280"/>
+            <a:off x="777240" y="4846320"/>
+            <a:ext cx="5029200" cy="457200"/>
+          </a:xfrm>
+          <a:prstGeom prst="roundRect">
+            <a:avLst>
+              <a:gd name="adj" fmla="val 16000"/>
+            </a:avLst>
+          </a:prstGeom>
+          <a:solidFill>
+            <a:schemeClr val="bg1"/>
+          </a:solidFill>
+          <a:ln w="9525">
+            <a:solidFill>
+              <a:srgbClr val="E4ECE8"/>
+            </a:solidFill>
+            <a:prstDash val="solid"/>
+          </a:ln>
+        </p:spPr>
+      </p:sp>
+      <p:sp>
+        <p:nvSpPr>
+          <p:cNvPr id="21" name="Text 19"/>
+          <p:cNvSpPr txBox="1"/>
+          <p:nvPr/>
+        </p:nvSpPr>
+        <p:spPr>
+          <a:xfrm>
+            <a:off x="914400" y="4846320"/>
+            <a:ext cx="3429000" cy="457200"/>
+          </a:xfrm>
+          <a:prstGeom prst="rect">
+            <a:avLst/>
+          </a:prstGeom>
+          <a:noFill/>
+          <a:ln/>
+        </p:spPr>
+        <p:txBody>
+          <a:bodyPr wrap="square" lIns="0" tIns="0" rIns="0" bIns="0" rtlCol="0" anchor="ctr"/>
+          <a:lstStyle/>
+          <a:p>
+            <a:pPr indent="0" marL="0">
+              <a:buNone/>
+            </a:pPr>
+            <a:r>
+              <a:rPr lang="en-US" sz="1300" dirty="0">
+                <a:solidFill>
+                  <a:schemeClr val="tx1"/>
+                </a:solidFill>
+              </a:rPr>
+              <a:t>Real deeds and a real registry feed</a:t>
+            </a:r>
+            <a:endParaRPr lang="en-US" sz="1300" dirty="0"/>
+          </a:p>
+        </p:txBody>
+      </p:sp>
+      <p:sp>
+        <p:nvSpPr>
+          <p:cNvPr id="22" name="Text 20"/>
+          <p:cNvSpPr txBox="1"/>
+          <p:nvPr/>
+        </p:nvSpPr>
+        <p:spPr>
+          <a:xfrm>
+            <a:off x="4480560" y="4901184"/>
+            <a:ext cx="1234440" cy="347472"/>
+          </a:xfrm>
+          <a:prstGeom prst="roundRect">
+            <a:avLst>
+              <a:gd name="adj" fmla="val 26316"/>
+            </a:avLst>
+          </a:prstGeom>
+          <a:solidFill>
+            <a:schemeClr val="accent3"/>
+          </a:solidFill>
+          <a:ln/>
+        </p:spPr>
+        <p:txBody>
+          <a:bodyPr wrap="square" lIns="0" tIns="0" rIns="0" bIns="0" rtlCol="0" anchor="ctr"/>
+          <a:lstStyle/>
+          <a:p>
+            <a:pPr algn="ctr" indent="0" marL="0">
+              <a:buNone/>
+            </a:pPr>
+            <a:r>
+              <a:rPr lang="en-US" sz="1300" b="1" dirty="0">
+                <a:solidFill>
+                  <a:schemeClr val="bg1"/>
+                </a:solidFill>
+              </a:rPr>
+              <a:t>Not tested</a:t>
+            </a:r>
+            <a:endParaRPr lang="en-US" sz="1300" dirty="0"/>
+          </a:p>
+        </p:txBody>
+      </p:sp>
+      <p:sp>
+        <p:nvSpPr>
+          <p:cNvPr id="23" name="Text 21"/>
+          <p:cNvSpPr txBox="1"/>
+          <p:nvPr/>
+        </p:nvSpPr>
+        <p:spPr>
+          <a:xfrm>
+            <a:off x="822960" y="5440680"/>
+            <a:ext cx="4937760" cy="548640"/>
+          </a:xfrm>
+          <a:prstGeom prst="rect">
+            <a:avLst/>
+          </a:prstGeom>
+          <a:noFill/>
+          <a:ln/>
+        </p:spPr>
+        <p:txBody>
+          <a:bodyPr wrap="square" lIns="0" tIns="0" rIns="0" bIns="0" rtlCol="0" anchor="t"/>
+          <a:lstStyle/>
+          <a:p>
+            <a:pPr indent="0" marL="0">
+              <a:buNone/>
+            </a:pPr>
+            <a:r>
+              <a:rPr lang="en-US" sz="1200" dirty="0">
+                <a:solidFill>
+                  <a:srgbClr val="5B7276"/>
+                </a:solidFill>
+              </a:rPr>
+              <a:t>Also: handwritten ID numbers cannot be masked automatically, and a deed-only view cannot see inheritance, mutations or litigation.</a:t>
+            </a:r>
+            <a:endParaRPr lang="en-US" sz="1200" dirty="0"/>
+          </a:p>
+        </p:txBody>
+      </p:sp>
+      <p:sp>
+        <p:nvSpPr>
+          <p:cNvPr id="24" name="Shape 22"/>
+          <p:cNvSpPr/>
+          <p:nvPr/>
+        </p:nvSpPr>
+        <p:spPr>
+          <a:xfrm>
+            <a:off x="6309360" y="1508760"/>
+            <a:ext cx="5333695" cy="4526280"/>
           </a:xfrm>
           <a:prstGeom prst="roundRect">
             <a:avLst>
@@ -8261,14 +9417,14 @@
       </p:sp>
       <p:sp>
         <p:nvSpPr>
-          <p:cNvPr id="7" name="Text 5"/>
+          <p:cNvPr id="25" name="Text 23"/>
           <p:cNvSpPr txBox="1"/>
           <p:nvPr/>
         </p:nvSpPr>
         <p:spPr>
           <a:xfrm>
-            <a:off x="6553048" y="1645920"/>
-            <a:ext cx="4815688" cy="457200"/>
+            <a:off x="6583680" y="1627632"/>
+            <a:ext cx="4785055" cy="457200"/>
           </a:xfrm>
           <a:prstGeom prst="rect">
             <a:avLst/>
@@ -8284,27 +9440,101 @@
               <a:buNone/>
             </a:pPr>
             <a:r>
-              <a:rPr lang="en-US" sz="2200" b="1" dirty="0">
+              <a:rPr lang="en-US" sz="2000" b="1" dirty="0">
                 <a:solidFill>
                   <a:schemeClr val="accent1"/>
                 </a:solidFill>
               </a:rPr>
-              <a:t>Future scope</a:t>
-            </a:r>
-            <a:endParaRPr lang="en-US" sz="2200" dirty="0"/>
-          </a:p>
-        </p:txBody>
-      </p:sp>
-      <p:sp>
-        <p:nvSpPr>
-          <p:cNvPr id="8" name="Text 6"/>
+              <a:t>Roadmap</a:t>
+            </a:r>
+            <a:endParaRPr lang="en-US" sz="2000" dirty="0"/>
+          </a:p>
+        </p:txBody>
+      </p:sp>
+      <p:sp>
+        <p:nvSpPr>
+          <p:cNvPr id="26" name="Shape 24"/>
+          <p:cNvSpPr/>
+          <p:nvPr/>
+        </p:nvSpPr>
+        <p:spPr>
+          <a:xfrm>
+            <a:off x="6812280" y="2468880"/>
+            <a:ext cx="36576" cy="2852928"/>
+          </a:xfrm>
+          <a:prstGeom prst="rect">
+            <a:avLst/>
+          </a:prstGeom>
+          <a:solidFill>
+            <a:srgbClr val="B9D8D2"/>
+          </a:solidFill>
+          <a:ln w="12700">
+            <a:solidFill>
+              <a:srgbClr val="B9D8D2"/>
+            </a:solidFill>
+            <a:prstDash val="solid"/>
+          </a:ln>
+        </p:spPr>
+      </p:sp>
+      <p:sp>
+        <p:nvSpPr>
+          <p:cNvPr id="27" name="Shape 25"/>
+          <p:cNvSpPr/>
+          <p:nvPr/>
+        </p:nvSpPr>
+        <p:spPr>
+          <a:xfrm>
+            <a:off x="6601968" y="2240280"/>
+            <a:ext cx="457200" cy="457200"/>
+          </a:xfrm>
+          <a:prstGeom prst="ellipse">
+            <a:avLst/>
+          </a:prstGeom>
+          <a:solidFill>
+            <a:schemeClr val="accent1"/>
+          </a:solidFill>
+          <a:ln w="12700">
+            <a:solidFill>
+              <a:schemeClr val="accent1"/>
+            </a:solidFill>
+            <a:prstDash val="solid"/>
+          </a:ln>
+        </p:spPr>
+      </p:sp>
+      <p:pic>
+        <p:nvPicPr>
+          <p:cNvPr id="28" name="Image 0" descr="Landmark">    </p:cNvPr>
+          <p:cNvPicPr>
+            <a:picLocks noChangeAspect="1"/>
+          </p:cNvPicPr>
+          <p:nvPr/>
+        </p:nvPicPr>
+        <p:blipFill>
+          <a:blip r:embed="rId1"/>
+          <a:stretch>
+            <a:fillRect/>
+          </a:stretch>
+        </p:blipFill>
+        <p:spPr>
+          <a:xfrm>
+            <a:off x="6716268" y="2354580"/>
+            <a:ext cx="228600" cy="228600"/>
+          </a:xfrm>
+          <a:prstGeom prst="rect">
+            <a:avLst/>
+          </a:prstGeom>
+        </p:spPr>
+      </p:pic>
+      <p:sp>
+        <p:nvSpPr>
+          <p:cNvPr id="29" name="Text 26"/>
           <p:cNvSpPr txBox="1"/>
           <p:nvPr/>
         </p:nvSpPr>
         <p:spPr>
           <a:xfrm>
-            <a:off x="6553048" y="2194560"/>
-            <a:ext cx="4815688" cy="3749040"/>
+            <a:off x="7269480" y="2194560"/>
+            <a:ext cx="4099255" cy="566928"/>
           </a:xfrm>
           <a:prstGeom prst="rect">
             <a:avLst/>
@@ -8313,97 +9543,483 @@
           <a:ln/>
         </p:spPr>
         <p:txBody>
-          <a:bodyPr wrap="square" lIns="635" tIns="635" rIns="635" bIns="635" rtlCol="0" anchor="t"/>
-          <a:lstStyle/>
-          <a:p>
-            <a:pPr marL="177800" indent="-177800">
-              <a:spcAft>
-                <a:spcPts val="1200"/>
-              </a:spcAft>
-              <a:buSzPct val="100000"/>
-              <a:buChar char="•"/>
-            </a:pPr>
-            <a:r>
-              <a:rPr lang="en-US" sz="1700" dirty="0">
+          <a:bodyPr wrap="square" lIns="0" tIns="0" rIns="0" bIns="0" rtlCol="0" anchor="ctr"/>
+          <a:lstStyle/>
+          <a:p>
+            <a:pPr indent="0" marL="0">
+              <a:buNone/>
+            </a:pPr>
+            <a:r>
+              <a:rPr lang="en-US" sz="1400" dirty="0">
                 <a:solidFill>
                   <a:schemeClr val="tx1"/>
                 </a:solidFill>
               </a:rPr>
               <a:t>Pilot with one Sub-Registrar office on a sandbox registry feed</a:t>
             </a:r>
-            <a:endParaRPr lang="en-US" sz="1700" dirty="0"/>
-          </a:p>
-          <a:p>
-            <a:pPr marL="177800" indent="-177800">
-              <a:spcAft>
-                <a:spcPts val="1200"/>
-              </a:spcAft>
-              <a:buSzPct val="100000"/>
-              <a:buChar char="•"/>
-            </a:pPr>
-            <a:r>
-              <a:rPr lang="en-US" sz="1700" dirty="0">
+            <a:endParaRPr lang="en-US" sz="1400" dirty="0"/>
+          </a:p>
+        </p:txBody>
+      </p:sp>
+      <p:sp>
+        <p:nvSpPr>
+          <p:cNvPr id="30" name="Shape 27"/>
+          <p:cNvSpPr/>
+          <p:nvPr/>
+        </p:nvSpPr>
+        <p:spPr>
+          <a:xfrm>
+            <a:off x="6601968" y="2953512"/>
+            <a:ext cx="457200" cy="457200"/>
+          </a:xfrm>
+          <a:prstGeom prst="ellipse">
+            <a:avLst/>
+          </a:prstGeom>
+          <a:solidFill>
+            <a:schemeClr val="accent1"/>
+          </a:solidFill>
+          <a:ln w="12700">
+            <a:solidFill>
+              <a:schemeClr val="accent1"/>
+            </a:solidFill>
+            <a:prstDash val="solid"/>
+          </a:ln>
+        </p:spPr>
+      </p:sp>
+      <p:pic>
+        <p:nvPicPr>
+          <p:cNvPr id="31" name="Image 1" descr="Server">    </p:cNvPr>
+          <p:cNvPicPr>
+            <a:picLocks noChangeAspect="1"/>
+          </p:cNvPicPr>
+          <p:nvPr/>
+        </p:nvPicPr>
+        <p:blipFill>
+          <a:blip r:embed="rId2"/>
+          <a:stretch>
+            <a:fillRect/>
+          </a:stretch>
+        </p:blipFill>
+        <p:spPr>
+          <a:xfrm>
+            <a:off x="6716268" y="3067812"/>
+            <a:ext cx="228600" cy="228600"/>
+          </a:xfrm>
+          <a:prstGeom prst="rect">
+            <a:avLst/>
+          </a:prstGeom>
+        </p:spPr>
+      </p:pic>
+      <p:sp>
+        <p:nvSpPr>
+          <p:cNvPr id="32" name="Text 28"/>
+          <p:cNvSpPr txBox="1"/>
+          <p:nvPr/>
+        </p:nvSpPr>
+        <p:spPr>
+          <a:xfrm>
+            <a:off x="7269480" y="2907792"/>
+            <a:ext cx="4099255" cy="566928"/>
+          </a:xfrm>
+          <a:prstGeom prst="rect">
+            <a:avLst/>
+          </a:prstGeom>
+          <a:noFill/>
+          <a:ln/>
+        </p:spPr>
+        <p:txBody>
+          <a:bodyPr wrap="square" lIns="0" tIns="0" rIns="0" bIns="0" rtlCol="0" anchor="ctr"/>
+          <a:lstStyle/>
+          <a:p>
+            <a:pPr indent="0" marL="0">
+              <a:buNone/>
+            </a:pPr>
+            <a:r>
+              <a:rPr lang="en-US" sz="1400" dirty="0">
                 <a:solidFill>
                   <a:schemeClr val="tx1"/>
                 </a:solidFill>
               </a:rPr>
               <a:t>Self-hosted Indic vision model, so documents never leave the department</a:t>
             </a:r>
-            <a:endParaRPr lang="en-US" sz="1700" dirty="0"/>
-          </a:p>
-          <a:p>
-            <a:pPr marL="177800" indent="-177800">
-              <a:spcAft>
-                <a:spcPts val="1200"/>
-              </a:spcAft>
-              <a:buSzPct val="100000"/>
-              <a:buChar char="•"/>
-            </a:pPr>
-            <a:r>
-              <a:rPr lang="en-US" sz="1700" dirty="0">
+            <a:endParaRPr lang="en-US" sz="1400" dirty="0"/>
+          </a:p>
+        </p:txBody>
+      </p:sp>
+      <p:sp>
+        <p:nvSpPr>
+          <p:cNvPr id="33" name="Shape 29"/>
+          <p:cNvSpPr/>
+          <p:nvPr/>
+        </p:nvSpPr>
+        <p:spPr>
+          <a:xfrm>
+            <a:off x="6601968" y="3666744"/>
+            <a:ext cx="457200" cy="457200"/>
+          </a:xfrm>
+          <a:prstGeom prst="ellipse">
+            <a:avLst/>
+          </a:prstGeom>
+          <a:solidFill>
+            <a:schemeClr val="accent2"/>
+          </a:solidFill>
+          <a:ln w="12700">
+            <a:solidFill>
+              <a:schemeClr val="accent2"/>
+            </a:solidFill>
+            <a:prstDash val="solid"/>
+          </a:ln>
+        </p:spPr>
+      </p:sp>
+      <p:pic>
+        <p:nvPicPr>
+          <p:cNvPr id="34" name="Image 2" descr="Map">    </p:cNvPr>
+          <p:cNvPicPr>
+            <a:picLocks noChangeAspect="1"/>
+          </p:cNvPicPr>
+          <p:nvPr/>
+        </p:nvPicPr>
+        <p:blipFill>
+          <a:blip r:embed="rId3"/>
+          <a:stretch>
+            <a:fillRect/>
+          </a:stretch>
+        </p:blipFill>
+        <p:spPr>
+          <a:xfrm>
+            <a:off x="6716268" y="3781044"/>
+            <a:ext cx="228600" cy="228600"/>
+          </a:xfrm>
+          <a:prstGeom prst="rect">
+            <a:avLst/>
+          </a:prstGeom>
+        </p:spPr>
+      </p:pic>
+      <p:sp>
+        <p:nvSpPr>
+          <p:cNvPr id="35" name="Text 30"/>
+          <p:cNvSpPr txBox="1"/>
+          <p:nvPr/>
+        </p:nvSpPr>
+        <p:spPr>
+          <a:xfrm>
+            <a:off x="7269480" y="3621024"/>
+            <a:ext cx="4099255" cy="566928"/>
+          </a:xfrm>
+          <a:prstGeom prst="rect">
+            <a:avLst/>
+          </a:prstGeom>
+          <a:noFill/>
+          <a:ln/>
+        </p:spPr>
+        <p:txBody>
+          <a:bodyPr wrap="square" lIns="0" tIns="0" rIns="0" bIns="0" rtlCol="0" anchor="ctr"/>
+          <a:lstStyle/>
+          <a:p>
+            <a:pPr indent="0" marL="0">
+              <a:buNone/>
+            </a:pPr>
+            <a:r>
+              <a:rPr lang="en-US" sz="1400" dirty="0">
                 <a:solidFill>
                   <a:schemeClr val="tx1"/>
                 </a:solidFill>
               </a:rPr>
-              <a:t>State-specific rule packs and an Indic handwriting test set from consented specimens</a:t>
-            </a:r>
-            <a:endParaRPr lang="en-US" sz="1700" dirty="0"/>
-          </a:p>
-          <a:p>
-            <a:pPr marL="177800" indent="-177800">
-              <a:spcAft>
-                <a:spcPts val="1200"/>
-              </a:spcAft>
-              <a:buSzPct val="100000"/>
-              <a:buChar char="•"/>
-            </a:pPr>
-            <a:r>
-              <a:rPr lang="en-US" sz="1700" dirty="0">
+              <a:t>State rule packs and a real Indic handwriting test set from consented specimens</a:t>
+            </a:r>
+            <a:endParaRPr lang="en-US" sz="1400" dirty="0"/>
+          </a:p>
+        </p:txBody>
+      </p:sp>
+      <p:sp>
+        <p:nvSpPr>
+          <p:cNvPr id="36" name="Shape 31"/>
+          <p:cNvSpPr/>
+          <p:nvPr/>
+        </p:nvSpPr>
+        <p:spPr>
+          <a:xfrm>
+            <a:off x="6601968" y="4379976"/>
+            <a:ext cx="457200" cy="457200"/>
+          </a:xfrm>
+          <a:prstGeom prst="ellipse">
+            <a:avLst/>
+          </a:prstGeom>
+          <a:solidFill>
+            <a:schemeClr val="accent2"/>
+          </a:solidFill>
+          <a:ln w="12700">
+            <a:solidFill>
+              <a:schemeClr val="accent2"/>
+            </a:solidFill>
+            <a:prstDash val="solid"/>
+          </a:ln>
+        </p:spPr>
+      </p:sp>
+      <p:pic>
+        <p:nvPicPr>
+          <p:cNvPr id="37" name="Image 3" descr="Language">    </p:cNvPr>
+          <p:cNvPicPr>
+            <a:picLocks noChangeAspect="1"/>
+          </p:cNvPicPr>
+          <p:nvPr/>
+        </p:nvPicPr>
+        <p:blipFill>
+          <a:blip r:embed="rId4"/>
+          <a:stretch>
+            <a:fillRect/>
+          </a:stretch>
+        </p:blipFill>
+        <p:spPr>
+          <a:xfrm>
+            <a:off x="6716268" y="4494276"/>
+            <a:ext cx="228600" cy="228600"/>
+          </a:xfrm>
+          <a:prstGeom prst="rect">
+            <a:avLst/>
+          </a:prstGeom>
+        </p:spPr>
+      </p:pic>
+      <p:sp>
+        <p:nvSpPr>
+          <p:cNvPr id="38" name="Text 32"/>
+          <p:cNvSpPr txBox="1"/>
+          <p:nvPr/>
+        </p:nvSpPr>
+        <p:spPr>
+          <a:xfrm>
+            <a:off x="7269480" y="4334256"/>
+            <a:ext cx="4099255" cy="566928"/>
+          </a:xfrm>
+          <a:prstGeom prst="rect">
+            <a:avLst/>
+          </a:prstGeom>
+          <a:noFill/>
+          <a:ln/>
+        </p:spPr>
+        <p:txBody>
+          <a:bodyPr wrap="square" lIns="0" tIns="0" rIns="0" bIns="0" rtlCol="0" anchor="ctr"/>
+          <a:lstStyle/>
+          <a:p>
+            <a:pPr indent="0" marL="0">
+              <a:buNone/>
+            </a:pPr>
+            <a:r>
+              <a:rPr lang="en-US" sz="1400" dirty="0">
                 <a:solidFill>
                   <a:schemeClr val="tx1"/>
                 </a:solidFill>
               </a:rPr>
               <a:t>Transliteration-aware name matching across scripts</a:t>
             </a:r>
-            <a:endParaRPr lang="en-US" sz="1700" dirty="0"/>
-          </a:p>
-          <a:p>
-            <a:pPr marL="177800" indent="-177800">
-              <a:spcAft>
-                <a:spcPts val="1200"/>
-              </a:spcAft>
-              <a:buSzPct val="100000"/>
-              <a:buChar char="•"/>
-            </a:pPr>
-            <a:r>
-              <a:rPr lang="en-US" sz="1700" dirty="0">
+            <a:endParaRPr lang="en-US" sz="1400" dirty="0"/>
+          </a:p>
+        </p:txBody>
+      </p:sp>
+      <p:sp>
+        <p:nvSpPr>
+          <p:cNvPr id="39" name="Shape 33"/>
+          <p:cNvSpPr/>
+          <p:nvPr/>
+        </p:nvSpPr>
+        <p:spPr>
+          <a:xfrm>
+            <a:off x="6601968" y="5093208"/>
+            <a:ext cx="457200" cy="457200"/>
+          </a:xfrm>
+          <a:prstGeom prst="ellipse">
+            <a:avLst/>
+          </a:prstGeom>
+          <a:solidFill>
+            <a:schemeClr val="accent2"/>
+          </a:solidFill>
+          <a:ln w="12700">
+            <a:solidFill>
+              <a:schemeClr val="accent2"/>
+            </a:solidFill>
+            <a:prstDash val="solid"/>
+          </a:ln>
+        </p:spPr>
+      </p:sp>
+      <p:pic>
+        <p:nvPicPr>
+          <p:cNvPr id="40" name="Image 4" descr="Robot">    </p:cNvPr>
+          <p:cNvPicPr>
+            <a:picLocks noChangeAspect="1"/>
+          </p:cNvPicPr>
+          <p:nvPr/>
+        </p:nvPicPr>
+        <p:blipFill>
+          <a:blip r:embed="rId5"/>
+          <a:stretch>
+            <a:fillRect/>
+          </a:stretch>
+        </p:blipFill>
+        <p:spPr>
+          <a:xfrm>
+            <a:off x="6716268" y="5207508"/>
+            <a:ext cx="228600" cy="228600"/>
+          </a:xfrm>
+          <a:prstGeom prst="rect">
+            <a:avLst/>
+          </a:prstGeom>
+        </p:spPr>
+      </p:pic>
+      <p:sp>
+        <p:nvSpPr>
+          <p:cNvPr id="41" name="Text 34"/>
+          <p:cNvSpPr txBox="1"/>
+          <p:nvPr/>
+        </p:nvSpPr>
+        <p:spPr>
+          <a:xfrm>
+            <a:off x="7269480" y="5047488"/>
+            <a:ext cx="4099255" cy="566928"/>
+          </a:xfrm>
+          <a:prstGeom prst="rect">
+            <a:avLst/>
+          </a:prstGeom>
+          <a:noFill/>
+          <a:ln/>
+        </p:spPr>
+        <p:txBody>
+          <a:bodyPr wrap="square" lIns="0" tIns="0" rIns="0" bIns="0" rtlCol="0" anchor="ctr"/>
+          <a:lstStyle/>
+          <a:p>
+            <a:pPr indent="0" marL="0">
+              <a:buNone/>
+            </a:pPr>
+            <a:r>
+              <a:rPr lang="en-US" sz="1400" dirty="0">
                 <a:solidFill>
                   <a:schemeClr val="tx1"/>
                 </a:solidFill>
               </a:rPr>
-              <a:t>A Cline-powered assistant that answers “why was this flagged?” from the evidence</a:t>
-            </a:r>
-            <a:endParaRPr lang="en-US" sz="1700" dirty="0"/>
+              <a:t>A Cline-powered assistant that answers “why was this flagged?”</a:t>
+            </a:r>
+            <a:endParaRPr lang="en-US" sz="1400" dirty="0"/>
+          </a:p>
+        </p:txBody>
+      </p:sp>
+      <p:sp>
+        <p:nvSpPr>
+          <p:cNvPr id="42" name="Shape 35"/>
+          <p:cNvSpPr/>
+          <p:nvPr/>
+        </p:nvSpPr>
+        <p:spPr>
+          <a:xfrm>
+            <a:off x="6629400" y="5669280"/>
+            <a:ext cx="164592" cy="164592"/>
+          </a:xfrm>
+          <a:prstGeom prst="ellipse">
+            <a:avLst/>
+          </a:prstGeom>
+          <a:solidFill>
+            <a:schemeClr val="accent1"/>
+          </a:solidFill>
+          <a:ln w="12700">
+            <a:solidFill>
+              <a:schemeClr val="accent1"/>
+            </a:solidFill>
+            <a:prstDash val="solid"/>
+          </a:ln>
+        </p:spPr>
+      </p:sp>
+      <p:sp>
+        <p:nvSpPr>
+          <p:cNvPr id="43" name="Text 36"/>
+          <p:cNvSpPr txBox="1"/>
+          <p:nvPr/>
+        </p:nvSpPr>
+        <p:spPr>
+          <a:xfrm>
+            <a:off x="6858000" y="5596128"/>
+            <a:ext cx="822960" cy="310896"/>
+          </a:xfrm>
+          <a:prstGeom prst="rect">
+            <a:avLst/>
+          </a:prstGeom>
+          <a:noFill/>
+          <a:ln/>
+        </p:spPr>
+        <p:txBody>
+          <a:bodyPr wrap="square" lIns="0" tIns="0" rIns="0" bIns="0" rtlCol="0" anchor="ctr"/>
+          <a:lstStyle/>
+          <a:p>
+            <a:pPr indent="0" marL="0">
+              <a:buNone/>
+            </a:pPr>
+            <a:r>
+              <a:rPr lang="en-US" sz="1200" dirty="0">
+                <a:solidFill>
+                  <a:srgbClr val="5B7276"/>
+                </a:solidFill>
+              </a:rPr>
+              <a:t>Next</a:t>
+            </a:r>
+            <a:endParaRPr lang="en-US" sz="1200" dirty="0"/>
+          </a:p>
+        </p:txBody>
+      </p:sp>
+      <p:sp>
+        <p:nvSpPr>
+          <p:cNvPr id="44" name="Shape 37"/>
+          <p:cNvSpPr/>
+          <p:nvPr/>
+        </p:nvSpPr>
+        <p:spPr>
+          <a:xfrm>
+            <a:off x="7680960" y="5669280"/>
+            <a:ext cx="164592" cy="164592"/>
+          </a:xfrm>
+          <a:prstGeom prst="ellipse">
+            <a:avLst/>
+          </a:prstGeom>
+          <a:solidFill>
+            <a:schemeClr val="accent2"/>
+          </a:solidFill>
+          <a:ln w="12700">
+            <a:solidFill>
+              <a:schemeClr val="accent2"/>
+            </a:solidFill>
+            <a:prstDash val="solid"/>
+          </a:ln>
+        </p:spPr>
+      </p:sp>
+      <p:sp>
+        <p:nvSpPr>
+          <p:cNvPr id="45" name="Text 38"/>
+          <p:cNvSpPr txBox="1"/>
+          <p:nvPr/>
+        </p:nvSpPr>
+        <p:spPr>
+          <a:xfrm>
+            <a:off x="7909560" y="5596128"/>
+            <a:ext cx="822960" cy="310896"/>
+          </a:xfrm>
+          <a:prstGeom prst="rect">
+            <a:avLst/>
+          </a:prstGeom>
+          <a:noFill/>
+          <a:ln/>
+        </p:spPr>
+        <p:txBody>
+          <a:bodyPr wrap="square" lIns="0" tIns="0" rIns="0" bIns="0" rtlCol="0" anchor="ctr"/>
+          <a:lstStyle/>
+          <a:p>
+            <a:pPr indent="0" marL="0">
+              <a:buNone/>
+            </a:pPr>
+            <a:r>
+              <a:rPr lang="en-US" sz="1200" dirty="0">
+                <a:solidFill>
+                  <a:srgbClr val="5B7276"/>
+                </a:solidFill>
+              </a:rPr>
+              <a:t>Later</a:t>
+            </a:r>
+            <a:endParaRPr lang="en-US" sz="1200" dirty="0"/>
           </a:p>
         </p:txBody>
       </p:sp>
